--- a/课件/C1/C1-B-06/C1-B-06.pptx
+++ b/课件/C1/C1-B-06/C1-B-06.pptx
@@ -20,9 +20,11 @@
     <p:sldId id="268" r:id="rId14"/>
     <p:sldId id="269" r:id="rId15"/>
     <p:sldId id="270" r:id="rId16"/>
+    <p:sldId id="271" r:id="rId17"/>
+    <p:sldId id="272" r:id="rId18"/>
   </p:sldIdLst>
   <p:notesMasterIdLst>
-    <p:notesMasterId r:id="rId17"/>
+    <p:notesMasterId r:id="rId19"/>
   </p:notesMasterIdLst>
   <p:sldSz cx="12191695" cy="6858000"/>
   <p:notesSz cx="6858000" cy="12191695"/>
@@ -1068,6 +1070,182 @@
             <a:fld id="{F7021451-1387-4CA6-816F-3879F97B5CBC}" type="slidenum">
               <a:rPr lang="en-US"/>
               <a:t>15</a:t>
+            </a:fld>
+            <a:endParaRPr lang="en-US"/>
+          </a:p>
+        </p:txBody>
+      </p:sp>
+    </p:spTree>
+    <p:extLst>
+      <p:ext uri="{BB962C8B-B14F-4D97-AF65-F5344CB8AC3E}">
+        <p14:creationId xmlns:p14="http://schemas.microsoft.com/office/powerpoint/2010/main" val="1024086991"/>
+      </p:ext>
+    </p:extLst>
+  </p:cSld>
+  <p:clrMapOvr>
+    <a:masterClrMapping/>
+  </p:clrMapOvr>
+</p:notes>
+</file>
+
+<file path=ppt/notesSlides/notesSlide16.xml><?xml version="1.0" encoding="utf-8"?>
+<p:notes xmlns:a="http://schemas.openxmlformats.org/drawingml/2006/main" xmlns:r="http://schemas.openxmlformats.org/officeDocument/2006/relationships" xmlns:p="http://schemas.openxmlformats.org/presentationml/2006/main">
+  <p:cSld>
+    <p:spTree>
+      <p:nvGrpSpPr>
+        <p:cNvPr id="1" name=""/>
+        <p:cNvGrpSpPr/>
+        <p:nvPr/>
+      </p:nvGrpSpPr>
+      <p:grpSpPr>
+        <a:xfrm>
+          <a:off x="0" y="0"/>
+          <a:ext cx="0" cy="0"/>
+          <a:chOff x="0" y="0"/>
+          <a:chExt cx="0" cy="0"/>
+        </a:xfrm>
+      </p:grpSpPr>
+      <p:sp>
+        <p:nvSpPr>
+          <p:cNvPr id="2" name="Slide Image Placeholder 1"/>
+          <p:cNvSpPr>
+            <a:spLocks noGrp="1" noRot="1" noChangeAspect="1"/>
+          </p:cNvSpPr>
+          <p:nvPr>
+            <p:ph type="sldImg"/>
+          </p:nvPr>
+        </p:nvSpPr>
+        <p:spPr/>
+      </p:sp>
+      <p:sp>
+        <p:nvSpPr>
+          <p:cNvPr id="3" name="Notes Placeholder 2"/>
+          <p:cNvSpPr>
+            <a:spLocks noGrp="1"/>
+          </p:cNvSpPr>
+          <p:nvPr>
+            <p:ph type="body" idx="1"/>
+          </p:nvPr>
+        </p:nvSpPr>
+        <p:spPr/>
+        <p:txBody>
+          <a:bodyPr/>
+          <a:lstStyle/>
+          <a:p>
+            <a:r>
+              <a:rPr lang="en-US" dirty="0"/>
+              <a:t/>
+            </a:r>
+            <a:endParaRPr lang="en-US" dirty="0"/>
+          </a:p>
+        </p:txBody>
+      </p:sp>
+      <p:sp>
+        <p:nvSpPr>
+          <p:cNvPr id="4" name="Slide Number Placeholder 3"/>
+          <p:cNvSpPr>
+            <a:spLocks noGrp="1"/>
+          </p:cNvSpPr>
+          <p:nvPr>
+            <p:ph type="sldNum" sz="quarter" idx="10"/>
+          </p:nvPr>
+        </p:nvSpPr>
+        <p:spPr/>
+        <p:txBody>
+          <a:bodyPr/>
+          <a:lstStyle/>
+          <a:p>
+            <a:fld id="{F7021451-1387-4CA6-816F-3879F97B5CBC}" type="slidenum">
+              <a:rPr lang="en-US"/>
+              <a:t>16</a:t>
+            </a:fld>
+            <a:endParaRPr lang="en-US"/>
+          </a:p>
+        </p:txBody>
+      </p:sp>
+    </p:spTree>
+    <p:extLst>
+      <p:ext uri="{BB962C8B-B14F-4D97-AF65-F5344CB8AC3E}">
+        <p14:creationId xmlns:p14="http://schemas.microsoft.com/office/powerpoint/2010/main" val="1024086991"/>
+      </p:ext>
+    </p:extLst>
+  </p:cSld>
+  <p:clrMapOvr>
+    <a:masterClrMapping/>
+  </p:clrMapOvr>
+</p:notes>
+</file>
+
+<file path=ppt/notesSlides/notesSlide17.xml><?xml version="1.0" encoding="utf-8"?>
+<p:notes xmlns:a="http://schemas.openxmlformats.org/drawingml/2006/main" xmlns:r="http://schemas.openxmlformats.org/officeDocument/2006/relationships" xmlns:p="http://schemas.openxmlformats.org/presentationml/2006/main">
+  <p:cSld>
+    <p:spTree>
+      <p:nvGrpSpPr>
+        <p:cNvPr id="1" name=""/>
+        <p:cNvGrpSpPr/>
+        <p:nvPr/>
+      </p:nvGrpSpPr>
+      <p:grpSpPr>
+        <a:xfrm>
+          <a:off x="0" y="0"/>
+          <a:ext cx="0" cy="0"/>
+          <a:chOff x="0" y="0"/>
+          <a:chExt cx="0" cy="0"/>
+        </a:xfrm>
+      </p:grpSpPr>
+      <p:sp>
+        <p:nvSpPr>
+          <p:cNvPr id="2" name="Slide Image Placeholder 1"/>
+          <p:cNvSpPr>
+            <a:spLocks noGrp="1" noRot="1" noChangeAspect="1"/>
+          </p:cNvSpPr>
+          <p:nvPr>
+            <p:ph type="sldImg"/>
+          </p:nvPr>
+        </p:nvSpPr>
+        <p:spPr/>
+      </p:sp>
+      <p:sp>
+        <p:nvSpPr>
+          <p:cNvPr id="3" name="Notes Placeholder 2"/>
+          <p:cNvSpPr>
+            <a:spLocks noGrp="1"/>
+          </p:cNvSpPr>
+          <p:nvPr>
+            <p:ph type="body" idx="1"/>
+          </p:nvPr>
+        </p:nvSpPr>
+        <p:spPr/>
+        <p:txBody>
+          <a:bodyPr/>
+          <a:lstStyle/>
+          <a:p>
+            <a:r>
+              <a:rPr lang="en-US" dirty="0"/>
+              <a:t/>
+            </a:r>
+            <a:endParaRPr lang="en-US" dirty="0"/>
+          </a:p>
+        </p:txBody>
+      </p:sp>
+      <p:sp>
+        <p:nvSpPr>
+          <p:cNvPr id="4" name="Slide Number Placeholder 3"/>
+          <p:cNvSpPr>
+            <a:spLocks noGrp="1"/>
+          </p:cNvSpPr>
+          <p:nvPr>
+            <p:ph type="sldNum" sz="quarter" idx="10"/>
+          </p:nvPr>
+        </p:nvSpPr>
+        <p:spPr/>
+        <p:txBody>
+          <a:bodyPr/>
+          <a:lstStyle/>
+          <a:p>
+            <a:fld id="{F7021451-1387-4CA6-816F-3879F97B5CBC}" type="slidenum">
+              <a:rPr lang="en-US"/>
+              <a:t>17</a:t>
             </a:fld>
             <a:endParaRPr lang="en-US"/>
           </a:p>
@@ -2161,7 +2339,7 @@
                 <a:ea typeface="微软雅黑" pitchFamily="34" charset="-122"/>
                 <a:cs typeface="微软雅黑" pitchFamily="34" charset="-120"/>
               </a:rPr>
-              <a:t>1 / 15</a:t>
+              <a:t>1 / 17</a:t>
             </a:r>
             <a:endParaRPr lang="en-US" sz="1000" dirty="0"/>
           </a:p>
@@ -2395,7 +2573,7 @@
                 <a:ea typeface="微软雅黑" pitchFamily="34" charset="-122"/>
                 <a:cs typeface="微软雅黑" pitchFamily="34" charset="-120"/>
               </a:rPr>
-              <a:t>10 / 15</a:t>
+              <a:t>10 / 17</a:t>
             </a:r>
             <a:endParaRPr lang="en-US" sz="1000" dirty="0"/>
           </a:p>
@@ -2719,7 +2897,7 @@
                 <a:ea typeface="微软雅黑" pitchFamily="34" charset="-122"/>
                 <a:cs typeface="微软雅黑" pitchFamily="34" charset="-120"/>
               </a:rPr>
-              <a:t>11 / 15</a:t>
+              <a:t>11 / 17</a:t>
             </a:r>
             <a:endParaRPr lang="en-US" sz="1000" dirty="0"/>
           </a:p>
@@ -2818,19 +2996,34 @@
             <a:avLst/>
           </a:prstGeom>
           <a:solidFill>
-            <a:srgbClr val="F5F6F7"/>
+            <a:srgbClr val="F7F9FC"/>
           </a:solidFill>
-          <a:ln w="9525">
-            <a:solidFill>
-              <a:srgbClr val="D8DBE0"/>
-            </a:solidFill>
-            <a:prstDash val="solid"/>
-          </a:ln>
-        </p:spPr>
-      </p:sp>
-      <p:sp>
-        <p:nvSpPr>
-          <p:cNvPr id="6" name="Text 4"/>
+          <a:ln/>
+        </p:spPr>
+      </p:sp>
+      <p:sp>
+        <p:nvSpPr>
+          <p:cNvPr id="6" name="Shape 4"/>
+          <p:cNvSpPr/>
+          <p:nvPr/>
+        </p:nvSpPr>
+        <p:spPr>
+          <a:xfrm>
+            <a:off x="822960" y="2395728"/>
+            <a:ext cx="50292" cy="1508760"/>
+          </a:xfrm>
+          <a:prstGeom prst="rect">
+            <a:avLst/>
+          </a:prstGeom>
+          <a:solidFill>
+            <a:srgbClr val="1F4E9C"/>
+          </a:solidFill>
+          <a:ln/>
+        </p:spPr>
+      </p:sp>
+      <p:sp>
+        <p:nvSpPr>
+          <p:cNvPr id="7" name="Text 5"/>
           <p:cNvSpPr/>
           <p:nvPr/>
         </p:nvSpPr>
@@ -2876,7 +3069,7 @@
       </p:sp>
       <p:sp>
         <p:nvSpPr>
-          <p:cNvPr id="7" name="Text 5"/>
+          <p:cNvPr id="8" name="Text 6"/>
           <p:cNvSpPr/>
           <p:nvPr/>
         </p:nvSpPr>
@@ -2932,7 +3125,7 @@
       </p:sp>
       <p:sp>
         <p:nvSpPr>
-          <p:cNvPr id="8" name="Text 6"/>
+          <p:cNvPr id="9" name="Text 7"/>
           <p:cNvSpPr/>
           <p:nvPr/>
         </p:nvSpPr>
@@ -2988,7 +3181,7 @@
       </p:sp>
       <p:sp>
         <p:nvSpPr>
-          <p:cNvPr id="9" name="Text 7"/>
+          <p:cNvPr id="10" name="Text 8"/>
           <p:cNvSpPr/>
           <p:nvPr/>
         </p:nvSpPr>
@@ -3114,7 +3307,7 @@
                 <a:ea typeface="微软雅黑" pitchFamily="34" charset="-122"/>
                 <a:cs typeface="微软雅黑" pitchFamily="34" charset="-120"/>
               </a:rPr>
-              <a:t>12 / 15</a:t>
+              <a:t>12 / 17</a:t>
             </a:r>
             <a:endParaRPr lang="en-US" sz="1000" dirty="0"/>
           </a:p>
@@ -3213,19 +3406,34 @@
             <a:avLst/>
           </a:prstGeom>
           <a:solidFill>
-            <a:srgbClr val="F5F6F7"/>
+            <a:srgbClr val="F7F9FC"/>
           </a:solidFill>
-          <a:ln w="9525">
-            <a:solidFill>
-              <a:srgbClr val="D8DBE0"/>
-            </a:solidFill>
-            <a:prstDash val="solid"/>
-          </a:ln>
-        </p:spPr>
-      </p:sp>
-      <p:sp>
-        <p:nvSpPr>
-          <p:cNvPr id="6" name="Text 4"/>
+          <a:ln/>
+        </p:spPr>
+      </p:sp>
+      <p:sp>
+        <p:nvSpPr>
+          <p:cNvPr id="6" name="Shape 4"/>
+          <p:cNvSpPr/>
+          <p:nvPr/>
+        </p:nvSpPr>
+        <p:spPr>
+          <a:xfrm>
+            <a:off x="822960" y="2395728"/>
+            <a:ext cx="50292" cy="1271016"/>
+          </a:xfrm>
+          <a:prstGeom prst="rect">
+            <a:avLst/>
+          </a:prstGeom>
+          <a:solidFill>
+            <a:srgbClr val="1F4E9C"/>
+          </a:solidFill>
+          <a:ln/>
+        </p:spPr>
+      </p:sp>
+      <p:sp>
+        <p:nvSpPr>
+          <p:cNvPr id="7" name="Text 5"/>
           <p:cNvSpPr/>
           <p:nvPr/>
         </p:nvSpPr>
@@ -3270,7 +3478,7 @@
       </p:sp>
       <p:sp>
         <p:nvSpPr>
-          <p:cNvPr id="7" name="Text 5"/>
+          <p:cNvPr id="8" name="Text 6"/>
           <p:cNvSpPr/>
           <p:nvPr/>
         </p:nvSpPr>
@@ -3326,7 +3534,7 @@
       </p:sp>
       <p:sp>
         <p:nvSpPr>
-          <p:cNvPr id="8" name="Text 6"/>
+          <p:cNvPr id="9" name="Text 7"/>
           <p:cNvSpPr/>
           <p:nvPr/>
         </p:nvSpPr>
@@ -3382,7 +3590,7 @@
       </p:sp>
       <p:sp>
         <p:nvSpPr>
-          <p:cNvPr id="9" name="Text 7"/>
+          <p:cNvPr id="10" name="Text 8"/>
           <p:cNvSpPr/>
           <p:nvPr/>
         </p:nvSpPr>
@@ -3508,7 +3716,7 @@
                 <a:ea typeface="微软雅黑" pitchFamily="34" charset="-122"/>
                 <a:cs typeface="微软雅黑" pitchFamily="34" charset="-120"/>
               </a:rPr>
-              <a:t>13 / 15</a:t>
+              <a:t>13 / 17</a:t>
             </a:r>
             <a:endParaRPr lang="en-US" sz="1000" dirty="0"/>
           </a:p>
@@ -3547,7 +3755,7 @@
                 <a:ea typeface="微软雅黑" pitchFamily="34" charset="-122"/>
                 <a:cs typeface="微软雅黑" pitchFamily="34" charset="-120"/>
               </a:rPr>
-              <a:t>板书推演</a:t>
+              <a:t>动画演示 · 单链表（本页逐条动画出现）</a:t>
             </a:r>
             <a:endParaRPr lang="en-US" sz="1400" dirty="0"/>
           </a:p>
@@ -3586,7 +3794,7 @@
                 <a:ea typeface="微软雅黑" pitchFamily="34" charset="-122"/>
                 <a:cs typeface="微软雅黑" pitchFamily="34" charset="-120"/>
               </a:rPr>
-              <a:t>画三个结点的单链表</a:t>
+              <a:t>三个结点的单链表：造、串、走（不手写，跟着画）</a:t>
             </a:r>
             <a:endParaRPr lang="en-US" sz="2800" dirty="0"/>
           </a:p>
@@ -3600,8 +3808,8 @@
         </p:nvSpPr>
         <p:spPr>
           <a:xfrm>
-            <a:off x="822960" y="2194560"/>
-            <a:ext cx="10545775" cy="685800"/>
+            <a:off x="896112" y="2395728"/>
+            <a:ext cx="10454335" cy="397764"/>
           </a:xfrm>
           <a:prstGeom prst="rect">
             <a:avLst/>
@@ -3614,47 +3822,95 @@
           <a:lstStyle/>
           <a:p>
             <a:pPr algn="l" indent="0" marL="0">
-              <a:buNone/>
-            </a:pPr>
-            <a:r>
-              <a:rPr lang="en-US" sz="1600" dirty="0">
-                <a:solidFill>
-                  <a:srgbClr val="1F2329"/>
-                </a:solidFill>
-                <a:latin typeface="微软雅黑" pitchFamily="34" charset="0"/>
-                <a:ea typeface="微软雅黑" pitchFamily="34" charset="-122"/>
-                <a:cs typeface="微软雅黑" pitchFamily="34" charset="-120"/>
-              </a:rPr>
-              <a:t>任务：① 画三个结点，每个分两半：data和next；② 填数据10、20、30，next互相串好，最后一个next填NULL；③ 画指针p从头走到尾，标每一轮打印的数。只画结点、箭头与p，不写程序骨架</a:t>
-            </a:r>
-            <a:endParaRPr lang="en-US" sz="1600" dirty="0"/>
-          </a:p>
-        </p:txBody>
-      </p:sp>
-      <p:sp>
-        <p:nvSpPr>
-          <p:cNvPr id="6" name="Shape 4"/>
-          <p:cNvSpPr/>
-          <p:nvPr/>
-        </p:nvSpPr>
-        <p:spPr>
-          <a:xfrm>
-            <a:off x="822960" y="3017520"/>
-            <a:ext cx="10545775" cy="2788920"/>
-          </a:xfrm>
-          <a:prstGeom prst="rect">
-            <a:avLst/>
-          </a:prstGeom>
-          <a:solidFill>
-            <a:srgbClr val="FFFFFF"/>
-          </a:solidFill>
-          <a:ln w="12700">
-            <a:solidFill>
-              <a:srgbClr val="B9C0C9"/>
-            </a:solidFill>
-            <a:prstDash val="dash"/>
-          </a:ln>
-        </p:spPr>
+              <a:lnSpc>
+                <a:spcPct val="115000"/>
+              </a:lnSpc>
+              <a:buNone/>
+            </a:pPr>
+            <a:r>
+              <a:rPr lang="en-US" sz="1800" b="1" dirty="0">
+                <a:solidFill>
+                  <a:srgbClr val="1F4E9C"/>
+                </a:solidFill>
+                <a:latin typeface="微软雅黑" pitchFamily="34" charset="0"/>
+                <a:ea typeface="微软雅黑" pitchFamily="34" charset="-122"/>
+                <a:cs typeface="微软雅黑" pitchFamily="34" charset="-120"/>
+              </a:rPr>
+              <a:t>•  </a:t>
+            </a:r>
+            <a:pPr algn="l" indent="0" marL="0">
+              <a:lnSpc>
+                <a:spcPct val="115000"/>
+              </a:lnSpc>
+              <a:buNone/>
+            </a:pPr>
+            <a:r>
+              <a:rPr lang="en-US" sz="1800" dirty="0">
+                <a:solidFill>
+                  <a:srgbClr val="000000"/>
+                </a:solidFill>
+              </a:rPr>
+              <a:t>① 横着画三个分离的结点，每个分两格：左data右next（散着住，不连片）</a:t>
+            </a:r>
+            <a:endParaRPr lang="en-US" sz="1800" dirty="0"/>
+          </a:p>
+        </p:txBody>
+      </p:sp>
+      <p:sp>
+        <p:nvSpPr>
+          <p:cNvPr id="6" name="Text 4"/>
+          <p:cNvSpPr/>
+          <p:nvPr/>
+        </p:nvSpPr>
+        <p:spPr>
+          <a:xfrm>
+            <a:off x="896112" y="2866644"/>
+            <a:ext cx="10454335" cy="740664"/>
+          </a:xfrm>
+          <a:prstGeom prst="rect">
+            <a:avLst/>
+          </a:prstGeom>
+          <a:noFill/>
+          <a:ln/>
+        </p:spPr>
+        <p:txBody>
+          <a:bodyPr wrap="square" rtlCol="0" anchor="t"/>
+          <a:lstStyle/>
+          <a:p>
+            <a:pPr algn="l" indent="0" marL="0">
+              <a:lnSpc>
+                <a:spcPct val="115000"/>
+              </a:lnSpc>
+              <a:buNone/>
+            </a:pPr>
+            <a:r>
+              <a:rPr lang="en-US" sz="1800" b="1" dirty="0">
+                <a:solidFill>
+                  <a:srgbClr val="1F4E9C"/>
+                </a:solidFill>
+                <a:latin typeface="微软雅黑" pitchFamily="34" charset="0"/>
+                <a:ea typeface="微软雅黑" pitchFamily="34" charset="-122"/>
+                <a:cs typeface="微软雅黑" pitchFamily="34" charset="-120"/>
+              </a:rPr>
+              <a:t>•  </a:t>
+            </a:r>
+            <a:pPr algn="l" indent="0" marL="0">
+              <a:lnSpc>
+                <a:spcPct val="115000"/>
+              </a:lnSpc>
+              <a:buNone/>
+            </a:pPr>
+            <a:r>
+              <a:rPr lang="en-US" sz="1800" dirty="0">
+                <a:solidFill>
+                  <a:srgbClr val="000000"/>
+                </a:solidFill>
+              </a:rPr>
+              <a:t>② 填数据10、20、30，next互串，最后一个next填NULL，箭头从next格指出</a:t>
+            </a:r>
+            <a:endParaRPr lang="en-US" sz="1800" dirty="0"/>
+          </a:p>
+        </p:txBody>
       </p:sp>
       <p:sp>
         <p:nvSpPr>
@@ -3664,34 +3920,51 @@
         </p:nvSpPr>
         <p:spPr>
           <a:xfrm>
-            <a:off x="822960" y="5349240"/>
-            <a:ext cx="10545775" cy="365760"/>
-          </a:xfrm>
-          <a:prstGeom prst="rect">
-            <a:avLst/>
-          </a:prstGeom>
-          <a:noFill/>
-          <a:ln/>
-        </p:spPr>
-        <p:txBody>
-          <a:bodyPr wrap="square" rtlCol="0" anchor="ctr"/>
-          <a:lstStyle/>
-          <a:p>
-            <a:pPr algn="r" indent="0" marL="0">
-              <a:buNone/>
-            </a:pPr>
-            <a:r>
-              <a:rPr lang="en-US" sz="1200" dirty="0">
-                <a:solidFill>
-                  <a:srgbClr val="8A9099"/>
-                </a:solidFill>
-                <a:latin typeface="微软雅黑" pitchFamily="34" charset="0"/>
-                <a:ea typeface="微软雅黑" pitchFamily="34" charset="-122"/>
-                <a:cs typeface="微软雅黑" pitchFamily="34" charset="-120"/>
-              </a:rPr>
-              <a:t>此处板书推演</a:t>
-            </a:r>
-            <a:endParaRPr lang="en-US" sz="1200" dirty="0"/>
+            <a:off x="896112" y="3680460"/>
+            <a:ext cx="10454335" cy="740664"/>
+          </a:xfrm>
+          <a:prstGeom prst="rect">
+            <a:avLst/>
+          </a:prstGeom>
+          <a:noFill/>
+          <a:ln/>
+        </p:spPr>
+        <p:txBody>
+          <a:bodyPr wrap="square" rtlCol="0" anchor="t"/>
+          <a:lstStyle/>
+          <a:p>
+            <a:pPr algn="l" indent="0" marL="0">
+              <a:lnSpc>
+                <a:spcPct val="115000"/>
+              </a:lnSpc>
+              <a:buNone/>
+            </a:pPr>
+            <a:r>
+              <a:rPr lang="en-US" sz="1800" b="1" dirty="0">
+                <a:solidFill>
+                  <a:srgbClr val="1F4E9C"/>
+                </a:solidFill>
+                <a:latin typeface="微软雅黑" pitchFamily="34" charset="0"/>
+                <a:ea typeface="微软雅黑" pitchFamily="34" charset="-122"/>
+                <a:cs typeface="微软雅黑" pitchFamily="34" charset="-120"/>
+              </a:rPr>
+              <a:t>•  </a:t>
+            </a:r>
+            <a:pPr algn="l" indent="0" marL="0">
+              <a:lnSpc>
+                <a:spcPct val="115000"/>
+              </a:lnSpc>
+              <a:buNone/>
+            </a:pPr>
+            <a:r>
+              <a:rPr lang="en-US" sz="1800" dirty="0">
+                <a:solidFill>
+                  <a:srgbClr val="000000"/>
+                </a:solidFill>
+              </a:rPr>
+              <a:t>③ 画p从头走到尾：每轮p = p-&gt;next挪一步，打印10、20、30，p变NULL循环停</a:t>
+            </a:r>
+            <a:endParaRPr lang="en-US" sz="1800" dirty="0"/>
           </a:p>
         </p:txBody>
       </p:sp>
@@ -3767,7 +4040,7 @@
                 <a:ea typeface="微软雅黑" pitchFamily="34" charset="-122"/>
                 <a:cs typeface="微软雅黑" pitchFamily="34" charset="-120"/>
               </a:rPr>
-              <a:t>14 / 15</a:t>
+              <a:t>14 / 17</a:t>
             </a:r>
             <a:endParaRPr lang="en-US" sz="1000" dirty="0"/>
           </a:p>
@@ -4130,7 +4403,7 @@
                 <a:ea typeface="微软雅黑" pitchFamily="34" charset="-122"/>
                 <a:cs typeface="微软雅黑" pitchFamily="34" charset="-120"/>
               </a:rPr>
-              <a:t>15 / 15</a:t>
+              <a:t>15 / 17</a:t>
             </a:r>
             <a:endParaRPr lang="en-US" sz="1000" dirty="0"/>
           </a:p>
@@ -4443,9 +4716,779 @@
                 <a:ea typeface="微软雅黑" pitchFamily="34" charset="-122"/>
                 <a:cs typeface="微软雅黑" pitchFamily="34" charset="-120"/>
               </a:rPr>
-              <a:t>参考答案在讲稿附录一</a:t>
+              <a:t>参考答案在本PPT最后两页，课后自行对照</a:t>
             </a:r>
             <a:endParaRPr lang="en-US" sz="1500" dirty="0"/>
+          </a:p>
+        </p:txBody>
+      </p:sp>
+    </p:spTree>
+  </p:cSld>
+  <p:clrMapOvr>
+    <a:masterClrMapping/>
+  </p:clrMapOvr>
+</p:sld>
+</file>
+
+<file path=ppt/slides/slide16.xml><?xml version="1.0" encoding="utf-8"?>
+<p:sld xmlns:a="http://schemas.openxmlformats.org/drawingml/2006/main" xmlns:r="http://schemas.openxmlformats.org/officeDocument/2006/relationships" xmlns:p="http://schemas.openxmlformats.org/presentationml/2006/main">
+  <p:cSld name="Slide 16">
+    <p:bg>
+      <p:bgPr>
+        <a:blipFill dpi="0" rotWithShape="1">
+          <a:blip r:embed="rId1">
+            <a:lum/>
+          </a:blip>
+          <a:srcRect/>
+          <a:stretch>
+            <a:fillRect/>
+          </a:stretch>
+        </a:blipFill>
+        <a:effectLst/>
+      </p:bgPr>
+    </p:bg>
+    <p:spTree>
+      <p:nvGrpSpPr>
+        <p:cNvPr id="1" name=""/>
+        <p:cNvGrpSpPr/>
+        <p:nvPr/>
+      </p:nvGrpSpPr>
+      <p:grpSpPr>
+        <a:xfrm>
+          <a:off x="0" y="0"/>
+          <a:ext cx="0" cy="0"/>
+          <a:chOff x="0" y="0"/>
+          <a:chExt cx="0" cy="0"/>
+        </a:xfrm>
+      </p:grpSpPr>
+      <p:sp>
+        <p:nvSpPr>
+          <p:cNvPr id="2" name="Text 0"/>
+          <p:cNvSpPr/>
+          <p:nvPr/>
+        </p:nvSpPr>
+        <p:spPr>
+          <a:xfrm>
+            <a:off x="10362895" y="6016752"/>
+            <a:ext cx="1463040" cy="320040"/>
+          </a:xfrm>
+          <a:prstGeom prst="rect">
+            <a:avLst/>
+          </a:prstGeom>
+          <a:noFill/>
+          <a:ln/>
+        </p:spPr>
+        <p:txBody>
+          <a:bodyPr wrap="square" rtlCol="0" anchor="ctr"/>
+          <a:lstStyle/>
+          <a:p>
+            <a:pPr algn="r" indent="0" marL="0">
+              <a:buNone/>
+            </a:pPr>
+            <a:r>
+              <a:rPr lang="en-US" sz="1000" dirty="0">
+                <a:solidFill>
+                  <a:srgbClr val="8A9099"/>
+                </a:solidFill>
+                <a:latin typeface="微软雅黑" pitchFamily="34" charset="0"/>
+                <a:ea typeface="微软雅黑" pitchFamily="34" charset="-122"/>
+                <a:cs typeface="微软雅黑" pitchFamily="34" charset="-120"/>
+              </a:rPr>
+              <a:t>16 / 17</a:t>
+            </a:r>
+            <a:endParaRPr lang="en-US" sz="1000" dirty="0"/>
+          </a:p>
+        </p:txBody>
+      </p:sp>
+      <p:sp>
+        <p:nvSpPr>
+          <p:cNvPr id="3" name="Text 1"/>
+          <p:cNvSpPr/>
+          <p:nvPr/>
+        </p:nvSpPr>
+        <p:spPr>
+          <a:xfrm>
+            <a:off x="822960" y="960120"/>
+            <a:ext cx="10545775" cy="365760"/>
+          </a:xfrm>
+          <a:prstGeom prst="rect">
+            <a:avLst/>
+          </a:prstGeom>
+          <a:noFill/>
+          <a:ln/>
+        </p:spPr>
+        <p:txBody>
+          <a:bodyPr wrap="square" rtlCol="0" anchor="ctr"/>
+          <a:lstStyle/>
+          <a:p>
+            <a:pPr algn="l" indent="0" marL="0">
+              <a:buNone/>
+            </a:pPr>
+            <a:r>
+              <a:rPr lang="en-US" sz="1400" b="1" dirty="0">
+                <a:solidFill>
+                  <a:srgbClr val="1F4E9C"/>
+                </a:solidFill>
+                <a:latin typeface="微软雅黑" pitchFamily="34" charset="0"/>
+                <a:ea typeface="微软雅黑" pitchFamily="34" charset="-122"/>
+                <a:cs typeface="微软雅黑" pitchFamily="34" charset="-120"/>
+              </a:rPr>
+              <a:t>参考答案 · 跟练题</a:t>
+            </a:r>
+            <a:endParaRPr lang="en-US" sz="1400" dirty="0"/>
+          </a:p>
+        </p:txBody>
+      </p:sp>
+      <p:sp>
+        <p:nvSpPr>
+          <p:cNvPr id="4" name="Text 2"/>
+          <p:cNvSpPr/>
+          <p:nvPr/>
+        </p:nvSpPr>
+        <p:spPr>
+          <a:xfrm>
+            <a:off x="822960" y="1344168"/>
+            <a:ext cx="10545775" cy="731520"/>
+          </a:xfrm>
+          <a:prstGeom prst="rect">
+            <a:avLst/>
+          </a:prstGeom>
+          <a:noFill/>
+          <a:ln/>
+        </p:spPr>
+        <p:txBody>
+          <a:bodyPr wrap="square" rtlCol="0" anchor="ctr"/>
+          <a:lstStyle/>
+          <a:p>
+            <a:pPr algn="l" indent="0" marL="0">
+              <a:buNone/>
+            </a:pPr>
+            <a:r>
+              <a:rPr lang="en-US" sz="2800" b="1" dirty="0">
+                <a:solidFill>
+                  <a:srgbClr val="1F2329"/>
+                </a:solidFill>
+                <a:latin typeface="微软雅黑" pitchFamily="34" charset="0"/>
+                <a:ea typeface="微软雅黑" pitchFamily="34" charset="-122"/>
+                <a:cs typeface="微软雅黑" pitchFamily="34" charset="-120"/>
+              </a:rPr>
+              <a:t>跟练题参考答案（自行对照）</a:t>
+            </a:r>
+            <a:endParaRPr lang="en-US" sz="2800" dirty="0"/>
+          </a:p>
+        </p:txBody>
+      </p:sp>
+      <p:sp>
+        <p:nvSpPr>
+          <p:cNvPr id="5" name="Shape 3"/>
+          <p:cNvSpPr/>
+          <p:nvPr/>
+        </p:nvSpPr>
+        <p:spPr>
+          <a:xfrm>
+            <a:off x="822960" y="2395728"/>
+            <a:ext cx="10545775" cy="1984248"/>
+          </a:xfrm>
+          <a:prstGeom prst="rect">
+            <a:avLst/>
+          </a:prstGeom>
+          <a:solidFill>
+            <a:srgbClr val="F7F9FC"/>
+          </a:solidFill>
+          <a:ln/>
+        </p:spPr>
+      </p:sp>
+      <p:sp>
+        <p:nvSpPr>
+          <p:cNvPr id="6" name="Shape 4"/>
+          <p:cNvSpPr/>
+          <p:nvPr/>
+        </p:nvSpPr>
+        <p:spPr>
+          <a:xfrm>
+            <a:off x="822960" y="2395728"/>
+            <a:ext cx="50292" cy="1984248"/>
+          </a:xfrm>
+          <a:prstGeom prst="rect">
+            <a:avLst/>
+          </a:prstGeom>
+          <a:solidFill>
+            <a:srgbClr val="1F4E9C"/>
+          </a:solidFill>
+          <a:ln/>
+        </p:spPr>
+      </p:sp>
+      <p:sp>
+        <p:nvSpPr>
+          <p:cNvPr id="7" name="Text 5"/>
+          <p:cNvSpPr/>
+          <p:nvPr/>
+        </p:nvSpPr>
+        <p:spPr>
+          <a:xfrm>
+            <a:off x="1078992" y="2505456"/>
+            <a:ext cx="10033711" cy="1764792"/>
+          </a:xfrm>
+          <a:prstGeom prst="rect">
+            <a:avLst/>
+          </a:prstGeom>
+          <a:noFill/>
+          <a:ln/>
+        </p:spPr>
+        <p:txBody>
+          <a:bodyPr wrap="square" rtlCol="0" anchor="t"/>
+          <a:lstStyle/>
+          <a:p>
+            <a:pPr algn="l" indent="0" marL="0">
+              <a:lnSpc>
+                <a:spcPct val="125000"/>
+              </a:lnSpc>
+              <a:buNone/>
+            </a:pPr>
+            <a:r>
+              <a:rPr lang="en-US" sz="1400" dirty="0">
+                <a:solidFill>
+                  <a:srgbClr val="1F2329"/>
+                </a:solidFill>
+                <a:latin typeface="Consolas" pitchFamily="34" charset="0"/>
+                <a:ea typeface="Consolas" pitchFamily="34" charset="-122"/>
+                <a:cs typeface="Consolas" pitchFamily="34" charset="-120"/>
+              </a:rPr>
+              <a:t>// 阶乘递归版（fact(5)=120）
+int fact(int n){
+    if (n == 0) return 1;    // 终止条件
+    return n * fact(n - 1);  // 缩小 + 返回
+}
+// 迭代版：result=1; for(i=1;i&lt;=n;i++) result*=i;
+</a:t>
+            </a:r>
+            <a:endParaRPr lang="en-US" sz="1400" dirty="0"/>
+          </a:p>
+        </p:txBody>
+      </p:sp>
+      <p:sp>
+        <p:nvSpPr>
+          <p:cNvPr id="8" name="Text 6"/>
+          <p:cNvSpPr/>
+          <p:nvPr/>
+        </p:nvSpPr>
+        <p:spPr>
+          <a:xfrm>
+            <a:off x="896112" y="4581144"/>
+            <a:ext cx="10454335" cy="397764"/>
+          </a:xfrm>
+          <a:prstGeom prst="rect">
+            <a:avLst/>
+          </a:prstGeom>
+          <a:noFill/>
+          <a:ln/>
+        </p:spPr>
+        <p:txBody>
+          <a:bodyPr wrap="square" rtlCol="0" anchor="t"/>
+          <a:lstStyle/>
+          <a:p>
+            <a:pPr algn="l" indent="0" marL="0">
+              <a:lnSpc>
+                <a:spcPct val="115000"/>
+              </a:lnSpc>
+              <a:buNone/>
+            </a:pPr>
+            <a:r>
+              <a:rPr lang="en-US" sz="1800" b="1" dirty="0">
+                <a:solidFill>
+                  <a:srgbClr val="1F4E9C"/>
+                </a:solidFill>
+                <a:latin typeface="微软雅黑" pitchFamily="34" charset="0"/>
+                <a:ea typeface="微软雅黑" pitchFamily="34" charset="-122"/>
+                <a:cs typeface="微软雅黑" pitchFamily="34" charset="-120"/>
+              </a:rPr>
+              <a:t>•  </a:t>
+            </a:r>
+            <a:pPr algn="l" indent="0" marL="0">
+              <a:lnSpc>
+                <a:spcPct val="115000"/>
+              </a:lnSpc>
+              <a:buNone/>
+            </a:pPr>
+            <a:r>
+              <a:rPr lang="en-US" sz="1800" dirty="0">
+                <a:solidFill>
+                  <a:srgbClr val="000000"/>
+                </a:solidFill>
+              </a:rPr>
+              <a:t>fact(3)调用栈：3→2→1→0四层展开，返回1、1、2、6</a:t>
+            </a:r>
+            <a:endParaRPr lang="en-US" sz="1800" dirty="0"/>
+          </a:p>
+        </p:txBody>
+      </p:sp>
+      <p:sp>
+        <p:nvSpPr>
+          <p:cNvPr id="9" name="Text 7"/>
+          <p:cNvSpPr/>
+          <p:nvPr/>
+        </p:nvSpPr>
+        <p:spPr>
+          <a:xfrm>
+            <a:off x="896112" y="5052060"/>
+            <a:ext cx="10454335" cy="397764"/>
+          </a:xfrm>
+          <a:prstGeom prst="rect">
+            <a:avLst/>
+          </a:prstGeom>
+          <a:noFill/>
+          <a:ln/>
+        </p:spPr>
+        <p:txBody>
+          <a:bodyPr wrap="square" rtlCol="0" anchor="t"/>
+          <a:lstStyle/>
+          <a:p>
+            <a:pPr algn="l" indent="0" marL="0">
+              <a:lnSpc>
+                <a:spcPct val="115000"/>
+              </a:lnSpc>
+              <a:buNone/>
+            </a:pPr>
+            <a:r>
+              <a:rPr lang="en-US" sz="1800" b="1" dirty="0">
+                <a:solidFill>
+                  <a:srgbClr val="1F4E9C"/>
+                </a:solidFill>
+                <a:latin typeface="微软雅黑" pitchFamily="34" charset="0"/>
+                <a:ea typeface="微软雅黑" pitchFamily="34" charset="-122"/>
+                <a:cs typeface="微软雅黑" pitchFamily="34" charset="-120"/>
+              </a:rPr>
+              <a:t>•  </a:t>
+            </a:r>
+            <a:pPr algn="l" indent="0" marL="0">
+              <a:lnSpc>
+                <a:spcPct val="115000"/>
+              </a:lnSpc>
+              <a:buNone/>
+            </a:pPr>
+            <a:r>
+              <a:rPr lang="en-US" sz="1800" dirty="0">
+                <a:solidFill>
+                  <a:srgbClr val="000000"/>
+                </a:solidFill>
+              </a:rPr>
+              <a:t>迭代版只用result和i两个变量，空间从头到尾不变</a:t>
+            </a:r>
+            <a:endParaRPr lang="en-US" sz="1800" dirty="0"/>
+          </a:p>
+        </p:txBody>
+      </p:sp>
+    </p:spTree>
+  </p:cSld>
+  <p:clrMapOvr>
+    <a:masterClrMapping/>
+  </p:clrMapOvr>
+</p:sld>
+</file>
+
+<file path=ppt/slides/slide17.xml><?xml version="1.0" encoding="utf-8"?>
+<p:sld xmlns:a="http://schemas.openxmlformats.org/drawingml/2006/main" xmlns:r="http://schemas.openxmlformats.org/officeDocument/2006/relationships" xmlns:p="http://schemas.openxmlformats.org/presentationml/2006/main">
+  <p:cSld name="Slide 17">
+    <p:bg>
+      <p:bgPr>
+        <a:blipFill dpi="0" rotWithShape="1">
+          <a:blip r:embed="rId1">
+            <a:lum/>
+          </a:blip>
+          <a:srcRect/>
+          <a:stretch>
+            <a:fillRect/>
+          </a:stretch>
+        </a:blipFill>
+        <a:effectLst/>
+      </p:bgPr>
+    </p:bg>
+    <p:spTree>
+      <p:nvGrpSpPr>
+        <p:cNvPr id="1" name=""/>
+        <p:cNvGrpSpPr/>
+        <p:nvPr/>
+      </p:nvGrpSpPr>
+      <p:grpSpPr>
+        <a:xfrm>
+          <a:off x="0" y="0"/>
+          <a:ext cx="0" cy="0"/>
+          <a:chOff x="0" y="0"/>
+          <a:chExt cx="0" cy="0"/>
+        </a:xfrm>
+      </p:grpSpPr>
+      <p:sp>
+        <p:nvSpPr>
+          <p:cNvPr id="2" name="Text 0"/>
+          <p:cNvSpPr/>
+          <p:nvPr/>
+        </p:nvSpPr>
+        <p:spPr>
+          <a:xfrm>
+            <a:off x="10362895" y="6016752"/>
+            <a:ext cx="1463040" cy="320040"/>
+          </a:xfrm>
+          <a:prstGeom prst="rect">
+            <a:avLst/>
+          </a:prstGeom>
+          <a:noFill/>
+          <a:ln/>
+        </p:spPr>
+        <p:txBody>
+          <a:bodyPr wrap="square" rtlCol="0" anchor="ctr"/>
+          <a:lstStyle/>
+          <a:p>
+            <a:pPr algn="r" indent="0" marL="0">
+              <a:buNone/>
+            </a:pPr>
+            <a:r>
+              <a:rPr lang="en-US" sz="1000" dirty="0">
+                <a:solidFill>
+                  <a:srgbClr val="8A9099"/>
+                </a:solidFill>
+                <a:latin typeface="微软雅黑" pitchFamily="34" charset="0"/>
+                <a:ea typeface="微软雅黑" pitchFamily="34" charset="-122"/>
+                <a:cs typeface="微软雅黑" pitchFamily="34" charset="-120"/>
+              </a:rPr>
+              <a:t>17 / 17</a:t>
+            </a:r>
+            <a:endParaRPr lang="en-US" sz="1000" dirty="0"/>
+          </a:p>
+        </p:txBody>
+      </p:sp>
+      <p:sp>
+        <p:nvSpPr>
+          <p:cNvPr id="3" name="Text 1"/>
+          <p:cNvSpPr/>
+          <p:nvPr/>
+        </p:nvSpPr>
+        <p:spPr>
+          <a:xfrm>
+            <a:off x="822960" y="960120"/>
+            <a:ext cx="10545775" cy="365760"/>
+          </a:xfrm>
+          <a:prstGeom prst="rect">
+            <a:avLst/>
+          </a:prstGeom>
+          <a:noFill/>
+          <a:ln/>
+        </p:spPr>
+        <p:txBody>
+          <a:bodyPr wrap="square" rtlCol="0" anchor="ctr"/>
+          <a:lstStyle/>
+          <a:p>
+            <a:pPr algn="l" indent="0" marL="0">
+              <a:buNone/>
+            </a:pPr>
+            <a:r>
+              <a:rPr lang="en-US" sz="1400" b="1" dirty="0">
+                <a:solidFill>
+                  <a:srgbClr val="1F4E9C"/>
+                </a:solidFill>
+                <a:latin typeface="微软雅黑" pitchFamily="34" charset="0"/>
+                <a:ea typeface="微软雅黑" pitchFamily="34" charset="-122"/>
+                <a:cs typeface="微软雅黑" pitchFamily="34" charset="-120"/>
+              </a:rPr>
+              <a:t>参考答案 · 模仿题</a:t>
+            </a:r>
+            <a:endParaRPr lang="en-US" sz="1400" dirty="0"/>
+          </a:p>
+        </p:txBody>
+      </p:sp>
+      <p:sp>
+        <p:nvSpPr>
+          <p:cNvPr id="4" name="Text 2"/>
+          <p:cNvSpPr/>
+          <p:nvPr/>
+        </p:nvSpPr>
+        <p:spPr>
+          <a:xfrm>
+            <a:off x="822960" y="1344168"/>
+            <a:ext cx="10545775" cy="731520"/>
+          </a:xfrm>
+          <a:prstGeom prst="rect">
+            <a:avLst/>
+          </a:prstGeom>
+          <a:noFill/>
+          <a:ln/>
+        </p:spPr>
+        <p:txBody>
+          <a:bodyPr wrap="square" rtlCol="0" anchor="ctr"/>
+          <a:lstStyle/>
+          <a:p>
+            <a:pPr algn="l" indent="0" marL="0">
+              <a:buNone/>
+            </a:pPr>
+            <a:r>
+              <a:rPr lang="en-US" sz="2800" b="1" dirty="0">
+                <a:solidFill>
+                  <a:srgbClr val="1F2329"/>
+                </a:solidFill>
+                <a:latin typeface="微软雅黑" pitchFamily="34" charset="0"/>
+                <a:ea typeface="微软雅黑" pitchFamily="34" charset="-122"/>
+                <a:cs typeface="微软雅黑" pitchFamily="34" charset="-120"/>
+              </a:rPr>
+              <a:t>模仿题参考答案（自行对照）</a:t>
+            </a:r>
+            <a:endParaRPr lang="en-US" sz="2800" dirty="0"/>
+          </a:p>
+        </p:txBody>
+      </p:sp>
+      <p:sp>
+        <p:nvSpPr>
+          <p:cNvPr id="5" name="Shape 3"/>
+          <p:cNvSpPr/>
+          <p:nvPr/>
+        </p:nvSpPr>
+        <p:spPr>
+          <a:xfrm>
+            <a:off x="822960" y="2395728"/>
+            <a:ext cx="10545775" cy="2253654"/>
+          </a:xfrm>
+          <a:prstGeom prst="rect">
+            <a:avLst/>
+          </a:prstGeom>
+          <a:solidFill>
+            <a:srgbClr val="F7F9FC"/>
+          </a:solidFill>
+          <a:ln/>
+        </p:spPr>
+      </p:sp>
+      <p:sp>
+        <p:nvSpPr>
+          <p:cNvPr id="6" name="Shape 4"/>
+          <p:cNvSpPr/>
+          <p:nvPr/>
+        </p:nvSpPr>
+        <p:spPr>
+          <a:xfrm>
+            <a:off x="822960" y="2395728"/>
+            <a:ext cx="50292" cy="2253654"/>
+          </a:xfrm>
+          <a:prstGeom prst="rect">
+            <a:avLst/>
+          </a:prstGeom>
+          <a:solidFill>
+            <a:srgbClr val="1F4E9C"/>
+          </a:solidFill>
+          <a:ln/>
+        </p:spPr>
+      </p:sp>
+      <p:sp>
+        <p:nvSpPr>
+          <p:cNvPr id="7" name="Text 5"/>
+          <p:cNvSpPr/>
+          <p:nvPr/>
+        </p:nvSpPr>
+        <p:spPr>
+          <a:xfrm>
+            <a:off x="1078992" y="2505456"/>
+            <a:ext cx="10033711" cy="2034198"/>
+          </a:xfrm>
+          <a:prstGeom prst="rect">
+            <a:avLst/>
+          </a:prstGeom>
+          <a:noFill/>
+          <a:ln/>
+        </p:spPr>
+        <p:txBody>
+          <a:bodyPr wrap="square" rtlCol="0" anchor="t"/>
+          <a:lstStyle/>
+          <a:p>
+            <a:pPr algn="l" indent="0" marL="0">
+              <a:lnSpc>
+                <a:spcPct val="125000"/>
+              </a:lnSpc>
+              <a:buNone/>
+            </a:pPr>
+            <a:r>
+              <a:rPr lang="en-US" sz="1200" dirty="0">
+                <a:solidFill>
+                  <a:srgbClr val="1F2329"/>
+                </a:solidFill>
+                <a:latin typeface="Consolas" pitchFamily="34" charset="0"/>
+                <a:ea typeface="Consolas" pitchFamily="34" charset="-122"/>
+                <a:cs typeface="Consolas" pitchFamily="34" charset="-120"/>
+              </a:rPr>
+              <a:t>// 三结点单链表：造、串、走、还
+struct Node { int data; struct Node *next; };
+struct Node *a = (struct Node *)malloc(sizeof(struct Node));
+// b、c同样造法，判空不能省；data分别填1、2、3
+a-&gt;next = b;  b-&gt;next = c;  c-&gt;next = NULL;
+struct Node *p = a;
+while(p != NULL){ printf("%d ", p-&gt;data); p = p-&gt;next; }
+free(a); free(b); free(c);
+</a:t>
+            </a:r>
+            <a:endParaRPr lang="en-US" sz="1200" dirty="0"/>
+          </a:p>
+        </p:txBody>
+      </p:sp>
+      <p:sp>
+        <p:nvSpPr>
+          <p:cNvPr id="8" name="Text 6"/>
+          <p:cNvSpPr/>
+          <p:nvPr/>
+        </p:nvSpPr>
+        <p:spPr>
+          <a:xfrm>
+            <a:off x="896112" y="4850550"/>
+            <a:ext cx="10454335" cy="359664"/>
+          </a:xfrm>
+          <a:prstGeom prst="rect">
+            <a:avLst/>
+          </a:prstGeom>
+          <a:noFill/>
+          <a:ln/>
+        </p:spPr>
+        <p:txBody>
+          <a:bodyPr wrap="square" rtlCol="0" anchor="t"/>
+          <a:lstStyle/>
+          <a:p>
+            <a:pPr algn="l" indent="0" marL="0">
+              <a:lnSpc>
+                <a:spcPct val="115000"/>
+              </a:lnSpc>
+              <a:buNone/>
+            </a:pPr>
+            <a:r>
+              <a:rPr lang="en-US" sz="1600" b="1" dirty="0">
+                <a:solidFill>
+                  <a:srgbClr val="1F4E9C"/>
+                </a:solidFill>
+                <a:latin typeface="微软雅黑" pitchFamily="34" charset="0"/>
+                <a:ea typeface="微软雅黑" pitchFamily="34" charset="-122"/>
+                <a:cs typeface="微软雅黑" pitchFamily="34" charset="-120"/>
+              </a:rPr>
+              <a:t>•  </a:t>
+            </a:r>
+            <a:pPr algn="l" indent="0" marL="0">
+              <a:lnSpc>
+                <a:spcPct val="115000"/>
+              </a:lnSpc>
+              <a:buNone/>
+            </a:pPr>
+            <a:r>
+              <a:rPr lang="en-US" sz="1600" dirty="0">
+                <a:solidFill>
+                  <a:srgbClr val="000000"/>
+                </a:solidFill>
+              </a:rPr>
+              <a:t>输出1 2 3；串联就是前一个的next存后一个的地址，遍历到NULL停</a:t>
+            </a:r>
+            <a:endParaRPr lang="en-US" sz="1600" dirty="0"/>
+          </a:p>
+        </p:txBody>
+      </p:sp>
+      <p:sp>
+        <p:nvSpPr>
+          <p:cNvPr id="9" name="Text 7"/>
+          <p:cNvSpPr/>
+          <p:nvPr/>
+        </p:nvSpPr>
+        <p:spPr>
+          <a:xfrm>
+            <a:off x="896112" y="5283366"/>
+            <a:ext cx="10454335" cy="359664"/>
+          </a:xfrm>
+          <a:prstGeom prst="rect">
+            <a:avLst/>
+          </a:prstGeom>
+          <a:noFill/>
+          <a:ln/>
+        </p:spPr>
+        <p:txBody>
+          <a:bodyPr wrap="square" rtlCol="0" anchor="t"/>
+          <a:lstStyle/>
+          <a:p>
+            <a:pPr algn="l" indent="0" marL="0">
+              <a:lnSpc>
+                <a:spcPct val="115000"/>
+              </a:lnSpc>
+              <a:buNone/>
+            </a:pPr>
+            <a:r>
+              <a:rPr lang="en-US" sz="1600" b="1" dirty="0">
+                <a:solidFill>
+                  <a:srgbClr val="1F4E9C"/>
+                </a:solidFill>
+                <a:latin typeface="微软雅黑" pitchFamily="34" charset="0"/>
+                <a:ea typeface="微软雅黑" pitchFamily="34" charset="-122"/>
+                <a:cs typeface="微软雅黑" pitchFamily="34" charset="-120"/>
+              </a:rPr>
+              <a:t>•  </a:t>
+            </a:r>
+            <a:pPr algn="l" indent="0" marL="0">
+              <a:lnSpc>
+                <a:spcPct val="115000"/>
+              </a:lnSpc>
+              <a:buNone/>
+            </a:pPr>
+            <a:r>
+              <a:rPr lang="en-US" sz="1600" dirty="0">
+                <a:solidFill>
+                  <a:srgbClr val="000000"/>
+                </a:solidFill>
+              </a:rPr>
+              <a:t>三个结点都要free，有借有还</a:t>
+            </a:r>
+            <a:endParaRPr lang="en-US" sz="1600" dirty="0"/>
+          </a:p>
+        </p:txBody>
+      </p:sp>
+      <p:sp>
+        <p:nvSpPr>
+          <p:cNvPr id="10" name="Text 8"/>
+          <p:cNvSpPr/>
+          <p:nvPr/>
+        </p:nvSpPr>
+        <p:spPr>
+          <a:xfrm>
+            <a:off x="896112" y="5716182"/>
+            <a:ext cx="10454335" cy="359664"/>
+          </a:xfrm>
+          <a:prstGeom prst="rect">
+            <a:avLst/>
+          </a:prstGeom>
+          <a:noFill/>
+          <a:ln/>
+        </p:spPr>
+        <p:txBody>
+          <a:bodyPr wrap="square" rtlCol="0" anchor="t"/>
+          <a:lstStyle/>
+          <a:p>
+            <a:pPr algn="l" indent="0" marL="0">
+              <a:lnSpc>
+                <a:spcPct val="115000"/>
+              </a:lnSpc>
+              <a:buNone/>
+            </a:pPr>
+            <a:r>
+              <a:rPr lang="en-US" sz="1600" b="1" dirty="0">
+                <a:solidFill>
+                  <a:srgbClr val="1F4E9C"/>
+                </a:solidFill>
+                <a:latin typeface="微软雅黑" pitchFamily="34" charset="0"/>
+                <a:ea typeface="微软雅黑" pitchFamily="34" charset="-122"/>
+                <a:cs typeface="微软雅黑" pitchFamily="34" charset="-120"/>
+              </a:rPr>
+              <a:t>•  </a:t>
+            </a:r>
+            <a:pPr algn="l" indent="0" marL="0">
+              <a:lnSpc>
+                <a:spcPct val="115000"/>
+              </a:lnSpc>
+              <a:buNone/>
+            </a:pPr>
+            <a:r>
+              <a:rPr lang="en-US" sz="1600" dirty="0">
+                <a:solidFill>
+                  <a:srgbClr val="000000"/>
+                </a:solidFill>
+              </a:rPr>
+              <a:t>代码省略头文件与main骨架</a:t>
+            </a:r>
+            <a:endParaRPr lang="en-US" sz="1600" dirty="0"/>
           </a:p>
         </p:txBody>
       </p:sp>
@@ -4521,7 +5564,7 @@
                 <a:ea typeface="微软雅黑" pitchFamily="34" charset="-122"/>
                 <a:cs typeface="微软雅黑" pitchFamily="34" charset="-120"/>
               </a:rPr>
-              <a:t>2 / 15</a:t>
+              <a:t>2 / 17</a:t>
             </a:r>
             <a:endParaRPr lang="en-US" sz="1000" dirty="0"/>
           </a:p>
@@ -4620,19 +5663,34 @@
             <a:avLst/>
           </a:prstGeom>
           <a:solidFill>
-            <a:srgbClr val="F5F6F7"/>
+            <a:srgbClr val="F7F9FC"/>
           </a:solidFill>
-          <a:ln w="9525">
-            <a:solidFill>
-              <a:srgbClr val="D8DBE0"/>
-            </a:solidFill>
-            <a:prstDash val="solid"/>
-          </a:ln>
-        </p:spPr>
-      </p:sp>
-      <p:sp>
-        <p:nvSpPr>
-          <p:cNvPr id="6" name="Text 4"/>
+          <a:ln/>
+        </p:spPr>
+      </p:sp>
+      <p:sp>
+        <p:nvSpPr>
+          <p:cNvPr id="6" name="Shape 4"/>
+          <p:cNvSpPr/>
+          <p:nvPr/>
+        </p:nvSpPr>
+        <p:spPr>
+          <a:xfrm>
+            <a:off x="822960" y="2395728"/>
+            <a:ext cx="50292" cy="1508760"/>
+          </a:xfrm>
+          <a:prstGeom prst="rect">
+            <a:avLst/>
+          </a:prstGeom>
+          <a:solidFill>
+            <a:srgbClr val="1F4E9C"/>
+          </a:solidFill>
+          <a:ln/>
+        </p:spPr>
+      </p:sp>
+      <p:sp>
+        <p:nvSpPr>
+          <p:cNvPr id="7" name="Text 5"/>
           <p:cNvSpPr/>
           <p:nvPr/>
         </p:nvSpPr>
@@ -4678,7 +5736,7 @@
       </p:sp>
       <p:sp>
         <p:nvSpPr>
-          <p:cNvPr id="7" name="Text 5"/>
+          <p:cNvPr id="8" name="Text 6"/>
           <p:cNvSpPr/>
           <p:nvPr/>
         </p:nvSpPr>
@@ -4762,7 +5820,7 @@
       </p:sp>
       <p:sp>
         <p:nvSpPr>
-          <p:cNvPr id="8" name="Text 6"/>
+          <p:cNvPr id="9" name="Text 7"/>
           <p:cNvSpPr/>
           <p:nvPr/>
         </p:nvSpPr>
@@ -4818,7 +5876,7 @@
       </p:sp>
       <p:sp>
         <p:nvSpPr>
-          <p:cNvPr id="9" name="Text 7"/>
+          <p:cNvPr id="10" name="Text 8"/>
           <p:cNvSpPr/>
           <p:nvPr/>
         </p:nvSpPr>
@@ -4944,7 +6002,7 @@
                 <a:ea typeface="微软雅黑" pitchFamily="34" charset="-122"/>
                 <a:cs typeface="微软雅黑" pitchFamily="34" charset="-120"/>
               </a:rPr>
-              <a:t>3 / 15</a:t>
+              <a:t>3 / 17</a:t>
             </a:r>
             <a:endParaRPr lang="en-US" sz="1000" dirty="0"/>
           </a:p>
@@ -5043,19 +6101,34 @@
             <a:avLst/>
           </a:prstGeom>
           <a:solidFill>
-            <a:srgbClr val="F5F6F7"/>
+            <a:srgbClr val="F7F9FC"/>
           </a:solidFill>
-          <a:ln w="9525">
-            <a:solidFill>
-              <a:srgbClr val="D8DBE0"/>
-            </a:solidFill>
-            <a:prstDash val="solid"/>
-          </a:ln>
-        </p:spPr>
-      </p:sp>
-      <p:sp>
-        <p:nvSpPr>
-          <p:cNvPr id="6" name="Text 4"/>
+          <a:ln/>
+        </p:spPr>
+      </p:sp>
+      <p:sp>
+        <p:nvSpPr>
+          <p:cNvPr id="6" name="Shape 4"/>
+          <p:cNvSpPr/>
+          <p:nvPr/>
+        </p:nvSpPr>
+        <p:spPr>
+          <a:xfrm>
+            <a:off x="822960" y="2395728"/>
+            <a:ext cx="50292" cy="1508760"/>
+          </a:xfrm>
+          <a:prstGeom prst="rect">
+            <a:avLst/>
+          </a:prstGeom>
+          <a:solidFill>
+            <a:srgbClr val="1F4E9C"/>
+          </a:solidFill>
+          <a:ln/>
+        </p:spPr>
+      </p:sp>
+      <p:sp>
+        <p:nvSpPr>
+          <p:cNvPr id="7" name="Text 5"/>
           <p:cNvSpPr/>
           <p:nvPr/>
         </p:nvSpPr>
@@ -5101,7 +6174,7 @@
       </p:sp>
       <p:sp>
         <p:nvSpPr>
-          <p:cNvPr id="7" name="Text 5"/>
+          <p:cNvPr id="8" name="Text 6"/>
           <p:cNvSpPr/>
           <p:nvPr/>
         </p:nvSpPr>
@@ -5157,7 +6230,7 @@
       </p:sp>
       <p:sp>
         <p:nvSpPr>
-          <p:cNvPr id="8" name="Text 6"/>
+          <p:cNvPr id="9" name="Text 7"/>
           <p:cNvSpPr/>
           <p:nvPr/>
         </p:nvSpPr>
@@ -5213,7 +6286,7 @@
       </p:sp>
       <p:sp>
         <p:nvSpPr>
-          <p:cNvPr id="9" name="Text 7"/>
+          <p:cNvPr id="10" name="Text 8"/>
           <p:cNvSpPr/>
           <p:nvPr/>
         </p:nvSpPr>
@@ -5339,7 +6412,7 @@
                 <a:ea typeface="微软雅黑" pitchFamily="34" charset="-122"/>
                 <a:cs typeface="微软雅黑" pitchFamily="34" charset="-120"/>
               </a:rPr>
-              <a:t>4 / 15</a:t>
+              <a:t>4 / 17</a:t>
             </a:r>
             <a:endParaRPr lang="en-US" sz="1000" dirty="0"/>
           </a:p>
@@ -5663,7 +6736,7 @@
                 <a:ea typeface="微软雅黑" pitchFamily="34" charset="-122"/>
                 <a:cs typeface="微软雅黑" pitchFamily="34" charset="-120"/>
               </a:rPr>
-              <a:t>5 / 15</a:t>
+              <a:t>5 / 17</a:t>
             </a:r>
             <a:endParaRPr lang="en-US" sz="1000" dirty="0"/>
           </a:p>
@@ -5702,7 +6775,7 @@
                 <a:ea typeface="微软雅黑" pitchFamily="34" charset="-122"/>
                 <a:cs typeface="微软雅黑" pitchFamily="34" charset="-120"/>
               </a:rPr>
-              <a:t>板书推演</a:t>
+              <a:t>动画演示 · 调用栈（本页逐条动画出现）</a:t>
             </a:r>
             <a:endParaRPr lang="en-US" sz="1400" dirty="0"/>
           </a:p>
@@ -5741,7 +6814,7 @@
                 <a:ea typeface="微软雅黑" pitchFamily="34" charset="-122"/>
                 <a:cs typeface="微软雅黑" pitchFamily="34" charset="-120"/>
               </a:rPr>
-              <a:t>画fact(3)的调用栈</a:t>
+              <a:t>fact(3)的调用栈：展开与收回（不手写，跟着画）</a:t>
             </a:r>
             <a:endParaRPr lang="en-US" sz="2800" dirty="0"/>
           </a:p>
@@ -5755,8 +6828,8 @@
         </p:nvSpPr>
         <p:spPr>
           <a:xfrm>
-            <a:off x="822960" y="2194560"/>
-            <a:ext cx="10545775" cy="685800"/>
+            <a:off x="896112" y="2395728"/>
+            <a:ext cx="10454335" cy="740664"/>
           </a:xfrm>
           <a:prstGeom prst="rect">
             <a:avLst/>
@@ -5769,84 +6842,93 @@
           <a:lstStyle/>
           <a:p>
             <a:pPr algn="l" indent="0" marL="0">
-              <a:buNone/>
-            </a:pPr>
-            <a:r>
-              <a:rPr lang="en-US" sz="1600" dirty="0">
-                <a:solidFill>
-                  <a:srgbClr val="1F2329"/>
-                </a:solidFill>
-                <a:latin typeface="微软雅黑" pitchFamily="34" charset="0"/>
-                <a:ea typeface="微软雅黑" pitchFamily="34" charset="-122"/>
-                <a:cs typeface="微软雅黑" pitchFamily="34" charset="-120"/>
-              </a:rPr>
-              <a:t>任务：竖着画调用过程——fact(3)压进去，依次fact(2)、fact(1)、fact(0)，每层标自己的n；再从fact(0)往上画返回箭头，标每层交回的数。只画栈框、n值与返回箭头，不写程序骨架</a:t>
-            </a:r>
-            <a:endParaRPr lang="en-US" sz="1600" dirty="0"/>
-          </a:p>
-        </p:txBody>
-      </p:sp>
-      <p:sp>
-        <p:nvSpPr>
-          <p:cNvPr id="6" name="Shape 4"/>
-          <p:cNvSpPr/>
-          <p:nvPr/>
-        </p:nvSpPr>
-        <p:spPr>
-          <a:xfrm>
-            <a:off x="822960" y="3017520"/>
-            <a:ext cx="10545775" cy="2788920"/>
-          </a:xfrm>
-          <a:prstGeom prst="rect">
-            <a:avLst/>
-          </a:prstGeom>
-          <a:solidFill>
-            <a:srgbClr val="FFFFFF"/>
-          </a:solidFill>
-          <a:ln w="12700">
-            <a:solidFill>
-              <a:srgbClr val="B9C0C9"/>
-            </a:solidFill>
-            <a:prstDash val="dash"/>
-          </a:ln>
-        </p:spPr>
-      </p:sp>
-      <p:sp>
-        <p:nvSpPr>
-          <p:cNvPr id="7" name="Text 5"/>
-          <p:cNvSpPr/>
-          <p:nvPr/>
-        </p:nvSpPr>
-        <p:spPr>
-          <a:xfrm>
-            <a:off x="822960" y="5349240"/>
-            <a:ext cx="10545775" cy="365760"/>
-          </a:xfrm>
-          <a:prstGeom prst="rect">
-            <a:avLst/>
-          </a:prstGeom>
-          <a:noFill/>
-          <a:ln/>
-        </p:spPr>
-        <p:txBody>
-          <a:bodyPr wrap="square" rtlCol="0" anchor="ctr"/>
-          <a:lstStyle/>
-          <a:p>
-            <a:pPr algn="r" indent="0" marL="0">
-              <a:buNone/>
-            </a:pPr>
-            <a:r>
-              <a:rPr lang="en-US" sz="1200" dirty="0">
-                <a:solidFill>
-                  <a:srgbClr val="8A9099"/>
-                </a:solidFill>
-                <a:latin typeface="微软雅黑" pitchFamily="34" charset="0"/>
-                <a:ea typeface="微软雅黑" pitchFamily="34" charset="-122"/>
-                <a:cs typeface="微软雅黑" pitchFamily="34" charset="-120"/>
-              </a:rPr>
-              <a:t>此处板书推演</a:t>
-            </a:r>
-            <a:endParaRPr lang="en-US" sz="1200" dirty="0"/>
+              <a:lnSpc>
+                <a:spcPct val="115000"/>
+              </a:lnSpc>
+              <a:buNone/>
+            </a:pPr>
+            <a:r>
+              <a:rPr lang="en-US" sz="1800" b="1" dirty="0">
+                <a:solidFill>
+                  <a:srgbClr val="1F4E9C"/>
+                </a:solidFill>
+                <a:latin typeface="微软雅黑" pitchFamily="34" charset="0"/>
+                <a:ea typeface="微软雅黑" pitchFamily="34" charset="-122"/>
+                <a:cs typeface="微软雅黑" pitchFamily="34" charset="-120"/>
+              </a:rPr>
+              <a:t>•  </a:t>
+            </a:r>
+            <a:pPr algn="l" indent="0" marL="0">
+              <a:lnSpc>
+                <a:spcPct val="115000"/>
+              </a:lnSpc>
+              <a:buNone/>
+            </a:pPr>
+            <a:r>
+              <a:rPr lang="en-US" sz="1800" dirty="0">
+                <a:solidFill>
+                  <a:srgbClr val="000000"/>
+                </a:solidFill>
+              </a:rPr>
+              <a:t>① 竖着叠四层框：fact(3)、fact(2)、fact(1)、fact(0)，每层标自己的n，向下箭头是调用</a:t>
+            </a:r>
+            <a:endParaRPr lang="en-US" sz="1800" dirty="0"/>
+          </a:p>
+        </p:txBody>
+      </p:sp>
+      <p:sp>
+        <p:nvSpPr>
+          <p:cNvPr id="6" name="Text 4"/>
+          <p:cNvSpPr/>
+          <p:nvPr/>
+        </p:nvSpPr>
+        <p:spPr>
+          <a:xfrm>
+            <a:off x="896112" y="3209544"/>
+            <a:ext cx="10454335" cy="397764"/>
+          </a:xfrm>
+          <a:prstGeom prst="rect">
+            <a:avLst/>
+          </a:prstGeom>
+          <a:noFill/>
+          <a:ln/>
+        </p:spPr>
+        <p:txBody>
+          <a:bodyPr wrap="square" rtlCol="0" anchor="t"/>
+          <a:lstStyle/>
+          <a:p>
+            <a:pPr algn="l" indent="0" marL="0">
+              <a:lnSpc>
+                <a:spcPct val="115000"/>
+              </a:lnSpc>
+              <a:buNone/>
+            </a:pPr>
+            <a:r>
+              <a:rPr lang="en-US" sz="1800" b="1" dirty="0">
+                <a:solidFill>
+                  <a:srgbClr val="1F4E9C"/>
+                </a:solidFill>
+                <a:latin typeface="微软雅黑" pitchFamily="34" charset="0"/>
+                <a:ea typeface="微软雅黑" pitchFamily="34" charset="-122"/>
+                <a:cs typeface="微软雅黑" pitchFamily="34" charset="-120"/>
+              </a:rPr>
+              <a:t>•  </a:t>
+            </a:r>
+            <a:pPr algn="l" indent="0" marL="0">
+              <a:lnSpc>
+                <a:spcPct val="115000"/>
+              </a:lnSpc>
+              <a:buNone/>
+            </a:pPr>
+            <a:r>
+              <a:rPr lang="en-US" sz="1800" dirty="0">
+                <a:solidFill>
+                  <a:srgbClr val="000000"/>
+                </a:solidFill>
+              </a:rPr>
+              <a:t>② 从fact(0)往上画返回箭头：逐层交回1、1、2、6，向上箭头是返回</a:t>
+            </a:r>
+            <a:endParaRPr lang="en-US" sz="1800" dirty="0"/>
           </a:p>
         </p:txBody>
       </p:sp>
@@ -5922,7 +7004,7 @@
                 <a:ea typeface="微软雅黑" pitchFamily="34" charset="-122"/>
                 <a:cs typeface="微软雅黑" pitchFamily="34" charset="-120"/>
               </a:rPr>
-              <a:t>6 / 15</a:t>
+              <a:t>6 / 17</a:t>
             </a:r>
             <a:endParaRPr lang="en-US" sz="1000" dirty="0"/>
           </a:p>
@@ -6021,19 +7103,34 @@
             <a:avLst/>
           </a:prstGeom>
           <a:solidFill>
-            <a:srgbClr val="F5F6F7"/>
+            <a:srgbClr val="F7F9FC"/>
           </a:solidFill>
-          <a:ln w="9525">
-            <a:solidFill>
-              <a:srgbClr val="D8DBE0"/>
-            </a:solidFill>
-            <a:prstDash val="solid"/>
-          </a:ln>
-        </p:spPr>
-      </p:sp>
-      <p:sp>
-        <p:nvSpPr>
-          <p:cNvPr id="6" name="Text 4"/>
+          <a:ln/>
+        </p:spPr>
+      </p:sp>
+      <p:sp>
+        <p:nvSpPr>
+          <p:cNvPr id="6" name="Shape 4"/>
+          <p:cNvSpPr/>
+          <p:nvPr/>
+        </p:nvSpPr>
+        <p:spPr>
+          <a:xfrm>
+            <a:off x="822960" y="2395728"/>
+            <a:ext cx="50292" cy="1508760"/>
+          </a:xfrm>
+          <a:prstGeom prst="rect">
+            <a:avLst/>
+          </a:prstGeom>
+          <a:solidFill>
+            <a:srgbClr val="1F4E9C"/>
+          </a:solidFill>
+          <a:ln/>
+        </p:spPr>
+      </p:sp>
+      <p:sp>
+        <p:nvSpPr>
+          <p:cNvPr id="7" name="Text 5"/>
           <p:cNvSpPr/>
           <p:nvPr/>
         </p:nvSpPr>
@@ -6079,7 +7176,7 @@
       </p:sp>
       <p:sp>
         <p:nvSpPr>
-          <p:cNvPr id="7" name="Text 5"/>
+          <p:cNvPr id="8" name="Text 6"/>
           <p:cNvSpPr/>
           <p:nvPr/>
         </p:nvSpPr>
@@ -6135,7 +7232,7 @@
       </p:sp>
       <p:sp>
         <p:nvSpPr>
-          <p:cNvPr id="8" name="Text 6"/>
+          <p:cNvPr id="9" name="Text 7"/>
           <p:cNvSpPr/>
           <p:nvPr/>
         </p:nvSpPr>
@@ -6191,7 +7288,7 @@
       </p:sp>
       <p:sp>
         <p:nvSpPr>
-          <p:cNvPr id="9" name="Text 7"/>
+          <p:cNvPr id="10" name="Text 8"/>
           <p:cNvSpPr/>
           <p:nvPr/>
         </p:nvSpPr>
@@ -6317,7 +7414,7 @@
                 <a:ea typeface="微软雅黑" pitchFamily="34" charset="-122"/>
                 <a:cs typeface="微软雅黑" pitchFamily="34" charset="-120"/>
               </a:rPr>
-              <a:t>7 / 15</a:t>
+              <a:t>7 / 17</a:t>
             </a:r>
             <a:endParaRPr lang="en-US" sz="1000" dirty="0"/>
           </a:p>
@@ -6416,19 +7513,34 @@
             <a:avLst/>
           </a:prstGeom>
           <a:solidFill>
-            <a:srgbClr val="F5F6F7"/>
+            <a:srgbClr val="F7F9FC"/>
           </a:solidFill>
-          <a:ln w="9525">
-            <a:solidFill>
-              <a:srgbClr val="D8DBE0"/>
-            </a:solidFill>
-            <a:prstDash val="solid"/>
-          </a:ln>
-        </p:spPr>
-      </p:sp>
-      <p:sp>
-        <p:nvSpPr>
-          <p:cNvPr id="6" name="Text 4"/>
+          <a:ln/>
+        </p:spPr>
+      </p:sp>
+      <p:sp>
+        <p:nvSpPr>
+          <p:cNvPr id="6" name="Shape 4"/>
+          <p:cNvSpPr/>
+          <p:nvPr/>
+        </p:nvSpPr>
+        <p:spPr>
+          <a:xfrm>
+            <a:off x="822960" y="2395728"/>
+            <a:ext cx="50292" cy="1508760"/>
+          </a:xfrm>
+          <a:prstGeom prst="rect">
+            <a:avLst/>
+          </a:prstGeom>
+          <a:solidFill>
+            <a:srgbClr val="1F4E9C"/>
+          </a:solidFill>
+          <a:ln/>
+        </p:spPr>
+      </p:sp>
+      <p:sp>
+        <p:nvSpPr>
+          <p:cNvPr id="7" name="Text 5"/>
           <p:cNvSpPr/>
           <p:nvPr/>
         </p:nvSpPr>
@@ -6474,7 +7586,7 @@
       </p:sp>
       <p:sp>
         <p:nvSpPr>
-          <p:cNvPr id="7" name="Text 5"/>
+          <p:cNvPr id="8" name="Text 6"/>
           <p:cNvSpPr/>
           <p:nvPr/>
         </p:nvSpPr>
@@ -6530,7 +7642,7 @@
       </p:sp>
       <p:sp>
         <p:nvSpPr>
-          <p:cNvPr id="8" name="Text 6"/>
+          <p:cNvPr id="9" name="Text 7"/>
           <p:cNvSpPr/>
           <p:nvPr/>
         </p:nvSpPr>
@@ -6586,7 +7698,7 @@
       </p:sp>
       <p:sp>
         <p:nvSpPr>
-          <p:cNvPr id="9" name="Text 7"/>
+          <p:cNvPr id="10" name="Text 8"/>
           <p:cNvSpPr/>
           <p:nvPr/>
         </p:nvSpPr>
@@ -6712,7 +7824,7 @@
                 <a:ea typeface="微软雅黑" pitchFamily="34" charset="-122"/>
                 <a:cs typeface="微软雅黑" pitchFamily="34" charset="-120"/>
               </a:rPr>
-              <a:t>8 / 15</a:t>
+              <a:t>8 / 17</a:t>
             </a:r>
             <a:endParaRPr lang="en-US" sz="1000" dirty="0"/>
           </a:p>
@@ -6811,19 +7923,34 @@
             <a:avLst/>
           </a:prstGeom>
           <a:solidFill>
-            <a:srgbClr val="F5F6F7"/>
+            <a:srgbClr val="F7F9FC"/>
           </a:solidFill>
-          <a:ln w="9525">
-            <a:solidFill>
-              <a:srgbClr val="D8DBE0"/>
-            </a:solidFill>
-            <a:prstDash val="solid"/>
-          </a:ln>
-        </p:spPr>
-      </p:sp>
-      <p:sp>
-        <p:nvSpPr>
-          <p:cNvPr id="6" name="Text 4"/>
+          <a:ln/>
+        </p:spPr>
+      </p:sp>
+      <p:sp>
+        <p:nvSpPr>
+          <p:cNvPr id="6" name="Shape 4"/>
+          <p:cNvSpPr/>
+          <p:nvPr/>
+        </p:nvSpPr>
+        <p:spPr>
+          <a:xfrm>
+            <a:off x="822960" y="2395728"/>
+            <a:ext cx="50292" cy="1508760"/>
+          </a:xfrm>
+          <a:prstGeom prst="rect">
+            <a:avLst/>
+          </a:prstGeom>
+          <a:solidFill>
+            <a:srgbClr val="1F4E9C"/>
+          </a:solidFill>
+          <a:ln/>
+        </p:spPr>
+      </p:sp>
+      <p:sp>
+        <p:nvSpPr>
+          <p:cNvPr id="7" name="Text 5"/>
           <p:cNvSpPr/>
           <p:nvPr/>
         </p:nvSpPr>
@@ -6869,7 +7996,7 @@
       </p:sp>
       <p:sp>
         <p:nvSpPr>
-          <p:cNvPr id="7" name="Text 5"/>
+          <p:cNvPr id="8" name="Text 6"/>
           <p:cNvSpPr/>
           <p:nvPr/>
         </p:nvSpPr>
@@ -6925,7 +8052,7 @@
       </p:sp>
       <p:sp>
         <p:nvSpPr>
-          <p:cNvPr id="8" name="Text 6"/>
+          <p:cNvPr id="9" name="Text 7"/>
           <p:cNvSpPr/>
           <p:nvPr/>
         </p:nvSpPr>
@@ -6981,7 +8108,7 @@
       </p:sp>
       <p:sp>
         <p:nvSpPr>
-          <p:cNvPr id="9" name="Text 7"/>
+          <p:cNvPr id="10" name="Text 8"/>
           <p:cNvSpPr/>
           <p:nvPr/>
         </p:nvSpPr>
@@ -7107,7 +8234,7 @@
                 <a:ea typeface="微软雅黑" pitchFamily="34" charset="-122"/>
                 <a:cs typeface="微软雅黑" pitchFamily="34" charset="-120"/>
               </a:rPr>
-              <a:t>9 / 15</a:t>
+              <a:t>9 / 17</a:t>
             </a:r>
             <a:endParaRPr lang="en-US" sz="1000" dirty="0"/>
           </a:p>
@@ -7200,32 +8327,47 @@
         <p:spPr>
           <a:xfrm>
             <a:off x="822960" y="2395728"/>
-            <a:ext cx="10545775" cy="2221992"/>
+            <a:ext cx="10545775" cy="2152085"/>
           </a:xfrm>
           <a:prstGeom prst="rect">
             <a:avLst/>
           </a:prstGeom>
           <a:solidFill>
-            <a:srgbClr val="F5F6F7"/>
+            <a:srgbClr val="F7F9FC"/>
           </a:solidFill>
-          <a:ln w="9525">
-            <a:solidFill>
-              <a:srgbClr val="D8DBE0"/>
-            </a:solidFill>
-            <a:prstDash val="solid"/>
-          </a:ln>
-        </p:spPr>
-      </p:sp>
-      <p:sp>
-        <p:nvSpPr>
-          <p:cNvPr id="6" name="Text 4"/>
+          <a:ln/>
+        </p:spPr>
+      </p:sp>
+      <p:sp>
+        <p:nvSpPr>
+          <p:cNvPr id="6" name="Shape 4"/>
+          <p:cNvSpPr/>
+          <p:nvPr/>
+        </p:nvSpPr>
+        <p:spPr>
+          <a:xfrm>
+            <a:off x="822960" y="2395728"/>
+            <a:ext cx="50292" cy="2152085"/>
+          </a:xfrm>
+          <a:prstGeom prst="rect">
+            <a:avLst/>
+          </a:prstGeom>
+          <a:solidFill>
+            <a:srgbClr val="1F4E9C"/>
+          </a:solidFill>
+          <a:ln/>
+        </p:spPr>
+      </p:sp>
+      <p:sp>
+        <p:nvSpPr>
+          <p:cNvPr id="7" name="Text 5"/>
           <p:cNvSpPr/>
           <p:nvPr/>
         </p:nvSpPr>
         <p:spPr>
           <a:xfrm>
             <a:off x="1078992" y="2505456"/>
-            <a:ext cx="10033711" cy="2002536"/>
+            <a:ext cx="10033711" cy="1932629"/>
           </a:xfrm>
           <a:prstGeom prst="rect">
             <a:avLst/>
@@ -7267,13 +8409,13 @@
       </p:sp>
       <p:sp>
         <p:nvSpPr>
-          <p:cNvPr id="7" name="Text 5"/>
-          <p:cNvSpPr/>
-          <p:nvPr/>
-        </p:nvSpPr>
-        <p:spPr>
-          <a:xfrm>
-            <a:off x="896112" y="4818888"/>
+          <p:cNvPr id="8" name="Text 6"/>
+          <p:cNvSpPr/>
+          <p:nvPr/>
+        </p:nvSpPr>
+        <p:spPr>
+          <a:xfrm>
+            <a:off x="896112" y="4748981"/>
             <a:ext cx="10454335" cy="378714"/>
           </a:xfrm>
           <a:prstGeom prst="rect">
@@ -7323,13 +8465,13 @@
       </p:sp>
       <p:sp>
         <p:nvSpPr>
-          <p:cNvPr id="8" name="Text 6"/>
-          <p:cNvSpPr/>
-          <p:nvPr/>
-        </p:nvSpPr>
-        <p:spPr>
-          <a:xfrm>
-            <a:off x="896112" y="5270754"/>
+          <p:cNvPr id="9" name="Text 7"/>
+          <p:cNvSpPr/>
+          <p:nvPr/>
+        </p:nvSpPr>
+        <p:spPr>
+          <a:xfrm>
+            <a:off x="896112" y="5200847"/>
             <a:ext cx="10454335" cy="378714"/>
           </a:xfrm>
           <a:prstGeom prst="rect">
@@ -7379,13 +8521,13 @@
       </p:sp>
       <p:sp>
         <p:nvSpPr>
-          <p:cNvPr id="9" name="Text 7"/>
-          <p:cNvSpPr/>
-          <p:nvPr/>
-        </p:nvSpPr>
-        <p:spPr>
-          <a:xfrm>
-            <a:off x="896112" y="5722620"/>
+          <p:cNvPr id="10" name="Text 8"/>
+          <p:cNvSpPr/>
+          <p:nvPr/>
+        </p:nvSpPr>
+        <p:spPr>
+          <a:xfrm>
+            <a:off x="896112" y="5652713"/>
             <a:ext cx="10454335" cy="378714"/>
           </a:xfrm>
           <a:prstGeom prst="rect">

--- a/课件/C1/C1-B-06/C1-B-06.pptx
+++ b/课件/C1/C1-B-06/C1-B-06.pptx
@@ -1,33 +1,33 @@
 
 <file path=ppt/presentation.xml><?xml version="1.0" encoding="utf-8"?>
-<p:presentation xmlns:a="http://schemas.openxmlformats.org/drawingml/2006/main" xmlns:r="http://schemas.openxmlformats.org/officeDocument/2006/relationships" xmlns:p="http://schemas.openxmlformats.org/presentationml/2006/main" saveSubsetFonts="1" autoCompressPictures="0">
+<p:presentation xmlns:a="http://schemas.openxmlformats.org/drawingml/2006/main" xmlns:r="http://schemas.openxmlformats.org/officeDocument/2006/relationships" xmlns:p="http://schemas.openxmlformats.org/presentationml/2006/main" autoCompressPictures="0">
   <p:sldMasterIdLst>
     <p:sldMasterId id="2147483648" r:id="rId1"/>
+    <p:sldMasterId id="2147483650" r:id="rId3"/>
   </p:sldMasterIdLst>
+  <p:notesMasterIdLst>
+    <p:notesMasterId r:id="rId5"/>
+  </p:notesMasterIdLst>
   <p:sldIdLst>
-    <p:sldId id="256" r:id="rId2"/>
-    <p:sldId id="257" r:id="rId3"/>
-    <p:sldId id="258" r:id="rId4"/>
-    <p:sldId id="259" r:id="rId5"/>
-    <p:sldId id="260" r:id="rId6"/>
-    <p:sldId id="261" r:id="rId7"/>
-    <p:sldId id="262" r:id="rId8"/>
-    <p:sldId id="263" r:id="rId9"/>
-    <p:sldId id="264" r:id="rId10"/>
-    <p:sldId id="265" r:id="rId11"/>
-    <p:sldId id="266" r:id="rId12"/>
-    <p:sldId id="267" r:id="rId13"/>
-    <p:sldId id="268" r:id="rId14"/>
-    <p:sldId id="269" r:id="rId15"/>
-    <p:sldId id="270" r:id="rId16"/>
-    <p:sldId id="271" r:id="rId17"/>
-    <p:sldId id="272" r:id="rId18"/>
+    <p:sldId id="256" r:id="rId4"/>
+    <p:sldId id="257" r:id="rId6"/>
+    <p:sldId id="258" r:id="rId7"/>
+    <p:sldId id="259" r:id="rId8"/>
+    <p:sldId id="260" r:id="rId9"/>
+    <p:sldId id="261" r:id="rId10"/>
+    <p:sldId id="262" r:id="rId11"/>
+    <p:sldId id="263" r:id="rId12"/>
+    <p:sldId id="264" r:id="rId13"/>
+    <p:sldId id="265" r:id="rId14"/>
+    <p:sldId id="271" r:id="rId15"/>
+    <p:sldId id="266" r:id="rId16"/>
+    <p:sldId id="267" r:id="rId17"/>
+    <p:sldId id="268" r:id="rId18"/>
+    <p:sldId id="269" r:id="rId19"/>
+    <p:sldId id="270" r:id="rId20"/>
   </p:sldIdLst>
-  <p:notesMasterIdLst>
-    <p:notesMasterId r:id="rId19"/>
-  </p:notesMasterIdLst>
-  <p:sldSz cx="12191695" cy="6858000"/>
-  <p:notesSz cx="6858000" cy="12191695"/>
+  <p:sldSz cx="12191365" cy="6858000"/>
+  <p:notesSz cx="6858000" cy="12191365"/>
   <p:defaultTextStyle>
     <a:lvl1pPr marL="0" algn="l" defTabSz="914400" rtl="0" eaLnBrk="1" latinLnBrk="0" hangingPunct="1">
       <a:defRPr sz="1800" kern="1200">
@@ -205,7 +205,6 @@
           <a:p>
             <a:fld id="{5282F153-3F37-0F45-9E97-73ACFA13230C}" type="datetimeFigureOut">
               <a:rPr lang="en-US"/>
-              <a:t>7/23/19</a:t>
             </a:fld>
             <a:endParaRPr lang="en-US"/>
           </a:p>
@@ -272,6 +271,7 @@
               <a:rPr lang="en-US"/>
               <a:t>Click to edit Master text styles</a:t>
             </a:r>
+            <a:endParaRPr lang="en-US"/>
           </a:p>
           <a:p>
             <a:pPr lvl="1"/>
@@ -279,6 +279,7 @@
               <a:rPr lang="en-US"/>
               <a:t>Second level</a:t>
             </a:r>
+            <a:endParaRPr lang="en-US"/>
           </a:p>
           <a:p>
             <a:pPr lvl="2"/>
@@ -286,6 +287,7 @@
               <a:rPr lang="en-US"/>
               <a:t>Third level</a:t>
             </a:r>
+            <a:endParaRPr lang="en-US"/>
           </a:p>
           <a:p>
             <a:pPr lvl="3"/>
@@ -293,6 +295,7 @@
               <a:rPr lang="en-US"/>
               <a:t>Fourth level</a:t>
             </a:r>
+            <a:endParaRPr lang="en-US"/>
           </a:p>
           <a:p>
             <a:pPr lvl="4"/>
@@ -300,6 +303,7 @@
               <a:rPr lang="en-US"/>
               <a:t>Fifth level</a:t>
             </a:r>
+            <a:endParaRPr lang="en-US"/>
           </a:p>
         </p:txBody>
       </p:sp>
@@ -363,18 +367,12 @@
           <a:p>
             <a:fld id="{CE5E9CC1-C706-0F49-92D6-E571CC5EEA8F}" type="slidenum">
               <a:rPr lang="en-US"/>
-              <a:t>‹#›</a:t>
             </a:fld>
             <a:endParaRPr lang="en-US"/>
           </a:p>
         </p:txBody>
       </p:sp>
     </p:spTree>
-    <p:extLst>
-      <p:ext uri="{BB962C8B-B14F-4D97-AF65-F5344CB8AC3E}">
-        <p14:creationId xmlns:p14="http://schemas.microsoft.com/office/powerpoint/2010/main" val="1024086991"/>
-      </p:ext>
-    </p:extLst>
   </p:cSld>
   <p:clrMap bg1="lt1" tx1="dk1" bg2="lt2" tx2="dk2" accent1="accent1" accent2="accent2" accent3="accent3" accent4="accent4" accent5="accent5" accent6="accent6" hlink="hlink" folHlink="folHlink"/>
   <p:notesStyle>
@@ -516,10 +514,6 @@
           <a:bodyPr/>
           <a:lstStyle/>
           <a:p>
-            <a:r>
-              <a:rPr lang="en-US" dirty="0"/>
-              <a:t/>
-            </a:r>
             <a:endParaRPr lang="en-US" dirty="0"/>
           </a:p>
         </p:txBody>
@@ -541,18 +535,12 @@
           <a:p>
             <a:fld id="{F7021451-1387-4CA6-816F-3879F97B5CBC}" type="slidenum">
               <a:rPr lang="en-US"/>
-              <a:t>1</a:t>
             </a:fld>
             <a:endParaRPr lang="en-US"/>
           </a:p>
         </p:txBody>
       </p:sp>
     </p:spTree>
-    <p:extLst>
-      <p:ext uri="{BB962C8B-B14F-4D97-AF65-F5344CB8AC3E}">
-        <p14:creationId xmlns:p14="http://schemas.microsoft.com/office/powerpoint/2010/main" val="1024086991"/>
-      </p:ext>
-    </p:extLst>
   </p:cSld>
   <p:clrMapOvr>
     <a:masterClrMapping/>
@@ -604,10 +592,6 @@
           <a:bodyPr/>
           <a:lstStyle/>
           <a:p>
-            <a:r>
-              <a:rPr lang="en-US" dirty="0"/>
-              <a:t/>
-            </a:r>
             <a:endParaRPr lang="en-US" dirty="0"/>
           </a:p>
         </p:txBody>
@@ -629,18 +613,12 @@
           <a:p>
             <a:fld id="{F7021451-1387-4CA6-816F-3879F97B5CBC}" type="slidenum">
               <a:rPr lang="en-US"/>
-              <a:t>10</a:t>
             </a:fld>
             <a:endParaRPr lang="en-US"/>
           </a:p>
         </p:txBody>
       </p:sp>
     </p:spTree>
-    <p:extLst>
-      <p:ext uri="{BB962C8B-B14F-4D97-AF65-F5344CB8AC3E}">
-        <p14:creationId xmlns:p14="http://schemas.microsoft.com/office/powerpoint/2010/main" val="1024086991"/>
-      </p:ext>
-    </p:extLst>
   </p:cSld>
   <p:clrMapOvr>
     <a:masterClrMapping/>
@@ -692,10 +670,6 @@
           <a:bodyPr/>
           <a:lstStyle/>
           <a:p>
-            <a:r>
-              <a:rPr lang="en-US" dirty="0"/>
-              <a:t/>
-            </a:r>
             <a:endParaRPr lang="en-US" dirty="0"/>
           </a:p>
         </p:txBody>
@@ -717,18 +691,12 @@
           <a:p>
             <a:fld id="{F7021451-1387-4CA6-816F-3879F97B5CBC}" type="slidenum">
               <a:rPr lang="en-US"/>
-              <a:t>11</a:t>
             </a:fld>
             <a:endParaRPr lang="en-US"/>
           </a:p>
         </p:txBody>
       </p:sp>
     </p:spTree>
-    <p:extLst>
-      <p:ext uri="{BB962C8B-B14F-4D97-AF65-F5344CB8AC3E}">
-        <p14:creationId xmlns:p14="http://schemas.microsoft.com/office/powerpoint/2010/main" val="1024086991"/>
-      </p:ext>
-    </p:extLst>
   </p:cSld>
   <p:clrMapOvr>
     <a:masterClrMapping/>
@@ -780,10 +748,6 @@
           <a:bodyPr/>
           <a:lstStyle/>
           <a:p>
-            <a:r>
-              <a:rPr lang="en-US" dirty="0"/>
-              <a:t/>
-            </a:r>
             <a:endParaRPr lang="en-US" dirty="0"/>
           </a:p>
         </p:txBody>
@@ -805,18 +769,12 @@
           <a:p>
             <a:fld id="{F7021451-1387-4CA6-816F-3879F97B5CBC}" type="slidenum">
               <a:rPr lang="en-US"/>
-              <a:t>12</a:t>
             </a:fld>
             <a:endParaRPr lang="en-US"/>
           </a:p>
         </p:txBody>
       </p:sp>
     </p:spTree>
-    <p:extLst>
-      <p:ext uri="{BB962C8B-B14F-4D97-AF65-F5344CB8AC3E}">
-        <p14:creationId xmlns:p14="http://schemas.microsoft.com/office/powerpoint/2010/main" val="1024086991"/>
-      </p:ext>
-    </p:extLst>
   </p:cSld>
   <p:clrMapOvr>
     <a:masterClrMapping/>
@@ -868,10 +826,6 @@
           <a:bodyPr/>
           <a:lstStyle/>
           <a:p>
-            <a:r>
-              <a:rPr lang="en-US" dirty="0"/>
-              <a:t/>
-            </a:r>
             <a:endParaRPr lang="en-US" dirty="0"/>
           </a:p>
         </p:txBody>
@@ -893,18 +847,12 @@
           <a:p>
             <a:fld id="{F7021451-1387-4CA6-816F-3879F97B5CBC}" type="slidenum">
               <a:rPr lang="en-US"/>
-              <a:t>13</a:t>
             </a:fld>
             <a:endParaRPr lang="en-US"/>
           </a:p>
         </p:txBody>
       </p:sp>
     </p:spTree>
-    <p:extLst>
-      <p:ext uri="{BB962C8B-B14F-4D97-AF65-F5344CB8AC3E}">
-        <p14:creationId xmlns:p14="http://schemas.microsoft.com/office/powerpoint/2010/main" val="1024086991"/>
-      </p:ext>
-    </p:extLst>
   </p:cSld>
   <p:clrMapOvr>
     <a:masterClrMapping/>
@@ -956,10 +904,6 @@
           <a:bodyPr/>
           <a:lstStyle/>
           <a:p>
-            <a:r>
-              <a:rPr lang="en-US" dirty="0"/>
-              <a:t/>
-            </a:r>
             <a:endParaRPr lang="en-US" dirty="0"/>
           </a:p>
         </p:txBody>
@@ -981,18 +925,12 @@
           <a:p>
             <a:fld id="{F7021451-1387-4CA6-816F-3879F97B5CBC}" type="slidenum">
               <a:rPr lang="en-US"/>
-              <a:t>14</a:t>
             </a:fld>
             <a:endParaRPr lang="en-US"/>
           </a:p>
         </p:txBody>
       </p:sp>
     </p:spTree>
-    <p:extLst>
-      <p:ext uri="{BB962C8B-B14F-4D97-AF65-F5344CB8AC3E}">
-        <p14:creationId xmlns:p14="http://schemas.microsoft.com/office/powerpoint/2010/main" val="1024086991"/>
-      </p:ext>
-    </p:extLst>
   </p:cSld>
   <p:clrMapOvr>
     <a:masterClrMapping/>
@@ -1044,10 +982,6 @@
           <a:bodyPr/>
           <a:lstStyle/>
           <a:p>
-            <a:r>
-              <a:rPr lang="en-US" dirty="0"/>
-              <a:t/>
-            </a:r>
             <a:endParaRPr lang="en-US" dirty="0"/>
           </a:p>
         </p:txBody>
@@ -1069,18 +1003,12 @@
           <a:p>
             <a:fld id="{F7021451-1387-4CA6-816F-3879F97B5CBC}" type="slidenum">
               <a:rPr lang="en-US"/>
-              <a:t>15</a:t>
             </a:fld>
             <a:endParaRPr lang="en-US"/>
           </a:p>
         </p:txBody>
       </p:sp>
     </p:spTree>
-    <p:extLst>
-      <p:ext uri="{BB962C8B-B14F-4D97-AF65-F5344CB8AC3E}">
-        <p14:creationId xmlns:p14="http://schemas.microsoft.com/office/powerpoint/2010/main" val="1024086991"/>
-      </p:ext>
-    </p:extLst>
   </p:cSld>
   <p:clrMapOvr>
     <a:masterClrMapping/>
@@ -1132,10 +1060,6 @@
           <a:bodyPr/>
           <a:lstStyle/>
           <a:p>
-            <a:r>
-              <a:rPr lang="en-US" dirty="0"/>
-              <a:t/>
-            </a:r>
             <a:endParaRPr lang="en-US" dirty="0"/>
           </a:p>
         </p:txBody>
@@ -1157,106 +1081,12 @@
           <a:p>
             <a:fld id="{F7021451-1387-4CA6-816F-3879F97B5CBC}" type="slidenum">
               <a:rPr lang="en-US"/>
-              <a:t>16</a:t>
             </a:fld>
             <a:endParaRPr lang="en-US"/>
           </a:p>
         </p:txBody>
       </p:sp>
     </p:spTree>
-    <p:extLst>
-      <p:ext uri="{BB962C8B-B14F-4D97-AF65-F5344CB8AC3E}">
-        <p14:creationId xmlns:p14="http://schemas.microsoft.com/office/powerpoint/2010/main" val="1024086991"/>
-      </p:ext>
-    </p:extLst>
-  </p:cSld>
-  <p:clrMapOvr>
-    <a:masterClrMapping/>
-  </p:clrMapOvr>
-</p:notes>
-</file>
-
-<file path=ppt/notesSlides/notesSlide17.xml><?xml version="1.0" encoding="utf-8"?>
-<p:notes xmlns:a="http://schemas.openxmlformats.org/drawingml/2006/main" xmlns:r="http://schemas.openxmlformats.org/officeDocument/2006/relationships" xmlns:p="http://schemas.openxmlformats.org/presentationml/2006/main">
-  <p:cSld>
-    <p:spTree>
-      <p:nvGrpSpPr>
-        <p:cNvPr id="1" name=""/>
-        <p:cNvGrpSpPr/>
-        <p:nvPr/>
-      </p:nvGrpSpPr>
-      <p:grpSpPr>
-        <a:xfrm>
-          <a:off x="0" y="0"/>
-          <a:ext cx="0" cy="0"/>
-          <a:chOff x="0" y="0"/>
-          <a:chExt cx="0" cy="0"/>
-        </a:xfrm>
-      </p:grpSpPr>
-      <p:sp>
-        <p:nvSpPr>
-          <p:cNvPr id="2" name="Slide Image Placeholder 1"/>
-          <p:cNvSpPr>
-            <a:spLocks noGrp="1" noRot="1" noChangeAspect="1"/>
-          </p:cNvSpPr>
-          <p:nvPr>
-            <p:ph type="sldImg"/>
-          </p:nvPr>
-        </p:nvSpPr>
-        <p:spPr/>
-      </p:sp>
-      <p:sp>
-        <p:nvSpPr>
-          <p:cNvPr id="3" name="Notes Placeholder 2"/>
-          <p:cNvSpPr>
-            <a:spLocks noGrp="1"/>
-          </p:cNvSpPr>
-          <p:nvPr>
-            <p:ph type="body" idx="1"/>
-          </p:nvPr>
-        </p:nvSpPr>
-        <p:spPr/>
-        <p:txBody>
-          <a:bodyPr/>
-          <a:lstStyle/>
-          <a:p>
-            <a:r>
-              <a:rPr lang="en-US" dirty="0"/>
-              <a:t/>
-            </a:r>
-            <a:endParaRPr lang="en-US" dirty="0"/>
-          </a:p>
-        </p:txBody>
-      </p:sp>
-      <p:sp>
-        <p:nvSpPr>
-          <p:cNvPr id="4" name="Slide Number Placeholder 3"/>
-          <p:cNvSpPr>
-            <a:spLocks noGrp="1"/>
-          </p:cNvSpPr>
-          <p:nvPr>
-            <p:ph type="sldNum" sz="quarter" idx="10"/>
-          </p:nvPr>
-        </p:nvSpPr>
-        <p:spPr/>
-        <p:txBody>
-          <a:bodyPr/>
-          <a:lstStyle/>
-          <a:p>
-            <a:fld id="{F7021451-1387-4CA6-816F-3879F97B5CBC}" type="slidenum">
-              <a:rPr lang="en-US"/>
-              <a:t>17</a:t>
-            </a:fld>
-            <a:endParaRPr lang="en-US"/>
-          </a:p>
-        </p:txBody>
-      </p:sp>
-    </p:spTree>
-    <p:extLst>
-      <p:ext uri="{BB962C8B-B14F-4D97-AF65-F5344CB8AC3E}">
-        <p14:creationId xmlns:p14="http://schemas.microsoft.com/office/powerpoint/2010/main" val="1024086991"/>
-      </p:ext>
-    </p:extLst>
   </p:cSld>
   <p:clrMapOvr>
     <a:masterClrMapping/>
@@ -1308,10 +1138,6 @@
           <a:bodyPr/>
           <a:lstStyle/>
           <a:p>
-            <a:r>
-              <a:rPr lang="en-US" dirty="0"/>
-              <a:t/>
-            </a:r>
             <a:endParaRPr lang="en-US" dirty="0"/>
           </a:p>
         </p:txBody>
@@ -1333,18 +1159,12 @@
           <a:p>
             <a:fld id="{F7021451-1387-4CA6-816F-3879F97B5CBC}" type="slidenum">
               <a:rPr lang="en-US"/>
-              <a:t>2</a:t>
             </a:fld>
             <a:endParaRPr lang="en-US"/>
           </a:p>
         </p:txBody>
       </p:sp>
     </p:spTree>
-    <p:extLst>
-      <p:ext uri="{BB962C8B-B14F-4D97-AF65-F5344CB8AC3E}">
-        <p14:creationId xmlns:p14="http://schemas.microsoft.com/office/powerpoint/2010/main" val="1024086991"/>
-      </p:ext>
-    </p:extLst>
   </p:cSld>
   <p:clrMapOvr>
     <a:masterClrMapping/>
@@ -1396,10 +1216,6 @@
           <a:bodyPr/>
           <a:lstStyle/>
           <a:p>
-            <a:r>
-              <a:rPr lang="en-US" dirty="0"/>
-              <a:t/>
-            </a:r>
             <a:endParaRPr lang="en-US" dirty="0"/>
           </a:p>
         </p:txBody>
@@ -1421,18 +1237,12 @@
           <a:p>
             <a:fld id="{F7021451-1387-4CA6-816F-3879F97B5CBC}" type="slidenum">
               <a:rPr lang="en-US"/>
-              <a:t>3</a:t>
             </a:fld>
             <a:endParaRPr lang="en-US"/>
           </a:p>
         </p:txBody>
       </p:sp>
     </p:spTree>
-    <p:extLst>
-      <p:ext uri="{BB962C8B-B14F-4D97-AF65-F5344CB8AC3E}">
-        <p14:creationId xmlns:p14="http://schemas.microsoft.com/office/powerpoint/2010/main" val="1024086991"/>
-      </p:ext>
-    </p:extLst>
   </p:cSld>
   <p:clrMapOvr>
     <a:masterClrMapping/>
@@ -1484,10 +1294,6 @@
           <a:bodyPr/>
           <a:lstStyle/>
           <a:p>
-            <a:r>
-              <a:rPr lang="en-US" dirty="0"/>
-              <a:t/>
-            </a:r>
             <a:endParaRPr lang="en-US" dirty="0"/>
           </a:p>
         </p:txBody>
@@ -1509,18 +1315,12 @@
           <a:p>
             <a:fld id="{F7021451-1387-4CA6-816F-3879F97B5CBC}" type="slidenum">
               <a:rPr lang="en-US"/>
-              <a:t>4</a:t>
             </a:fld>
             <a:endParaRPr lang="en-US"/>
           </a:p>
         </p:txBody>
       </p:sp>
     </p:spTree>
-    <p:extLst>
-      <p:ext uri="{BB962C8B-B14F-4D97-AF65-F5344CB8AC3E}">
-        <p14:creationId xmlns:p14="http://schemas.microsoft.com/office/powerpoint/2010/main" val="1024086991"/>
-      </p:ext>
-    </p:extLst>
   </p:cSld>
   <p:clrMapOvr>
     <a:masterClrMapping/>
@@ -1572,10 +1372,6 @@
           <a:bodyPr/>
           <a:lstStyle/>
           <a:p>
-            <a:r>
-              <a:rPr lang="en-US" dirty="0"/>
-              <a:t/>
-            </a:r>
             <a:endParaRPr lang="en-US" dirty="0"/>
           </a:p>
         </p:txBody>
@@ -1597,18 +1393,12 @@
           <a:p>
             <a:fld id="{F7021451-1387-4CA6-816F-3879F97B5CBC}" type="slidenum">
               <a:rPr lang="en-US"/>
-              <a:t>5</a:t>
             </a:fld>
             <a:endParaRPr lang="en-US"/>
           </a:p>
         </p:txBody>
       </p:sp>
     </p:spTree>
-    <p:extLst>
-      <p:ext uri="{BB962C8B-B14F-4D97-AF65-F5344CB8AC3E}">
-        <p14:creationId xmlns:p14="http://schemas.microsoft.com/office/powerpoint/2010/main" val="1024086991"/>
-      </p:ext>
-    </p:extLst>
   </p:cSld>
   <p:clrMapOvr>
     <a:masterClrMapping/>
@@ -1660,10 +1450,6 @@
           <a:bodyPr/>
           <a:lstStyle/>
           <a:p>
-            <a:r>
-              <a:rPr lang="en-US" dirty="0"/>
-              <a:t/>
-            </a:r>
             <a:endParaRPr lang="en-US" dirty="0"/>
           </a:p>
         </p:txBody>
@@ -1685,18 +1471,12 @@
           <a:p>
             <a:fld id="{F7021451-1387-4CA6-816F-3879F97B5CBC}" type="slidenum">
               <a:rPr lang="en-US"/>
-              <a:t>6</a:t>
             </a:fld>
             <a:endParaRPr lang="en-US"/>
           </a:p>
         </p:txBody>
       </p:sp>
     </p:spTree>
-    <p:extLst>
-      <p:ext uri="{BB962C8B-B14F-4D97-AF65-F5344CB8AC3E}">
-        <p14:creationId xmlns:p14="http://schemas.microsoft.com/office/powerpoint/2010/main" val="1024086991"/>
-      </p:ext>
-    </p:extLst>
   </p:cSld>
   <p:clrMapOvr>
     <a:masterClrMapping/>
@@ -1748,10 +1528,6 @@
           <a:bodyPr/>
           <a:lstStyle/>
           <a:p>
-            <a:r>
-              <a:rPr lang="en-US" dirty="0"/>
-              <a:t/>
-            </a:r>
             <a:endParaRPr lang="en-US" dirty="0"/>
           </a:p>
         </p:txBody>
@@ -1773,18 +1549,12 @@
           <a:p>
             <a:fld id="{F7021451-1387-4CA6-816F-3879F97B5CBC}" type="slidenum">
               <a:rPr lang="en-US"/>
-              <a:t>7</a:t>
             </a:fld>
             <a:endParaRPr lang="en-US"/>
           </a:p>
         </p:txBody>
       </p:sp>
     </p:spTree>
-    <p:extLst>
-      <p:ext uri="{BB962C8B-B14F-4D97-AF65-F5344CB8AC3E}">
-        <p14:creationId xmlns:p14="http://schemas.microsoft.com/office/powerpoint/2010/main" val="1024086991"/>
-      </p:ext>
-    </p:extLst>
   </p:cSld>
   <p:clrMapOvr>
     <a:masterClrMapping/>
@@ -1836,10 +1606,6 @@
           <a:bodyPr/>
           <a:lstStyle/>
           <a:p>
-            <a:r>
-              <a:rPr lang="en-US" dirty="0"/>
-              <a:t/>
-            </a:r>
             <a:endParaRPr lang="en-US" dirty="0"/>
           </a:p>
         </p:txBody>
@@ -1861,18 +1627,12 @@
           <a:p>
             <a:fld id="{F7021451-1387-4CA6-816F-3879F97B5CBC}" type="slidenum">
               <a:rPr lang="en-US"/>
-              <a:t>8</a:t>
             </a:fld>
             <a:endParaRPr lang="en-US"/>
           </a:p>
         </p:txBody>
       </p:sp>
     </p:spTree>
-    <p:extLst>
-      <p:ext uri="{BB962C8B-B14F-4D97-AF65-F5344CB8AC3E}">
-        <p14:creationId xmlns:p14="http://schemas.microsoft.com/office/powerpoint/2010/main" val="1024086991"/>
-      </p:ext>
-    </p:extLst>
   </p:cSld>
   <p:clrMapOvr>
     <a:masterClrMapping/>
@@ -1924,10 +1684,6 @@
           <a:bodyPr/>
           <a:lstStyle/>
           <a:p>
-            <a:r>
-              <a:rPr lang="en-US" dirty="0"/>
-              <a:t/>
-            </a:r>
             <a:endParaRPr lang="en-US" dirty="0"/>
           </a:p>
         </p:txBody>
@@ -1949,18 +1705,12 @@
           <a:p>
             <a:fld id="{F7021451-1387-4CA6-816F-3879F97B5CBC}" type="slidenum">
               <a:rPr lang="en-US"/>
-              <a:t>9</a:t>
             </a:fld>
             <a:endParaRPr lang="en-US"/>
           </a:p>
         </p:txBody>
       </p:sp>
     </p:spTree>
-    <p:extLst>
-      <p:ext uri="{BB962C8B-B14F-4D97-AF65-F5344CB8AC3E}">
-        <p14:creationId xmlns:p14="http://schemas.microsoft.com/office/powerpoint/2010/main" val="1024086991"/>
-      </p:ext>
-    </p:extLst>
   </p:cSld>
   <p:clrMapOvr>
     <a:masterClrMapping/>
@@ -1998,9 +1748,44 @@
 </p:sldLayout>
 </file>
 
+<file path=ppt/slideLayouts/slideLayout2.xml><?xml version="1.0" encoding="utf-8"?>
+<p:sldLayout xmlns:a="http://schemas.openxmlformats.org/drawingml/2006/main" xmlns:r="http://schemas.openxmlformats.org/officeDocument/2006/relationships" xmlns:p="http://schemas.openxmlformats.org/presentationml/2006/main" preserve="1">
+  <p:cSld name="DEFAULT">
+    <p:bg>
+      <p:bgRef idx="1001">
+        <a:schemeClr val="bg1"/>
+      </p:bgRef>
+    </p:bg>
+    <p:spTree>
+      <p:nvGrpSpPr>
+        <p:cNvPr id="1" name=""/>
+        <p:cNvGrpSpPr/>
+        <p:nvPr/>
+      </p:nvGrpSpPr>
+      <p:grpSpPr>
+        <a:xfrm>
+          <a:off x="0" y="0"/>
+          <a:ext cx="0" cy="0"/>
+          <a:chOff x="0" y="0"/>
+          <a:chExt cx="0" cy="0"/>
+        </a:xfrm>
+      </p:grpSpPr>
+    </p:spTree>
+  </p:cSld>
+  <p:clrMapOvr>
+    <a:masterClrMapping/>
+  </p:clrMapOvr>
+</p:sldLayout>
+</file>
+
 <file path=ppt/slideMasters/slideMaster1.xml><?xml version="1.0" encoding="utf-8"?>
 <p:sldMaster xmlns:a="http://schemas.openxmlformats.org/drawingml/2006/main" xmlns:r="http://schemas.openxmlformats.org/officeDocument/2006/relationships" xmlns:p="http://schemas.openxmlformats.org/presentationml/2006/main">
   <p:cSld>
+    <p:bg>
+      <p:bgRef idx="1001">
+        <a:schemeClr val="bg1"/>
+      </p:bgRef>
+    </p:bg>
     <p:spTree>
       <p:nvGrpSpPr>
         <p:cNvPr id="1" name=""/>
@@ -2044,7 +1829,7 @@
         <a:spcBef>
           <a:spcPct val="20000"/>
         </a:spcBef>
-        <a:buFont typeface="Arial" pitchFamily="34" charset="0"/>
+        <a:buFont typeface="Arial" panose="020B0604020202020204" pitchFamily="34" charset="0"/>
         <a:buChar char="•"/>
         <a:defRPr sz="3200" kern="1200">
           <a:solidFill>
@@ -2059,7 +1844,7 @@
         <a:spcBef>
           <a:spcPct val="20000"/>
         </a:spcBef>
-        <a:buFont typeface="Arial" pitchFamily="34" charset="0"/>
+        <a:buFont typeface="Arial" panose="020B0604020202020204" pitchFamily="34" charset="0"/>
         <a:buChar char="–"/>
         <a:defRPr sz="2800" kern="1200">
           <a:solidFill>
@@ -2074,7 +1859,7 @@
         <a:spcBef>
           <a:spcPct val="20000"/>
         </a:spcBef>
-        <a:buFont typeface="Arial" pitchFamily="34" charset="0"/>
+        <a:buFont typeface="Arial" panose="020B0604020202020204" pitchFamily="34" charset="0"/>
         <a:buChar char="•"/>
         <a:defRPr sz="2400" kern="1200">
           <a:solidFill>
@@ -2089,7 +1874,7 @@
         <a:spcBef>
           <a:spcPct val="20000"/>
         </a:spcBef>
-        <a:buFont typeface="Arial" pitchFamily="34" charset="0"/>
+        <a:buFont typeface="Arial" panose="020B0604020202020204" pitchFamily="34" charset="0"/>
         <a:buChar char="–"/>
         <a:defRPr sz="2000" kern="1200">
           <a:solidFill>
@@ -2104,7 +1889,7 @@
         <a:spcBef>
           <a:spcPct val="20000"/>
         </a:spcBef>
-        <a:buFont typeface="Arial" pitchFamily="34" charset="0"/>
+        <a:buFont typeface="Arial" panose="020B0604020202020204" pitchFamily="34" charset="0"/>
         <a:buChar char="»"/>
         <a:defRPr sz="2000" kern="1200">
           <a:solidFill>
@@ -2119,7 +1904,7 @@
         <a:spcBef>
           <a:spcPct val="20000"/>
         </a:spcBef>
-        <a:buFont typeface="Arial" pitchFamily="34" charset="0"/>
+        <a:buFont typeface="Arial" panose="020B0604020202020204" pitchFamily="34" charset="0"/>
         <a:buChar char="•"/>
         <a:defRPr sz="2000" kern="1200">
           <a:solidFill>
@@ -2134,7 +1919,7 @@
         <a:spcBef>
           <a:spcPct val="20000"/>
         </a:spcBef>
-        <a:buFont typeface="Arial" pitchFamily="34" charset="0"/>
+        <a:buFont typeface="Arial" panose="020B0604020202020204" pitchFamily="34" charset="0"/>
         <a:buChar char="•"/>
         <a:defRPr sz="2000" kern="1200">
           <a:solidFill>
@@ -2149,7 +1934,7 @@
         <a:spcBef>
           <a:spcPct val="20000"/>
         </a:spcBef>
-        <a:buFont typeface="Arial" pitchFamily="34" charset="0"/>
+        <a:buFont typeface="Arial" panose="020B0604020202020204" pitchFamily="34" charset="0"/>
         <a:buChar char="•"/>
         <a:defRPr sz="2000" kern="1200">
           <a:solidFill>
@@ -2164,7 +1949,289 @@
         <a:spcBef>
           <a:spcPct val="20000"/>
         </a:spcBef>
-        <a:buFont typeface="Arial" pitchFamily="34" charset="0"/>
+        <a:buFont typeface="Arial" panose="020B0604020202020204" pitchFamily="34" charset="0"/>
+        <a:buChar char="•"/>
+        <a:defRPr sz="2000" kern="1200">
+          <a:solidFill>
+            <a:schemeClr val="tx1"/>
+          </a:solidFill>
+          <a:latin typeface="+mn-lt"/>
+          <a:ea typeface="+mn-ea"/>
+          <a:cs typeface="+mn-cs"/>
+        </a:defRPr>
+      </a:lvl9pPr>
+    </p:bodyStyle>
+    <p:otherStyle>
+      <a:defPPr>
+        <a:defRPr lang="en-US"/>
+      </a:defPPr>
+      <a:lvl1pPr marL="0" algn="l" defTabSz="914400" rtl="0" eaLnBrk="1" latinLnBrk="0" hangingPunct="1">
+        <a:defRPr sz="1800" kern="1200">
+          <a:solidFill>
+            <a:schemeClr val="tx1"/>
+          </a:solidFill>
+          <a:latin typeface="+mn-lt"/>
+          <a:ea typeface="+mn-ea"/>
+          <a:cs typeface="+mn-cs"/>
+        </a:defRPr>
+      </a:lvl1pPr>
+      <a:lvl2pPr marL="457200" algn="l" defTabSz="914400" rtl="0" eaLnBrk="1" latinLnBrk="0" hangingPunct="1">
+        <a:defRPr sz="1800" kern="1200">
+          <a:solidFill>
+            <a:schemeClr val="tx1"/>
+          </a:solidFill>
+          <a:latin typeface="+mn-lt"/>
+          <a:ea typeface="+mn-ea"/>
+          <a:cs typeface="+mn-cs"/>
+        </a:defRPr>
+      </a:lvl2pPr>
+      <a:lvl3pPr marL="914400" algn="l" defTabSz="914400" rtl="0" eaLnBrk="1" latinLnBrk="0" hangingPunct="1">
+        <a:defRPr sz="1800" kern="1200">
+          <a:solidFill>
+            <a:schemeClr val="tx1"/>
+          </a:solidFill>
+          <a:latin typeface="+mn-lt"/>
+          <a:ea typeface="+mn-ea"/>
+          <a:cs typeface="+mn-cs"/>
+        </a:defRPr>
+      </a:lvl3pPr>
+      <a:lvl4pPr marL="1371600" algn="l" defTabSz="914400" rtl="0" eaLnBrk="1" latinLnBrk="0" hangingPunct="1">
+        <a:defRPr sz="1800" kern="1200">
+          <a:solidFill>
+            <a:schemeClr val="tx1"/>
+          </a:solidFill>
+          <a:latin typeface="+mn-lt"/>
+          <a:ea typeface="+mn-ea"/>
+          <a:cs typeface="+mn-cs"/>
+        </a:defRPr>
+      </a:lvl4pPr>
+      <a:lvl5pPr marL="1828800" algn="l" defTabSz="914400" rtl="0" eaLnBrk="1" latinLnBrk="0" hangingPunct="1">
+        <a:defRPr sz="1800" kern="1200">
+          <a:solidFill>
+            <a:schemeClr val="tx1"/>
+          </a:solidFill>
+          <a:latin typeface="+mn-lt"/>
+          <a:ea typeface="+mn-ea"/>
+          <a:cs typeface="+mn-cs"/>
+        </a:defRPr>
+      </a:lvl5pPr>
+      <a:lvl6pPr marL="2286000" algn="l" defTabSz="914400" rtl="0" eaLnBrk="1" latinLnBrk="0" hangingPunct="1">
+        <a:defRPr sz="1800" kern="1200">
+          <a:solidFill>
+            <a:schemeClr val="tx1"/>
+          </a:solidFill>
+          <a:latin typeface="+mn-lt"/>
+          <a:ea typeface="+mn-ea"/>
+          <a:cs typeface="+mn-cs"/>
+        </a:defRPr>
+      </a:lvl6pPr>
+      <a:lvl7pPr marL="2743200" algn="l" defTabSz="914400" rtl="0" eaLnBrk="1" latinLnBrk="0" hangingPunct="1">
+        <a:defRPr sz="1800" kern="1200">
+          <a:solidFill>
+            <a:schemeClr val="tx1"/>
+          </a:solidFill>
+          <a:latin typeface="+mn-lt"/>
+          <a:ea typeface="+mn-ea"/>
+          <a:cs typeface="+mn-cs"/>
+        </a:defRPr>
+      </a:lvl7pPr>
+      <a:lvl8pPr marL="3200400" algn="l" defTabSz="914400" rtl="0" eaLnBrk="1" latinLnBrk="0" hangingPunct="1">
+        <a:defRPr sz="1800" kern="1200">
+          <a:solidFill>
+            <a:schemeClr val="tx1"/>
+          </a:solidFill>
+          <a:latin typeface="+mn-lt"/>
+          <a:ea typeface="+mn-ea"/>
+          <a:cs typeface="+mn-cs"/>
+        </a:defRPr>
+      </a:lvl8pPr>
+      <a:lvl9pPr marL="3657600" algn="l" defTabSz="914400" rtl="0" eaLnBrk="1" latinLnBrk="0" hangingPunct="1">
+        <a:defRPr sz="1800" kern="1200">
+          <a:solidFill>
+            <a:schemeClr val="tx1"/>
+          </a:solidFill>
+          <a:latin typeface="+mn-lt"/>
+          <a:ea typeface="+mn-ea"/>
+          <a:cs typeface="+mn-cs"/>
+        </a:defRPr>
+      </a:lvl9pPr>
+    </p:otherStyle>
+  </p:txStyles>
+</p:sldMaster>
+</file>
+
+<file path=ppt/slideMasters/slideMaster2.xml><?xml version="1.0" encoding="utf-8"?>
+<p:sldMaster xmlns:a="http://schemas.openxmlformats.org/drawingml/2006/main" xmlns:r="http://schemas.openxmlformats.org/officeDocument/2006/relationships" xmlns:p="http://schemas.openxmlformats.org/presentationml/2006/main">
+  <p:cSld>
+    <p:bg>
+      <p:bgRef idx="1001">
+        <a:schemeClr val="bg1"/>
+      </p:bgRef>
+    </p:bg>
+    <p:spTree>
+      <p:nvGrpSpPr>
+        <p:cNvPr id="1" name=""/>
+        <p:cNvGrpSpPr/>
+        <p:nvPr/>
+      </p:nvGrpSpPr>
+      <p:grpSpPr>
+        <a:xfrm>
+          <a:off x="0" y="0"/>
+          <a:ext cx="0" cy="0"/>
+          <a:chOff x="0" y="0"/>
+          <a:chExt cx="0" cy="0"/>
+        </a:xfrm>
+      </p:grpSpPr>
+    </p:spTree>
+  </p:cSld>
+  <p:clrMap bg1="lt1" tx1="dk1" bg2="lt2" tx2="dk2" accent1="accent1" accent2="accent2" accent3="accent3" accent4="accent4" accent5="accent5" accent6="accent6" hlink="hlink" folHlink="folHlink"/>
+  <p:sldLayoutIdLst>
+    <p:sldLayoutId id="2147483651" r:id="rId1"/>
+  </p:sldLayoutIdLst>
+  <p:hf sldNum="0" hdr="0" ftr="0" dt="0"/>
+  <p:txStyles>
+    <p:titleStyle>
+      <a:lvl1pPr algn="ctr" defTabSz="914400" rtl="0" eaLnBrk="1" latinLnBrk="0" hangingPunct="1">
+        <a:spcBef>
+          <a:spcPct val="0"/>
+        </a:spcBef>
+        <a:buNone/>
+        <a:defRPr sz="4400" kern="1200">
+          <a:solidFill>
+            <a:schemeClr val="tx1"/>
+          </a:solidFill>
+          <a:latin typeface="+mj-lt"/>
+          <a:ea typeface="+mj-ea"/>
+          <a:cs typeface="+mj-cs"/>
+        </a:defRPr>
+      </a:lvl1pPr>
+    </p:titleStyle>
+    <p:bodyStyle>
+      <a:lvl1pPr marL="342900" indent="-342900" algn="l" defTabSz="914400" rtl="0" eaLnBrk="1" latinLnBrk="0" hangingPunct="1">
+        <a:spcBef>
+          <a:spcPct val="20000"/>
+        </a:spcBef>
+        <a:buFont typeface="Arial" panose="020B0604020202020204" pitchFamily="34" charset="0"/>
+        <a:buChar char="•"/>
+        <a:defRPr sz="3200" kern="1200">
+          <a:solidFill>
+            <a:schemeClr val="tx1"/>
+          </a:solidFill>
+          <a:latin typeface="+mn-lt"/>
+          <a:ea typeface="+mn-ea"/>
+          <a:cs typeface="+mn-cs"/>
+        </a:defRPr>
+      </a:lvl1pPr>
+      <a:lvl2pPr marL="742950" indent="-285750" algn="l" defTabSz="914400" rtl="0" eaLnBrk="1" latinLnBrk="0" hangingPunct="1">
+        <a:spcBef>
+          <a:spcPct val="20000"/>
+        </a:spcBef>
+        <a:buFont typeface="Arial" panose="020B0604020202020204" pitchFamily="34" charset="0"/>
+        <a:buChar char="–"/>
+        <a:defRPr sz="2800" kern="1200">
+          <a:solidFill>
+            <a:schemeClr val="tx1"/>
+          </a:solidFill>
+          <a:latin typeface="+mn-lt"/>
+          <a:ea typeface="+mn-ea"/>
+          <a:cs typeface="+mn-cs"/>
+        </a:defRPr>
+      </a:lvl2pPr>
+      <a:lvl3pPr marL="1143000" indent="-228600" algn="l" defTabSz="914400" rtl="0" eaLnBrk="1" latinLnBrk="0" hangingPunct="1">
+        <a:spcBef>
+          <a:spcPct val="20000"/>
+        </a:spcBef>
+        <a:buFont typeface="Arial" panose="020B0604020202020204" pitchFamily="34" charset="0"/>
+        <a:buChar char="•"/>
+        <a:defRPr sz="2400" kern="1200">
+          <a:solidFill>
+            <a:schemeClr val="tx1"/>
+          </a:solidFill>
+          <a:latin typeface="+mn-lt"/>
+          <a:ea typeface="+mn-ea"/>
+          <a:cs typeface="+mn-cs"/>
+        </a:defRPr>
+      </a:lvl3pPr>
+      <a:lvl4pPr marL="1600200" indent="-228600" algn="l" defTabSz="914400" rtl="0" eaLnBrk="1" latinLnBrk="0" hangingPunct="1">
+        <a:spcBef>
+          <a:spcPct val="20000"/>
+        </a:spcBef>
+        <a:buFont typeface="Arial" panose="020B0604020202020204" pitchFamily="34" charset="0"/>
+        <a:buChar char="–"/>
+        <a:defRPr sz="2000" kern="1200">
+          <a:solidFill>
+            <a:schemeClr val="tx1"/>
+          </a:solidFill>
+          <a:latin typeface="+mn-lt"/>
+          <a:ea typeface="+mn-ea"/>
+          <a:cs typeface="+mn-cs"/>
+        </a:defRPr>
+      </a:lvl4pPr>
+      <a:lvl5pPr marL="2057400" indent="-228600" algn="l" defTabSz="914400" rtl="0" eaLnBrk="1" latinLnBrk="0" hangingPunct="1">
+        <a:spcBef>
+          <a:spcPct val="20000"/>
+        </a:spcBef>
+        <a:buFont typeface="Arial" panose="020B0604020202020204" pitchFamily="34" charset="0"/>
+        <a:buChar char="»"/>
+        <a:defRPr sz="2000" kern="1200">
+          <a:solidFill>
+            <a:schemeClr val="tx1"/>
+          </a:solidFill>
+          <a:latin typeface="+mn-lt"/>
+          <a:ea typeface="+mn-ea"/>
+          <a:cs typeface="+mn-cs"/>
+        </a:defRPr>
+      </a:lvl5pPr>
+      <a:lvl6pPr marL="2514600" indent="-228600" algn="l" defTabSz="914400" rtl="0" eaLnBrk="1" latinLnBrk="0" hangingPunct="1">
+        <a:spcBef>
+          <a:spcPct val="20000"/>
+        </a:spcBef>
+        <a:buFont typeface="Arial" panose="020B0604020202020204" pitchFamily="34" charset="0"/>
+        <a:buChar char="•"/>
+        <a:defRPr sz="2000" kern="1200">
+          <a:solidFill>
+            <a:schemeClr val="tx1"/>
+          </a:solidFill>
+          <a:latin typeface="+mn-lt"/>
+          <a:ea typeface="+mn-ea"/>
+          <a:cs typeface="+mn-cs"/>
+        </a:defRPr>
+      </a:lvl6pPr>
+      <a:lvl7pPr marL="2971800" indent="-228600" algn="l" defTabSz="914400" rtl="0" eaLnBrk="1" latinLnBrk="0" hangingPunct="1">
+        <a:spcBef>
+          <a:spcPct val="20000"/>
+        </a:spcBef>
+        <a:buFont typeface="Arial" panose="020B0604020202020204" pitchFamily="34" charset="0"/>
+        <a:buChar char="•"/>
+        <a:defRPr sz="2000" kern="1200">
+          <a:solidFill>
+            <a:schemeClr val="tx1"/>
+          </a:solidFill>
+          <a:latin typeface="+mn-lt"/>
+          <a:ea typeface="+mn-ea"/>
+          <a:cs typeface="+mn-cs"/>
+        </a:defRPr>
+      </a:lvl7pPr>
+      <a:lvl8pPr marL="3429000" indent="-228600" algn="l" defTabSz="914400" rtl="0" eaLnBrk="1" latinLnBrk="0" hangingPunct="1">
+        <a:spcBef>
+          <a:spcPct val="20000"/>
+        </a:spcBef>
+        <a:buFont typeface="Arial" panose="020B0604020202020204" pitchFamily="34" charset="0"/>
+        <a:buChar char="•"/>
+        <a:defRPr sz="2000" kern="1200">
+          <a:solidFill>
+            <a:schemeClr val="tx1"/>
+          </a:solidFill>
+          <a:latin typeface="+mn-lt"/>
+          <a:ea typeface="+mn-ea"/>
+          <a:cs typeface="+mn-cs"/>
+        </a:defRPr>
+      </a:lvl8pPr>
+      <a:lvl9pPr marL="3886200" indent="-228600" algn="l" defTabSz="914400" rtl="0" eaLnBrk="1" latinLnBrk="0" hangingPunct="1">
+        <a:spcBef>
+          <a:spcPct val="20000"/>
+        </a:spcBef>
+        <a:buFont typeface="Arial" panose="020B0604020202020204" pitchFamily="34" charset="0"/>
         <a:buChar char="•"/>
         <a:defRPr sz="2000" kern="1200">
           <a:solidFill>
@@ -2277,7 +2344,7 @@
 
 <file path=ppt/slides/slide1.xml><?xml version="1.0" encoding="utf-8"?>
 <p:sld xmlns:a="http://schemas.openxmlformats.org/drawingml/2006/main" xmlns:r="http://schemas.openxmlformats.org/officeDocument/2006/relationships" xmlns:p="http://schemas.openxmlformats.org/presentationml/2006/main">
-  <p:cSld name="Slide 1">
+  <p:cSld>
     <p:bg>
       <p:bgPr>
         <a:blipFill dpi="0" rotWithShape="1">
@@ -2321,13 +2388,12 @@
             <a:avLst/>
           </a:prstGeom>
           <a:noFill/>
-          <a:ln/>
         </p:spPr>
         <p:txBody>
           <a:bodyPr wrap="square" rtlCol="0" anchor="ctr"/>
           <a:lstStyle/>
           <a:p>
-            <a:pPr algn="r" indent="0" marL="0">
+            <a:pPr marL="0" indent="0" algn="r">
               <a:buNone/>
             </a:pPr>
             <a:r>
@@ -2335,11 +2401,11 @@
                 <a:solidFill>
                   <a:srgbClr val="8A9099"/>
                 </a:solidFill>
-                <a:latin typeface="微软雅黑" pitchFamily="34" charset="0"/>
-                <a:ea typeface="微软雅黑" pitchFamily="34" charset="-122"/>
-                <a:cs typeface="微软雅黑" pitchFamily="34" charset="-120"/>
-              </a:rPr>
-              <a:t>1 / 17</a:t>
+                <a:latin typeface="微软雅黑" panose="020B0503020204020204" pitchFamily="34" charset="-122"/>
+                <a:ea typeface="微软雅黑" panose="020B0503020204020204" pitchFamily="34" charset="-122"/>
+                <a:cs typeface="微软雅黑" panose="020B0503020204020204" pitchFamily="34" charset="-120"/>
+              </a:rPr>
+              <a:t>1 / 16</a:t>
             </a:r>
             <a:endParaRPr lang="en-US" sz="1000" dirty="0"/>
           </a:p>
@@ -2360,13 +2426,12 @@
             <a:avLst/>
           </a:prstGeom>
           <a:noFill/>
-          <a:ln/>
         </p:spPr>
         <p:txBody>
           <a:bodyPr wrap="square" rtlCol="0" anchor="ctr"/>
           <a:lstStyle/>
           <a:p>
-            <a:pPr algn="ctr" indent="0" marL="0">
+            <a:pPr marL="0" indent="0" algn="ctr">
               <a:buNone/>
             </a:pPr>
             <a:r>
@@ -2374,9 +2439,9 @@
                 <a:solidFill>
                   <a:srgbClr val="1F4E9C"/>
                 </a:solidFill>
-                <a:latin typeface="微软雅黑" pitchFamily="34" charset="0"/>
-                <a:ea typeface="微软雅黑" pitchFamily="34" charset="-122"/>
-                <a:cs typeface="微软雅黑" pitchFamily="34" charset="-120"/>
+                <a:latin typeface="微软雅黑" panose="020B0503020204020204" pitchFamily="34" charset="-122"/>
+                <a:ea typeface="微软雅黑" panose="020B0503020204020204" pitchFamily="34" charset="-122"/>
+                <a:cs typeface="微软雅黑" panose="020B0503020204020204" pitchFamily="34" charset="-120"/>
               </a:rPr>
               <a:t>重邮802 数据结构代码课程</a:t>
             </a:r>
@@ -2399,13 +2464,12 @@
             <a:avLst/>
           </a:prstGeom>
           <a:noFill/>
-          <a:ln/>
         </p:spPr>
         <p:txBody>
           <a:bodyPr wrap="square" rtlCol="0" anchor="ctr"/>
           <a:lstStyle/>
           <a:p>
-            <a:pPr algn="ctr" indent="0" marL="0">
+            <a:pPr marL="0" indent="0" algn="ctr">
               <a:buNone/>
             </a:pPr>
             <a:r>
@@ -2413,9 +2477,9 @@
                 <a:solidFill>
                   <a:srgbClr val="1F2329"/>
                 </a:solidFill>
-                <a:latin typeface="微软雅黑" pitchFamily="34" charset="0"/>
-                <a:ea typeface="微软雅黑" pitchFamily="34" charset="-122"/>
-                <a:cs typeface="微软雅黑" pitchFamily="34" charset="-120"/>
+                <a:latin typeface="微软雅黑" panose="020B0503020204020204" pitchFamily="34" charset="-122"/>
+                <a:ea typeface="微软雅黑" panose="020B0503020204020204" pitchFamily="34" charset="-122"/>
+                <a:cs typeface="微软雅黑" panose="020B0503020204020204" pitchFamily="34" charset="-120"/>
               </a:rPr>
               <a:t>C语言强化阶段</a:t>
             </a:r>
@@ -2438,13 +2502,12 @@
             <a:avLst/>
           </a:prstGeom>
           <a:noFill/>
-          <a:ln/>
         </p:spPr>
         <p:txBody>
           <a:bodyPr wrap="square" rtlCol="0" anchor="ctr"/>
           <a:lstStyle/>
           <a:p>
-            <a:pPr algn="ctr" indent="0" marL="0">
+            <a:pPr marL="0" indent="0" algn="ctr">
               <a:buNone/>
             </a:pPr>
             <a:r>
@@ -2452,9 +2515,9 @@
                 <a:solidFill>
                   <a:srgbClr val="1F2329"/>
                 </a:solidFill>
-                <a:latin typeface="微软雅黑" pitchFamily="34" charset="0"/>
-                <a:ea typeface="微软雅黑" pitchFamily="34" charset="-122"/>
-                <a:cs typeface="微软雅黑" pitchFamily="34" charset="-120"/>
+                <a:latin typeface="微软雅黑" panose="020B0503020204020204" pitchFamily="34" charset="-122"/>
+                <a:ea typeface="微软雅黑" panose="020B0503020204020204" pitchFamily="34" charset="-122"/>
+                <a:cs typeface="微软雅黑" panose="020B0503020204020204" pitchFamily="34" charset="-120"/>
               </a:rPr>
               <a:t>第6节 递归与综合实战</a:t>
             </a:r>
@@ -2477,13 +2540,12 @@
             <a:avLst/>
           </a:prstGeom>
           <a:noFill/>
-          <a:ln/>
         </p:spPr>
         <p:txBody>
           <a:bodyPr wrap="square" rtlCol="0" anchor="ctr"/>
           <a:lstStyle/>
           <a:p>
-            <a:pPr algn="ctr" indent="0" marL="0">
+            <a:pPr marL="0" indent="0" algn="ctr">
               <a:buNone/>
             </a:pPr>
             <a:r>
@@ -2491,11 +2553,11 @@
                 <a:solidFill>
                   <a:srgbClr val="8A9099"/>
                 </a:solidFill>
-                <a:latin typeface="微软雅黑" pitchFamily="34" charset="0"/>
-                <a:ea typeface="微软雅黑" pitchFamily="34" charset="-122"/>
-                <a:cs typeface="微软雅黑" pitchFamily="34" charset="-120"/>
-              </a:rPr>
-              <a:t>阶段：强化 ｜ 主讲：牙膏学长 ｜ 预计50分钟 ｜ 资料答疑：伴梦研途QQ群</a:t>
+                <a:latin typeface="微软雅黑" panose="020B0503020204020204" pitchFamily="34" charset="-122"/>
+                <a:ea typeface="微软雅黑" panose="020B0503020204020204" pitchFamily="34" charset="-122"/>
+                <a:cs typeface="微软雅黑" panose="020B0503020204020204" pitchFamily="34" charset="-120"/>
+              </a:rPr>
+              <a:t>阶段：强化 ｜ 主讲：牙膏学长 ｜ 预计42分钟 ｜ 资料答疑：伴梦研途QQ群</a:t>
             </a:r>
             <a:endParaRPr lang="en-US" sz="1400" dirty="0"/>
           </a:p>
@@ -2511,7 +2573,7 @@
 
 <file path=ppt/slides/slide10.xml><?xml version="1.0" encoding="utf-8"?>
 <p:sld xmlns:a="http://schemas.openxmlformats.org/drawingml/2006/main" xmlns:r="http://schemas.openxmlformats.org/officeDocument/2006/relationships" xmlns:p="http://schemas.openxmlformats.org/presentationml/2006/main">
-  <p:cSld name="Slide 10">
+  <p:cSld>
     <p:bg>
       <p:bgPr>
         <a:blipFill dpi="0" rotWithShape="1">
@@ -2555,13 +2617,12 @@
             <a:avLst/>
           </a:prstGeom>
           <a:noFill/>
-          <a:ln/>
         </p:spPr>
         <p:txBody>
           <a:bodyPr wrap="square" rtlCol="0" anchor="ctr"/>
           <a:lstStyle/>
           <a:p>
-            <a:pPr algn="r" indent="0" marL="0">
+            <a:pPr marL="0" indent="0" algn="r">
               <a:buNone/>
             </a:pPr>
             <a:r>
@@ -2569,11 +2630,11 @@
                 <a:solidFill>
                   <a:srgbClr val="8A9099"/>
                 </a:solidFill>
-                <a:latin typeface="微软雅黑" pitchFamily="34" charset="0"/>
-                <a:ea typeface="微软雅黑" pitchFamily="34" charset="-122"/>
-                <a:cs typeface="微软雅黑" pitchFamily="34" charset="-120"/>
-              </a:rPr>
-              <a:t>10 / 17</a:t>
+                <a:latin typeface="微软雅黑" panose="020B0503020204020204" pitchFamily="34" charset="-122"/>
+                <a:ea typeface="微软雅黑" panose="020B0503020204020204" pitchFamily="34" charset="-122"/>
+                <a:cs typeface="微软雅黑" panose="020B0503020204020204" pitchFamily="34" charset="-120"/>
+              </a:rPr>
+              <a:t>10 / 16</a:t>
             </a:r>
             <a:endParaRPr lang="en-US" sz="1000" dirty="0"/>
           </a:p>
@@ -2594,13 +2655,12 @@
             <a:avLst/>
           </a:prstGeom>
           <a:noFill/>
-          <a:ln/>
         </p:spPr>
         <p:txBody>
           <a:bodyPr wrap="square" rtlCol="0" anchor="ctr"/>
           <a:lstStyle/>
           <a:p>
-            <a:pPr algn="l" indent="0" marL="0">
+            <a:pPr marL="0" indent="0" algn="l">
               <a:buNone/>
             </a:pPr>
             <a:r>
@@ -2608,11 +2668,11 @@
                 <a:solidFill>
                   <a:srgbClr val="1F4E9C"/>
                 </a:solidFill>
-                <a:latin typeface="微软雅黑" pitchFamily="34" charset="0"/>
-                <a:ea typeface="微软雅黑" pitchFamily="34" charset="-122"/>
-                <a:cs typeface="微软雅黑" pitchFamily="34" charset="-120"/>
-              </a:rPr>
-              <a:t>转向链表</a:t>
+                <a:latin typeface="微软雅黑" panose="020B0503020204020204" pitchFamily="34" charset="-122"/>
+                <a:ea typeface="微软雅黑" panose="020B0503020204020204" pitchFamily="34" charset="-122"/>
+                <a:cs typeface="微软雅黑" panose="020B0503020204020204" pitchFamily="34" charset="-120"/>
+              </a:rPr>
+              <a:t>造、串、走、还</a:t>
             </a:r>
             <a:endParaRPr lang="en-US" sz="1400" dirty="0"/>
           </a:p>
@@ -2633,13 +2693,12 @@
             <a:avLst/>
           </a:prstGeom>
           <a:noFill/>
-          <a:ln/>
         </p:spPr>
         <p:txBody>
           <a:bodyPr wrap="square" rtlCol="0" anchor="ctr"/>
           <a:lstStyle/>
           <a:p>
-            <a:pPr algn="l" indent="0" marL="0">
+            <a:pPr marL="0" indent="0" algn="l">
               <a:buNone/>
             </a:pPr>
             <a:r>
@@ -2647,11 +2706,11 @@
                 <a:solidFill>
                   <a:srgbClr val="1F2329"/>
                 </a:solidFill>
-                <a:latin typeface="微软雅黑" pitchFamily="34" charset="0"/>
-                <a:ea typeface="微软雅黑" pitchFamily="34" charset="-122"/>
-                <a:cs typeface="微软雅黑" pitchFamily="34" charset="-120"/>
-              </a:rPr>
-              <a:t>顺序表的短板：格子必须连成一片</a:t>
+                <a:latin typeface="微软雅黑" panose="020B0503020204020204" pitchFamily="34" charset="-122"/>
+                <a:ea typeface="微软雅黑" panose="020B0503020204020204" pitchFamily="34" charset="-122"/>
+                <a:cs typeface="微软雅黑" panose="020B0503020204020204" pitchFamily="34" charset="-120"/>
+              </a:rPr>
+              <a:t>malloc造结构体，箭头串起来，指针走一遍</a:t>
             </a:r>
             <a:endParaRPr lang="en-US" sz="2800" dirty="0"/>
           </a:p>
@@ -2659,169 +2718,280 @@
       </p:sp>
       <p:sp>
         <p:nvSpPr>
-          <p:cNvPr id="5" name="Text 3"/>
-          <p:cNvSpPr/>
-          <p:nvPr/>
-        </p:nvSpPr>
-        <p:spPr>
-          <a:xfrm>
-            <a:off x="896112" y="2395728"/>
-            <a:ext cx="10454335" cy="397764"/>
-          </a:xfrm>
-          <a:prstGeom prst="rect">
-            <a:avLst/>
-          </a:prstGeom>
-          <a:noFill/>
-          <a:ln/>
+          <p:cNvPr id="5" name="Shape 3"/>
+          <p:cNvSpPr/>
+          <p:nvPr/>
+        </p:nvSpPr>
+        <p:spPr>
+          <a:xfrm>
+            <a:off x="822960" y="2395728"/>
+            <a:ext cx="10545775" cy="1450737"/>
+          </a:xfrm>
+          <a:prstGeom prst="rect">
+            <a:avLst/>
+          </a:prstGeom>
+          <a:solidFill>
+            <a:srgbClr val="F7F9FC"/>
+          </a:solidFill>
+        </p:spPr>
+      </p:sp>
+      <p:sp>
+        <p:nvSpPr>
+          <p:cNvPr id="6" name="Shape 4"/>
+          <p:cNvSpPr/>
+          <p:nvPr/>
+        </p:nvSpPr>
+        <p:spPr>
+          <a:xfrm>
+            <a:off x="822960" y="2395728"/>
+            <a:ext cx="50292" cy="1450737"/>
+          </a:xfrm>
+          <a:prstGeom prst="rect">
+            <a:avLst/>
+          </a:prstGeom>
+          <a:solidFill>
+            <a:srgbClr val="1F4E9C"/>
+          </a:solidFill>
+        </p:spPr>
+      </p:sp>
+      <p:sp>
+        <p:nvSpPr>
+          <p:cNvPr id="7" name="Text 5"/>
+          <p:cNvSpPr/>
+          <p:nvPr/>
+        </p:nvSpPr>
+        <p:spPr>
+          <a:xfrm>
+            <a:off x="1078992" y="2505456"/>
+            <a:ext cx="10033711" cy="1231281"/>
+          </a:xfrm>
+          <a:prstGeom prst="rect">
+            <a:avLst/>
+          </a:prstGeom>
+          <a:noFill/>
         </p:spPr>
         <p:txBody>
           <a:bodyPr wrap="square" rtlCol="0" anchor="t"/>
           <a:lstStyle/>
           <a:p>
-            <a:pPr algn="l" indent="0" marL="0">
+            <a:pPr marL="0" indent="0" algn="l">
+              <a:lnSpc>
+                <a:spcPct val="125000"/>
+              </a:lnSpc>
+              <a:buNone/>
+            </a:pPr>
+            <a:r>
+              <a:rPr lang="en-US" sz="1300" dirty="0">
+                <a:solidFill>
+                  <a:srgbClr val="1F2329"/>
+                </a:solidFill>
+                <a:latin typeface="Consolas" panose="020B0609020204030204" pitchFamily="34" charset="0"/>
+                <a:ea typeface="Consolas" panose="020B0609020204030204" pitchFamily="34" charset="-122"/>
+                <a:cs typeface="Consolas" panose="020B0609020204030204" pitchFamily="34" charset="-120"/>
+              </a:rPr>
+              <a:t>struct Node *p = (struct Node *)malloc(sizeof(struct Node));
+if (p == NULL) return 1;
+p-&gt;data = 10;
+p-&gt;next = q;        // 串：前一个的next存后一个的地址
+</a:t>
+            </a:r>
+            <a:endParaRPr lang="en-US" sz="1300" dirty="0"/>
+          </a:p>
+        </p:txBody>
+      </p:sp>
+      <p:sp>
+        <p:nvSpPr>
+          <p:cNvPr id="8" name="Text 6"/>
+          <p:cNvSpPr/>
+          <p:nvPr/>
+        </p:nvSpPr>
+        <p:spPr>
+          <a:xfrm>
+            <a:off x="896112" y="4047633"/>
+            <a:ext cx="10454335" cy="378714"/>
+          </a:xfrm>
+          <a:prstGeom prst="rect">
+            <a:avLst/>
+          </a:prstGeom>
+          <a:noFill/>
+        </p:spPr>
+        <p:txBody>
+          <a:bodyPr wrap="square" rtlCol="0" anchor="t"/>
+          <a:lstStyle/>
+          <a:p>
+            <a:pPr marL="0" indent="0" algn="l">
               <a:lnSpc>
                 <a:spcPct val="115000"/>
               </a:lnSpc>
               <a:buNone/>
             </a:pPr>
             <a:r>
-              <a:rPr lang="en-US" sz="1800" b="1" dirty="0">
+              <a:rPr lang="en-US" sz="1700" b="1" dirty="0">
                 <a:solidFill>
                   <a:srgbClr val="1F4E9C"/>
                 </a:solidFill>
-                <a:latin typeface="微软雅黑" pitchFamily="34" charset="0"/>
-                <a:ea typeface="微软雅黑" pitchFamily="34" charset="-122"/>
-                <a:cs typeface="微软雅黑" pitchFamily="34" charset="-120"/>
+                <a:latin typeface="微软雅黑" panose="020B0503020204020204" pitchFamily="34" charset="-122"/>
+                <a:ea typeface="微软雅黑" panose="020B0503020204020204" pitchFamily="34" charset="-122"/>
+                <a:cs typeface="微软雅黑" panose="020B0503020204020204" pitchFamily="34" charset="-120"/>
               </a:rPr>
               <a:t>•  </a:t>
             </a:r>
-            <a:pPr algn="l" indent="0" marL="0">
+            <a:r>
+              <a:rPr lang="en-US" sz="1700" dirty="0">
+                <a:solidFill>
+                  <a:srgbClr val="000000"/>
+                </a:solidFill>
+              </a:rPr>
+              <a:t>住堆上：数量运行时才知道，而且要活得比函数长（上节课的选型）</a:t>
+            </a:r>
+            <a:endParaRPr lang="en-US" sz="1700" dirty="0"/>
+          </a:p>
+        </p:txBody>
+      </p:sp>
+      <p:sp>
+        <p:nvSpPr>
+          <p:cNvPr id="9" name="Text 7"/>
+          <p:cNvSpPr/>
+          <p:nvPr/>
+        </p:nvSpPr>
+        <p:spPr>
+          <a:xfrm>
+            <a:off x="896112" y="4499499"/>
+            <a:ext cx="10454335" cy="378714"/>
+          </a:xfrm>
+          <a:prstGeom prst="rect">
+            <a:avLst/>
+          </a:prstGeom>
+          <a:noFill/>
+        </p:spPr>
+        <p:txBody>
+          <a:bodyPr wrap="square" rtlCol="0" anchor="t"/>
+          <a:lstStyle/>
+          <a:p>
+            <a:pPr marL="0" indent="0" algn="l">
               <a:lnSpc>
                 <a:spcPct val="115000"/>
               </a:lnSpc>
               <a:buNone/>
             </a:pPr>
             <a:r>
-              <a:rPr lang="en-US" sz="1800" dirty="0">
+              <a:rPr lang="en-US" sz="1700" b="1" dirty="0">
+                <a:solidFill>
+                  <a:srgbClr val="1F4E9C"/>
+                </a:solidFill>
+                <a:latin typeface="微软雅黑" panose="020B0503020204020204" pitchFamily="34" charset="-122"/>
+                <a:ea typeface="微软雅黑" panose="020B0503020204020204" pitchFamily="34" charset="-122"/>
+                <a:cs typeface="微软雅黑" panose="020B0503020204020204" pitchFamily="34" charset="-120"/>
+              </a:rPr>
+              <a:t>•  </a:t>
+            </a:r>
+            <a:r>
+              <a:rPr lang="en-US" sz="1700" dirty="0">
                 <a:solidFill>
                   <a:srgbClr val="000000"/>
                 </a:solidFill>
               </a:rPr>
-              <a:t>数组开多大写死，满了就装不下；中间插入还得搬一堆元素</a:t>
-            </a:r>
-            <a:endParaRPr lang="en-US" sz="1800" dirty="0"/>
-          </a:p>
-        </p:txBody>
-      </p:sp>
-      <p:sp>
-        <p:nvSpPr>
-          <p:cNvPr id="6" name="Text 4"/>
-          <p:cNvSpPr/>
-          <p:nvPr/>
-        </p:nvSpPr>
-        <p:spPr>
-          <a:xfrm>
-            <a:off x="896112" y="2866644"/>
-            <a:ext cx="10454335" cy="397764"/>
-          </a:xfrm>
-          <a:prstGeom prst="rect">
-            <a:avLst/>
-          </a:prstGeom>
-          <a:noFill/>
-          <a:ln/>
+              <a:t>next先置NULL：malloc不清零，垃圾地址会让遍历跑飞</a:t>
+            </a:r>
+            <a:endParaRPr lang="en-US" sz="1700" dirty="0"/>
+          </a:p>
+        </p:txBody>
+      </p:sp>
+      <p:sp>
+        <p:nvSpPr>
+          <p:cNvPr id="10" name="Text 8"/>
+          <p:cNvSpPr/>
+          <p:nvPr/>
+        </p:nvSpPr>
+        <p:spPr>
+          <a:xfrm>
+            <a:off x="896112" y="4951365"/>
+            <a:ext cx="10454335" cy="378714"/>
+          </a:xfrm>
+          <a:prstGeom prst="rect">
+            <a:avLst/>
+          </a:prstGeom>
+          <a:noFill/>
         </p:spPr>
         <p:txBody>
           <a:bodyPr wrap="square" rtlCol="0" anchor="t"/>
           <a:lstStyle/>
           <a:p>
-            <a:pPr algn="l" indent="0" marL="0">
+            <a:pPr marL="0" indent="0" algn="l">
               <a:lnSpc>
                 <a:spcPct val="115000"/>
               </a:lnSpc>
               <a:buNone/>
             </a:pPr>
             <a:r>
-              <a:rPr lang="en-US" sz="1800" b="1" dirty="0">
+              <a:rPr lang="en-US" sz="1700" b="1" dirty="0">
                 <a:solidFill>
                   <a:srgbClr val="1F4E9C"/>
                 </a:solidFill>
-                <a:latin typeface="微软雅黑" pitchFamily="34" charset="0"/>
-                <a:ea typeface="微软雅黑" pitchFamily="34" charset="-122"/>
-                <a:cs typeface="微软雅黑" pitchFamily="34" charset="-120"/>
+                <a:latin typeface="微软雅黑" panose="020B0503020204020204" pitchFamily="34" charset="-122"/>
+                <a:ea typeface="微软雅黑" panose="020B0503020204020204" pitchFamily="34" charset="-122"/>
+                <a:cs typeface="微软雅黑" panose="020B0503020204020204" pitchFamily="34" charset="-120"/>
               </a:rPr>
               <a:t>•  </a:t>
             </a:r>
-            <a:pPr algn="l" indent="0" marL="0">
+            <a:r>
+              <a:rPr lang="en-US" sz="1700" dirty="0">
+                <a:solidFill>
+                  <a:srgbClr val="000000"/>
+                </a:solidFill>
+              </a:rPr>
+              <a:t>走一遍：while(p != NULL)，打印p-&gt;data，再p = p-&gt;next</a:t>
+            </a:r>
+            <a:endParaRPr lang="en-US" sz="1700" dirty="0"/>
+          </a:p>
+        </p:txBody>
+      </p:sp>
+      <p:sp>
+        <p:nvSpPr>
+          <p:cNvPr id="11" name="Text 9"/>
+          <p:cNvSpPr/>
+          <p:nvPr/>
+        </p:nvSpPr>
+        <p:spPr>
+          <a:xfrm>
+            <a:off x="896112" y="5403231"/>
+            <a:ext cx="10454335" cy="378714"/>
+          </a:xfrm>
+          <a:prstGeom prst="rect">
+            <a:avLst/>
+          </a:prstGeom>
+          <a:noFill/>
+        </p:spPr>
+        <p:txBody>
+          <a:bodyPr wrap="square" rtlCol="0" anchor="t"/>
+          <a:lstStyle/>
+          <a:p>
+            <a:pPr marL="0" indent="0" algn="l">
               <a:lnSpc>
                 <a:spcPct val="115000"/>
               </a:lnSpc>
               <a:buNone/>
             </a:pPr>
             <a:r>
-              <a:rPr lang="en-US" sz="1800" dirty="0">
+              <a:rPr lang="en-US" sz="1700" b="1" dirty="0">
+                <a:solidFill>
+                  <a:srgbClr val="1F4E9C"/>
+                </a:solidFill>
+                <a:latin typeface="微软雅黑" panose="020B0503020204020204" pitchFamily="34" charset="-122"/>
+                <a:ea typeface="微软雅黑" panose="020B0503020204020204" pitchFamily="34" charset="-122"/>
+                <a:cs typeface="微软雅黑" panose="020B0503020204020204" pitchFamily="34" charset="-120"/>
+              </a:rPr>
+              <a:t>•  </a:t>
+            </a:r>
+            <a:r>
+              <a:rPr lang="en-US" sz="1700" dirty="0">
                 <a:solidFill>
                   <a:srgbClr val="000000"/>
                 </a:solidFill>
               </a:rPr>
-              <a:t>换个思路：结点散着住，用指针把它们串起来</a:t>
-            </a:r>
-            <a:endParaRPr lang="en-US" sz="1800" dirty="0"/>
-          </a:p>
-        </p:txBody>
-      </p:sp>
-      <p:sp>
-        <p:nvSpPr>
-          <p:cNvPr id="7" name="Text 5"/>
-          <p:cNvSpPr/>
-          <p:nvPr/>
-        </p:nvSpPr>
-        <p:spPr>
-          <a:xfrm>
-            <a:off x="896112" y="3337560"/>
-            <a:ext cx="10454335" cy="397764"/>
-          </a:xfrm>
-          <a:prstGeom prst="rect">
-            <a:avLst/>
-          </a:prstGeom>
-          <a:noFill/>
-          <a:ln/>
-        </p:spPr>
-        <p:txBody>
-          <a:bodyPr wrap="square" rtlCol="0" anchor="t"/>
-          <a:lstStyle/>
-          <a:p>
-            <a:pPr algn="l" indent="0" marL="0">
-              <a:lnSpc>
-                <a:spcPct val="115000"/>
-              </a:lnSpc>
-              <a:buNone/>
-            </a:pPr>
-            <a:r>
-              <a:rPr lang="en-US" sz="1800" b="1" dirty="0">
-                <a:solidFill>
-                  <a:srgbClr val="1F4E9C"/>
-                </a:solidFill>
-                <a:latin typeface="微软雅黑" pitchFamily="34" charset="0"/>
-                <a:ea typeface="微软雅黑" pitchFamily="34" charset="-122"/>
-                <a:cs typeface="微软雅黑" pitchFamily="34" charset="-120"/>
-              </a:rPr>
-              <a:t>•  </a:t>
-            </a:r>
-            <a:pPr algn="l" indent="0" marL="0">
-              <a:lnSpc>
-                <a:spcPct val="115000"/>
-              </a:lnSpc>
-              <a:buNone/>
-            </a:pPr>
-            <a:r>
-              <a:rPr lang="en-US" sz="1800" dirty="0">
-                <a:solidFill>
-                  <a:srgbClr val="000000"/>
-                </a:solidFill>
-              </a:rPr>
-              <a:t>这就是链表：数据结构课的主角，今天先把它从零造出来</a:t>
-            </a:r>
-            <a:endParaRPr lang="en-US" sz="1800" dirty="0"/>
+              <a:t>收尾三块都free再置NULL，账才平</a:t>
+            </a:r>
+            <a:endParaRPr lang="en-US" sz="1700" dirty="0"/>
           </a:p>
         </p:txBody>
       </p:sp>
@@ -2835,7 +3005,7 @@
 
 <file path=ppt/slides/slide11.xml><?xml version="1.0" encoding="utf-8"?>
 <p:sld xmlns:a="http://schemas.openxmlformats.org/drawingml/2006/main" xmlns:r="http://schemas.openxmlformats.org/officeDocument/2006/relationships" xmlns:p="http://schemas.openxmlformats.org/presentationml/2006/main">
-  <p:cSld name="Slide 11">
+  <p:cSld>
     <p:bg>
       <p:bgPr>
         <a:blipFill dpi="0" rotWithShape="1">
@@ -2879,13 +3049,12 @@
             <a:avLst/>
           </a:prstGeom>
           <a:noFill/>
-          <a:ln/>
         </p:spPr>
         <p:txBody>
           <a:bodyPr wrap="square" rtlCol="0" anchor="ctr"/>
           <a:lstStyle/>
           <a:p>
-            <a:pPr algn="r" indent="0" marL="0">
+            <a:pPr marL="0" indent="0" algn="r">
               <a:buNone/>
             </a:pPr>
             <a:r>
@@ -2893,345 +3062,13 @@
                 <a:solidFill>
                   <a:srgbClr val="8A9099"/>
                 </a:solidFill>
-                <a:latin typeface="微软雅黑" pitchFamily="34" charset="0"/>
-                <a:ea typeface="微软雅黑" pitchFamily="34" charset="-122"/>
-                <a:cs typeface="微软雅黑" pitchFamily="34" charset="-120"/>
-              </a:rPr>
-              <a:t>11 / 17</a:t>
+                <a:latin typeface="微软雅黑" panose="020B0503020204020204" pitchFamily="34" charset="-122"/>
+                <a:ea typeface="微软雅黑" panose="020B0503020204020204" pitchFamily="34" charset="-122"/>
+                <a:cs typeface="微软雅黑" panose="020B0503020204020204" pitchFamily="34" charset="-120"/>
+              </a:rPr>
+              <a:t>11 / 16</a:t>
             </a:r>
             <a:endParaRPr lang="en-US" sz="1000" dirty="0"/>
-          </a:p>
-        </p:txBody>
-      </p:sp>
-      <p:sp>
-        <p:nvSpPr>
-          <p:cNvPr id="3" name="Text 1"/>
-          <p:cNvSpPr/>
-          <p:nvPr/>
-        </p:nvSpPr>
-        <p:spPr>
-          <a:xfrm>
-            <a:off x="822960" y="960120"/>
-            <a:ext cx="10545775" cy="365760"/>
-          </a:xfrm>
-          <a:prstGeom prst="rect">
-            <a:avLst/>
-          </a:prstGeom>
-          <a:noFill/>
-          <a:ln/>
-        </p:spPr>
-        <p:txBody>
-          <a:bodyPr wrap="square" rtlCol="0" anchor="ctr"/>
-          <a:lstStyle/>
-          <a:p>
-            <a:pPr algn="l" indent="0" marL="0">
-              <a:buNone/>
-            </a:pPr>
-            <a:r>
-              <a:rPr lang="en-US" sz="1400" b="1" dirty="0">
-                <a:solidFill>
-                  <a:srgbClr val="1F4E9C"/>
-                </a:solidFill>
-                <a:latin typeface="微软雅黑" pitchFamily="34" charset="0"/>
-                <a:ea typeface="微软雅黑" pitchFamily="34" charset="-122"/>
-                <a:cs typeface="微软雅黑" pitchFamily="34" charset="-120"/>
-              </a:rPr>
-              <a:t>链表结点</a:t>
-            </a:r>
-            <a:endParaRPr lang="en-US" sz="1400" dirty="0"/>
-          </a:p>
-        </p:txBody>
-      </p:sp>
-      <p:sp>
-        <p:nvSpPr>
-          <p:cNvPr id="4" name="Text 2"/>
-          <p:cNvSpPr/>
-          <p:nvPr/>
-        </p:nvSpPr>
-        <p:spPr>
-          <a:xfrm>
-            <a:off x="822960" y="1344168"/>
-            <a:ext cx="10545775" cy="731520"/>
-          </a:xfrm>
-          <a:prstGeom prst="rect">
-            <a:avLst/>
-          </a:prstGeom>
-          <a:noFill/>
-          <a:ln/>
-        </p:spPr>
-        <p:txBody>
-          <a:bodyPr wrap="square" rtlCol="0" anchor="ctr"/>
-          <a:lstStyle/>
-          <a:p>
-            <a:pPr algn="l" indent="0" marL="0">
-              <a:buNone/>
-            </a:pPr>
-            <a:r>
-              <a:rPr lang="en-US" sz="2800" b="1" dirty="0">
-                <a:solidFill>
-                  <a:srgbClr val="1F2329"/>
-                </a:solidFill>
-                <a:latin typeface="微软雅黑" pitchFamily="34" charset="0"/>
-                <a:ea typeface="微软雅黑" pitchFamily="34" charset="-122"/>
-                <a:cs typeface="微软雅黑" pitchFamily="34" charset="-120"/>
-              </a:rPr>
-              <a:t>结点定义：数据加一个指向同类结点的指针</a:t>
-            </a:r>
-            <a:endParaRPr lang="en-US" sz="2800" dirty="0"/>
-          </a:p>
-        </p:txBody>
-      </p:sp>
-      <p:sp>
-        <p:nvSpPr>
-          <p:cNvPr id="5" name="Shape 3"/>
-          <p:cNvSpPr/>
-          <p:nvPr/>
-        </p:nvSpPr>
-        <p:spPr>
-          <a:xfrm>
-            <a:off x="822960" y="2395728"/>
-            <a:ext cx="10545775" cy="1508760"/>
-          </a:xfrm>
-          <a:prstGeom prst="rect">
-            <a:avLst/>
-          </a:prstGeom>
-          <a:solidFill>
-            <a:srgbClr val="F7F9FC"/>
-          </a:solidFill>
-          <a:ln/>
-        </p:spPr>
-      </p:sp>
-      <p:sp>
-        <p:nvSpPr>
-          <p:cNvPr id="6" name="Shape 4"/>
-          <p:cNvSpPr/>
-          <p:nvPr/>
-        </p:nvSpPr>
-        <p:spPr>
-          <a:xfrm>
-            <a:off x="822960" y="2395728"/>
-            <a:ext cx="50292" cy="1508760"/>
-          </a:xfrm>
-          <a:prstGeom prst="rect">
-            <a:avLst/>
-          </a:prstGeom>
-          <a:solidFill>
-            <a:srgbClr val="1F4E9C"/>
-          </a:solidFill>
-          <a:ln/>
-        </p:spPr>
-      </p:sp>
-      <p:sp>
-        <p:nvSpPr>
-          <p:cNvPr id="7" name="Text 5"/>
-          <p:cNvSpPr/>
-          <p:nvPr/>
-        </p:nvSpPr>
-        <p:spPr>
-          <a:xfrm>
-            <a:off x="1078992" y="2505456"/>
-            <a:ext cx="10033711" cy="1289304"/>
-          </a:xfrm>
-          <a:prstGeom prst="rect">
-            <a:avLst/>
-          </a:prstGeom>
-          <a:noFill/>
-          <a:ln/>
-        </p:spPr>
-        <p:txBody>
-          <a:bodyPr wrap="square" rtlCol="0" anchor="t"/>
-          <a:lstStyle/>
-          <a:p>
-            <a:pPr algn="l" indent="0" marL="0">
-              <a:lnSpc>
-                <a:spcPct val="125000"/>
-              </a:lnSpc>
-              <a:buNone/>
-            </a:pPr>
-            <a:r>
-              <a:rPr lang="en-US" sz="1400" dirty="0">
-                <a:solidFill>
-                  <a:srgbClr val="1F2329"/>
-                </a:solidFill>
-                <a:latin typeface="Consolas" pitchFamily="34" charset="0"/>
-                <a:ea typeface="Consolas" pitchFamily="34" charset="-122"/>
-                <a:cs typeface="Consolas" pitchFamily="34" charset="-120"/>
-              </a:rPr>
-              <a:t>struct Node {
-    int data;              // 数据
-    struct Node *next;     // 指向下一个结点
-};
-</a:t>
-            </a:r>
-            <a:endParaRPr lang="en-US" sz="1400" dirty="0"/>
-          </a:p>
-        </p:txBody>
-      </p:sp>
-      <p:sp>
-        <p:nvSpPr>
-          <p:cNvPr id="8" name="Text 6"/>
-          <p:cNvSpPr/>
-          <p:nvPr/>
-        </p:nvSpPr>
-        <p:spPr>
-          <a:xfrm>
-            <a:off x="896112" y="4105656"/>
-            <a:ext cx="10454335" cy="397764"/>
-          </a:xfrm>
-          <a:prstGeom prst="rect">
-            <a:avLst/>
-          </a:prstGeom>
-          <a:noFill/>
-          <a:ln/>
-        </p:spPr>
-        <p:txBody>
-          <a:bodyPr wrap="square" rtlCol="0" anchor="t"/>
-          <a:lstStyle/>
-          <a:p>
-            <a:pPr algn="l" indent="0" marL="0">
-              <a:lnSpc>
-                <a:spcPct val="115000"/>
-              </a:lnSpc>
-              <a:buNone/>
-            </a:pPr>
-            <a:r>
-              <a:rPr lang="en-US" sz="1800" b="1" dirty="0">
-                <a:solidFill>
-                  <a:srgbClr val="1F4E9C"/>
-                </a:solidFill>
-                <a:latin typeface="微软雅黑" pitchFamily="34" charset="0"/>
-                <a:ea typeface="微软雅黑" pitchFamily="34" charset="-122"/>
-                <a:cs typeface="微软雅黑" pitchFamily="34" charset="-120"/>
-              </a:rPr>
-              <a:t>•  </a:t>
-            </a:r>
-            <a:pPr algn="l" indent="0" marL="0">
-              <a:lnSpc>
-                <a:spcPct val="115000"/>
-              </a:lnSpc>
-              <a:buNone/>
-            </a:pPr>
-            <a:r>
-              <a:rPr lang="en-US" sz="1800" dirty="0">
-                <a:solidFill>
-                  <a:srgbClr val="000000"/>
-                </a:solidFill>
-              </a:rPr>
-              <a:t>成员next的类型是struct Node *：指向自己的同类，这叫自引用</a:t>
-            </a:r>
-            <a:endParaRPr lang="en-US" sz="1800" dirty="0"/>
-          </a:p>
-        </p:txBody>
-      </p:sp>
-      <p:sp>
-        <p:nvSpPr>
-          <p:cNvPr id="9" name="Text 7"/>
-          <p:cNvSpPr/>
-          <p:nvPr/>
-        </p:nvSpPr>
-        <p:spPr>
-          <a:xfrm>
-            <a:off x="896112" y="4576572"/>
-            <a:ext cx="10454335" cy="397764"/>
-          </a:xfrm>
-          <a:prstGeom prst="rect">
-            <a:avLst/>
-          </a:prstGeom>
-          <a:noFill/>
-          <a:ln/>
-        </p:spPr>
-        <p:txBody>
-          <a:bodyPr wrap="square" rtlCol="0" anchor="t"/>
-          <a:lstStyle/>
-          <a:p>
-            <a:pPr algn="l" indent="0" marL="0">
-              <a:lnSpc>
-                <a:spcPct val="115000"/>
-              </a:lnSpc>
-              <a:buNone/>
-            </a:pPr>
-            <a:r>
-              <a:rPr lang="en-US" sz="1800" b="1" dirty="0">
-                <a:solidFill>
-                  <a:srgbClr val="1F4E9C"/>
-                </a:solidFill>
-                <a:latin typeface="微软雅黑" pitchFamily="34" charset="0"/>
-                <a:ea typeface="微软雅黑" pitchFamily="34" charset="-122"/>
-                <a:cs typeface="微软雅黑" pitchFamily="34" charset="-120"/>
-              </a:rPr>
-              <a:t>•  </a:t>
-            </a:r>
-            <a:pPr algn="l" indent="0" marL="0">
-              <a:lnSpc>
-                <a:spcPct val="115000"/>
-              </a:lnSpc>
-              <a:buNone/>
-            </a:pPr>
-            <a:r>
-              <a:rPr lang="en-US" sz="1800" dirty="0">
-                <a:solidFill>
-                  <a:srgbClr val="000000"/>
-                </a:solidFill>
-              </a:rPr>
-              <a:t>定义里写全struct Node，不能省，此刻别名还不存在</a:t>
-            </a:r>
-            <a:endParaRPr lang="en-US" sz="1800" dirty="0"/>
-          </a:p>
-        </p:txBody>
-      </p:sp>
-      <p:sp>
-        <p:nvSpPr>
-          <p:cNvPr id="10" name="Text 8"/>
-          <p:cNvSpPr/>
-          <p:nvPr/>
-        </p:nvSpPr>
-        <p:spPr>
-          <a:xfrm>
-            <a:off x="896112" y="5047488"/>
-            <a:ext cx="10454335" cy="397764"/>
-          </a:xfrm>
-          <a:prstGeom prst="rect">
-            <a:avLst/>
-          </a:prstGeom>
-          <a:noFill/>
-          <a:ln/>
-        </p:spPr>
-        <p:txBody>
-          <a:bodyPr wrap="square" rtlCol="0" anchor="t"/>
-          <a:lstStyle/>
-          <a:p>
-            <a:pPr algn="l" indent="0" marL="0">
-              <a:lnSpc>
-                <a:spcPct val="115000"/>
-              </a:lnSpc>
-              <a:buNone/>
-            </a:pPr>
-            <a:r>
-              <a:rPr lang="en-US" sz="1800" b="1" dirty="0">
-                <a:solidFill>
-                  <a:srgbClr val="1F4E9C"/>
-                </a:solidFill>
-                <a:latin typeface="微软雅黑" pitchFamily="34" charset="0"/>
-                <a:ea typeface="微软雅黑" pitchFamily="34" charset="-122"/>
-                <a:cs typeface="微软雅黑" pitchFamily="34" charset="-120"/>
-              </a:rPr>
-              <a:t>•  </a:t>
-            </a:r>
-            <a:pPr algn="l" indent="0" marL="0">
-              <a:lnSpc>
-                <a:spcPct val="115000"/>
-              </a:lnSpc>
-              <a:buNone/>
-            </a:pPr>
-            <a:r>
-              <a:rPr lang="en-US" sz="1800" dirty="0">
-                <a:solidFill>
-                  <a:srgbClr val="000000"/>
-                </a:solidFill>
-              </a:rPr>
-              <a:t>一个结点的样子：一格数据，一把指向下一个结点的钥匙</a:t>
-            </a:r>
-            <a:endParaRPr lang="en-US" sz="1800" dirty="0"/>
           </a:p>
         </p:txBody>
       </p:sp>
@@ -3245,7 +3082,7 @@
 
 <file path=ppt/slides/slide12.xml><?xml version="1.0" encoding="utf-8"?>
 <p:sld xmlns:a="http://schemas.openxmlformats.org/drawingml/2006/main" xmlns:r="http://schemas.openxmlformats.org/officeDocument/2006/relationships" xmlns:p="http://schemas.openxmlformats.org/presentationml/2006/main">
-  <p:cSld name="Slide 12">
+  <p:cSld>
     <p:bg>
       <p:bgPr>
         <a:blipFill dpi="0" rotWithShape="1">
@@ -3289,13 +3126,12 @@
             <a:avLst/>
           </a:prstGeom>
           <a:noFill/>
-          <a:ln/>
         </p:spPr>
         <p:txBody>
           <a:bodyPr wrap="square" rtlCol="0" anchor="ctr"/>
           <a:lstStyle/>
           <a:p>
-            <a:pPr algn="r" indent="0" marL="0">
+            <a:pPr marL="0" indent="0" algn="r">
               <a:buNone/>
             </a:pPr>
             <a:r>
@@ -3303,11 +3139,11 @@
                 <a:solidFill>
                   <a:srgbClr val="8A9099"/>
                 </a:solidFill>
-                <a:latin typeface="微软雅黑" pitchFamily="34" charset="0"/>
-                <a:ea typeface="微软雅黑" pitchFamily="34" charset="-122"/>
-                <a:cs typeface="微软雅黑" pitchFamily="34" charset="-120"/>
-              </a:rPr>
-              <a:t>12 / 17</a:t>
+                <a:latin typeface="微软雅黑" panose="020B0503020204020204" pitchFamily="34" charset="-122"/>
+                <a:ea typeface="微软雅黑" panose="020B0503020204020204" pitchFamily="34" charset="-122"/>
+                <a:cs typeface="微软雅黑" panose="020B0503020204020204" pitchFamily="34" charset="-120"/>
+              </a:rPr>
+              <a:t>12 / 16</a:t>
             </a:r>
             <a:endParaRPr lang="en-US" sz="1000" dirty="0"/>
           </a:p>
@@ -3328,13 +3164,12 @@
             <a:avLst/>
           </a:prstGeom>
           <a:noFill/>
-          <a:ln/>
         </p:spPr>
         <p:txBody>
           <a:bodyPr wrap="square" rtlCol="0" anchor="ctr"/>
           <a:lstStyle/>
           <a:p>
-            <a:pPr algn="l" indent="0" marL="0">
+            <a:pPr marL="0" indent="0" algn="l">
               <a:buNone/>
             </a:pPr>
             <a:r>
@@ -3342,11 +3177,11 @@
                 <a:solidFill>
                   <a:srgbClr val="1F4E9C"/>
                 </a:solidFill>
-                <a:latin typeface="微软雅黑" pitchFamily="34" charset="0"/>
-                <a:ea typeface="微软雅黑" pitchFamily="34" charset="-122"/>
-                <a:cs typeface="微软雅黑" pitchFamily="34" charset="-120"/>
-              </a:rPr>
-              <a:t>造链表</a:t>
+                <a:latin typeface="微软雅黑" panose="020B0503020204020204" pitchFamily="34" charset="-122"/>
+                <a:ea typeface="微软雅黑" panose="020B0503020204020204" pitchFamily="34" charset="-122"/>
+                <a:cs typeface="微软雅黑" panose="020B0503020204020204" pitchFamily="34" charset="-120"/>
+              </a:rPr>
+              <a:t>综合内存图推演</a:t>
             </a:r>
             <a:endParaRPr lang="en-US" sz="1400" dirty="0"/>
           </a:p>
@@ -3367,13 +3202,12 @@
             <a:avLst/>
           </a:prstGeom>
           <a:noFill/>
-          <a:ln/>
         </p:spPr>
         <p:txBody>
           <a:bodyPr wrap="square" rtlCol="0" anchor="ctr"/>
           <a:lstStyle/>
           <a:p>
-            <a:pPr algn="l" indent="0" marL="0">
+            <a:pPr marL="0" indent="0" algn="l">
               <a:buNone/>
             </a:pPr>
             <a:r>
@@ -3381,11 +3215,11 @@
                 <a:solidFill>
                   <a:srgbClr val="1F2329"/>
                 </a:solidFill>
-                <a:latin typeface="微软雅黑" pitchFamily="34" charset="0"/>
-                <a:ea typeface="微软雅黑" pitchFamily="34" charset="-122"/>
-                <a:cs typeface="微软雅黑" pitchFamily="34" charset="-120"/>
-              </a:rPr>
-              <a:t>malloc造结点，next串起来，指针走一遍</a:t>
+                <a:latin typeface="微软雅黑" panose="020B0503020204020204" pitchFamily="34" charset="-122"/>
+                <a:ea typeface="微软雅黑" panose="020B0503020204020204" pitchFamily="34" charset="-122"/>
+                <a:cs typeface="微软雅黑" panose="020B0503020204020204" pitchFamily="34" charset="-120"/>
+              </a:rPr>
+              <a:t>一张图把这一阶段全画上（拿纸跟着画）</a:t>
             </a:r>
             <a:endParaRPr lang="en-US" sz="2800" dirty="0"/>
           </a:p>
@@ -3393,111 +3227,25 @@
       </p:sp>
       <p:sp>
         <p:nvSpPr>
-          <p:cNvPr id="5" name="Shape 3"/>
-          <p:cNvSpPr/>
-          <p:nvPr/>
-        </p:nvSpPr>
-        <p:spPr>
-          <a:xfrm>
-            <a:off x="822960" y="2395728"/>
-            <a:ext cx="10545775" cy="1271016"/>
-          </a:xfrm>
-          <a:prstGeom prst="rect">
-            <a:avLst/>
-          </a:prstGeom>
-          <a:solidFill>
-            <a:srgbClr val="F7F9FC"/>
-          </a:solidFill>
-          <a:ln/>
-        </p:spPr>
-      </p:sp>
-      <p:sp>
-        <p:nvSpPr>
-          <p:cNvPr id="6" name="Shape 4"/>
-          <p:cNvSpPr/>
-          <p:nvPr/>
-        </p:nvSpPr>
-        <p:spPr>
-          <a:xfrm>
-            <a:off x="822960" y="2395728"/>
-            <a:ext cx="50292" cy="1271016"/>
-          </a:xfrm>
-          <a:prstGeom prst="rect">
-            <a:avLst/>
-          </a:prstGeom>
-          <a:solidFill>
-            <a:srgbClr val="1F4E9C"/>
-          </a:solidFill>
-          <a:ln/>
-        </p:spPr>
-      </p:sp>
-      <p:sp>
-        <p:nvSpPr>
-          <p:cNvPr id="7" name="Text 5"/>
-          <p:cNvSpPr/>
-          <p:nvPr/>
-        </p:nvSpPr>
-        <p:spPr>
-          <a:xfrm>
-            <a:off x="1078992" y="2505456"/>
-            <a:ext cx="10033711" cy="1051560"/>
-          </a:xfrm>
-          <a:prstGeom prst="rect">
-            <a:avLst/>
-          </a:prstGeom>
-          <a:noFill/>
-          <a:ln/>
+          <p:cNvPr id="5" name="Text 3"/>
+          <p:cNvSpPr/>
+          <p:nvPr/>
+        </p:nvSpPr>
+        <p:spPr>
+          <a:xfrm>
+            <a:off x="896112" y="2395728"/>
+            <a:ext cx="10454335" cy="397764"/>
+          </a:xfrm>
+          <a:prstGeom prst="rect">
+            <a:avLst/>
+          </a:prstGeom>
+          <a:noFill/>
         </p:spPr>
         <p:txBody>
           <a:bodyPr wrap="square" rtlCol="0" anchor="t"/>
           <a:lstStyle/>
           <a:p>
-            <a:pPr algn="l" indent="0" marL="0">
-              <a:lnSpc>
-                <a:spcPct val="125000"/>
-              </a:lnSpc>
-              <a:buNone/>
-            </a:pPr>
-            <a:r>
-              <a:rPr lang="en-US" sz="1400" dirty="0">
-                <a:solidFill>
-                  <a:srgbClr val="1F2329"/>
-                </a:solidFill>
-                <a:latin typeface="Consolas" pitchFamily="34" charset="0"/>
-                <a:ea typeface="Consolas" pitchFamily="34" charset="-122"/>
-                <a:cs typeface="Consolas" pitchFamily="34" charset="-120"/>
-              </a:rPr>
-              <a:t>struct Node *p = (struct Node *)malloc(sizeof(struct Node));
-p-&gt;data = 10;
-p-&gt;next = NULL;      // 暂时没有下一个
-</a:t>
-            </a:r>
-            <a:endParaRPr lang="en-US" sz="1400" dirty="0"/>
-          </a:p>
-        </p:txBody>
-      </p:sp>
-      <p:sp>
-        <p:nvSpPr>
-          <p:cNvPr id="8" name="Text 6"/>
-          <p:cNvSpPr/>
-          <p:nvPr/>
-        </p:nvSpPr>
-        <p:spPr>
-          <a:xfrm>
-            <a:off x="896112" y="3867912"/>
-            <a:ext cx="10454335" cy="397764"/>
-          </a:xfrm>
-          <a:prstGeom prst="rect">
-            <a:avLst/>
-          </a:prstGeom>
-          <a:noFill/>
-          <a:ln/>
-        </p:spPr>
-        <p:txBody>
-          <a:bodyPr wrap="square" rtlCol="0" anchor="t"/>
-          <a:lstStyle/>
-          <a:p>
-            <a:pPr algn="l" indent="0" marL="0">
+            <a:pPr marL="0" indent="0" algn="l">
               <a:lnSpc>
                 <a:spcPct val="115000"/>
               </a:lnSpc>
@@ -3508,25 +3256,68 @@
                 <a:solidFill>
                   <a:srgbClr val="1F4E9C"/>
                 </a:solidFill>
-                <a:latin typeface="微软雅黑" pitchFamily="34" charset="0"/>
-                <a:ea typeface="微软雅黑" pitchFamily="34" charset="-122"/>
-                <a:cs typeface="微软雅黑" pitchFamily="34" charset="-120"/>
+                <a:latin typeface="微软雅黑" panose="020B0503020204020204" pitchFamily="34" charset="-122"/>
+                <a:ea typeface="微软雅黑" panose="020B0503020204020204" pitchFamily="34" charset="-122"/>
+                <a:cs typeface="微软雅黑" panose="020B0503020204020204" pitchFamily="34" charset="-120"/>
               </a:rPr>
               <a:t>•  </a:t>
             </a:r>
-            <a:pPr algn="l" indent="0" marL="0">
+            <a:r>
+              <a:rPr lang="en-US" sz="1800" dirty="0">
+                <a:solidFill>
+                  <a:srgbClr val="000000"/>
+                </a:solidFill>
+              </a:rPr>
+              <a:t>① 画栈：一个格子标p，里面装地址（局部变量住栈上）</a:t>
+            </a:r>
+            <a:endParaRPr lang="en-US" sz="1800" dirty="0"/>
+          </a:p>
+        </p:txBody>
+      </p:sp>
+      <p:sp>
+        <p:nvSpPr>
+          <p:cNvPr id="6" name="Text 4"/>
+          <p:cNvSpPr/>
+          <p:nvPr/>
+        </p:nvSpPr>
+        <p:spPr>
+          <a:xfrm>
+            <a:off x="896112" y="2866644"/>
+            <a:ext cx="10454335" cy="397764"/>
+          </a:xfrm>
+          <a:prstGeom prst="rect">
+            <a:avLst/>
+          </a:prstGeom>
+          <a:noFill/>
+        </p:spPr>
+        <p:txBody>
+          <a:bodyPr wrap="square" rtlCol="0" anchor="t"/>
+          <a:lstStyle/>
+          <a:p>
+            <a:pPr marL="0" indent="0" algn="l">
               <a:lnSpc>
                 <a:spcPct val="115000"/>
               </a:lnSpc>
               <a:buNone/>
             </a:pPr>
             <a:r>
+              <a:rPr lang="en-US" sz="1800" b="1" dirty="0">
+                <a:solidFill>
+                  <a:srgbClr val="1F4E9C"/>
+                </a:solidFill>
+                <a:latin typeface="微软雅黑" panose="020B0503020204020204" pitchFamily="34" charset="-122"/>
+                <a:ea typeface="微软雅黑" panose="020B0503020204020204" pitchFamily="34" charset="-122"/>
+                <a:cs typeface="微软雅黑" panose="020B0503020204020204" pitchFamily="34" charset="-120"/>
+              </a:rPr>
+              <a:t>•  </a:t>
+            </a:r>
+            <a:r>
               <a:rPr lang="en-US" sz="1800" dirty="0">
                 <a:solidFill>
                   <a:srgbClr val="000000"/>
                 </a:solidFill>
               </a:rPr>
-              <a:t>结点住堆上：malloc申请，箭头指过去</a:t>
+              <a:t>② 画堆上三片分开的结构体格，每片两格：左data右next，填10、20、30</a:t>
             </a:r>
             <a:endParaRPr lang="en-US" sz="1800" dirty="0"/>
           </a:p>
@@ -3534,26 +3325,25 @@
       </p:sp>
       <p:sp>
         <p:nvSpPr>
-          <p:cNvPr id="9" name="Text 7"/>
-          <p:cNvSpPr/>
-          <p:nvPr/>
-        </p:nvSpPr>
-        <p:spPr>
-          <a:xfrm>
-            <a:off x="896112" y="4338828"/>
+          <p:cNvPr id="7" name="Text 5"/>
+          <p:cNvSpPr/>
+          <p:nvPr/>
+        </p:nvSpPr>
+        <p:spPr>
+          <a:xfrm>
+            <a:off x="896112" y="3337560"/>
             <a:ext cx="10454335" cy="397764"/>
           </a:xfrm>
           <a:prstGeom prst="rect">
             <a:avLst/>
           </a:prstGeom>
           <a:noFill/>
-          <a:ln/>
         </p:spPr>
         <p:txBody>
           <a:bodyPr wrap="square" rtlCol="0" anchor="t"/>
           <a:lstStyle/>
           <a:p>
-            <a:pPr algn="l" indent="0" marL="0">
+            <a:pPr marL="0" indent="0" algn="l">
               <a:lnSpc>
                 <a:spcPct val="115000"/>
               </a:lnSpc>
@@ -3564,81 +3354,68 @@
                 <a:solidFill>
                   <a:srgbClr val="1F4E9C"/>
                 </a:solidFill>
-                <a:latin typeface="微软雅黑" pitchFamily="34" charset="0"/>
-                <a:ea typeface="微软雅黑" pitchFamily="34" charset="-122"/>
-                <a:cs typeface="微软雅黑" pitchFamily="34" charset="-120"/>
+                <a:latin typeface="微软雅黑" panose="020B0503020204020204" pitchFamily="34" charset="-122"/>
+                <a:ea typeface="微软雅黑" panose="020B0503020204020204" pitchFamily="34" charset="-122"/>
+                <a:cs typeface="微软雅黑" panose="020B0503020204020204" pitchFamily="34" charset="-120"/>
               </a:rPr>
               <a:t>•  </a:t>
             </a:r>
-            <a:pPr algn="l" indent="0" marL="0">
+            <a:r>
+              <a:rPr lang="en-US" sz="1800" dirty="0">
+                <a:solidFill>
+                  <a:srgbClr val="000000"/>
+                </a:solidFill>
+              </a:rPr>
+              <a:t>③ next互串画箭头，最后一片next写NULL；p的箭头指到第一片</a:t>
+            </a:r>
+            <a:endParaRPr lang="en-US" sz="1800" dirty="0"/>
+          </a:p>
+        </p:txBody>
+      </p:sp>
+      <p:sp>
+        <p:nvSpPr>
+          <p:cNvPr id="8" name="Text 6"/>
+          <p:cNvSpPr/>
+          <p:nvPr/>
+        </p:nvSpPr>
+        <p:spPr>
+          <a:xfrm>
+            <a:off x="896112" y="3808476"/>
+            <a:ext cx="10454335" cy="397764"/>
+          </a:xfrm>
+          <a:prstGeom prst="rect">
+            <a:avLst/>
+          </a:prstGeom>
+          <a:noFill/>
+        </p:spPr>
+        <p:txBody>
+          <a:bodyPr wrap="square" rtlCol="0" anchor="t"/>
+          <a:lstStyle/>
+          <a:p>
+            <a:pPr marL="0" indent="0" algn="l">
               <a:lnSpc>
                 <a:spcPct val="115000"/>
               </a:lnSpc>
               <a:buNone/>
             </a:pPr>
             <a:r>
+              <a:rPr lang="en-US" sz="1800" b="1" dirty="0">
+                <a:solidFill>
+                  <a:srgbClr val="1F4E9C"/>
+                </a:solidFill>
+                <a:latin typeface="微软雅黑" panose="020B0503020204020204" pitchFamily="34" charset="-122"/>
+                <a:ea typeface="微软雅黑" panose="020B0503020204020204" pitchFamily="34" charset="-122"/>
+                <a:cs typeface="微软雅黑" panose="020B0503020204020204" pitchFamily="34" charset="-120"/>
+              </a:rPr>
+              <a:t>•  </a:t>
+            </a:r>
+            <a:r>
               <a:rPr lang="en-US" sz="1800" dirty="0">
                 <a:solidFill>
                   <a:srgbClr val="000000"/>
                 </a:solidFill>
               </a:rPr>
-              <a:t>两个结点这样串：前一个的next存后一个的地址</a:t>
-            </a:r>
-            <a:endParaRPr lang="en-US" sz="1800" dirty="0"/>
-          </a:p>
-        </p:txBody>
-      </p:sp>
-      <p:sp>
-        <p:nvSpPr>
-          <p:cNvPr id="10" name="Text 8"/>
-          <p:cNvSpPr/>
-          <p:nvPr/>
-        </p:nvSpPr>
-        <p:spPr>
-          <a:xfrm>
-            <a:off x="896112" y="4809744"/>
-            <a:ext cx="10454335" cy="397764"/>
-          </a:xfrm>
-          <a:prstGeom prst="rect">
-            <a:avLst/>
-          </a:prstGeom>
-          <a:noFill/>
-          <a:ln/>
-        </p:spPr>
-        <p:txBody>
-          <a:bodyPr wrap="square" rtlCol="0" anchor="t"/>
-          <a:lstStyle/>
-          <a:p>
-            <a:pPr algn="l" indent="0" marL="0">
-              <a:lnSpc>
-                <a:spcPct val="115000"/>
-              </a:lnSpc>
-              <a:buNone/>
-            </a:pPr>
-            <a:r>
-              <a:rPr lang="en-US" sz="1800" b="1" dirty="0">
-                <a:solidFill>
-                  <a:srgbClr val="1F4E9C"/>
-                </a:solidFill>
-                <a:latin typeface="微软雅黑" pitchFamily="34" charset="0"/>
-                <a:ea typeface="微软雅黑" pitchFamily="34" charset="-122"/>
-                <a:cs typeface="微软雅黑" pitchFamily="34" charset="-120"/>
-              </a:rPr>
-              <a:t>•  </a:t>
-            </a:r>
-            <a:pPr algn="l" indent="0" marL="0">
-              <a:lnSpc>
-                <a:spcPct val="115000"/>
-              </a:lnSpc>
-              <a:buNone/>
-            </a:pPr>
-            <a:r>
-              <a:rPr lang="en-US" sz="1800" dirty="0">
-                <a:solidFill>
-                  <a:srgbClr val="000000"/>
-                </a:solidFill>
-              </a:rPr>
-              <a:t>遍历就一句套路：p = p-&gt;next，沿着箭头一个一个走</a:t>
+              <a:t>④ 走一遍：p沿箭头挪三次打印，变NULL时循环停；free后格子涂掉、箭头失效</a:t>
             </a:r>
             <a:endParaRPr lang="en-US" sz="1800" dirty="0"/>
           </a:p>
@@ -3654,7 +3431,7 @@
 
 <file path=ppt/slides/slide13.xml><?xml version="1.0" encoding="utf-8"?>
 <p:sld xmlns:a="http://schemas.openxmlformats.org/drawingml/2006/main" xmlns:r="http://schemas.openxmlformats.org/officeDocument/2006/relationships" xmlns:p="http://schemas.openxmlformats.org/presentationml/2006/main">
-  <p:cSld name="Slide 13">
+  <p:cSld>
     <p:bg>
       <p:bgPr>
         <a:blipFill dpi="0" rotWithShape="1">
@@ -3698,13 +3475,12 @@
             <a:avLst/>
           </a:prstGeom>
           <a:noFill/>
-          <a:ln/>
         </p:spPr>
         <p:txBody>
           <a:bodyPr wrap="square" rtlCol="0" anchor="ctr"/>
           <a:lstStyle/>
           <a:p>
-            <a:pPr algn="r" indent="0" marL="0">
+            <a:pPr marL="0" indent="0" algn="r">
               <a:buNone/>
             </a:pPr>
             <a:r>
@@ -3712,11 +3488,11 @@
                 <a:solidFill>
                   <a:srgbClr val="8A9099"/>
                 </a:solidFill>
-                <a:latin typeface="微软雅黑" pitchFamily="34" charset="0"/>
-                <a:ea typeface="微软雅黑" pitchFamily="34" charset="-122"/>
-                <a:cs typeface="微软雅黑" pitchFamily="34" charset="-120"/>
-              </a:rPr>
-              <a:t>13 / 17</a:t>
+                <a:latin typeface="微软雅黑" panose="020B0503020204020204" pitchFamily="34" charset="-122"/>
+                <a:ea typeface="微软雅黑" panose="020B0503020204020204" pitchFamily="34" charset="-122"/>
+                <a:cs typeface="微软雅黑" panose="020B0503020204020204" pitchFamily="34" charset="-120"/>
+              </a:rPr>
+              <a:t>13 / 16</a:t>
             </a:r>
             <a:endParaRPr lang="en-US" sz="1000" dirty="0"/>
           </a:p>
@@ -3737,13 +3513,12 @@
             <a:avLst/>
           </a:prstGeom>
           <a:noFill/>
-          <a:ln/>
         </p:spPr>
         <p:txBody>
           <a:bodyPr wrap="square" rtlCol="0" anchor="ctr"/>
           <a:lstStyle/>
           <a:p>
-            <a:pPr algn="l" indent="0" marL="0">
+            <a:pPr marL="0" indent="0" algn="l">
               <a:buNone/>
             </a:pPr>
             <a:r>
@@ -3751,11 +3526,11 @@
                 <a:solidFill>
                   <a:srgbClr val="1F4E9C"/>
                 </a:solidFill>
-                <a:latin typeface="微软雅黑" pitchFamily="34" charset="0"/>
-                <a:ea typeface="微软雅黑" pitchFamily="34" charset="-122"/>
-                <a:cs typeface="微软雅黑" pitchFamily="34" charset="-120"/>
-              </a:rPr>
-              <a:t>动画演示 · 单链表（本页逐条动画出现）</a:t>
+                <a:latin typeface="微软雅黑" panose="020B0503020204020204" pitchFamily="34" charset="-122"/>
+                <a:ea typeface="微软雅黑" panose="020B0503020204020204" pitchFamily="34" charset="-122"/>
+                <a:cs typeface="微软雅黑" panose="020B0503020204020204" pitchFamily="34" charset="-120"/>
+              </a:rPr>
+              <a:t>本节小结</a:t>
             </a:r>
             <a:endParaRPr lang="en-US" sz="1400" dirty="0"/>
           </a:p>
@@ -3776,13 +3551,12 @@
             <a:avLst/>
           </a:prstGeom>
           <a:noFill/>
-          <a:ln/>
         </p:spPr>
         <p:txBody>
           <a:bodyPr wrap="square" rtlCol="0" anchor="ctr"/>
           <a:lstStyle/>
           <a:p>
-            <a:pPr algn="l" indent="0" marL="0">
+            <a:pPr marL="0" indent="0" algn="l">
               <a:buNone/>
             </a:pPr>
             <a:r>
@@ -3790,11 +3564,11 @@
                 <a:solidFill>
                   <a:srgbClr val="1F2329"/>
                 </a:solidFill>
-                <a:latin typeface="微软雅黑" pitchFamily="34" charset="0"/>
-                <a:ea typeface="微软雅黑" pitchFamily="34" charset="-122"/>
-                <a:cs typeface="微软雅黑" pitchFamily="34" charset="-120"/>
-              </a:rPr>
-              <a:t>三个结点的单链表：造、串、走（不手写，跟着画）</a:t>
+                <a:latin typeface="微软雅黑" panose="020B0503020204020204" pitchFamily="34" charset="-122"/>
+                <a:ea typeface="微软雅黑" panose="020B0503020204020204" pitchFamily="34" charset="-122"/>
+                <a:cs typeface="微软雅黑" panose="020B0503020204020204" pitchFamily="34" charset="-120"/>
+              </a:rPr>
+              <a:t>今天就两件事</a:t>
             </a:r>
             <a:endParaRPr lang="en-US" sz="2800" dirty="0"/>
           </a:p>
@@ -3815,13 +3589,12 @@
             <a:avLst/>
           </a:prstGeom>
           <a:noFill/>
-          <a:ln/>
         </p:spPr>
         <p:txBody>
           <a:bodyPr wrap="square" rtlCol="0" anchor="t"/>
           <a:lstStyle/>
           <a:p>
-            <a:pPr algn="l" indent="0" marL="0">
+            <a:pPr marL="0" indent="0" algn="l">
               <a:lnSpc>
                 <a:spcPct val="115000"/>
               </a:lnSpc>
@@ -3832,25 +3605,68 @@
                 <a:solidFill>
                   <a:srgbClr val="1F4E9C"/>
                 </a:solidFill>
-                <a:latin typeface="微软雅黑" pitchFamily="34" charset="0"/>
-                <a:ea typeface="微软雅黑" pitchFamily="34" charset="-122"/>
-                <a:cs typeface="微软雅黑" pitchFamily="34" charset="-120"/>
+                <a:latin typeface="微软雅黑" panose="020B0503020204020204" pitchFamily="34" charset="-122"/>
+                <a:ea typeface="微软雅黑" panose="020B0503020204020204" pitchFamily="34" charset="-122"/>
+                <a:cs typeface="微软雅黑" panose="020B0503020204020204" pitchFamily="34" charset="-120"/>
               </a:rPr>
               <a:t>•  </a:t>
             </a:r>
-            <a:pPr algn="l" indent="0" marL="0">
+            <a:r>
+              <a:rPr lang="en-US" sz="1800" dirty="0">
+                <a:solidFill>
+                  <a:srgbClr val="000000"/>
+                </a:solidFill>
+              </a:rPr>
+              <a:t>递归三要素：终止条件、缩小规模、返回值；运行过程是调用栈的展开与收回</a:t>
+            </a:r>
+            <a:endParaRPr lang="en-US" sz="1800" dirty="0"/>
+          </a:p>
+        </p:txBody>
+      </p:sp>
+      <p:sp>
+        <p:nvSpPr>
+          <p:cNvPr id="6" name="Text 4"/>
+          <p:cNvSpPr/>
+          <p:nvPr/>
+        </p:nvSpPr>
+        <p:spPr>
+          <a:xfrm>
+            <a:off x="896112" y="2866644"/>
+            <a:ext cx="10454335" cy="740664"/>
+          </a:xfrm>
+          <a:prstGeom prst="rect">
+            <a:avLst/>
+          </a:prstGeom>
+          <a:noFill/>
+        </p:spPr>
+        <p:txBody>
+          <a:bodyPr wrap="square" rtlCol="0" anchor="t"/>
+          <a:lstStyle/>
+          <a:p>
+            <a:pPr marL="0" indent="0" algn="l">
               <a:lnSpc>
                 <a:spcPct val="115000"/>
               </a:lnSpc>
               <a:buNone/>
             </a:pPr>
             <a:r>
+              <a:rPr lang="en-US" sz="1800" b="1" dirty="0">
+                <a:solidFill>
+                  <a:srgbClr val="1F4E9C"/>
+                </a:solidFill>
+                <a:latin typeface="微软雅黑" panose="020B0503020204020204" pitchFamily="34" charset="-122"/>
+                <a:ea typeface="微软雅黑" panose="020B0503020204020204" pitchFamily="34" charset="-122"/>
+                <a:cs typeface="微软雅黑" panose="020B0503020204020204" pitchFamily="34" charset="-120"/>
+              </a:rPr>
+              <a:t>•  </a:t>
+            </a:r>
+            <a:r>
               <a:rPr lang="en-US" sz="1800" dirty="0">
                 <a:solidFill>
                   <a:srgbClr val="000000"/>
                 </a:solidFill>
               </a:rPr>
-              <a:t>① 横着画三个分离的结点，每个分两格：左data右next（散着住，不连片）</a:t>
+              <a:t>四样工具的组合：结构体装数组也装指针、malloc造结构体、引用传参改外面、free平账</a:t>
             </a:r>
             <a:endParaRPr lang="en-US" sz="1800" dirty="0"/>
           </a:p>
@@ -3858,26 +3674,25 @@
       </p:sp>
       <p:sp>
         <p:nvSpPr>
-          <p:cNvPr id="6" name="Text 4"/>
-          <p:cNvSpPr/>
-          <p:nvPr/>
-        </p:nvSpPr>
-        <p:spPr>
-          <a:xfrm>
-            <a:off x="896112" y="2866644"/>
-            <a:ext cx="10454335" cy="740664"/>
-          </a:xfrm>
-          <a:prstGeom prst="rect">
-            <a:avLst/>
-          </a:prstGeom>
-          <a:noFill/>
-          <a:ln/>
+          <p:cNvPr id="7" name="Text 5"/>
+          <p:cNvSpPr/>
+          <p:nvPr/>
+        </p:nvSpPr>
+        <p:spPr>
+          <a:xfrm>
+            <a:off x="896112" y="3680460"/>
+            <a:ext cx="10454335" cy="397764"/>
+          </a:xfrm>
+          <a:prstGeom prst="rect">
+            <a:avLst/>
+          </a:prstGeom>
+          <a:noFill/>
         </p:spPr>
         <p:txBody>
           <a:bodyPr wrap="square" rtlCol="0" anchor="t"/>
           <a:lstStyle/>
           <a:p>
-            <a:pPr algn="l" indent="0" marL="0">
+            <a:pPr marL="0" indent="0" algn="l">
               <a:lnSpc>
                 <a:spcPct val="115000"/>
               </a:lnSpc>
@@ -3888,25 +3703,19 @@
                 <a:solidFill>
                   <a:srgbClr val="1F4E9C"/>
                 </a:solidFill>
-                <a:latin typeface="微软雅黑" pitchFamily="34" charset="0"/>
-                <a:ea typeface="微软雅黑" pitchFamily="34" charset="-122"/>
-                <a:cs typeface="微软雅黑" pitchFamily="34" charset="-120"/>
+                <a:latin typeface="微软雅黑" panose="020B0503020204020204" pitchFamily="34" charset="-122"/>
+                <a:ea typeface="微软雅黑" panose="020B0503020204020204" pitchFamily="34" charset="-122"/>
+                <a:cs typeface="微软雅黑" panose="020B0503020204020204" pitchFamily="34" charset="-120"/>
               </a:rPr>
               <a:t>•  </a:t>
             </a:r>
-            <a:pPr algn="l" indent="0" marL="0">
-              <a:lnSpc>
-                <a:spcPct val="115000"/>
-              </a:lnSpc>
-              <a:buNone/>
-            </a:pPr>
             <a:r>
               <a:rPr lang="en-US" sz="1800" dirty="0">
                 <a:solidFill>
                   <a:srgbClr val="000000"/>
                 </a:solidFill>
               </a:rPr>
-              <a:t>② 填数据10、20、30，next互串，最后一个next填NULL，箭头从next格指出</a:t>
+              <a:t>一张综合内存图：栈上指针、堆上分开的结构体格、箭头、NULL</a:t>
             </a:r>
             <a:endParaRPr lang="en-US" sz="1800" dirty="0"/>
           </a:p>
@@ -3914,57 +3723,39 @@
       </p:sp>
       <p:sp>
         <p:nvSpPr>
-          <p:cNvPr id="7" name="Text 5"/>
-          <p:cNvSpPr/>
-          <p:nvPr/>
-        </p:nvSpPr>
-        <p:spPr>
-          <a:xfrm>
-            <a:off x="896112" y="3680460"/>
-            <a:ext cx="10454335" cy="740664"/>
-          </a:xfrm>
-          <a:prstGeom prst="rect">
-            <a:avLst/>
-          </a:prstGeom>
-          <a:noFill/>
-          <a:ln/>
+          <p:cNvPr id="8" name="Text 6"/>
+          <p:cNvSpPr/>
+          <p:nvPr/>
+        </p:nvSpPr>
+        <p:spPr>
+          <a:xfrm>
+            <a:off x="822960" y="4242816"/>
+            <a:ext cx="10545775" cy="358902"/>
+          </a:xfrm>
+          <a:prstGeom prst="rect">
+            <a:avLst/>
+          </a:prstGeom>
+          <a:noFill/>
         </p:spPr>
         <p:txBody>
           <a:bodyPr wrap="square" rtlCol="0" anchor="t"/>
           <a:lstStyle/>
           <a:p>
-            <a:pPr algn="l" indent="0" marL="0">
-              <a:lnSpc>
-                <a:spcPct val="115000"/>
-              </a:lnSpc>
-              <a:buNone/>
-            </a:pPr>
-            <a:r>
-              <a:rPr lang="en-US" sz="1800" b="1" dirty="0">
-                <a:solidFill>
-                  <a:srgbClr val="1F4E9C"/>
-                </a:solidFill>
-                <a:latin typeface="微软雅黑" pitchFamily="34" charset="0"/>
-                <a:ea typeface="微软雅黑" pitchFamily="34" charset="-122"/>
-                <a:cs typeface="微软雅黑" pitchFamily="34" charset="-120"/>
-              </a:rPr>
-              <a:t>•  </a:t>
-            </a:r>
-            <a:pPr algn="l" indent="0" marL="0">
-              <a:lnSpc>
-                <a:spcPct val="115000"/>
-              </a:lnSpc>
-              <a:buNone/>
-            </a:pPr>
-            <a:r>
-              <a:rPr lang="en-US" sz="1800" dirty="0">
-                <a:solidFill>
-                  <a:srgbClr val="000000"/>
-                </a:solidFill>
-              </a:rPr>
-              <a:t>③ 画p从头走到尾：每轮p = p-&gt;next挪一步，打印10、20、30，p变NULL循环停</a:t>
-            </a:r>
-            <a:endParaRPr lang="en-US" sz="1800" dirty="0"/>
+            <a:pPr marL="0" indent="0" algn="l">
+              <a:buNone/>
+            </a:pPr>
+            <a:r>
+              <a:rPr lang="en-US" sz="1500" dirty="0">
+                <a:solidFill>
+                  <a:srgbClr val="8A9099"/>
+                </a:solidFill>
+                <a:latin typeface="微软雅黑" panose="020B0503020204020204" pitchFamily="34" charset="-122"/>
+                <a:ea typeface="微软雅黑" panose="020B0503020204020204" pitchFamily="34" charset="-122"/>
+                <a:cs typeface="微软雅黑" panose="020B0503020204020204" pitchFamily="34" charset="-120"/>
+              </a:rPr>
+              <a:t>顺序表与链表的正式内容（插删、头结点、查找）在数据结构课讲；强化阶段到此完结</a:t>
+            </a:r>
+            <a:endParaRPr lang="en-US" sz="1500" dirty="0"/>
           </a:p>
         </p:txBody>
       </p:sp>
@@ -3978,7 +3769,7 @@
 
 <file path=ppt/slides/slide14.xml><?xml version="1.0" encoding="utf-8"?>
 <p:sld xmlns:a="http://schemas.openxmlformats.org/drawingml/2006/main" xmlns:r="http://schemas.openxmlformats.org/officeDocument/2006/relationships" xmlns:p="http://schemas.openxmlformats.org/presentationml/2006/main">
-  <p:cSld name="Slide 14">
+  <p:cSld>
     <p:bg>
       <p:bgPr>
         <a:blipFill dpi="0" rotWithShape="1">
@@ -4022,13 +3813,12 @@
             <a:avLst/>
           </a:prstGeom>
           <a:noFill/>
-          <a:ln/>
         </p:spPr>
         <p:txBody>
           <a:bodyPr wrap="square" rtlCol="0" anchor="ctr"/>
           <a:lstStyle/>
           <a:p>
-            <a:pPr algn="r" indent="0" marL="0">
+            <a:pPr marL="0" indent="0" algn="r">
               <a:buNone/>
             </a:pPr>
             <a:r>
@@ -4036,11 +3826,11 @@
                 <a:solidFill>
                   <a:srgbClr val="8A9099"/>
                 </a:solidFill>
-                <a:latin typeface="微软雅黑" pitchFamily="34" charset="0"/>
-                <a:ea typeface="微软雅黑" pitchFamily="34" charset="-122"/>
-                <a:cs typeface="微软雅黑" pitchFamily="34" charset="-120"/>
-              </a:rPr>
-              <a:t>14 / 17</a:t>
+                <a:latin typeface="微软雅黑" panose="020B0503020204020204" pitchFamily="34" charset="-122"/>
+                <a:ea typeface="微软雅黑" panose="020B0503020204020204" pitchFamily="34" charset="-122"/>
+                <a:cs typeface="微软雅黑" panose="020B0503020204020204" pitchFamily="34" charset="-120"/>
+              </a:rPr>
+              <a:t>14 / 16</a:t>
             </a:r>
             <a:endParaRPr lang="en-US" sz="1000" dirty="0"/>
           </a:p>
@@ -4061,13 +3851,12 @@
             <a:avLst/>
           </a:prstGeom>
           <a:noFill/>
-          <a:ln/>
         </p:spPr>
         <p:txBody>
           <a:bodyPr wrap="square" rtlCol="0" anchor="ctr"/>
           <a:lstStyle/>
           <a:p>
-            <a:pPr algn="l" indent="0" marL="0">
+            <a:pPr marL="0" indent="0" algn="l">
               <a:buNone/>
             </a:pPr>
             <a:r>
@@ -4075,11 +3864,11 @@
                 <a:solidFill>
                   <a:srgbClr val="1F4E9C"/>
                 </a:solidFill>
-                <a:latin typeface="微软雅黑" pitchFamily="34" charset="0"/>
-                <a:ea typeface="微软雅黑" pitchFamily="34" charset="-122"/>
-                <a:cs typeface="微软雅黑" pitchFamily="34" charset="-120"/>
-              </a:rPr>
-              <a:t>本节小结</a:t>
+                <a:latin typeface="微软雅黑" panose="020B0503020204020204" pitchFamily="34" charset="-122"/>
+                <a:ea typeface="微软雅黑" panose="020B0503020204020204" pitchFamily="34" charset="-122"/>
+                <a:cs typeface="微软雅黑" panose="020B0503020204020204" pitchFamily="34" charset="-120"/>
+              </a:rPr>
+              <a:t>课后任务</a:t>
             </a:r>
             <a:endParaRPr lang="en-US" sz="1400" dirty="0"/>
           </a:p>
@@ -4100,13 +3889,12 @@
             <a:avLst/>
           </a:prstGeom>
           <a:noFill/>
-          <a:ln/>
         </p:spPr>
         <p:txBody>
           <a:bodyPr wrap="square" rtlCol="0" anchor="ctr"/>
           <a:lstStyle/>
           <a:p>
-            <a:pPr algn="l" indent="0" marL="0">
+            <a:pPr marL="0" indent="0" algn="l">
               <a:buNone/>
             </a:pPr>
             <a:r>
@@ -4114,11 +3902,11 @@
                 <a:solidFill>
                   <a:srgbClr val="1F2329"/>
                 </a:solidFill>
-                <a:latin typeface="微软雅黑" pitchFamily="34" charset="0"/>
-                <a:ea typeface="微软雅黑" pitchFamily="34" charset="-122"/>
-                <a:cs typeface="微软雅黑" pitchFamily="34" charset="-120"/>
-              </a:rPr>
-              <a:t>今天就三件事</a:t>
+                <a:latin typeface="微软雅黑" panose="020B0503020204020204" pitchFamily="34" charset="-122"/>
+                <a:ea typeface="微软雅黑" panose="020B0503020204020204" pitchFamily="34" charset="-122"/>
+                <a:cs typeface="微软雅黑" panose="020B0503020204020204" pitchFamily="34" charset="-120"/>
+              </a:rPr>
+              <a:t>1道跟练 ＋ 1道模仿</a:t>
             </a:r>
             <a:endParaRPr lang="en-US" sz="2800" dirty="0"/>
           </a:p>
@@ -4139,13 +3927,12 @@
             <a:avLst/>
           </a:prstGeom>
           <a:noFill/>
-          <a:ln/>
         </p:spPr>
         <p:txBody>
           <a:bodyPr wrap="square" rtlCol="0" anchor="t"/>
           <a:lstStyle/>
           <a:p>
-            <a:pPr algn="l" indent="0" marL="0">
+            <a:pPr marL="0" indent="0" algn="l">
               <a:lnSpc>
                 <a:spcPct val="115000"/>
               </a:lnSpc>
@@ -4156,25 +3943,84 @@
                 <a:solidFill>
                   <a:srgbClr val="1F4E9C"/>
                 </a:solidFill>
-                <a:latin typeface="微软雅黑" pitchFamily="34" charset="0"/>
-                <a:ea typeface="微软雅黑" pitchFamily="34" charset="-122"/>
-                <a:cs typeface="微软雅黑" pitchFamily="34" charset="-120"/>
+                <a:latin typeface="微软雅黑" panose="020B0503020204020204" pitchFamily="34" charset="-122"/>
+                <a:ea typeface="微软雅黑" panose="020B0503020204020204" pitchFamily="34" charset="-122"/>
+                <a:cs typeface="微软雅黑" panose="020B0503020204020204" pitchFamily="34" charset="-120"/>
               </a:rPr>
               <a:t>•  </a:t>
             </a:r>
-            <a:pPr algn="l" indent="0" marL="0">
+            <a:r>
+              <a:rPr lang="en-US" sz="1800" b="1" dirty="0">
+                <a:solidFill>
+                  <a:srgbClr val="000000"/>
+                </a:solidFill>
+              </a:rPr>
+              <a:t>跟练题</a:t>
+            </a:r>
+            <a:r>
+              <a:rPr lang="en-US" sz="1800" dirty="0">
+                <a:solidFill>
+                  <a:srgbClr val="000000"/>
+                </a:solidFill>
+              </a:rPr>
+              <a:t>：手写阶乘的递归版与迭代版，都跑通，再把fact(3)的调用栈画一遍</a:t>
+            </a:r>
+            <a:endParaRPr lang="en-US" sz="1800" dirty="0"/>
+          </a:p>
+        </p:txBody>
+      </p:sp>
+      <p:sp>
+        <p:nvSpPr>
+          <p:cNvPr id="6" name="Text 4"/>
+          <p:cNvSpPr/>
+          <p:nvPr/>
+        </p:nvSpPr>
+        <p:spPr>
+          <a:xfrm>
+            <a:off x="896112" y="2866644"/>
+            <a:ext cx="10454335" cy="740664"/>
+          </a:xfrm>
+          <a:prstGeom prst="rect">
+            <a:avLst/>
+          </a:prstGeom>
+          <a:noFill/>
+        </p:spPr>
+        <p:txBody>
+          <a:bodyPr wrap="square" rtlCol="0" anchor="t"/>
+          <a:lstStyle/>
+          <a:p>
+            <a:pPr marL="0" indent="0" algn="l">
               <a:lnSpc>
                 <a:spcPct val="115000"/>
               </a:lnSpc>
               <a:buNone/>
             </a:pPr>
             <a:r>
+              <a:rPr lang="en-US" sz="1800" b="1" dirty="0">
+                <a:solidFill>
+                  <a:srgbClr val="1F4E9C"/>
+                </a:solidFill>
+                <a:latin typeface="微软雅黑" panose="020B0503020204020204" pitchFamily="34" charset="-122"/>
+                <a:ea typeface="微软雅黑" panose="020B0503020204020204" pitchFamily="34" charset="-122"/>
+                <a:cs typeface="微软雅黑" panose="020B0503020204020204" pitchFamily="34" charset="-120"/>
+              </a:rPr>
+              <a:t>•  </a:t>
+            </a:r>
+            <a:r>
+              <a:rPr lang="en-US" sz="1800" b="1" dirty="0">
+                <a:solidFill>
+                  <a:srgbClr val="000000"/>
+                </a:solidFill>
+              </a:rPr>
+              <a:t>模仿题</a:t>
+            </a:r>
+            <a:r>
               <a:rPr lang="en-US" sz="1800" dirty="0">
                 <a:solidFill>
                   <a:srgbClr val="000000"/>
                 </a:solidFill>
               </a:rPr>
-              <a:t>递归三要素：终止条件、缩小规模、返回值；运行过程是调用栈的展开与收回</a:t>
+              <a:t>：malloc三个struct Node，data填1、2、3，用next串起来，遍历打印后全部free</a:t>
             </a:r>
             <a:endParaRPr lang="en-US" sz="1800" dirty="0"/>
           </a:p>
@@ -4182,26 +4028,25 @@
       </p:sp>
       <p:sp>
         <p:nvSpPr>
-          <p:cNvPr id="6" name="Text 4"/>
-          <p:cNvSpPr/>
-          <p:nvPr/>
-        </p:nvSpPr>
-        <p:spPr>
-          <a:xfrm>
-            <a:off x="896112" y="2866644"/>
-            <a:ext cx="10454335" cy="397764"/>
-          </a:xfrm>
-          <a:prstGeom prst="rect">
-            <a:avLst/>
-          </a:prstGeom>
-          <a:noFill/>
-          <a:ln/>
+          <p:cNvPr id="7" name="Text 5"/>
+          <p:cNvSpPr/>
+          <p:nvPr/>
+        </p:nvSpPr>
+        <p:spPr>
+          <a:xfrm>
+            <a:off x="896112" y="3680460"/>
+            <a:ext cx="10454335" cy="740664"/>
+          </a:xfrm>
+          <a:prstGeom prst="rect">
+            <a:avLst/>
+          </a:prstGeom>
+          <a:noFill/>
         </p:spPr>
         <p:txBody>
           <a:bodyPr wrap="square" rtlCol="0" anchor="t"/>
           <a:lstStyle/>
           <a:p>
-            <a:pPr algn="l" indent="0" marL="0">
+            <a:pPr marL="0" indent="0" algn="l">
               <a:lnSpc>
                 <a:spcPct val="115000"/>
               </a:lnSpc>
@@ -4212,25 +4057,19 @@
                 <a:solidFill>
                   <a:srgbClr val="1F4E9C"/>
                 </a:solidFill>
-                <a:latin typeface="微软雅黑" pitchFamily="34" charset="0"/>
-                <a:ea typeface="微软雅黑" pitchFamily="34" charset="-122"/>
-                <a:cs typeface="微软雅黑" pitchFamily="34" charset="-120"/>
+                <a:latin typeface="微软雅黑" panose="020B0503020204020204" pitchFamily="34" charset="-122"/>
+                <a:ea typeface="微软雅黑" panose="020B0503020204020204" pitchFamily="34" charset="-122"/>
+                <a:cs typeface="微软雅黑" panose="020B0503020204020204" pitchFamily="34" charset="-120"/>
               </a:rPr>
               <a:t>•  </a:t>
             </a:r>
-            <a:pPr algn="l" indent="0" marL="0">
-              <a:lnSpc>
-                <a:spcPct val="115000"/>
-              </a:lnSpc>
-              <a:buNone/>
-            </a:pPr>
             <a:r>
               <a:rPr lang="en-US" sz="1800" dirty="0">
                 <a:solidFill>
                   <a:srgbClr val="000000"/>
                 </a:solidFill>
               </a:rPr>
-              <a:t>顺序表：数组加length，插入改length，引用传参让函数改得动表</a:t>
+              <a:t>要求：合上资料能默写fact递归版、struct Node定义、malloc＋判空＋箭头赋值＋free四步</a:t>
             </a:r>
             <a:endParaRPr lang="en-US" sz="1800" dirty="0"/>
           </a:p>
@@ -4238,82 +4077,25 @@
       </p:sp>
       <p:sp>
         <p:nvSpPr>
-          <p:cNvPr id="7" name="Text 5"/>
-          <p:cNvSpPr/>
-          <p:nvPr/>
-        </p:nvSpPr>
-        <p:spPr>
-          <a:xfrm>
-            <a:off x="896112" y="3337560"/>
-            <a:ext cx="10454335" cy="397764"/>
-          </a:xfrm>
-          <a:prstGeom prst="rect">
-            <a:avLst/>
-          </a:prstGeom>
-          <a:noFill/>
-          <a:ln/>
+          <p:cNvPr id="8" name="Text 6"/>
+          <p:cNvSpPr/>
+          <p:nvPr/>
+        </p:nvSpPr>
+        <p:spPr>
+          <a:xfrm>
+            <a:off x="822960" y="4585716"/>
+            <a:ext cx="10545775" cy="358902"/>
+          </a:xfrm>
+          <a:prstGeom prst="rect">
+            <a:avLst/>
+          </a:prstGeom>
+          <a:noFill/>
         </p:spPr>
         <p:txBody>
           <a:bodyPr wrap="square" rtlCol="0" anchor="t"/>
           <a:lstStyle/>
           <a:p>
-            <a:pPr algn="l" indent="0" marL="0">
-              <a:lnSpc>
-                <a:spcPct val="115000"/>
-              </a:lnSpc>
-              <a:buNone/>
-            </a:pPr>
-            <a:r>
-              <a:rPr lang="en-US" sz="1800" b="1" dirty="0">
-                <a:solidFill>
-                  <a:srgbClr val="1F4E9C"/>
-                </a:solidFill>
-                <a:latin typeface="微软雅黑" pitchFamily="34" charset="0"/>
-                <a:ea typeface="微软雅黑" pitchFamily="34" charset="-122"/>
-                <a:cs typeface="微软雅黑" pitchFamily="34" charset="-120"/>
-              </a:rPr>
-              <a:t>•  </a:t>
-            </a:r>
-            <a:pPr algn="l" indent="0" marL="0">
-              <a:lnSpc>
-                <a:spcPct val="115000"/>
-              </a:lnSpc>
-              <a:buNone/>
-            </a:pPr>
-            <a:r>
-              <a:rPr lang="en-US" sz="1800" dirty="0">
-                <a:solidFill>
-                  <a:srgbClr val="000000"/>
-                </a:solidFill>
-              </a:rPr>
-              <a:t>单链表：结点带next，malloc造、指针串、p = p-&gt;next走</a:t>
-            </a:r>
-            <a:endParaRPr lang="en-US" sz="1800" dirty="0"/>
-          </a:p>
-        </p:txBody>
-      </p:sp>
-      <p:sp>
-        <p:nvSpPr>
-          <p:cNvPr id="8" name="Text 6"/>
-          <p:cNvSpPr/>
-          <p:nvPr/>
-        </p:nvSpPr>
-        <p:spPr>
-          <a:xfrm>
-            <a:off x="822960" y="3899916"/>
-            <a:ext cx="10545775" cy="358902"/>
-          </a:xfrm>
-          <a:prstGeom prst="rect">
-            <a:avLst/>
-          </a:prstGeom>
-          <a:noFill/>
-          <a:ln/>
-        </p:spPr>
-        <p:txBody>
-          <a:bodyPr wrap="square" rtlCol="0" anchor="t"/>
-          <a:lstStyle/>
-          <a:p>
-            <a:pPr algn="l" indent="0" marL="0">
+            <a:pPr marL="0" indent="0" algn="l">
               <a:buNone/>
             </a:pPr>
             <a:r>
@@ -4321,11 +4103,11 @@
                 <a:solidFill>
                   <a:srgbClr val="8A9099"/>
                 </a:solidFill>
-                <a:latin typeface="微软雅黑" pitchFamily="34" charset="0"/>
-                <a:ea typeface="微软雅黑" pitchFamily="34" charset="-122"/>
-                <a:cs typeface="微软雅黑" pitchFamily="34" charset="-120"/>
-              </a:rPr>
-              <a:t>强化阶段到此完结；这六节课的工具，是数据结构课全部代码的地基</a:t>
+                <a:latin typeface="微软雅黑" panose="020B0503020204020204" pitchFamily="34" charset="-122"/>
+                <a:ea typeface="微软雅黑" panose="020B0503020204020204" pitchFamily="34" charset="-122"/>
+                <a:cs typeface="微软雅黑" panose="020B0503020204020204" pitchFamily="34" charset="-120"/>
+              </a:rPr>
+              <a:t>参考答案在本PPT最后两页，课后自行对照</a:t>
             </a:r>
             <a:endParaRPr lang="en-US" sz="1500" dirty="0"/>
           </a:p>
@@ -4341,7 +4123,7 @@
 
 <file path=ppt/slides/slide15.xml><?xml version="1.0" encoding="utf-8"?>
 <p:sld xmlns:a="http://schemas.openxmlformats.org/drawingml/2006/main" xmlns:r="http://schemas.openxmlformats.org/officeDocument/2006/relationships" xmlns:p="http://schemas.openxmlformats.org/presentationml/2006/main">
-  <p:cSld name="Slide 15">
+  <p:cSld>
     <p:bg>
       <p:bgPr>
         <a:blipFill dpi="0" rotWithShape="1">
@@ -4385,13 +4167,12 @@
             <a:avLst/>
           </a:prstGeom>
           <a:noFill/>
-          <a:ln/>
         </p:spPr>
         <p:txBody>
           <a:bodyPr wrap="square" rtlCol="0" anchor="ctr"/>
           <a:lstStyle/>
           <a:p>
-            <a:pPr algn="r" indent="0" marL="0">
+            <a:pPr marL="0" indent="0" algn="r">
               <a:buNone/>
             </a:pPr>
             <a:r>
@@ -4399,11 +4180,11 @@
                 <a:solidFill>
                   <a:srgbClr val="8A9099"/>
                 </a:solidFill>
-                <a:latin typeface="微软雅黑" pitchFamily="34" charset="0"/>
-                <a:ea typeface="微软雅黑" pitchFamily="34" charset="-122"/>
-                <a:cs typeface="微软雅黑" pitchFamily="34" charset="-120"/>
-              </a:rPr>
-              <a:t>15 / 17</a:t>
+                <a:latin typeface="微软雅黑" panose="020B0503020204020204" pitchFamily="34" charset="-122"/>
+                <a:ea typeface="微软雅黑" panose="020B0503020204020204" pitchFamily="34" charset="-122"/>
+                <a:cs typeface="微软雅黑" panose="020B0503020204020204" pitchFamily="34" charset="-120"/>
+              </a:rPr>
+              <a:t>15 / 16</a:t>
             </a:r>
             <a:endParaRPr lang="en-US" sz="1000" dirty="0"/>
           </a:p>
@@ -4424,13 +4205,12 @@
             <a:avLst/>
           </a:prstGeom>
           <a:noFill/>
-          <a:ln/>
         </p:spPr>
         <p:txBody>
           <a:bodyPr wrap="square" rtlCol="0" anchor="ctr"/>
           <a:lstStyle/>
           <a:p>
-            <a:pPr algn="l" indent="0" marL="0">
+            <a:pPr marL="0" indent="0" algn="l">
               <a:buNone/>
             </a:pPr>
             <a:r>
@@ -4438,11 +4218,11 @@
                 <a:solidFill>
                   <a:srgbClr val="1F4E9C"/>
                 </a:solidFill>
-                <a:latin typeface="微软雅黑" pitchFamily="34" charset="0"/>
-                <a:ea typeface="微软雅黑" pitchFamily="34" charset="-122"/>
-                <a:cs typeface="微软雅黑" pitchFamily="34" charset="-120"/>
-              </a:rPr>
-              <a:t>课后任务</a:t>
+                <a:latin typeface="微软雅黑" panose="020B0503020204020204" pitchFamily="34" charset="-122"/>
+                <a:ea typeface="微软雅黑" panose="020B0503020204020204" pitchFamily="34" charset="-122"/>
+                <a:cs typeface="微软雅黑" panose="020B0503020204020204" pitchFamily="34" charset="-120"/>
+              </a:rPr>
+              <a:t>参考答案 · 跟练题</a:t>
             </a:r>
             <a:endParaRPr lang="en-US" sz="1400" dirty="0"/>
           </a:p>
@@ -4463,13 +4243,12 @@
             <a:avLst/>
           </a:prstGeom>
           <a:noFill/>
-          <a:ln/>
         </p:spPr>
         <p:txBody>
           <a:bodyPr wrap="square" rtlCol="0" anchor="ctr"/>
           <a:lstStyle/>
           <a:p>
-            <a:pPr algn="l" indent="0" marL="0">
+            <a:pPr marL="0" indent="0" algn="l">
               <a:buNone/>
             </a:pPr>
             <a:r>
@@ -4477,11 +4256,11 @@
                 <a:solidFill>
                   <a:srgbClr val="1F2329"/>
                 </a:solidFill>
-                <a:latin typeface="微软雅黑" pitchFamily="34" charset="0"/>
-                <a:ea typeface="微软雅黑" pitchFamily="34" charset="-122"/>
-                <a:cs typeface="微软雅黑" pitchFamily="34" charset="-120"/>
-              </a:rPr>
-              <a:t>1道跟练 ＋ 1道模仿</a:t>
+                <a:latin typeface="微软雅黑" panose="020B0503020204020204" pitchFamily="34" charset="-122"/>
+                <a:ea typeface="微软雅黑" panose="020B0503020204020204" pitchFamily="34" charset="-122"/>
+                <a:cs typeface="微软雅黑" panose="020B0503020204020204" pitchFamily="34" charset="-120"/>
+              </a:rPr>
+              <a:t>跟练题参考答案（自行对照）</a:t>
             </a:r>
             <a:endParaRPr lang="en-US" sz="2800" dirty="0"/>
           </a:p>
@@ -4489,26 +4268,110 @@
       </p:sp>
       <p:sp>
         <p:nvSpPr>
-          <p:cNvPr id="5" name="Text 3"/>
-          <p:cNvSpPr/>
-          <p:nvPr/>
-        </p:nvSpPr>
-        <p:spPr>
-          <a:xfrm>
-            <a:off x="896112" y="2395728"/>
+          <p:cNvPr id="5" name="Shape 3"/>
+          <p:cNvSpPr/>
+          <p:nvPr/>
+        </p:nvSpPr>
+        <p:spPr>
+          <a:xfrm>
+            <a:off x="822960" y="2395728"/>
+            <a:ext cx="10545775" cy="1984248"/>
+          </a:xfrm>
+          <a:prstGeom prst="rect">
+            <a:avLst/>
+          </a:prstGeom>
+          <a:solidFill>
+            <a:srgbClr val="F7F9FC"/>
+          </a:solidFill>
+        </p:spPr>
+      </p:sp>
+      <p:sp>
+        <p:nvSpPr>
+          <p:cNvPr id="6" name="Shape 4"/>
+          <p:cNvSpPr/>
+          <p:nvPr/>
+        </p:nvSpPr>
+        <p:spPr>
+          <a:xfrm>
+            <a:off x="822960" y="2395728"/>
+            <a:ext cx="50292" cy="1984248"/>
+          </a:xfrm>
+          <a:prstGeom prst="rect">
+            <a:avLst/>
+          </a:prstGeom>
+          <a:solidFill>
+            <a:srgbClr val="1F4E9C"/>
+          </a:solidFill>
+        </p:spPr>
+      </p:sp>
+      <p:sp>
+        <p:nvSpPr>
+          <p:cNvPr id="7" name="Text 5"/>
+          <p:cNvSpPr/>
+          <p:nvPr/>
+        </p:nvSpPr>
+        <p:spPr>
+          <a:xfrm>
+            <a:off x="1078992" y="2505456"/>
+            <a:ext cx="10033711" cy="1764792"/>
+          </a:xfrm>
+          <a:prstGeom prst="rect">
+            <a:avLst/>
+          </a:prstGeom>
+          <a:noFill/>
+        </p:spPr>
+        <p:txBody>
+          <a:bodyPr wrap="square" rtlCol="0" anchor="t"/>
+          <a:lstStyle/>
+          <a:p>
+            <a:pPr marL="0" indent="0" algn="l">
+              <a:lnSpc>
+                <a:spcPct val="125000"/>
+              </a:lnSpc>
+              <a:buNone/>
+            </a:pPr>
+            <a:r>
+              <a:rPr lang="en-US" sz="1400" dirty="0">
+                <a:solidFill>
+                  <a:srgbClr val="1F2329"/>
+                </a:solidFill>
+                <a:latin typeface="Consolas" panose="020B0609020204030204" pitchFamily="34" charset="0"/>
+                <a:ea typeface="Consolas" panose="020B0609020204030204" pitchFamily="34" charset="-122"/>
+                <a:cs typeface="Consolas" panose="020B0609020204030204" pitchFamily="34" charset="-120"/>
+              </a:rPr>
+              <a:t>// 阶乘递归版（fact(5)=120）
+int fact(int n){
+    if (n == 0) return 1;    // 终止条件
+    return n * fact(n - 1);  // 缩小 + 返回
+}
+// 迭代版：result=1; for(i=1;i&lt;=n;i++) result*=i;
+</a:t>
+            </a:r>
+            <a:endParaRPr lang="en-US" sz="1400" dirty="0"/>
+          </a:p>
+        </p:txBody>
+      </p:sp>
+      <p:sp>
+        <p:nvSpPr>
+          <p:cNvPr id="8" name="Text 6"/>
+          <p:cNvSpPr/>
+          <p:nvPr/>
+        </p:nvSpPr>
+        <p:spPr>
+          <a:xfrm>
+            <a:off x="896112" y="4581144"/>
             <a:ext cx="10454335" cy="397764"/>
           </a:xfrm>
           <a:prstGeom prst="rect">
             <a:avLst/>
           </a:prstGeom>
           <a:noFill/>
-          <a:ln/>
         </p:spPr>
         <p:txBody>
           <a:bodyPr wrap="square" rtlCol="0" anchor="t"/>
           <a:lstStyle/>
           <a:p>
-            <a:pPr algn="l" indent="0" marL="0">
+            <a:pPr marL="0" indent="0" algn="l">
               <a:lnSpc>
                 <a:spcPct val="115000"/>
               </a:lnSpc>
@@ -4519,13 +4382,45 @@
                 <a:solidFill>
                   <a:srgbClr val="1F4E9C"/>
                 </a:solidFill>
-                <a:latin typeface="微软雅黑" pitchFamily="34" charset="0"/>
-                <a:ea typeface="微软雅黑" pitchFamily="34" charset="-122"/>
-                <a:cs typeface="微软雅黑" pitchFamily="34" charset="-120"/>
+                <a:latin typeface="微软雅黑" panose="020B0503020204020204" pitchFamily="34" charset="-122"/>
+                <a:ea typeface="微软雅黑" panose="020B0503020204020204" pitchFamily="34" charset="-122"/>
+                <a:cs typeface="微软雅黑" panose="020B0503020204020204" pitchFamily="34" charset="-120"/>
               </a:rPr>
               <a:t>•  </a:t>
             </a:r>
-            <a:pPr algn="l" indent="0" marL="0">
+            <a:r>
+              <a:rPr lang="en-US" sz="1800" dirty="0">
+                <a:solidFill>
+                  <a:srgbClr val="000000"/>
+                </a:solidFill>
+              </a:rPr>
+              <a:t>fact(3)调用栈：3→2→1→0四层展开，返回1、1、2、6</a:t>
+            </a:r>
+            <a:endParaRPr lang="en-US" sz="1800" dirty="0"/>
+          </a:p>
+        </p:txBody>
+      </p:sp>
+      <p:sp>
+        <p:nvSpPr>
+          <p:cNvPr id="9" name="Text 7"/>
+          <p:cNvSpPr/>
+          <p:nvPr/>
+        </p:nvSpPr>
+        <p:spPr>
+          <a:xfrm>
+            <a:off x="896112" y="5052060"/>
+            <a:ext cx="10454335" cy="397764"/>
+          </a:xfrm>
+          <a:prstGeom prst="rect">
+            <a:avLst/>
+          </a:prstGeom>
+          <a:noFill/>
+        </p:spPr>
+        <p:txBody>
+          <a:bodyPr wrap="square" rtlCol="0" anchor="t"/>
+          <a:lstStyle/>
+          <a:p>
+            <a:pPr marL="0" indent="0" algn="l">
               <a:lnSpc>
                 <a:spcPct val="115000"/>
               </a:lnSpc>
@@ -4534,191 +4429,23 @@
             <a:r>
               <a:rPr lang="en-US" sz="1800" b="1" dirty="0">
                 <a:solidFill>
+                  <a:srgbClr val="1F4E9C"/>
+                </a:solidFill>
+                <a:latin typeface="微软雅黑" panose="020B0503020204020204" pitchFamily="34" charset="-122"/>
+                <a:ea typeface="微软雅黑" panose="020B0503020204020204" pitchFamily="34" charset="-122"/>
+                <a:cs typeface="微软雅黑" panose="020B0503020204020204" pitchFamily="34" charset="-120"/>
+              </a:rPr>
+              <a:t>•  </a:t>
+            </a:r>
+            <a:r>
+              <a:rPr lang="en-US" sz="1800" dirty="0">
+                <a:solidFill>
                   <a:srgbClr val="000000"/>
                 </a:solidFill>
               </a:rPr>
-              <a:t>跟练题</a:t>
-            </a:r>
-            <a:pPr algn="l" indent="0" marL="0">
-              <a:lnSpc>
-                <a:spcPct val="115000"/>
-              </a:lnSpc>
-              <a:buNone/>
-            </a:pPr>
-            <a:r>
-              <a:rPr lang="en-US" sz="1800" dirty="0">
-                <a:solidFill>
-                  <a:srgbClr val="000000"/>
-                </a:solidFill>
-              </a:rPr>
-              <a:t>：手写阶乘的递归版与迭代版，都跑通，再把fact(3)的调用栈画一遍</a:t>
+              <a:t>迭代版只用result和i两个变量，空间从头到尾不变</a:t>
             </a:r>
             <a:endParaRPr lang="en-US" sz="1800" dirty="0"/>
-          </a:p>
-        </p:txBody>
-      </p:sp>
-      <p:sp>
-        <p:nvSpPr>
-          <p:cNvPr id="6" name="Text 4"/>
-          <p:cNvSpPr/>
-          <p:nvPr/>
-        </p:nvSpPr>
-        <p:spPr>
-          <a:xfrm>
-            <a:off x="896112" y="2866644"/>
-            <a:ext cx="10454335" cy="740664"/>
-          </a:xfrm>
-          <a:prstGeom prst="rect">
-            <a:avLst/>
-          </a:prstGeom>
-          <a:noFill/>
-          <a:ln/>
-        </p:spPr>
-        <p:txBody>
-          <a:bodyPr wrap="square" rtlCol="0" anchor="t"/>
-          <a:lstStyle/>
-          <a:p>
-            <a:pPr algn="l" indent="0" marL="0">
-              <a:lnSpc>
-                <a:spcPct val="115000"/>
-              </a:lnSpc>
-              <a:buNone/>
-            </a:pPr>
-            <a:r>
-              <a:rPr lang="en-US" sz="1800" b="1" dirty="0">
-                <a:solidFill>
-                  <a:srgbClr val="1F4E9C"/>
-                </a:solidFill>
-                <a:latin typeface="微软雅黑" pitchFamily="34" charset="0"/>
-                <a:ea typeface="微软雅黑" pitchFamily="34" charset="-122"/>
-                <a:cs typeface="微软雅黑" pitchFamily="34" charset="-120"/>
-              </a:rPr>
-              <a:t>•  </a:t>
-            </a:r>
-            <a:pPr algn="l" indent="0" marL="0">
-              <a:lnSpc>
-                <a:spcPct val="115000"/>
-              </a:lnSpc>
-              <a:buNone/>
-            </a:pPr>
-            <a:r>
-              <a:rPr lang="en-US" sz="1800" b="1" dirty="0">
-                <a:solidFill>
-                  <a:srgbClr val="000000"/>
-                </a:solidFill>
-              </a:rPr>
-              <a:t>模仿题</a:t>
-            </a:r>
-            <a:pPr algn="l" indent="0" marL="0">
-              <a:lnSpc>
-                <a:spcPct val="115000"/>
-              </a:lnSpc>
-              <a:buNone/>
-            </a:pPr>
-            <a:r>
-              <a:rPr lang="en-US" sz="1800" dirty="0">
-                <a:solidFill>
-                  <a:srgbClr val="000000"/>
-                </a:solidFill>
-              </a:rPr>
-              <a:t>：malloc三个结点，数据1、2、3，串成链表，用p = p-&gt;next遍历打印</a:t>
-            </a:r>
-            <a:endParaRPr lang="en-US" sz="1800" dirty="0"/>
-          </a:p>
-        </p:txBody>
-      </p:sp>
-      <p:sp>
-        <p:nvSpPr>
-          <p:cNvPr id="7" name="Text 5"/>
-          <p:cNvSpPr/>
-          <p:nvPr/>
-        </p:nvSpPr>
-        <p:spPr>
-          <a:xfrm>
-            <a:off x="896112" y="3680460"/>
-            <a:ext cx="10454335" cy="397764"/>
-          </a:xfrm>
-          <a:prstGeom prst="rect">
-            <a:avLst/>
-          </a:prstGeom>
-          <a:noFill/>
-          <a:ln/>
-        </p:spPr>
-        <p:txBody>
-          <a:bodyPr wrap="square" rtlCol="0" anchor="t"/>
-          <a:lstStyle/>
-          <a:p>
-            <a:pPr algn="l" indent="0" marL="0">
-              <a:lnSpc>
-                <a:spcPct val="115000"/>
-              </a:lnSpc>
-              <a:buNone/>
-            </a:pPr>
-            <a:r>
-              <a:rPr lang="en-US" sz="1800" b="1" dirty="0">
-                <a:solidFill>
-                  <a:srgbClr val="1F4E9C"/>
-                </a:solidFill>
-                <a:latin typeface="微软雅黑" pitchFamily="34" charset="0"/>
-                <a:ea typeface="微软雅黑" pitchFamily="34" charset="-122"/>
-                <a:cs typeface="微软雅黑" pitchFamily="34" charset="-120"/>
-              </a:rPr>
-              <a:t>•  </a:t>
-            </a:r>
-            <a:pPr algn="l" indent="0" marL="0">
-              <a:lnSpc>
-                <a:spcPct val="115000"/>
-              </a:lnSpc>
-              <a:buNone/>
-            </a:pPr>
-            <a:r>
-              <a:rPr lang="en-US" sz="1800" dirty="0">
-                <a:solidFill>
-                  <a:srgbClr val="000000"/>
-                </a:solidFill>
-              </a:rPr>
-              <a:t>要求：顺序表的定义与insert、链表结点定义，合上资料能默写</a:t>
-            </a:r>
-            <a:endParaRPr lang="en-US" sz="1800" dirty="0"/>
-          </a:p>
-        </p:txBody>
-      </p:sp>
-      <p:sp>
-        <p:nvSpPr>
-          <p:cNvPr id="8" name="Text 6"/>
-          <p:cNvSpPr/>
-          <p:nvPr/>
-        </p:nvSpPr>
-        <p:spPr>
-          <a:xfrm>
-            <a:off x="822960" y="4242816"/>
-            <a:ext cx="10545775" cy="358902"/>
-          </a:xfrm>
-          <a:prstGeom prst="rect">
-            <a:avLst/>
-          </a:prstGeom>
-          <a:noFill/>
-          <a:ln/>
-        </p:spPr>
-        <p:txBody>
-          <a:bodyPr wrap="square" rtlCol="0" anchor="t"/>
-          <a:lstStyle/>
-          <a:p>
-            <a:pPr algn="l" indent="0" marL="0">
-              <a:buNone/>
-            </a:pPr>
-            <a:r>
-              <a:rPr lang="en-US" sz="1500" dirty="0">
-                <a:solidFill>
-                  <a:srgbClr val="8A9099"/>
-                </a:solidFill>
-                <a:latin typeface="微软雅黑" pitchFamily="34" charset="0"/>
-                <a:ea typeface="微软雅黑" pitchFamily="34" charset="-122"/>
-                <a:cs typeface="微软雅黑" pitchFamily="34" charset="-120"/>
-              </a:rPr>
-              <a:t>参考答案在本PPT最后两页，课后自行对照</a:t>
-            </a:r>
-            <a:endParaRPr lang="en-US" sz="1500" dirty="0"/>
           </a:p>
         </p:txBody>
       </p:sp>
@@ -4732,7 +4459,7 @@
 
 <file path=ppt/slides/slide16.xml><?xml version="1.0" encoding="utf-8"?>
 <p:sld xmlns:a="http://schemas.openxmlformats.org/drawingml/2006/main" xmlns:r="http://schemas.openxmlformats.org/officeDocument/2006/relationships" xmlns:p="http://schemas.openxmlformats.org/presentationml/2006/main">
-  <p:cSld name="Slide 16">
+  <p:cSld>
     <p:bg>
       <p:bgPr>
         <a:blipFill dpi="0" rotWithShape="1">
@@ -4776,13 +4503,12 @@
             <a:avLst/>
           </a:prstGeom>
           <a:noFill/>
-          <a:ln/>
         </p:spPr>
         <p:txBody>
           <a:bodyPr wrap="square" rtlCol="0" anchor="ctr"/>
           <a:lstStyle/>
           <a:p>
-            <a:pPr algn="r" indent="0" marL="0">
+            <a:pPr marL="0" indent="0" algn="r">
               <a:buNone/>
             </a:pPr>
             <a:r>
@@ -4790,11 +4516,11 @@
                 <a:solidFill>
                   <a:srgbClr val="8A9099"/>
                 </a:solidFill>
-                <a:latin typeface="微软雅黑" pitchFamily="34" charset="0"/>
-                <a:ea typeface="微软雅黑" pitchFamily="34" charset="-122"/>
-                <a:cs typeface="微软雅黑" pitchFamily="34" charset="-120"/>
-              </a:rPr>
-              <a:t>16 / 17</a:t>
+                <a:latin typeface="微软雅黑" panose="020B0503020204020204" pitchFamily="34" charset="-122"/>
+                <a:ea typeface="微软雅黑" panose="020B0503020204020204" pitchFamily="34" charset="-122"/>
+                <a:cs typeface="微软雅黑" panose="020B0503020204020204" pitchFamily="34" charset="-120"/>
+              </a:rPr>
+              <a:t>16 / 16</a:t>
             </a:r>
             <a:endParaRPr lang="en-US" sz="1000" dirty="0"/>
           </a:p>
@@ -4815,13 +4541,12 @@
             <a:avLst/>
           </a:prstGeom>
           <a:noFill/>
-          <a:ln/>
         </p:spPr>
         <p:txBody>
           <a:bodyPr wrap="square" rtlCol="0" anchor="ctr"/>
           <a:lstStyle/>
           <a:p>
-            <a:pPr algn="l" indent="0" marL="0">
+            <a:pPr marL="0" indent="0" algn="l">
               <a:buNone/>
             </a:pPr>
             <a:r>
@@ -4829,11 +4554,11 @@
                 <a:solidFill>
                   <a:srgbClr val="1F4E9C"/>
                 </a:solidFill>
-                <a:latin typeface="微软雅黑" pitchFamily="34" charset="0"/>
-                <a:ea typeface="微软雅黑" pitchFamily="34" charset="-122"/>
-                <a:cs typeface="微软雅黑" pitchFamily="34" charset="-120"/>
-              </a:rPr>
-              <a:t>参考答案 · 跟练题</a:t>
+                <a:latin typeface="微软雅黑" panose="020B0503020204020204" pitchFamily="34" charset="-122"/>
+                <a:ea typeface="微软雅黑" panose="020B0503020204020204" pitchFamily="34" charset="-122"/>
+                <a:cs typeface="微软雅黑" panose="020B0503020204020204" pitchFamily="34" charset="-120"/>
+              </a:rPr>
+              <a:t>参考答案 · 模仿题</a:t>
             </a:r>
             <a:endParaRPr lang="en-US" sz="1400" dirty="0"/>
           </a:p>
@@ -4854,13 +4579,12 @@
             <a:avLst/>
           </a:prstGeom>
           <a:noFill/>
-          <a:ln/>
         </p:spPr>
         <p:txBody>
           <a:bodyPr wrap="square" rtlCol="0" anchor="ctr"/>
           <a:lstStyle/>
           <a:p>
-            <a:pPr algn="l" indent="0" marL="0">
+            <a:pPr marL="0" indent="0" algn="l">
               <a:buNone/>
             </a:pPr>
             <a:r>
@@ -4868,11 +4592,11 @@
                 <a:solidFill>
                   <a:srgbClr val="1F2329"/>
                 </a:solidFill>
-                <a:latin typeface="微软雅黑" pitchFamily="34" charset="0"/>
-                <a:ea typeface="微软雅黑" pitchFamily="34" charset="-122"/>
-                <a:cs typeface="微软雅黑" pitchFamily="34" charset="-120"/>
-              </a:rPr>
-              <a:t>跟练题参考答案（自行对照）</a:t>
+                <a:latin typeface="微软雅黑" panose="020B0503020204020204" pitchFamily="34" charset="-122"/>
+                <a:ea typeface="微软雅黑" panose="020B0503020204020204" pitchFamily="34" charset="-122"/>
+                <a:cs typeface="微软雅黑" panose="020B0503020204020204" pitchFamily="34" charset="-120"/>
+              </a:rPr>
+              <a:t>模仿题参考答案（自行对照）</a:t>
             </a:r>
             <a:endParaRPr lang="en-US" sz="2800" dirty="0"/>
           </a:p>
@@ -4887,7 +4611,7 @@
         <p:spPr>
           <a:xfrm>
             <a:off x="822960" y="2395728"/>
-            <a:ext cx="10545775" cy="1984248"/>
+            <a:ext cx="10545775" cy="2253654"/>
           </a:xfrm>
           <a:prstGeom prst="rect">
             <a:avLst/>
@@ -4895,7 +4619,6 @@
           <a:solidFill>
             <a:srgbClr val="F7F9FC"/>
           </a:solidFill>
-          <a:ln/>
         </p:spPr>
       </p:sp>
       <p:sp>
@@ -4907,7 +4630,7 @@
         <p:spPr>
           <a:xfrm>
             <a:off x="822960" y="2395728"/>
-            <a:ext cx="50292" cy="1984248"/>
+            <a:ext cx="50292" cy="2253654"/>
           </a:xfrm>
           <a:prstGeom prst="rect">
             <a:avLst/>
@@ -4915,7 +4638,6 @@
           <a:solidFill>
             <a:srgbClr val="1F4E9C"/>
           </a:solidFill>
-          <a:ln/>
         </p:spPr>
       </p:sp>
       <p:sp>
@@ -4927,42 +4649,43 @@
         <p:spPr>
           <a:xfrm>
             <a:off x="1078992" y="2505456"/>
-            <a:ext cx="10033711" cy="1764792"/>
-          </a:xfrm>
-          <a:prstGeom prst="rect">
-            <a:avLst/>
-          </a:prstGeom>
-          <a:noFill/>
-          <a:ln/>
+            <a:ext cx="10033711" cy="2034198"/>
+          </a:xfrm>
+          <a:prstGeom prst="rect">
+            <a:avLst/>
+          </a:prstGeom>
+          <a:noFill/>
         </p:spPr>
         <p:txBody>
           <a:bodyPr wrap="square" rtlCol="0" anchor="t"/>
           <a:lstStyle/>
           <a:p>
-            <a:pPr algn="l" indent="0" marL="0">
+            <a:pPr marL="0" indent="0" algn="l">
               <a:lnSpc>
                 <a:spcPct val="125000"/>
               </a:lnSpc>
               <a:buNone/>
             </a:pPr>
             <a:r>
-              <a:rPr lang="en-US" sz="1400" dirty="0">
+              <a:rPr lang="en-US" sz="1200" dirty="0">
                 <a:solidFill>
                   <a:srgbClr val="1F2329"/>
                 </a:solidFill>
-                <a:latin typeface="Consolas" pitchFamily="34" charset="0"/>
-                <a:ea typeface="Consolas" pitchFamily="34" charset="-122"/>
-                <a:cs typeface="Consolas" pitchFamily="34" charset="-120"/>
-              </a:rPr>
-              <a:t>// 阶乘递归版（fact(5)=120）
-int fact(int n){
-    if (n == 0) return 1;    // 终止条件
-    return n * fact(n - 1);  // 缩小 + 返回
-}
-// 迭代版：result=1; for(i=1;i&lt;=n;i++) result*=i;
+                <a:latin typeface="Consolas" panose="020B0609020204030204" pitchFamily="34" charset="0"/>
+                <a:ea typeface="Consolas" panose="020B0609020204030204" pitchFamily="34" charset="-122"/>
+                <a:cs typeface="Consolas" panose="020B0609020204030204" pitchFamily="34" charset="-120"/>
+              </a:rPr>
+              <a:t>// 三结点单链表：造、串、走、还
+struct Node { int data; struct Node *next; };
+struct Node *a = (struct Node *)malloc(sizeof(struct Node));
+// b、c同样造法，判空不能省；data分别填1、2、3
+a-&gt;next = b;  b-&gt;next = c;  c-&gt;next = NULL;
+struct Node *p = a;
+while(p != NULL){ printf("%d ", p-&gt;data); p = p-&gt;next; }
+free(a); free(b); free(c);
 </a:t>
             </a:r>
-            <a:endParaRPr lang="en-US" sz="1400" dirty="0"/>
+            <a:endParaRPr lang="en-US" sz="1200" dirty="0"/>
           </a:p>
         </p:txBody>
       </p:sp>
@@ -4974,107 +4697,142 @@
         </p:nvSpPr>
         <p:spPr>
           <a:xfrm>
-            <a:off x="896112" y="4581144"/>
-            <a:ext cx="10454335" cy="397764"/>
-          </a:xfrm>
-          <a:prstGeom prst="rect">
-            <a:avLst/>
-          </a:prstGeom>
-          <a:noFill/>
-          <a:ln/>
+            <a:off x="896112" y="4850550"/>
+            <a:ext cx="10454335" cy="359664"/>
+          </a:xfrm>
+          <a:prstGeom prst="rect">
+            <a:avLst/>
+          </a:prstGeom>
+          <a:noFill/>
         </p:spPr>
         <p:txBody>
           <a:bodyPr wrap="square" rtlCol="0" anchor="t"/>
           <a:lstStyle/>
           <a:p>
-            <a:pPr algn="l" indent="0" marL="0">
+            <a:pPr marL="0" indent="0" algn="l">
               <a:lnSpc>
                 <a:spcPct val="115000"/>
               </a:lnSpc>
               <a:buNone/>
             </a:pPr>
             <a:r>
-              <a:rPr lang="en-US" sz="1800" b="1" dirty="0">
+              <a:rPr lang="en-US" sz="1600" b="1" dirty="0">
                 <a:solidFill>
                   <a:srgbClr val="1F4E9C"/>
                 </a:solidFill>
-                <a:latin typeface="微软雅黑" pitchFamily="34" charset="0"/>
-                <a:ea typeface="微软雅黑" pitchFamily="34" charset="-122"/>
-                <a:cs typeface="微软雅黑" pitchFamily="34" charset="-120"/>
+                <a:latin typeface="微软雅黑" panose="020B0503020204020204" pitchFamily="34" charset="-122"/>
+                <a:ea typeface="微软雅黑" panose="020B0503020204020204" pitchFamily="34" charset="-122"/>
+                <a:cs typeface="微软雅黑" panose="020B0503020204020204" pitchFamily="34" charset="-120"/>
               </a:rPr>
               <a:t>•  </a:t>
             </a:r>
-            <a:pPr algn="l" indent="0" marL="0">
+            <a:r>
+              <a:rPr lang="en-US" sz="1600" dirty="0">
+                <a:solidFill>
+                  <a:srgbClr val="000000"/>
+                </a:solidFill>
+              </a:rPr>
+              <a:t>输出1 2 3；串联就是前一个的next存后一个的地址，遍历到NULL停</a:t>
+            </a:r>
+            <a:endParaRPr lang="en-US" sz="1600" dirty="0"/>
+          </a:p>
+        </p:txBody>
+      </p:sp>
+      <p:sp>
+        <p:nvSpPr>
+          <p:cNvPr id="9" name="Text 7"/>
+          <p:cNvSpPr/>
+          <p:nvPr/>
+        </p:nvSpPr>
+        <p:spPr>
+          <a:xfrm>
+            <a:off x="896112" y="5283366"/>
+            <a:ext cx="10454335" cy="359664"/>
+          </a:xfrm>
+          <a:prstGeom prst="rect">
+            <a:avLst/>
+          </a:prstGeom>
+          <a:noFill/>
+        </p:spPr>
+        <p:txBody>
+          <a:bodyPr wrap="square" rtlCol="0" anchor="t"/>
+          <a:lstStyle/>
+          <a:p>
+            <a:pPr marL="0" indent="0" algn="l">
               <a:lnSpc>
                 <a:spcPct val="115000"/>
               </a:lnSpc>
               <a:buNone/>
             </a:pPr>
             <a:r>
-              <a:rPr lang="en-US" sz="1800" dirty="0">
+              <a:rPr lang="en-US" sz="1600" b="1" dirty="0">
+                <a:solidFill>
+                  <a:srgbClr val="1F4E9C"/>
+                </a:solidFill>
+                <a:latin typeface="微软雅黑" panose="020B0503020204020204" pitchFamily="34" charset="-122"/>
+                <a:ea typeface="微软雅黑" panose="020B0503020204020204" pitchFamily="34" charset="-122"/>
+                <a:cs typeface="微软雅黑" panose="020B0503020204020204" pitchFamily="34" charset="-120"/>
+              </a:rPr>
+              <a:t>•  </a:t>
+            </a:r>
+            <a:r>
+              <a:rPr lang="en-US" sz="1600" dirty="0">
                 <a:solidFill>
                   <a:srgbClr val="000000"/>
                 </a:solidFill>
               </a:rPr>
-              <a:t>fact(3)调用栈：3→2→1→0四层展开，返回1、1、2、6</a:t>
-            </a:r>
-            <a:endParaRPr lang="en-US" sz="1800" dirty="0"/>
-          </a:p>
-        </p:txBody>
-      </p:sp>
-      <p:sp>
-        <p:nvSpPr>
-          <p:cNvPr id="9" name="Text 7"/>
-          <p:cNvSpPr/>
-          <p:nvPr/>
-        </p:nvSpPr>
-        <p:spPr>
-          <a:xfrm>
-            <a:off x="896112" y="5052060"/>
-            <a:ext cx="10454335" cy="397764"/>
-          </a:xfrm>
-          <a:prstGeom prst="rect">
-            <a:avLst/>
-          </a:prstGeom>
-          <a:noFill/>
-          <a:ln/>
+              <a:t>三个结点都要free，有借有还</a:t>
+            </a:r>
+            <a:endParaRPr lang="en-US" sz="1600" dirty="0"/>
+          </a:p>
+        </p:txBody>
+      </p:sp>
+      <p:sp>
+        <p:nvSpPr>
+          <p:cNvPr id="10" name="Text 8"/>
+          <p:cNvSpPr/>
+          <p:nvPr/>
+        </p:nvSpPr>
+        <p:spPr>
+          <a:xfrm>
+            <a:off x="896112" y="5716182"/>
+            <a:ext cx="10454335" cy="359664"/>
+          </a:xfrm>
+          <a:prstGeom prst="rect">
+            <a:avLst/>
+          </a:prstGeom>
+          <a:noFill/>
         </p:spPr>
         <p:txBody>
           <a:bodyPr wrap="square" rtlCol="0" anchor="t"/>
           <a:lstStyle/>
           <a:p>
-            <a:pPr algn="l" indent="0" marL="0">
+            <a:pPr marL="0" indent="0" algn="l">
               <a:lnSpc>
                 <a:spcPct val="115000"/>
               </a:lnSpc>
               <a:buNone/>
             </a:pPr>
             <a:r>
-              <a:rPr lang="en-US" sz="1800" b="1" dirty="0">
+              <a:rPr lang="en-US" sz="1600" b="1" dirty="0">
                 <a:solidFill>
                   <a:srgbClr val="1F4E9C"/>
                 </a:solidFill>
-                <a:latin typeface="微软雅黑" pitchFamily="34" charset="0"/>
-                <a:ea typeface="微软雅黑" pitchFamily="34" charset="-122"/>
-                <a:cs typeface="微软雅黑" pitchFamily="34" charset="-120"/>
+                <a:latin typeface="微软雅黑" panose="020B0503020204020204" pitchFamily="34" charset="-122"/>
+                <a:ea typeface="微软雅黑" panose="020B0503020204020204" pitchFamily="34" charset="-122"/>
+                <a:cs typeface="微软雅黑" panose="020B0503020204020204" pitchFamily="34" charset="-120"/>
               </a:rPr>
               <a:t>•  </a:t>
             </a:r>
-            <a:pPr algn="l" indent="0" marL="0">
-              <a:lnSpc>
-                <a:spcPct val="115000"/>
-              </a:lnSpc>
-              <a:buNone/>
-            </a:pPr>
-            <a:r>
-              <a:rPr lang="en-US" sz="1800" dirty="0">
+            <a:r>
+              <a:rPr lang="en-US" sz="1600" dirty="0">
                 <a:solidFill>
                   <a:srgbClr val="000000"/>
                 </a:solidFill>
               </a:rPr>
-              <a:t>迭代版只用result和i两个变量，空间从头到尾不变</a:t>
-            </a:r>
-            <a:endParaRPr lang="en-US" sz="1800" dirty="0"/>
+              <a:t>代码省略头文件与main骨架</a:t>
+            </a:r>
+            <a:endParaRPr lang="en-US" sz="1600" dirty="0"/>
           </a:p>
         </p:txBody>
       </p:sp>
@@ -5086,9 +4844,9 @@
 </p:sld>
 </file>
 
-<file path=ppt/slides/slide17.xml><?xml version="1.0" encoding="utf-8"?>
+<file path=ppt/slides/slide2.xml><?xml version="1.0" encoding="utf-8"?>
 <p:sld xmlns:a="http://schemas.openxmlformats.org/drawingml/2006/main" xmlns:r="http://schemas.openxmlformats.org/officeDocument/2006/relationships" xmlns:p="http://schemas.openxmlformats.org/presentationml/2006/main">
-  <p:cSld name="Slide 17">
+  <p:cSld>
     <p:bg>
       <p:bgPr>
         <a:blipFill dpi="0" rotWithShape="1">
@@ -5132,13 +4890,12 @@
             <a:avLst/>
           </a:prstGeom>
           <a:noFill/>
-          <a:ln/>
         </p:spPr>
         <p:txBody>
           <a:bodyPr wrap="square" rtlCol="0" anchor="ctr"/>
           <a:lstStyle/>
           <a:p>
-            <a:pPr algn="r" indent="0" marL="0">
+            <a:pPr marL="0" indent="0" algn="r">
               <a:buNone/>
             </a:pPr>
             <a:r>
@@ -5146,11 +4903,11 @@
                 <a:solidFill>
                   <a:srgbClr val="8A9099"/>
                 </a:solidFill>
-                <a:latin typeface="微软雅黑" pitchFamily="34" charset="0"/>
-                <a:ea typeface="微软雅黑" pitchFamily="34" charset="-122"/>
-                <a:cs typeface="微软雅黑" pitchFamily="34" charset="-120"/>
-              </a:rPr>
-              <a:t>17 / 17</a:t>
+                <a:latin typeface="微软雅黑" panose="020B0503020204020204" pitchFamily="34" charset="-122"/>
+                <a:ea typeface="微软雅黑" panose="020B0503020204020204" pitchFamily="34" charset="-122"/>
+                <a:cs typeface="微软雅黑" panose="020B0503020204020204" pitchFamily="34" charset="-120"/>
+              </a:rPr>
+              <a:t>2 / 16</a:t>
             </a:r>
             <a:endParaRPr lang="en-US" sz="1000" dirty="0"/>
           </a:p>
@@ -5171,13 +4928,12 @@
             <a:avLst/>
           </a:prstGeom>
           <a:noFill/>
-          <a:ln/>
         </p:spPr>
         <p:txBody>
           <a:bodyPr wrap="square" rtlCol="0" anchor="ctr"/>
           <a:lstStyle/>
           <a:p>
-            <a:pPr algn="l" indent="0" marL="0">
+            <a:pPr marL="0" indent="0" algn="l">
               <a:buNone/>
             </a:pPr>
             <a:r>
@@ -5185,11 +4941,11 @@
                 <a:solidFill>
                   <a:srgbClr val="1F4E9C"/>
                 </a:solidFill>
-                <a:latin typeface="微软雅黑" pitchFamily="34" charset="0"/>
-                <a:ea typeface="微软雅黑" pitchFamily="34" charset="-122"/>
-                <a:cs typeface="微软雅黑" pitchFamily="34" charset="-120"/>
-              </a:rPr>
-              <a:t>参考答案 · 模仿题</a:t>
+                <a:latin typeface="微软雅黑" panose="020B0503020204020204" pitchFamily="34" charset="-122"/>
+                <a:ea typeface="微软雅黑" panose="020B0503020204020204" pitchFamily="34" charset="-122"/>
+                <a:cs typeface="微软雅黑" panose="020B0503020204020204" pitchFamily="34" charset="-120"/>
+              </a:rPr>
+              <a:t>引题</a:t>
             </a:r>
             <a:endParaRPr lang="en-US" sz="1400" dirty="0"/>
           </a:p>
@@ -5210,13 +4966,12 @@
             <a:avLst/>
           </a:prstGeom>
           <a:noFill/>
-          <a:ln/>
         </p:spPr>
         <p:txBody>
           <a:bodyPr wrap="square" rtlCol="0" anchor="ctr"/>
           <a:lstStyle/>
           <a:p>
-            <a:pPr algn="l" indent="0" marL="0">
+            <a:pPr marL="0" indent="0" algn="l">
               <a:buNone/>
             </a:pPr>
             <a:r>
@@ -5224,11 +4979,11 @@
                 <a:solidFill>
                   <a:srgbClr val="1F2329"/>
                 </a:solidFill>
-                <a:latin typeface="微软雅黑" pitchFamily="34" charset="0"/>
-                <a:ea typeface="微软雅黑" pitchFamily="34" charset="-122"/>
-                <a:cs typeface="微软雅黑" pitchFamily="34" charset="-120"/>
-              </a:rPr>
-              <a:t>模仿题参考答案（自行对照）</a:t>
+                <a:latin typeface="微软雅黑" panose="020B0503020204020204" pitchFamily="34" charset="-122"/>
+                <a:ea typeface="微软雅黑" panose="020B0503020204020204" pitchFamily="34" charset="-122"/>
+                <a:cs typeface="微软雅黑" panose="020B0503020204020204" pitchFamily="34" charset="-120"/>
+              </a:rPr>
+              <a:t>函数调用自己，允许吗</a:t>
             </a:r>
             <a:endParaRPr lang="en-US" sz="2800" dirty="0"/>
           </a:p>
@@ -5243,7 +4998,7 @@
         <p:spPr>
           <a:xfrm>
             <a:off x="822960" y="2395728"/>
-            <a:ext cx="10545775" cy="2253654"/>
+            <a:ext cx="10545775" cy="1508760"/>
           </a:xfrm>
           <a:prstGeom prst="rect">
             <a:avLst/>
@@ -5251,7 +5006,6 @@
           <a:solidFill>
             <a:srgbClr val="F7F9FC"/>
           </a:solidFill>
-          <a:ln/>
         </p:spPr>
       </p:sp>
       <p:sp>
@@ -5263,7 +5017,7 @@
         <p:spPr>
           <a:xfrm>
             <a:off x="822960" y="2395728"/>
-            <a:ext cx="50292" cy="2253654"/>
+            <a:ext cx="50292" cy="1508760"/>
           </a:xfrm>
           <a:prstGeom prst="rect">
             <a:avLst/>
@@ -5271,7 +5025,6 @@
           <a:solidFill>
             <a:srgbClr val="1F4E9C"/>
           </a:solidFill>
-          <a:ln/>
         </p:spPr>
       </p:sp>
       <p:sp>
@@ -5283,44 +5036,39 @@
         <p:spPr>
           <a:xfrm>
             <a:off x="1078992" y="2505456"/>
-            <a:ext cx="10033711" cy="2034198"/>
-          </a:xfrm>
-          <a:prstGeom prst="rect">
-            <a:avLst/>
-          </a:prstGeom>
-          <a:noFill/>
-          <a:ln/>
+            <a:ext cx="10033711" cy="1289304"/>
+          </a:xfrm>
+          <a:prstGeom prst="rect">
+            <a:avLst/>
+          </a:prstGeom>
+          <a:noFill/>
         </p:spPr>
         <p:txBody>
           <a:bodyPr wrap="square" rtlCol="0" anchor="t"/>
           <a:lstStyle/>
           <a:p>
-            <a:pPr algn="l" indent="0" marL="0">
+            <a:pPr marL="0" indent="0" algn="l">
               <a:lnSpc>
                 <a:spcPct val="125000"/>
               </a:lnSpc>
               <a:buNone/>
             </a:pPr>
             <a:r>
-              <a:rPr lang="en-US" sz="1200" dirty="0">
+              <a:rPr lang="en-US" sz="1400" dirty="0">
                 <a:solidFill>
                   <a:srgbClr val="1F2329"/>
                 </a:solidFill>
-                <a:latin typeface="Consolas" pitchFamily="34" charset="0"/>
-                <a:ea typeface="Consolas" pitchFamily="34" charset="-122"/>
-                <a:cs typeface="Consolas" pitchFamily="34" charset="-120"/>
-              </a:rPr>
-              <a:t>// 三结点单链表：造、串、走、还
-struct Node { int data; struct Node *next; };
-struct Node *a = (struct Node *)malloc(sizeof(struct Node));
-// b、c同样造法，判空不能省；data分别填1、2、3
-a-&gt;next = b;  b-&gt;next = c;  c-&gt;next = NULL;
-struct Node *p = a;
-while(p != NULL){ printf("%d ", p-&gt;data); p = p-&gt;next; }
-free(a); free(b); free(c);
+                <a:latin typeface="Consolas" panose="020B0609020204030204" pitchFamily="34" charset="0"/>
+                <a:ea typeface="Consolas" panose="020B0609020204030204" pitchFamily="34" charset="-122"/>
+                <a:cs typeface="Consolas" panose="020B0609020204030204" pitchFamily="34" charset="-120"/>
+              </a:rPr>
+              <a:t>void countdown(int n){
+    printf("%d ", n);
+    countdown(n - 1);      // 函数调用自己
+}
 </a:t>
             </a:r>
-            <a:endParaRPr lang="en-US" sz="1200" dirty="0"/>
+            <a:endParaRPr lang="en-US" sz="1400" dirty="0"/>
           </a:p>
         </p:txBody>
       </p:sp>
@@ -5332,163 +5080,158 @@
         </p:nvSpPr>
         <p:spPr>
           <a:xfrm>
-            <a:off x="896112" y="4850550"/>
-            <a:ext cx="10454335" cy="359664"/>
-          </a:xfrm>
-          <a:prstGeom prst="rect">
-            <a:avLst/>
-          </a:prstGeom>
-          <a:noFill/>
-          <a:ln/>
+            <a:off x="896112" y="4105656"/>
+            <a:ext cx="10454335" cy="397764"/>
+          </a:xfrm>
+          <a:prstGeom prst="rect">
+            <a:avLst/>
+          </a:prstGeom>
+          <a:noFill/>
         </p:spPr>
         <p:txBody>
           <a:bodyPr wrap="square" rtlCol="0" anchor="t"/>
           <a:lstStyle/>
           <a:p>
-            <a:pPr algn="l" indent="0" marL="0">
+            <a:pPr marL="0" indent="0" algn="l">
               <a:lnSpc>
                 <a:spcPct val="115000"/>
               </a:lnSpc>
               <a:buNone/>
             </a:pPr>
             <a:r>
-              <a:rPr lang="en-US" sz="1600" b="1" dirty="0">
+              <a:rPr lang="en-US" sz="1800" b="1" dirty="0">
                 <a:solidFill>
                   <a:srgbClr val="1F4E9C"/>
                 </a:solidFill>
-                <a:latin typeface="微软雅黑" pitchFamily="34" charset="0"/>
-                <a:ea typeface="微软雅黑" pitchFamily="34" charset="-122"/>
-                <a:cs typeface="微软雅黑" pitchFamily="34" charset="-120"/>
+                <a:latin typeface="微软雅黑" panose="020B0503020204020204" pitchFamily="34" charset="-122"/>
+                <a:ea typeface="微软雅黑" panose="020B0503020204020204" pitchFamily="34" charset="-122"/>
+                <a:cs typeface="微软雅黑" panose="020B0503020204020204" pitchFamily="34" charset="-120"/>
               </a:rPr>
               <a:t>•  </a:t>
             </a:r>
-            <a:pPr algn="l" indent="0" marL="0">
+            <a:r>
+              <a:rPr lang="en-US" sz="1800" dirty="0">
+                <a:solidFill>
+                  <a:srgbClr val="000000"/>
+                </a:solidFill>
+              </a:rPr>
+              <a:t>允许，这叫</a:t>
+            </a:r>
+            <a:r>
+              <a:rPr lang="en-US" sz="1800" b="1" dirty="0">
+                <a:solidFill>
+                  <a:srgbClr val="000000"/>
+                </a:solidFill>
+              </a:rPr>
+              <a:t>递归</a:t>
+            </a:r>
+            <a:r>
+              <a:rPr lang="en-US" sz="1800" dirty="0">
+                <a:solidFill>
+                  <a:srgbClr val="000000"/>
+                </a:solidFill>
+              </a:rPr>
+              <a:t>：函数自己调自己</a:t>
+            </a:r>
+            <a:endParaRPr lang="en-US" sz="1800" dirty="0"/>
+          </a:p>
+        </p:txBody>
+      </p:sp>
+      <p:sp>
+        <p:nvSpPr>
+          <p:cNvPr id="9" name="Text 7"/>
+          <p:cNvSpPr/>
+          <p:nvPr/>
+        </p:nvSpPr>
+        <p:spPr>
+          <a:xfrm>
+            <a:off x="896112" y="4576572"/>
+            <a:ext cx="10454335" cy="397764"/>
+          </a:xfrm>
+          <a:prstGeom prst="rect">
+            <a:avLst/>
+          </a:prstGeom>
+          <a:noFill/>
+        </p:spPr>
+        <p:txBody>
+          <a:bodyPr wrap="square" rtlCol="0" anchor="t"/>
+          <a:lstStyle/>
+          <a:p>
+            <a:pPr marL="0" indent="0" algn="l">
               <a:lnSpc>
                 <a:spcPct val="115000"/>
               </a:lnSpc>
               <a:buNone/>
             </a:pPr>
             <a:r>
-              <a:rPr lang="en-US" sz="1600" dirty="0">
+              <a:rPr lang="en-US" sz="1800" b="1" dirty="0">
+                <a:solidFill>
+                  <a:srgbClr val="1F4E9C"/>
+                </a:solidFill>
+                <a:latin typeface="微软雅黑" panose="020B0503020204020204" pitchFamily="34" charset="-122"/>
+                <a:ea typeface="微软雅黑" panose="020B0503020204020204" pitchFamily="34" charset="-122"/>
+                <a:cs typeface="微软雅黑" panose="020B0503020204020204" pitchFamily="34" charset="-120"/>
+              </a:rPr>
+              <a:t>•  </a:t>
+            </a:r>
+            <a:r>
+              <a:rPr lang="en-US" sz="1800" dirty="0">
                 <a:solidFill>
                   <a:srgbClr val="000000"/>
                 </a:solidFill>
               </a:rPr>
-              <a:t>输出1 2 3；串联就是前一个的next存后一个的地址，遍历到NULL停</a:t>
-            </a:r>
-            <a:endParaRPr lang="en-US" sz="1600" dirty="0"/>
-          </a:p>
-        </p:txBody>
-      </p:sp>
-      <p:sp>
-        <p:nvSpPr>
-          <p:cNvPr id="9" name="Text 7"/>
-          <p:cNvSpPr/>
-          <p:nvPr/>
-        </p:nvSpPr>
-        <p:spPr>
-          <a:xfrm>
-            <a:off x="896112" y="5283366"/>
-            <a:ext cx="10454335" cy="359664"/>
-          </a:xfrm>
-          <a:prstGeom prst="rect">
-            <a:avLst/>
-          </a:prstGeom>
-          <a:noFill/>
-          <a:ln/>
+              <a:t>但这段代码有问题：它永远停不下来</a:t>
+            </a:r>
+            <a:endParaRPr lang="en-US" sz="1800" dirty="0"/>
+          </a:p>
+        </p:txBody>
+      </p:sp>
+      <p:sp>
+        <p:nvSpPr>
+          <p:cNvPr id="10" name="Text 8"/>
+          <p:cNvSpPr/>
+          <p:nvPr/>
+        </p:nvSpPr>
+        <p:spPr>
+          <a:xfrm>
+            <a:off x="896112" y="5047488"/>
+            <a:ext cx="10454335" cy="397764"/>
+          </a:xfrm>
+          <a:prstGeom prst="rect">
+            <a:avLst/>
+          </a:prstGeom>
+          <a:noFill/>
         </p:spPr>
         <p:txBody>
           <a:bodyPr wrap="square" rtlCol="0" anchor="t"/>
           <a:lstStyle/>
           <a:p>
-            <a:pPr algn="l" indent="0" marL="0">
+            <a:pPr marL="0" indent="0" algn="l">
               <a:lnSpc>
                 <a:spcPct val="115000"/>
               </a:lnSpc>
               <a:buNone/>
             </a:pPr>
             <a:r>
-              <a:rPr lang="en-US" sz="1600" b="1" dirty="0">
+              <a:rPr lang="en-US" sz="1800" b="1" dirty="0">
                 <a:solidFill>
                   <a:srgbClr val="1F4E9C"/>
                 </a:solidFill>
-                <a:latin typeface="微软雅黑" pitchFamily="34" charset="0"/>
-                <a:ea typeface="微软雅黑" pitchFamily="34" charset="-122"/>
-                <a:cs typeface="微软雅黑" pitchFamily="34" charset="-120"/>
+                <a:latin typeface="微软雅黑" panose="020B0503020204020204" pitchFamily="34" charset="-122"/>
+                <a:ea typeface="微软雅黑" panose="020B0503020204020204" pitchFamily="34" charset="-122"/>
+                <a:cs typeface="微软雅黑" panose="020B0503020204020204" pitchFamily="34" charset="-120"/>
               </a:rPr>
               <a:t>•  </a:t>
             </a:r>
-            <a:pPr algn="l" indent="0" marL="0">
-              <a:lnSpc>
-                <a:spcPct val="115000"/>
-              </a:lnSpc>
-              <a:buNone/>
-            </a:pPr>
-            <a:r>
-              <a:rPr lang="en-US" sz="1600" dirty="0">
+            <a:r>
+              <a:rPr lang="en-US" sz="1800" dirty="0">
                 <a:solidFill>
                   <a:srgbClr val="000000"/>
                 </a:solidFill>
               </a:rPr>
-              <a:t>三个结点都要free，有借有还</a:t>
-            </a:r>
-            <a:endParaRPr lang="en-US" sz="1600" dirty="0"/>
-          </a:p>
-        </p:txBody>
-      </p:sp>
-      <p:sp>
-        <p:nvSpPr>
-          <p:cNvPr id="10" name="Text 8"/>
-          <p:cNvSpPr/>
-          <p:nvPr/>
-        </p:nvSpPr>
-        <p:spPr>
-          <a:xfrm>
-            <a:off x="896112" y="5716182"/>
-            <a:ext cx="10454335" cy="359664"/>
-          </a:xfrm>
-          <a:prstGeom prst="rect">
-            <a:avLst/>
-          </a:prstGeom>
-          <a:noFill/>
-          <a:ln/>
-        </p:spPr>
-        <p:txBody>
-          <a:bodyPr wrap="square" rtlCol="0" anchor="t"/>
-          <a:lstStyle/>
-          <a:p>
-            <a:pPr algn="l" indent="0" marL="0">
-              <a:lnSpc>
-                <a:spcPct val="115000"/>
-              </a:lnSpc>
-              <a:buNone/>
-            </a:pPr>
-            <a:r>
-              <a:rPr lang="en-US" sz="1600" b="1" dirty="0">
-                <a:solidFill>
-                  <a:srgbClr val="1F4E9C"/>
-                </a:solidFill>
-                <a:latin typeface="微软雅黑" pitchFamily="34" charset="0"/>
-                <a:ea typeface="微软雅黑" pitchFamily="34" charset="-122"/>
-                <a:cs typeface="微软雅黑" pitchFamily="34" charset="-120"/>
-              </a:rPr>
-              <a:t>•  </a:t>
-            </a:r>
-            <a:pPr algn="l" indent="0" marL="0">
-              <a:lnSpc>
-                <a:spcPct val="115000"/>
-              </a:lnSpc>
-              <a:buNone/>
-            </a:pPr>
-            <a:r>
-              <a:rPr lang="en-US" sz="1600" dirty="0">
-                <a:solidFill>
-                  <a:srgbClr val="000000"/>
-                </a:solidFill>
-              </a:rPr>
-              <a:t>代码省略头文件与main骨架</a:t>
-            </a:r>
-            <a:endParaRPr lang="en-US" sz="1600" dirty="0"/>
+              <a:t>本节目标：学会递归的三要素，看懂调用栈，最后从零手写顺序表和单链表</a:t>
+            </a:r>
+            <a:endParaRPr lang="en-US" sz="1800" dirty="0"/>
           </a:p>
         </p:txBody>
       </p:sp>
@@ -5500,9 +5243,9 @@
 </p:sld>
 </file>
 
-<file path=ppt/slides/slide2.xml><?xml version="1.0" encoding="utf-8"?>
+<file path=ppt/slides/slide3.xml><?xml version="1.0" encoding="utf-8"?>
 <p:sld xmlns:a="http://schemas.openxmlformats.org/drawingml/2006/main" xmlns:r="http://schemas.openxmlformats.org/officeDocument/2006/relationships" xmlns:p="http://schemas.openxmlformats.org/presentationml/2006/main">
-  <p:cSld name="Slide 2">
+  <p:cSld>
     <p:bg>
       <p:bgPr>
         <a:blipFill dpi="0" rotWithShape="1">
@@ -5546,13 +5289,12 @@
             <a:avLst/>
           </a:prstGeom>
           <a:noFill/>
-          <a:ln/>
         </p:spPr>
         <p:txBody>
           <a:bodyPr wrap="square" rtlCol="0" anchor="ctr"/>
           <a:lstStyle/>
           <a:p>
-            <a:pPr algn="r" indent="0" marL="0">
+            <a:pPr marL="0" indent="0" algn="r">
               <a:buNone/>
             </a:pPr>
             <a:r>
@@ -5560,11 +5302,11 @@
                 <a:solidFill>
                   <a:srgbClr val="8A9099"/>
                 </a:solidFill>
-                <a:latin typeface="微软雅黑" pitchFamily="34" charset="0"/>
-                <a:ea typeface="微软雅黑" pitchFamily="34" charset="-122"/>
-                <a:cs typeface="微软雅黑" pitchFamily="34" charset="-120"/>
-              </a:rPr>
-              <a:t>2 / 17</a:t>
+                <a:latin typeface="微软雅黑" panose="020B0503020204020204" pitchFamily="34" charset="-122"/>
+                <a:ea typeface="微软雅黑" panose="020B0503020204020204" pitchFamily="34" charset="-122"/>
+                <a:cs typeface="微软雅黑" panose="020B0503020204020204" pitchFamily="34" charset="-120"/>
+              </a:rPr>
+              <a:t>3 / 16</a:t>
             </a:r>
             <a:endParaRPr lang="en-US" sz="1000" dirty="0"/>
           </a:p>
@@ -5585,13 +5327,12 @@
             <a:avLst/>
           </a:prstGeom>
           <a:noFill/>
-          <a:ln/>
         </p:spPr>
         <p:txBody>
           <a:bodyPr wrap="square" rtlCol="0" anchor="ctr"/>
           <a:lstStyle/>
           <a:p>
-            <a:pPr algn="l" indent="0" marL="0">
+            <a:pPr marL="0" indent="0" algn="l">
               <a:buNone/>
             </a:pPr>
             <a:r>
@@ -5599,11 +5340,11 @@
                 <a:solidFill>
                   <a:srgbClr val="1F4E9C"/>
                 </a:solidFill>
-                <a:latin typeface="微软雅黑" pitchFamily="34" charset="0"/>
-                <a:ea typeface="微软雅黑" pitchFamily="34" charset="-122"/>
-                <a:cs typeface="微软雅黑" pitchFamily="34" charset="-120"/>
-              </a:rPr>
-              <a:t>引题</a:t>
+                <a:latin typeface="微软雅黑" panose="020B0503020204020204" pitchFamily="34" charset="-122"/>
+                <a:ea typeface="微软雅黑" panose="020B0503020204020204" pitchFamily="34" charset="-122"/>
+                <a:cs typeface="微软雅黑" panose="020B0503020204020204" pitchFamily="34" charset="-120"/>
+              </a:rPr>
+              <a:t>递归三要素</a:t>
             </a:r>
             <a:endParaRPr lang="en-US" sz="1400" dirty="0"/>
           </a:p>
@@ -5624,13 +5365,12 @@
             <a:avLst/>
           </a:prstGeom>
           <a:noFill/>
-          <a:ln/>
         </p:spPr>
         <p:txBody>
           <a:bodyPr wrap="square" rtlCol="0" anchor="ctr"/>
           <a:lstStyle/>
           <a:p>
-            <a:pPr algn="l" indent="0" marL="0">
+            <a:pPr marL="0" indent="0" algn="l">
               <a:buNone/>
             </a:pPr>
             <a:r>
@@ -5638,11 +5378,11 @@
                 <a:solidFill>
                   <a:srgbClr val="1F2329"/>
                 </a:solidFill>
-                <a:latin typeface="微软雅黑" pitchFamily="34" charset="0"/>
-                <a:ea typeface="微软雅黑" pitchFamily="34" charset="-122"/>
-                <a:cs typeface="微软雅黑" pitchFamily="34" charset="-120"/>
-              </a:rPr>
-              <a:t>函数调用自己，允许吗</a:t>
+                <a:latin typeface="微软雅黑" panose="020B0503020204020204" pitchFamily="34" charset="-122"/>
+                <a:ea typeface="微软雅黑" panose="020B0503020204020204" pitchFamily="34" charset="-122"/>
+                <a:cs typeface="微软雅黑" panose="020B0503020204020204" pitchFamily="34" charset="-120"/>
+              </a:rPr>
+              <a:t>递归三要素：终止、缩小、返回</a:t>
             </a:r>
             <a:endParaRPr lang="en-US" sz="2800" dirty="0"/>
           </a:p>
@@ -5665,7 +5405,6 @@
           <a:solidFill>
             <a:srgbClr val="F7F9FC"/>
           </a:solidFill>
-          <a:ln/>
         </p:spPr>
       </p:sp>
       <p:sp>
@@ -5685,7 +5424,6 @@
           <a:solidFill>
             <a:srgbClr val="1F4E9C"/>
           </a:solidFill>
-          <a:ln/>
         </p:spPr>
       </p:sp>
       <p:sp>
@@ -5703,13 +5441,12 @@
             <a:avLst/>
           </a:prstGeom>
           <a:noFill/>
-          <a:ln/>
         </p:spPr>
         <p:txBody>
           <a:bodyPr wrap="square" rtlCol="0" anchor="t"/>
           <a:lstStyle/>
           <a:p>
-            <a:pPr algn="l" indent="0" marL="0">
+            <a:pPr marL="0" indent="0" algn="l">
               <a:lnSpc>
                 <a:spcPct val="125000"/>
               </a:lnSpc>
@@ -5720,13 +5457,13 @@
                 <a:solidFill>
                   <a:srgbClr val="1F2329"/>
                 </a:solidFill>
-                <a:latin typeface="Consolas" pitchFamily="34" charset="0"/>
-                <a:ea typeface="Consolas" pitchFamily="34" charset="-122"/>
-                <a:cs typeface="Consolas" pitchFamily="34" charset="-120"/>
-              </a:rPr>
-              <a:t>void countdown(int n){
-    printf("%d ", n);
-    countdown(n - 1);      // 函数调用自己
+                <a:latin typeface="Consolas" panose="020B0609020204030204" pitchFamily="34" charset="0"/>
+                <a:ea typeface="Consolas" panose="020B0609020204030204" pitchFamily="34" charset="-122"/>
+                <a:cs typeface="Consolas" panose="020B0609020204030204" pitchFamily="34" charset="-120"/>
+              </a:rPr>
+              <a:t>int fact(int n){           // 求n的阶乘
+    if (n == 0) return 1;  // ① 终止条件
+    return n * fact(n - 1);// ② 缩小规模 ③ 返回结果
 }
 </a:t>
             </a:r>
@@ -5749,13 +5486,12 @@
             <a:avLst/>
           </a:prstGeom>
           <a:noFill/>
-          <a:ln/>
         </p:spPr>
         <p:txBody>
           <a:bodyPr wrap="square" rtlCol="0" anchor="t"/>
           <a:lstStyle/>
           <a:p>
-            <a:pPr algn="l" indent="0" marL="0">
+            <a:pPr marL="0" indent="0" algn="l">
               <a:lnSpc>
                 <a:spcPct val="115000"/>
               </a:lnSpc>
@@ -5766,27 +5502,94 @@
                 <a:solidFill>
                   <a:srgbClr val="1F4E9C"/>
                 </a:solidFill>
-                <a:latin typeface="微软雅黑" pitchFamily="34" charset="0"/>
-                <a:ea typeface="微软雅黑" pitchFamily="34" charset="-122"/>
-                <a:cs typeface="微软雅黑" pitchFamily="34" charset="-120"/>
+                <a:latin typeface="微软雅黑" panose="020B0503020204020204" pitchFamily="34" charset="-122"/>
+                <a:ea typeface="微软雅黑" panose="020B0503020204020204" pitchFamily="34" charset="-122"/>
+                <a:cs typeface="微软雅黑" panose="020B0503020204020204" pitchFamily="34" charset="-120"/>
               </a:rPr>
               <a:t>•  </a:t>
             </a:r>
-            <a:pPr algn="l" indent="0" marL="0">
+            <a:r>
+              <a:rPr lang="en-US" sz="1800" dirty="0">
+                <a:solidFill>
+                  <a:srgbClr val="000000"/>
+                </a:solidFill>
+              </a:rPr>
+              <a:t>终止条件：什么时候不再调用自己，没有它就是无底洞</a:t>
+            </a:r>
+            <a:endParaRPr lang="en-US" sz="1800" dirty="0"/>
+          </a:p>
+        </p:txBody>
+      </p:sp>
+      <p:sp>
+        <p:nvSpPr>
+          <p:cNvPr id="9" name="Text 7"/>
+          <p:cNvSpPr/>
+          <p:nvPr/>
+        </p:nvSpPr>
+        <p:spPr>
+          <a:xfrm>
+            <a:off x="896112" y="4576572"/>
+            <a:ext cx="10454335" cy="397764"/>
+          </a:xfrm>
+          <a:prstGeom prst="rect">
+            <a:avLst/>
+          </a:prstGeom>
+          <a:noFill/>
+        </p:spPr>
+        <p:txBody>
+          <a:bodyPr wrap="square" rtlCol="0" anchor="t"/>
+          <a:lstStyle/>
+          <a:p>
+            <a:pPr marL="0" indent="0" algn="l">
               <a:lnSpc>
                 <a:spcPct val="115000"/>
               </a:lnSpc>
               <a:buNone/>
             </a:pPr>
             <a:r>
+              <a:rPr lang="en-US" sz="1800" b="1" dirty="0">
+                <a:solidFill>
+                  <a:srgbClr val="1F4E9C"/>
+                </a:solidFill>
+                <a:latin typeface="微软雅黑" panose="020B0503020204020204" pitchFamily="34" charset="-122"/>
+                <a:ea typeface="微软雅黑" panose="020B0503020204020204" pitchFamily="34" charset="-122"/>
+                <a:cs typeface="微软雅黑" panose="020B0503020204020204" pitchFamily="34" charset="-120"/>
+              </a:rPr>
+              <a:t>•  </a:t>
+            </a:r>
+            <a:r>
               <a:rPr lang="en-US" sz="1800" dirty="0">
                 <a:solidFill>
                   <a:srgbClr val="000000"/>
                 </a:solidFill>
               </a:rPr>
-              <a:t>允许，这叫</a:t>
-            </a:r>
-            <a:pPr algn="l" indent="0" marL="0">
+              <a:t>缩小规模：每次调用都要离终止更近一步</a:t>
+            </a:r>
+            <a:endParaRPr lang="en-US" sz="1800" dirty="0"/>
+          </a:p>
+        </p:txBody>
+      </p:sp>
+      <p:sp>
+        <p:nvSpPr>
+          <p:cNvPr id="10" name="Text 8"/>
+          <p:cNvSpPr/>
+          <p:nvPr/>
+        </p:nvSpPr>
+        <p:spPr>
+          <a:xfrm>
+            <a:off x="896112" y="5047488"/>
+            <a:ext cx="10454335" cy="397764"/>
+          </a:xfrm>
+          <a:prstGeom prst="rect">
+            <a:avLst/>
+          </a:prstGeom>
+          <a:noFill/>
+        </p:spPr>
+        <p:txBody>
+          <a:bodyPr wrap="square" rtlCol="0" anchor="t"/>
+          <a:lstStyle/>
+          <a:p>
+            <a:pPr marL="0" indent="0" algn="l">
               <a:lnSpc>
                 <a:spcPct val="115000"/>
               </a:lnSpc>
@@ -5795,136 +5598,21 @@
             <a:r>
               <a:rPr lang="en-US" sz="1800" b="1" dirty="0">
                 <a:solidFill>
+                  <a:srgbClr val="1F4E9C"/>
+                </a:solidFill>
+                <a:latin typeface="微软雅黑" panose="020B0503020204020204" pitchFamily="34" charset="-122"/>
+                <a:ea typeface="微软雅黑" panose="020B0503020204020204" pitchFamily="34" charset="-122"/>
+                <a:cs typeface="微软雅黑" panose="020B0503020204020204" pitchFamily="34" charset="-120"/>
+              </a:rPr>
+              <a:t>•  </a:t>
+            </a:r>
+            <a:r>
+              <a:rPr lang="en-US" sz="1800" dirty="0">
+                <a:solidFill>
                   <a:srgbClr val="000000"/>
                 </a:solidFill>
               </a:rPr>
-              <a:t>递归</a:t>
-            </a:r>
-            <a:pPr algn="l" indent="0" marL="0">
-              <a:lnSpc>
-                <a:spcPct val="115000"/>
-              </a:lnSpc>
-              <a:buNone/>
-            </a:pPr>
-            <a:r>
-              <a:rPr lang="en-US" sz="1800" dirty="0">
-                <a:solidFill>
-                  <a:srgbClr val="000000"/>
-                </a:solidFill>
-              </a:rPr>
-              <a:t>：函数自己调自己</a:t>
-            </a:r>
-            <a:endParaRPr lang="en-US" sz="1800" dirty="0"/>
-          </a:p>
-        </p:txBody>
-      </p:sp>
-      <p:sp>
-        <p:nvSpPr>
-          <p:cNvPr id="9" name="Text 7"/>
-          <p:cNvSpPr/>
-          <p:nvPr/>
-        </p:nvSpPr>
-        <p:spPr>
-          <a:xfrm>
-            <a:off x="896112" y="4576572"/>
-            <a:ext cx="10454335" cy="397764"/>
-          </a:xfrm>
-          <a:prstGeom prst="rect">
-            <a:avLst/>
-          </a:prstGeom>
-          <a:noFill/>
-          <a:ln/>
-        </p:spPr>
-        <p:txBody>
-          <a:bodyPr wrap="square" rtlCol="0" anchor="t"/>
-          <a:lstStyle/>
-          <a:p>
-            <a:pPr algn="l" indent="0" marL="0">
-              <a:lnSpc>
-                <a:spcPct val="115000"/>
-              </a:lnSpc>
-              <a:buNone/>
-            </a:pPr>
-            <a:r>
-              <a:rPr lang="en-US" sz="1800" b="1" dirty="0">
-                <a:solidFill>
-                  <a:srgbClr val="1F4E9C"/>
-                </a:solidFill>
-                <a:latin typeface="微软雅黑" pitchFamily="34" charset="0"/>
-                <a:ea typeface="微软雅黑" pitchFamily="34" charset="-122"/>
-                <a:cs typeface="微软雅黑" pitchFamily="34" charset="-120"/>
-              </a:rPr>
-              <a:t>•  </a:t>
-            </a:r>
-            <a:pPr algn="l" indent="0" marL="0">
-              <a:lnSpc>
-                <a:spcPct val="115000"/>
-              </a:lnSpc>
-              <a:buNone/>
-            </a:pPr>
-            <a:r>
-              <a:rPr lang="en-US" sz="1800" dirty="0">
-                <a:solidFill>
-                  <a:srgbClr val="000000"/>
-                </a:solidFill>
-              </a:rPr>
-              <a:t>但这段代码有问题：它永远停不下来</a:t>
-            </a:r>
-            <a:endParaRPr lang="en-US" sz="1800" dirty="0"/>
-          </a:p>
-        </p:txBody>
-      </p:sp>
-      <p:sp>
-        <p:nvSpPr>
-          <p:cNvPr id="10" name="Text 8"/>
-          <p:cNvSpPr/>
-          <p:nvPr/>
-        </p:nvSpPr>
-        <p:spPr>
-          <a:xfrm>
-            <a:off x="896112" y="5047488"/>
-            <a:ext cx="10454335" cy="397764"/>
-          </a:xfrm>
-          <a:prstGeom prst="rect">
-            <a:avLst/>
-          </a:prstGeom>
-          <a:noFill/>
-          <a:ln/>
-        </p:spPr>
-        <p:txBody>
-          <a:bodyPr wrap="square" rtlCol="0" anchor="t"/>
-          <a:lstStyle/>
-          <a:p>
-            <a:pPr algn="l" indent="0" marL="0">
-              <a:lnSpc>
-                <a:spcPct val="115000"/>
-              </a:lnSpc>
-              <a:buNone/>
-            </a:pPr>
-            <a:r>
-              <a:rPr lang="en-US" sz="1800" b="1" dirty="0">
-                <a:solidFill>
-                  <a:srgbClr val="1F4E9C"/>
-                </a:solidFill>
-                <a:latin typeface="微软雅黑" pitchFamily="34" charset="0"/>
-                <a:ea typeface="微软雅黑" pitchFamily="34" charset="-122"/>
-                <a:cs typeface="微软雅黑" pitchFamily="34" charset="-120"/>
-              </a:rPr>
-              <a:t>•  </a:t>
-            </a:r>
-            <a:pPr algn="l" indent="0" marL="0">
-              <a:lnSpc>
-                <a:spcPct val="115000"/>
-              </a:lnSpc>
-              <a:buNone/>
-            </a:pPr>
-            <a:r>
-              <a:rPr lang="en-US" sz="1800" dirty="0">
-                <a:solidFill>
-                  <a:srgbClr val="000000"/>
-                </a:solidFill>
-              </a:rPr>
-              <a:t>本节目标：学会递归的三要素，看懂调用栈，最后从零手写顺序表和单链表</a:t>
+              <a:t>返回值：把自己这层的结果交回给上一层</a:t>
             </a:r>
             <a:endParaRPr lang="en-US" sz="1800" dirty="0"/>
           </a:p>
@@ -5938,9 +5626,9 @@
 </p:sld>
 </file>
 
-<file path=ppt/slides/slide3.xml><?xml version="1.0" encoding="utf-8"?>
+<file path=ppt/slides/slide4.xml><?xml version="1.0" encoding="utf-8"?>
 <p:sld xmlns:a="http://schemas.openxmlformats.org/drawingml/2006/main" xmlns:r="http://schemas.openxmlformats.org/officeDocument/2006/relationships" xmlns:p="http://schemas.openxmlformats.org/presentationml/2006/main">
-  <p:cSld name="Slide 3">
+  <p:cSld>
     <p:bg>
       <p:bgPr>
         <a:blipFill dpi="0" rotWithShape="1">
@@ -5984,13 +5672,12 @@
             <a:avLst/>
           </a:prstGeom>
           <a:noFill/>
-          <a:ln/>
         </p:spPr>
         <p:txBody>
           <a:bodyPr wrap="square" rtlCol="0" anchor="ctr"/>
           <a:lstStyle/>
           <a:p>
-            <a:pPr algn="r" indent="0" marL="0">
+            <a:pPr marL="0" indent="0" algn="r">
               <a:buNone/>
             </a:pPr>
             <a:r>
@@ -5998,11 +5685,11 @@
                 <a:solidFill>
                   <a:srgbClr val="8A9099"/>
                 </a:solidFill>
-                <a:latin typeface="微软雅黑" pitchFamily="34" charset="0"/>
-                <a:ea typeface="微软雅黑" pitchFamily="34" charset="-122"/>
-                <a:cs typeface="微软雅黑" pitchFamily="34" charset="-120"/>
-              </a:rPr>
-              <a:t>3 / 17</a:t>
+                <a:latin typeface="微软雅黑" panose="020B0503020204020204" pitchFamily="34" charset="-122"/>
+                <a:ea typeface="微软雅黑" panose="020B0503020204020204" pitchFamily="34" charset="-122"/>
+                <a:cs typeface="微软雅黑" panose="020B0503020204020204" pitchFamily="34" charset="-120"/>
+              </a:rPr>
+              <a:t>4 / 16</a:t>
             </a:r>
             <a:endParaRPr lang="en-US" sz="1000" dirty="0"/>
           </a:p>
@@ -6023,13 +5710,12 @@
             <a:avLst/>
           </a:prstGeom>
           <a:noFill/>
-          <a:ln/>
         </p:spPr>
         <p:txBody>
           <a:bodyPr wrap="square" rtlCol="0" anchor="ctr"/>
           <a:lstStyle/>
           <a:p>
-            <a:pPr algn="l" indent="0" marL="0">
+            <a:pPr marL="0" indent="0" algn="l">
               <a:buNone/>
             </a:pPr>
             <a:r>
@@ -6037,11 +5723,11 @@
                 <a:solidFill>
                   <a:srgbClr val="1F4E9C"/>
                 </a:solidFill>
-                <a:latin typeface="微软雅黑" pitchFamily="34" charset="0"/>
-                <a:ea typeface="微软雅黑" pitchFamily="34" charset="-122"/>
-                <a:cs typeface="微软雅黑" pitchFamily="34" charset="-120"/>
-              </a:rPr>
-              <a:t>递归三要素</a:t>
+                <a:latin typeface="微软雅黑" panose="020B0503020204020204" pitchFamily="34" charset="-122"/>
+                <a:ea typeface="微软雅黑" panose="020B0503020204020204" pitchFamily="34" charset="-122"/>
+                <a:cs typeface="微软雅黑" panose="020B0503020204020204" pitchFamily="34" charset="-120"/>
+              </a:rPr>
+              <a:t>调用栈</a:t>
             </a:r>
             <a:endParaRPr lang="en-US" sz="1400" dirty="0"/>
           </a:p>
@@ -6062,13 +5748,12 @@
             <a:avLst/>
           </a:prstGeom>
           <a:noFill/>
-          <a:ln/>
         </p:spPr>
         <p:txBody>
           <a:bodyPr wrap="square" rtlCol="0" anchor="ctr"/>
           <a:lstStyle/>
           <a:p>
-            <a:pPr algn="l" indent="0" marL="0">
+            <a:pPr marL="0" indent="0" algn="l">
               <a:buNone/>
             </a:pPr>
             <a:r>
@@ -6076,11 +5761,11 @@
                 <a:solidFill>
                   <a:srgbClr val="1F2329"/>
                 </a:solidFill>
-                <a:latin typeface="微软雅黑" pitchFamily="34" charset="0"/>
-                <a:ea typeface="微软雅黑" pitchFamily="34" charset="-122"/>
-                <a:cs typeface="微软雅黑" pitchFamily="34" charset="-120"/>
-              </a:rPr>
-              <a:t>递归三要素：终止、缩小、返回</a:t>
+                <a:latin typeface="微软雅黑" panose="020B0503020204020204" pitchFamily="34" charset="-122"/>
+                <a:ea typeface="微软雅黑" panose="020B0503020204020204" pitchFamily="34" charset="-122"/>
+                <a:cs typeface="微软雅黑" panose="020B0503020204020204" pitchFamily="34" charset="-120"/>
+              </a:rPr>
+              <a:t>递归怎么运行：一层一层展开，再一层一层收回</a:t>
             </a:r>
             <a:endParaRPr lang="en-US" sz="2800" dirty="0"/>
           </a:p>
@@ -6088,112 +5773,25 @@
       </p:sp>
       <p:sp>
         <p:nvSpPr>
-          <p:cNvPr id="5" name="Shape 3"/>
-          <p:cNvSpPr/>
-          <p:nvPr/>
-        </p:nvSpPr>
-        <p:spPr>
-          <a:xfrm>
-            <a:off x="822960" y="2395728"/>
-            <a:ext cx="10545775" cy="1508760"/>
-          </a:xfrm>
-          <a:prstGeom prst="rect">
-            <a:avLst/>
-          </a:prstGeom>
-          <a:solidFill>
-            <a:srgbClr val="F7F9FC"/>
-          </a:solidFill>
-          <a:ln/>
-        </p:spPr>
-      </p:sp>
-      <p:sp>
-        <p:nvSpPr>
-          <p:cNvPr id="6" name="Shape 4"/>
-          <p:cNvSpPr/>
-          <p:nvPr/>
-        </p:nvSpPr>
-        <p:spPr>
-          <a:xfrm>
-            <a:off x="822960" y="2395728"/>
-            <a:ext cx="50292" cy="1508760"/>
-          </a:xfrm>
-          <a:prstGeom prst="rect">
-            <a:avLst/>
-          </a:prstGeom>
-          <a:solidFill>
-            <a:srgbClr val="1F4E9C"/>
-          </a:solidFill>
-          <a:ln/>
-        </p:spPr>
-      </p:sp>
-      <p:sp>
-        <p:nvSpPr>
-          <p:cNvPr id="7" name="Text 5"/>
-          <p:cNvSpPr/>
-          <p:nvPr/>
-        </p:nvSpPr>
-        <p:spPr>
-          <a:xfrm>
-            <a:off x="1078992" y="2505456"/>
-            <a:ext cx="10033711" cy="1289304"/>
-          </a:xfrm>
-          <a:prstGeom prst="rect">
-            <a:avLst/>
-          </a:prstGeom>
-          <a:noFill/>
-          <a:ln/>
+          <p:cNvPr id="5" name="Text 3"/>
+          <p:cNvSpPr/>
+          <p:nvPr/>
+        </p:nvSpPr>
+        <p:spPr>
+          <a:xfrm>
+            <a:off x="896112" y="2395728"/>
+            <a:ext cx="10454335" cy="740664"/>
+          </a:xfrm>
+          <a:prstGeom prst="rect">
+            <a:avLst/>
+          </a:prstGeom>
+          <a:noFill/>
         </p:spPr>
         <p:txBody>
           <a:bodyPr wrap="square" rtlCol="0" anchor="t"/>
           <a:lstStyle/>
           <a:p>
-            <a:pPr algn="l" indent="0" marL="0">
-              <a:lnSpc>
-                <a:spcPct val="125000"/>
-              </a:lnSpc>
-              <a:buNone/>
-            </a:pPr>
-            <a:r>
-              <a:rPr lang="en-US" sz="1400" dirty="0">
-                <a:solidFill>
-                  <a:srgbClr val="1F2329"/>
-                </a:solidFill>
-                <a:latin typeface="Consolas" pitchFamily="34" charset="0"/>
-                <a:ea typeface="Consolas" pitchFamily="34" charset="-122"/>
-                <a:cs typeface="Consolas" pitchFamily="34" charset="-120"/>
-              </a:rPr>
-              <a:t>int fact(int n){           // 求n的阶乘
-    if (n == 0) return 1;  // ① 终止条件
-    return n * fact(n - 1);// ② 缩小规模 ③ 返回结果
-}
-</a:t>
-            </a:r>
-            <a:endParaRPr lang="en-US" sz="1400" dirty="0"/>
-          </a:p>
-        </p:txBody>
-      </p:sp>
-      <p:sp>
-        <p:nvSpPr>
-          <p:cNvPr id="8" name="Text 6"/>
-          <p:cNvSpPr/>
-          <p:nvPr/>
-        </p:nvSpPr>
-        <p:spPr>
-          <a:xfrm>
-            <a:off x="896112" y="4105656"/>
-            <a:ext cx="10454335" cy="397764"/>
-          </a:xfrm>
-          <a:prstGeom prst="rect">
-            <a:avLst/>
-          </a:prstGeom>
-          <a:noFill/>
-          <a:ln/>
-        </p:spPr>
-        <p:txBody>
-          <a:bodyPr wrap="square" rtlCol="0" anchor="t"/>
-          <a:lstStyle/>
-          <a:p>
-            <a:pPr algn="l" indent="0" marL="0">
+            <a:pPr marL="0" indent="0" algn="l">
               <a:lnSpc>
                 <a:spcPct val="115000"/>
               </a:lnSpc>
@@ -6204,25 +5802,68 @@
                 <a:solidFill>
                   <a:srgbClr val="1F4E9C"/>
                 </a:solidFill>
-                <a:latin typeface="微软雅黑" pitchFamily="34" charset="0"/>
-                <a:ea typeface="微软雅黑" pitchFamily="34" charset="-122"/>
-                <a:cs typeface="微软雅黑" pitchFamily="34" charset="-120"/>
+                <a:latin typeface="微软雅黑" panose="020B0503020204020204" pitchFamily="34" charset="-122"/>
+                <a:ea typeface="微软雅黑" panose="020B0503020204020204" pitchFamily="34" charset="-122"/>
+                <a:cs typeface="微软雅黑" panose="020B0503020204020204" pitchFamily="34" charset="-120"/>
               </a:rPr>
               <a:t>•  </a:t>
             </a:r>
-            <a:pPr algn="l" indent="0" marL="0">
+            <a:r>
+              <a:rPr lang="en-US" sz="1800" dirty="0">
+                <a:solidFill>
+                  <a:srgbClr val="000000"/>
+                </a:solidFill>
+              </a:rPr>
+              <a:t>fact(3)调fact(2)，fact(2)调fact(1)，一路到fact(0)触发终止</a:t>
+            </a:r>
+            <a:endParaRPr lang="en-US" sz="1800" dirty="0"/>
+          </a:p>
+        </p:txBody>
+      </p:sp>
+      <p:sp>
+        <p:nvSpPr>
+          <p:cNvPr id="6" name="Text 4"/>
+          <p:cNvSpPr/>
+          <p:nvPr/>
+        </p:nvSpPr>
+        <p:spPr>
+          <a:xfrm>
+            <a:off x="896112" y="3209544"/>
+            <a:ext cx="10454335" cy="397764"/>
+          </a:xfrm>
+          <a:prstGeom prst="rect">
+            <a:avLst/>
+          </a:prstGeom>
+          <a:noFill/>
+        </p:spPr>
+        <p:txBody>
+          <a:bodyPr wrap="square" rtlCol="0" anchor="t"/>
+          <a:lstStyle/>
+          <a:p>
+            <a:pPr marL="0" indent="0" algn="l">
               <a:lnSpc>
                 <a:spcPct val="115000"/>
               </a:lnSpc>
               <a:buNone/>
             </a:pPr>
             <a:r>
+              <a:rPr lang="en-US" sz="1800" b="1" dirty="0">
+                <a:solidFill>
+                  <a:srgbClr val="1F4E9C"/>
+                </a:solidFill>
+                <a:latin typeface="微软雅黑" panose="020B0503020204020204" pitchFamily="34" charset="-122"/>
+                <a:ea typeface="微软雅黑" panose="020B0503020204020204" pitchFamily="34" charset="-122"/>
+                <a:cs typeface="微软雅黑" panose="020B0503020204020204" pitchFamily="34" charset="-120"/>
+              </a:rPr>
+              <a:t>•  </a:t>
+            </a:r>
+            <a:r>
               <a:rPr lang="en-US" sz="1800" dirty="0">
                 <a:solidFill>
                   <a:srgbClr val="000000"/>
                 </a:solidFill>
               </a:rPr>
-              <a:t>终止条件：什么时候不再调用自己，没有它就是无底洞</a:t>
+              <a:t>每层调用都有自己的格子：参数n各是各的，互不干扰</a:t>
             </a:r>
             <a:endParaRPr lang="en-US" sz="1800" dirty="0"/>
           </a:p>
@@ -6230,26 +5871,25 @@
       </p:sp>
       <p:sp>
         <p:nvSpPr>
-          <p:cNvPr id="9" name="Text 7"/>
-          <p:cNvSpPr/>
-          <p:nvPr/>
-        </p:nvSpPr>
-        <p:spPr>
-          <a:xfrm>
-            <a:off x="896112" y="4576572"/>
+          <p:cNvPr id="7" name="Text 5"/>
+          <p:cNvSpPr/>
+          <p:nvPr/>
+        </p:nvSpPr>
+        <p:spPr>
+          <a:xfrm>
+            <a:off x="896112" y="3680460"/>
             <a:ext cx="10454335" cy="397764"/>
           </a:xfrm>
           <a:prstGeom prst="rect">
             <a:avLst/>
           </a:prstGeom>
           <a:noFill/>
-          <a:ln/>
         </p:spPr>
         <p:txBody>
           <a:bodyPr wrap="square" rtlCol="0" anchor="t"/>
           <a:lstStyle/>
           <a:p>
-            <a:pPr algn="l" indent="0" marL="0">
+            <a:pPr marL="0" indent="0" algn="l">
               <a:lnSpc>
                 <a:spcPct val="115000"/>
               </a:lnSpc>
@@ -6260,81 +5900,19 @@
                 <a:solidFill>
                   <a:srgbClr val="1F4E9C"/>
                 </a:solidFill>
-                <a:latin typeface="微软雅黑" pitchFamily="34" charset="0"/>
-                <a:ea typeface="微软雅黑" pitchFamily="34" charset="-122"/>
-                <a:cs typeface="微软雅黑" pitchFamily="34" charset="-120"/>
+                <a:latin typeface="微软雅黑" panose="020B0503020204020204" pitchFamily="34" charset="-122"/>
+                <a:ea typeface="微软雅黑" panose="020B0503020204020204" pitchFamily="34" charset="-122"/>
+                <a:cs typeface="微软雅黑" panose="020B0503020204020204" pitchFamily="34" charset="-120"/>
               </a:rPr>
               <a:t>•  </a:t>
             </a:r>
-            <a:pPr algn="l" indent="0" marL="0">
-              <a:lnSpc>
-                <a:spcPct val="115000"/>
-              </a:lnSpc>
-              <a:buNone/>
-            </a:pPr>
             <a:r>
               <a:rPr lang="en-US" sz="1800" dirty="0">
                 <a:solidFill>
                   <a:srgbClr val="000000"/>
                 </a:solidFill>
               </a:rPr>
-              <a:t>缩小规模：每次调用都要离终止更近一步</a:t>
-            </a:r>
-            <a:endParaRPr lang="en-US" sz="1800" dirty="0"/>
-          </a:p>
-        </p:txBody>
-      </p:sp>
-      <p:sp>
-        <p:nvSpPr>
-          <p:cNvPr id="10" name="Text 8"/>
-          <p:cNvSpPr/>
-          <p:nvPr/>
-        </p:nvSpPr>
-        <p:spPr>
-          <a:xfrm>
-            <a:off x="896112" y="5047488"/>
-            <a:ext cx="10454335" cy="397764"/>
-          </a:xfrm>
-          <a:prstGeom prst="rect">
-            <a:avLst/>
-          </a:prstGeom>
-          <a:noFill/>
-          <a:ln/>
-        </p:spPr>
-        <p:txBody>
-          <a:bodyPr wrap="square" rtlCol="0" anchor="t"/>
-          <a:lstStyle/>
-          <a:p>
-            <a:pPr algn="l" indent="0" marL="0">
-              <a:lnSpc>
-                <a:spcPct val="115000"/>
-              </a:lnSpc>
-              <a:buNone/>
-            </a:pPr>
-            <a:r>
-              <a:rPr lang="en-US" sz="1800" b="1" dirty="0">
-                <a:solidFill>
-                  <a:srgbClr val="1F4E9C"/>
-                </a:solidFill>
-                <a:latin typeface="微软雅黑" pitchFamily="34" charset="0"/>
-                <a:ea typeface="微软雅黑" pitchFamily="34" charset="-122"/>
-                <a:cs typeface="微软雅黑" pitchFamily="34" charset="-120"/>
-              </a:rPr>
-              <a:t>•  </a:t>
-            </a:r>
-            <a:pPr algn="l" indent="0" marL="0">
-              <a:lnSpc>
-                <a:spcPct val="115000"/>
-              </a:lnSpc>
-              <a:buNone/>
-            </a:pPr>
-            <a:r>
-              <a:rPr lang="en-US" sz="1800" dirty="0">
-                <a:solidFill>
-                  <a:srgbClr val="000000"/>
-                </a:solidFill>
-              </a:rPr>
-              <a:t>返回值：把自己这层的结果交回给上一层</a:t>
+              <a:t>收回时逐层交结果：1、1、2、6，最后fact(3)返回6</a:t>
             </a:r>
             <a:endParaRPr lang="en-US" sz="1800" dirty="0"/>
           </a:p>
@@ -6348,9 +5926,9 @@
 </p:sld>
 </file>
 
-<file path=ppt/slides/slide4.xml><?xml version="1.0" encoding="utf-8"?>
+<file path=ppt/slides/slide5.xml><?xml version="1.0" encoding="utf-8"?>
 <p:sld xmlns:a="http://schemas.openxmlformats.org/drawingml/2006/main" xmlns:r="http://schemas.openxmlformats.org/officeDocument/2006/relationships" xmlns:p="http://schemas.openxmlformats.org/presentationml/2006/main">
-  <p:cSld name="Slide 4">
+  <p:cSld>
     <p:bg>
       <p:bgPr>
         <a:blipFill dpi="0" rotWithShape="1">
@@ -6394,13 +5972,12 @@
             <a:avLst/>
           </a:prstGeom>
           <a:noFill/>
-          <a:ln/>
         </p:spPr>
         <p:txBody>
           <a:bodyPr wrap="square" rtlCol="0" anchor="ctr"/>
           <a:lstStyle/>
           <a:p>
-            <a:pPr algn="r" indent="0" marL="0">
+            <a:pPr marL="0" indent="0" algn="r">
               <a:buNone/>
             </a:pPr>
             <a:r>
@@ -6408,11 +5985,11 @@
                 <a:solidFill>
                   <a:srgbClr val="8A9099"/>
                 </a:solidFill>
-                <a:latin typeface="微软雅黑" pitchFamily="34" charset="0"/>
-                <a:ea typeface="微软雅黑" pitchFamily="34" charset="-122"/>
-                <a:cs typeface="微软雅黑" pitchFamily="34" charset="-120"/>
-              </a:rPr>
-              <a:t>4 / 17</a:t>
+                <a:latin typeface="微软雅黑" panose="020B0503020204020204" pitchFamily="34" charset="-122"/>
+                <a:ea typeface="微软雅黑" panose="020B0503020204020204" pitchFamily="34" charset="-122"/>
+                <a:cs typeface="微软雅黑" panose="020B0503020204020204" pitchFamily="34" charset="-120"/>
+              </a:rPr>
+              <a:t>5 / 16</a:t>
             </a:r>
             <a:endParaRPr lang="en-US" sz="1000" dirty="0"/>
           </a:p>
@@ -6433,13 +6010,12 @@
             <a:avLst/>
           </a:prstGeom>
           <a:noFill/>
-          <a:ln/>
         </p:spPr>
         <p:txBody>
           <a:bodyPr wrap="square" rtlCol="0" anchor="ctr"/>
           <a:lstStyle/>
           <a:p>
-            <a:pPr algn="l" indent="0" marL="0">
+            <a:pPr marL="0" indent="0" algn="l">
               <a:buNone/>
             </a:pPr>
             <a:r>
@@ -6447,11 +6023,11 @@
                 <a:solidFill>
                   <a:srgbClr val="1F4E9C"/>
                 </a:solidFill>
-                <a:latin typeface="微软雅黑" pitchFamily="34" charset="0"/>
-                <a:ea typeface="微软雅黑" pitchFamily="34" charset="-122"/>
-                <a:cs typeface="微软雅黑" pitchFamily="34" charset="-120"/>
-              </a:rPr>
-              <a:t>调用栈</a:t>
+                <a:latin typeface="微软雅黑" panose="020B0503020204020204" pitchFamily="34" charset="-122"/>
+                <a:ea typeface="微软雅黑" panose="020B0503020204020204" pitchFamily="34" charset="-122"/>
+                <a:cs typeface="微软雅黑" panose="020B0503020204020204" pitchFamily="34" charset="-120"/>
+              </a:rPr>
+              <a:t>调用栈推演</a:t>
             </a:r>
             <a:endParaRPr lang="en-US" sz="1400" dirty="0"/>
           </a:p>
@@ -6472,13 +6048,12 @@
             <a:avLst/>
           </a:prstGeom>
           <a:noFill/>
-          <a:ln/>
         </p:spPr>
         <p:txBody>
           <a:bodyPr wrap="square" rtlCol="0" anchor="ctr"/>
           <a:lstStyle/>
           <a:p>
-            <a:pPr algn="l" indent="0" marL="0">
+            <a:pPr marL="0" indent="0" algn="l">
               <a:buNone/>
             </a:pPr>
             <a:r>
@@ -6486,11 +6061,11 @@
                 <a:solidFill>
                   <a:srgbClr val="1F2329"/>
                 </a:solidFill>
-                <a:latin typeface="微软雅黑" pitchFamily="34" charset="0"/>
-                <a:ea typeface="微软雅黑" pitchFamily="34" charset="-122"/>
-                <a:cs typeface="微软雅黑" pitchFamily="34" charset="-120"/>
-              </a:rPr>
-              <a:t>递归怎么运行：一层一层展开，再一层一层收回</a:t>
+                <a:latin typeface="微软雅黑" panose="020B0503020204020204" pitchFamily="34" charset="-122"/>
+                <a:ea typeface="微软雅黑" panose="020B0503020204020204" pitchFamily="34" charset="-122"/>
+                <a:cs typeface="微软雅黑" panose="020B0503020204020204" pitchFamily="34" charset="-120"/>
+              </a:rPr>
+              <a:t>fact(3)的调用栈：展开与收回（拿纸跟着画）</a:t>
             </a:r>
             <a:endParaRPr lang="en-US" sz="2800" dirty="0"/>
           </a:p>
@@ -6511,13 +6086,12 @@
             <a:avLst/>
           </a:prstGeom>
           <a:noFill/>
-          <a:ln/>
         </p:spPr>
         <p:txBody>
           <a:bodyPr wrap="square" rtlCol="0" anchor="t"/>
           <a:lstStyle/>
           <a:p>
-            <a:pPr algn="l" indent="0" marL="0">
+            <a:pPr marL="0" indent="0" algn="l">
               <a:lnSpc>
                 <a:spcPct val="115000"/>
               </a:lnSpc>
@@ -6528,137 +6102,68 @@
                 <a:solidFill>
                   <a:srgbClr val="1F4E9C"/>
                 </a:solidFill>
-                <a:latin typeface="微软雅黑" pitchFamily="34" charset="0"/>
-                <a:ea typeface="微软雅黑" pitchFamily="34" charset="-122"/>
-                <a:cs typeface="微软雅黑" pitchFamily="34" charset="-120"/>
+                <a:latin typeface="微软雅黑" panose="020B0503020204020204" pitchFamily="34" charset="-122"/>
+                <a:ea typeface="微软雅黑" panose="020B0503020204020204" pitchFamily="34" charset="-122"/>
+                <a:cs typeface="微软雅黑" panose="020B0503020204020204" pitchFamily="34" charset="-120"/>
               </a:rPr>
               <a:t>•  </a:t>
             </a:r>
-            <a:pPr algn="l" indent="0" marL="0">
+            <a:r>
+              <a:rPr lang="en-US" sz="1800" dirty="0">
+                <a:solidFill>
+                  <a:srgbClr val="000000"/>
+                </a:solidFill>
+              </a:rPr>
+              <a:t>① 竖着叠四层框：fact(3)、fact(2)、fact(1)、fact(0)，每层标自己的n，向下箭头是调用</a:t>
+            </a:r>
+            <a:endParaRPr lang="en-US" sz="1800" dirty="0"/>
+          </a:p>
+        </p:txBody>
+      </p:sp>
+      <p:sp>
+        <p:nvSpPr>
+          <p:cNvPr id="6" name="Text 4"/>
+          <p:cNvSpPr/>
+          <p:nvPr/>
+        </p:nvSpPr>
+        <p:spPr>
+          <a:xfrm>
+            <a:off x="896112" y="3209544"/>
+            <a:ext cx="10454335" cy="397764"/>
+          </a:xfrm>
+          <a:prstGeom prst="rect">
+            <a:avLst/>
+          </a:prstGeom>
+          <a:noFill/>
+        </p:spPr>
+        <p:txBody>
+          <a:bodyPr wrap="square" rtlCol="0" anchor="t"/>
+          <a:lstStyle/>
+          <a:p>
+            <a:pPr marL="0" indent="0" algn="l">
               <a:lnSpc>
                 <a:spcPct val="115000"/>
               </a:lnSpc>
               <a:buNone/>
             </a:pPr>
             <a:r>
+              <a:rPr lang="en-US" sz="1800" b="1" dirty="0">
+                <a:solidFill>
+                  <a:srgbClr val="1F4E9C"/>
+                </a:solidFill>
+                <a:latin typeface="微软雅黑" panose="020B0503020204020204" pitchFamily="34" charset="-122"/>
+                <a:ea typeface="微软雅黑" panose="020B0503020204020204" pitchFamily="34" charset="-122"/>
+                <a:cs typeface="微软雅黑" panose="020B0503020204020204" pitchFamily="34" charset="-120"/>
+              </a:rPr>
+              <a:t>•  </a:t>
+            </a:r>
+            <a:r>
               <a:rPr lang="en-US" sz="1800" dirty="0">
                 <a:solidFill>
                   <a:srgbClr val="000000"/>
                 </a:solidFill>
               </a:rPr>
-              <a:t>fact(3)调fact(2)，fact(2)调fact(1)，一路到fact(0)触发终止</a:t>
-            </a:r>
-            <a:endParaRPr lang="en-US" sz="1800" dirty="0"/>
-          </a:p>
-        </p:txBody>
-      </p:sp>
-      <p:sp>
-        <p:nvSpPr>
-          <p:cNvPr id="6" name="Text 4"/>
-          <p:cNvSpPr/>
-          <p:nvPr/>
-        </p:nvSpPr>
-        <p:spPr>
-          <a:xfrm>
-            <a:off x="896112" y="3209544"/>
-            <a:ext cx="10454335" cy="397764"/>
-          </a:xfrm>
-          <a:prstGeom prst="rect">
-            <a:avLst/>
-          </a:prstGeom>
-          <a:noFill/>
-          <a:ln/>
-        </p:spPr>
-        <p:txBody>
-          <a:bodyPr wrap="square" rtlCol="0" anchor="t"/>
-          <a:lstStyle/>
-          <a:p>
-            <a:pPr algn="l" indent="0" marL="0">
-              <a:lnSpc>
-                <a:spcPct val="115000"/>
-              </a:lnSpc>
-              <a:buNone/>
-            </a:pPr>
-            <a:r>
-              <a:rPr lang="en-US" sz="1800" b="1" dirty="0">
-                <a:solidFill>
-                  <a:srgbClr val="1F4E9C"/>
-                </a:solidFill>
-                <a:latin typeface="微软雅黑" pitchFamily="34" charset="0"/>
-                <a:ea typeface="微软雅黑" pitchFamily="34" charset="-122"/>
-                <a:cs typeface="微软雅黑" pitchFamily="34" charset="-120"/>
-              </a:rPr>
-              <a:t>•  </a:t>
-            </a:r>
-            <a:pPr algn="l" indent="0" marL="0">
-              <a:lnSpc>
-                <a:spcPct val="115000"/>
-              </a:lnSpc>
-              <a:buNone/>
-            </a:pPr>
-            <a:r>
-              <a:rPr lang="en-US" sz="1800" dirty="0">
-                <a:solidFill>
-                  <a:srgbClr val="000000"/>
-                </a:solidFill>
-              </a:rPr>
-              <a:t>每层调用都有自己的格子：参数n各是各的，互不干扰</a:t>
-            </a:r>
-            <a:endParaRPr lang="en-US" sz="1800" dirty="0"/>
-          </a:p>
-        </p:txBody>
-      </p:sp>
-      <p:sp>
-        <p:nvSpPr>
-          <p:cNvPr id="7" name="Text 5"/>
-          <p:cNvSpPr/>
-          <p:nvPr/>
-        </p:nvSpPr>
-        <p:spPr>
-          <a:xfrm>
-            <a:off x="896112" y="3680460"/>
-            <a:ext cx="10454335" cy="397764"/>
-          </a:xfrm>
-          <a:prstGeom prst="rect">
-            <a:avLst/>
-          </a:prstGeom>
-          <a:noFill/>
-          <a:ln/>
-        </p:spPr>
-        <p:txBody>
-          <a:bodyPr wrap="square" rtlCol="0" anchor="t"/>
-          <a:lstStyle/>
-          <a:p>
-            <a:pPr algn="l" indent="0" marL="0">
-              <a:lnSpc>
-                <a:spcPct val="115000"/>
-              </a:lnSpc>
-              <a:buNone/>
-            </a:pPr>
-            <a:r>
-              <a:rPr lang="en-US" sz="1800" b="1" dirty="0">
-                <a:solidFill>
-                  <a:srgbClr val="1F4E9C"/>
-                </a:solidFill>
-                <a:latin typeface="微软雅黑" pitchFamily="34" charset="0"/>
-                <a:ea typeface="微软雅黑" pitchFamily="34" charset="-122"/>
-                <a:cs typeface="微软雅黑" pitchFamily="34" charset="-120"/>
-              </a:rPr>
-              <a:t>•  </a:t>
-            </a:r>
-            <a:pPr algn="l" indent="0" marL="0">
-              <a:lnSpc>
-                <a:spcPct val="115000"/>
-              </a:lnSpc>
-              <a:buNone/>
-            </a:pPr>
-            <a:r>
-              <a:rPr lang="en-US" sz="1800" dirty="0">
-                <a:solidFill>
-                  <a:srgbClr val="000000"/>
-                </a:solidFill>
-              </a:rPr>
-              <a:t>收回时逐层交结果：1、1、2、6，最后fact(3)返回6</a:t>
+              <a:t>② 从fact(0)往上画返回箭头：逐层交回1、1、2、6，向上箭头是返回</a:t>
             </a:r>
             <a:endParaRPr lang="en-US" sz="1800" dirty="0"/>
           </a:p>
@@ -6672,9 +6177,9 @@
 </p:sld>
 </file>
 
-<file path=ppt/slides/slide5.xml><?xml version="1.0" encoding="utf-8"?>
+<file path=ppt/slides/slide6.xml><?xml version="1.0" encoding="utf-8"?>
 <p:sld xmlns:a="http://schemas.openxmlformats.org/drawingml/2006/main" xmlns:r="http://schemas.openxmlformats.org/officeDocument/2006/relationships" xmlns:p="http://schemas.openxmlformats.org/presentationml/2006/main">
-  <p:cSld name="Slide 5">
+  <p:cSld>
     <p:bg>
       <p:bgPr>
         <a:blipFill dpi="0" rotWithShape="1">
@@ -6718,13 +6223,12 @@
             <a:avLst/>
           </a:prstGeom>
           <a:noFill/>
-          <a:ln/>
         </p:spPr>
         <p:txBody>
           <a:bodyPr wrap="square" rtlCol="0" anchor="ctr"/>
           <a:lstStyle/>
           <a:p>
-            <a:pPr algn="r" indent="0" marL="0">
+            <a:pPr marL="0" indent="0" algn="r">
               <a:buNone/>
             </a:pPr>
             <a:r>
@@ -6732,11 +6236,11 @@
                 <a:solidFill>
                   <a:srgbClr val="8A9099"/>
                 </a:solidFill>
-                <a:latin typeface="微软雅黑" pitchFamily="34" charset="0"/>
-                <a:ea typeface="微软雅黑" pitchFamily="34" charset="-122"/>
-                <a:cs typeface="微软雅黑" pitchFamily="34" charset="-120"/>
-              </a:rPr>
-              <a:t>5 / 17</a:t>
+                <a:latin typeface="微软雅黑" panose="020B0503020204020204" pitchFamily="34" charset="-122"/>
+                <a:ea typeface="微软雅黑" panose="020B0503020204020204" pitchFamily="34" charset="-122"/>
+                <a:cs typeface="微软雅黑" panose="020B0503020204020204" pitchFamily="34" charset="-120"/>
+              </a:rPr>
+              <a:t>6 / 16</a:t>
             </a:r>
             <a:endParaRPr lang="en-US" sz="1000" dirty="0"/>
           </a:p>
@@ -6757,13 +6261,12 @@
             <a:avLst/>
           </a:prstGeom>
           <a:noFill/>
-          <a:ln/>
         </p:spPr>
         <p:txBody>
           <a:bodyPr wrap="square" rtlCol="0" anchor="ctr"/>
           <a:lstStyle/>
           <a:p>
-            <a:pPr algn="l" indent="0" marL="0">
+            <a:pPr marL="0" indent="0" algn="l">
               <a:buNone/>
             </a:pPr>
             <a:r>
@@ -6771,11 +6274,11 @@
                 <a:solidFill>
                   <a:srgbClr val="1F4E9C"/>
                 </a:solidFill>
-                <a:latin typeface="微软雅黑" pitchFamily="34" charset="0"/>
-                <a:ea typeface="微软雅黑" pitchFamily="34" charset="-122"/>
-                <a:cs typeface="微软雅黑" pitchFamily="34" charset="-120"/>
-              </a:rPr>
-              <a:t>动画演示 · 调用栈（本页逐条动画出现）</a:t>
+                <a:latin typeface="微软雅黑" panose="020B0503020204020204" pitchFamily="34" charset="-122"/>
+                <a:ea typeface="微软雅黑" panose="020B0503020204020204" pitchFamily="34" charset="-122"/>
+                <a:cs typeface="微软雅黑" panose="020B0503020204020204" pitchFamily="34" charset="-120"/>
+              </a:rPr>
+              <a:t>对比</a:t>
             </a:r>
             <a:endParaRPr lang="en-US" sz="1400" dirty="0"/>
           </a:p>
@@ -6796,13 +6299,12 @@
             <a:avLst/>
           </a:prstGeom>
           <a:noFill/>
-          <a:ln/>
         </p:spPr>
         <p:txBody>
           <a:bodyPr wrap="square" rtlCol="0" anchor="ctr"/>
           <a:lstStyle/>
           <a:p>
-            <a:pPr algn="l" indent="0" marL="0">
+            <a:pPr marL="0" indent="0" algn="l">
               <a:buNone/>
             </a:pPr>
             <a:r>
@@ -6810,11 +6312,11 @@
                 <a:solidFill>
                   <a:srgbClr val="1F2329"/>
                 </a:solidFill>
-                <a:latin typeface="微软雅黑" pitchFamily="34" charset="0"/>
-                <a:ea typeface="微软雅黑" pitchFamily="34" charset="-122"/>
-                <a:cs typeface="微软雅黑" pitchFamily="34" charset="-120"/>
-              </a:rPr>
-              <a:t>fact(3)的调用栈：展开与收回（不手写，跟着画）</a:t>
+                <a:latin typeface="微软雅黑" panose="020B0503020204020204" pitchFamily="34" charset="-122"/>
+                <a:ea typeface="微软雅黑" panose="020B0503020204020204" pitchFamily="34" charset="-122"/>
+                <a:cs typeface="微软雅黑" panose="020B0503020204020204" pitchFamily="34" charset="-120"/>
+              </a:rPr>
+              <a:t>递归与迭代：一套问题，两种写法</a:t>
             </a:r>
             <a:endParaRPr lang="en-US" sz="2800" dirty="0"/>
           </a:p>
@@ -6822,26 +6324,108 @@
       </p:sp>
       <p:sp>
         <p:nvSpPr>
-          <p:cNvPr id="5" name="Text 3"/>
-          <p:cNvSpPr/>
-          <p:nvPr/>
-        </p:nvSpPr>
-        <p:spPr>
-          <a:xfrm>
-            <a:off x="896112" y="2395728"/>
-            <a:ext cx="10454335" cy="740664"/>
-          </a:xfrm>
-          <a:prstGeom prst="rect">
-            <a:avLst/>
-          </a:prstGeom>
-          <a:noFill/>
-          <a:ln/>
+          <p:cNvPr id="5" name="Shape 3"/>
+          <p:cNvSpPr/>
+          <p:nvPr/>
+        </p:nvSpPr>
+        <p:spPr>
+          <a:xfrm>
+            <a:off x="822960" y="2395728"/>
+            <a:ext cx="10545775" cy="1508760"/>
+          </a:xfrm>
+          <a:prstGeom prst="rect">
+            <a:avLst/>
+          </a:prstGeom>
+          <a:solidFill>
+            <a:srgbClr val="F7F9FC"/>
+          </a:solidFill>
+        </p:spPr>
+      </p:sp>
+      <p:sp>
+        <p:nvSpPr>
+          <p:cNvPr id="6" name="Shape 4"/>
+          <p:cNvSpPr/>
+          <p:nvPr/>
+        </p:nvSpPr>
+        <p:spPr>
+          <a:xfrm>
+            <a:off x="822960" y="2395728"/>
+            <a:ext cx="50292" cy="1508760"/>
+          </a:xfrm>
+          <a:prstGeom prst="rect">
+            <a:avLst/>
+          </a:prstGeom>
+          <a:solidFill>
+            <a:srgbClr val="1F4E9C"/>
+          </a:solidFill>
+        </p:spPr>
+      </p:sp>
+      <p:sp>
+        <p:nvSpPr>
+          <p:cNvPr id="7" name="Text 5"/>
+          <p:cNvSpPr/>
+          <p:nvPr/>
+        </p:nvSpPr>
+        <p:spPr>
+          <a:xfrm>
+            <a:off x="1078992" y="2505456"/>
+            <a:ext cx="10033711" cy="1289304"/>
+          </a:xfrm>
+          <a:prstGeom prst="rect">
+            <a:avLst/>
+          </a:prstGeom>
+          <a:noFill/>
         </p:spPr>
         <p:txBody>
           <a:bodyPr wrap="square" rtlCol="0" anchor="t"/>
           <a:lstStyle/>
           <a:p>
-            <a:pPr algn="l" indent="0" marL="0">
+            <a:pPr marL="0" indent="0" algn="l">
+              <a:lnSpc>
+                <a:spcPct val="125000"/>
+              </a:lnSpc>
+              <a:buNone/>
+            </a:pPr>
+            <a:r>
+              <a:rPr lang="en-US" sz="1400" dirty="0">
+                <a:solidFill>
+                  <a:srgbClr val="1F2329"/>
+                </a:solidFill>
+                <a:latin typeface="Consolas" panose="020B0609020204030204" pitchFamily="34" charset="0"/>
+                <a:ea typeface="Consolas" panose="020B0609020204030204" pitchFamily="34" charset="-122"/>
+                <a:cs typeface="Consolas" panose="020B0609020204030204" pitchFamily="34" charset="-120"/>
+              </a:rPr>
+              <a:t>// 迭代版阶乘
+int result = 1;
+for(int i = 1; i &lt;= n; i++)
+    result = result * i;
+</a:t>
+            </a:r>
+            <a:endParaRPr lang="en-US" sz="1400" dirty="0"/>
+          </a:p>
+        </p:txBody>
+      </p:sp>
+      <p:sp>
+        <p:nvSpPr>
+          <p:cNvPr id="8" name="Text 6"/>
+          <p:cNvSpPr/>
+          <p:nvPr/>
+        </p:nvSpPr>
+        <p:spPr>
+          <a:xfrm>
+            <a:off x="896112" y="4105656"/>
+            <a:ext cx="10454335" cy="397764"/>
+          </a:xfrm>
+          <a:prstGeom prst="rect">
+            <a:avLst/>
+          </a:prstGeom>
+          <a:noFill/>
+        </p:spPr>
+        <p:txBody>
+          <a:bodyPr wrap="square" rtlCol="0" anchor="t"/>
+          <a:lstStyle/>
+          <a:p>
+            <a:pPr marL="0" indent="0" algn="l">
               <a:lnSpc>
                 <a:spcPct val="115000"/>
               </a:lnSpc>
@@ -6852,25 +6436,68 @@
                 <a:solidFill>
                   <a:srgbClr val="1F4E9C"/>
                 </a:solidFill>
-                <a:latin typeface="微软雅黑" pitchFamily="34" charset="0"/>
-                <a:ea typeface="微软雅黑" pitchFamily="34" charset="-122"/>
-                <a:cs typeface="微软雅黑" pitchFamily="34" charset="-120"/>
+                <a:latin typeface="微软雅黑" panose="020B0503020204020204" pitchFamily="34" charset="-122"/>
+                <a:ea typeface="微软雅黑" panose="020B0503020204020204" pitchFamily="34" charset="-122"/>
+                <a:cs typeface="微软雅黑" panose="020B0503020204020204" pitchFamily="34" charset="-120"/>
               </a:rPr>
               <a:t>•  </a:t>
             </a:r>
-            <a:pPr algn="l" indent="0" marL="0">
+            <a:r>
+              <a:rPr lang="en-US" sz="1800" dirty="0">
+                <a:solidFill>
+                  <a:srgbClr val="000000"/>
+                </a:solidFill>
+              </a:rPr>
+              <a:t>迭代靠循环，一层格子从头跑到尾；递归靠调用，层数随问题展开</a:t>
+            </a:r>
+            <a:endParaRPr lang="en-US" sz="1800" dirty="0"/>
+          </a:p>
+        </p:txBody>
+      </p:sp>
+      <p:sp>
+        <p:nvSpPr>
+          <p:cNvPr id="9" name="Text 7"/>
+          <p:cNvSpPr/>
+          <p:nvPr/>
+        </p:nvSpPr>
+        <p:spPr>
+          <a:xfrm>
+            <a:off x="896112" y="4576572"/>
+            <a:ext cx="10454335" cy="397764"/>
+          </a:xfrm>
+          <a:prstGeom prst="rect">
+            <a:avLst/>
+          </a:prstGeom>
+          <a:noFill/>
+        </p:spPr>
+        <p:txBody>
+          <a:bodyPr wrap="square" rtlCol="0" anchor="t"/>
+          <a:lstStyle/>
+          <a:p>
+            <a:pPr marL="0" indent="0" algn="l">
               <a:lnSpc>
                 <a:spcPct val="115000"/>
               </a:lnSpc>
               <a:buNone/>
             </a:pPr>
             <a:r>
+              <a:rPr lang="en-US" sz="1800" b="1" dirty="0">
+                <a:solidFill>
+                  <a:srgbClr val="1F4E9C"/>
+                </a:solidFill>
+                <a:latin typeface="微软雅黑" panose="020B0503020204020204" pitchFamily="34" charset="-122"/>
+                <a:ea typeface="微软雅黑" panose="020B0503020204020204" pitchFamily="34" charset="-122"/>
+                <a:cs typeface="微软雅黑" panose="020B0503020204020204" pitchFamily="34" charset="-120"/>
+              </a:rPr>
+              <a:t>•  </a:t>
+            </a:r>
+            <a:r>
               <a:rPr lang="en-US" sz="1800" dirty="0">
                 <a:solidFill>
                   <a:srgbClr val="000000"/>
                 </a:solidFill>
               </a:rPr>
-              <a:t>① 竖着叠四层框：fact(3)、fact(2)、fact(1)、fact(0)，每层标自己的n，向下箭头是调用</a:t>
+              <a:t>阶乘这种问题，迭代更省；递归的优势在结构自带层次的问题上</a:t>
             </a:r>
             <a:endParaRPr lang="en-US" sz="1800" dirty="0"/>
           </a:p>
@@ -6878,26 +6505,25 @@
       </p:sp>
       <p:sp>
         <p:nvSpPr>
-          <p:cNvPr id="6" name="Text 4"/>
-          <p:cNvSpPr/>
-          <p:nvPr/>
-        </p:nvSpPr>
-        <p:spPr>
-          <a:xfrm>
-            <a:off x="896112" y="3209544"/>
+          <p:cNvPr id="10" name="Text 8"/>
+          <p:cNvSpPr/>
+          <p:nvPr/>
+        </p:nvSpPr>
+        <p:spPr>
+          <a:xfrm>
+            <a:off x="896112" y="5047488"/>
             <a:ext cx="10454335" cy="397764"/>
           </a:xfrm>
           <a:prstGeom prst="rect">
             <a:avLst/>
           </a:prstGeom>
           <a:noFill/>
-          <a:ln/>
         </p:spPr>
         <p:txBody>
           <a:bodyPr wrap="square" rtlCol="0" anchor="t"/>
           <a:lstStyle/>
           <a:p>
-            <a:pPr algn="l" indent="0" marL="0">
+            <a:pPr marL="0" indent="0" algn="l">
               <a:lnSpc>
                 <a:spcPct val="115000"/>
               </a:lnSpc>
@@ -6908,25 +6534,19 @@
                 <a:solidFill>
                   <a:srgbClr val="1F4E9C"/>
                 </a:solidFill>
-                <a:latin typeface="微软雅黑" pitchFamily="34" charset="0"/>
-                <a:ea typeface="微软雅黑" pitchFamily="34" charset="-122"/>
-                <a:cs typeface="微软雅黑" pitchFamily="34" charset="-120"/>
+                <a:latin typeface="微软雅黑" panose="020B0503020204020204" pitchFamily="34" charset="-122"/>
+                <a:ea typeface="微软雅黑" panose="020B0503020204020204" pitchFamily="34" charset="-122"/>
+                <a:cs typeface="微软雅黑" panose="020B0503020204020204" pitchFamily="34" charset="-120"/>
               </a:rPr>
               <a:t>•  </a:t>
             </a:r>
-            <a:pPr algn="l" indent="0" marL="0">
-              <a:lnSpc>
-                <a:spcPct val="115000"/>
-              </a:lnSpc>
-              <a:buNone/>
-            </a:pPr>
             <a:r>
               <a:rPr lang="en-US" sz="1800" dirty="0">
                 <a:solidFill>
                   <a:srgbClr val="000000"/>
                 </a:solidFill>
               </a:rPr>
-              <a:t>② 从fact(0)往上画返回箭头：逐层交回1、1、2、6，向上箭头是返回</a:t>
+              <a:t>两种都要会：读代码要都认得，写代码按问题选</a:t>
             </a:r>
             <a:endParaRPr lang="en-US" sz="1800" dirty="0"/>
           </a:p>
@@ -6940,9 +6560,9 @@
 </p:sld>
 </file>
 
-<file path=ppt/slides/slide6.xml><?xml version="1.0" encoding="utf-8"?>
+<file path=ppt/slides/slide7.xml><?xml version="1.0" encoding="utf-8"?>
 <p:sld xmlns:a="http://schemas.openxmlformats.org/drawingml/2006/main" xmlns:r="http://schemas.openxmlformats.org/officeDocument/2006/relationships" xmlns:p="http://schemas.openxmlformats.org/presentationml/2006/main">
-  <p:cSld name="Slide 6">
+  <p:cSld>
     <p:bg>
       <p:bgPr>
         <a:blipFill dpi="0" rotWithShape="1">
@@ -6986,13 +6606,12 @@
             <a:avLst/>
           </a:prstGeom>
           <a:noFill/>
-          <a:ln/>
         </p:spPr>
         <p:txBody>
           <a:bodyPr wrap="square" rtlCol="0" anchor="ctr"/>
           <a:lstStyle/>
           <a:p>
-            <a:pPr algn="r" indent="0" marL="0">
+            <a:pPr marL="0" indent="0" algn="r">
               <a:buNone/>
             </a:pPr>
             <a:r>
@@ -7000,11 +6619,11 @@
                 <a:solidFill>
                   <a:srgbClr val="8A9099"/>
                 </a:solidFill>
-                <a:latin typeface="微软雅黑" pitchFamily="34" charset="0"/>
-                <a:ea typeface="微软雅黑" pitchFamily="34" charset="-122"/>
-                <a:cs typeface="微软雅黑" pitchFamily="34" charset="-120"/>
-              </a:rPr>
-              <a:t>6 / 17</a:t>
+                <a:latin typeface="微软雅黑" panose="020B0503020204020204" pitchFamily="34" charset="-122"/>
+                <a:ea typeface="微软雅黑" panose="020B0503020204020204" pitchFamily="34" charset="-122"/>
+                <a:cs typeface="微软雅黑" panose="020B0503020204020204" pitchFamily="34" charset="-120"/>
+              </a:rPr>
+              <a:t>7 / 16</a:t>
             </a:r>
             <a:endParaRPr lang="en-US" sz="1000" dirty="0"/>
           </a:p>
@@ -7025,13 +6644,12 @@
             <a:avLst/>
           </a:prstGeom>
           <a:noFill/>
-          <a:ln/>
         </p:spPr>
         <p:txBody>
           <a:bodyPr wrap="square" rtlCol="0" anchor="ctr"/>
           <a:lstStyle/>
           <a:p>
-            <a:pPr algn="l" indent="0" marL="0">
+            <a:pPr marL="0" indent="0" algn="l">
               <a:buNone/>
             </a:pPr>
             <a:r>
@@ -7039,11 +6657,11 @@
                 <a:solidFill>
                   <a:srgbClr val="1F4E9C"/>
                 </a:solidFill>
-                <a:latin typeface="微软雅黑" pitchFamily="34" charset="0"/>
-                <a:ea typeface="微软雅黑" pitchFamily="34" charset="-122"/>
-                <a:cs typeface="微软雅黑" pitchFamily="34" charset="-120"/>
-              </a:rPr>
-              <a:t>对比</a:t>
+                <a:latin typeface="微软雅黑" panose="020B0503020204020204" pitchFamily="34" charset="-122"/>
+                <a:ea typeface="微软雅黑" panose="020B0503020204020204" pitchFamily="34" charset="-122"/>
+                <a:cs typeface="微软雅黑" panose="020B0503020204020204" pitchFamily="34" charset="-120"/>
+              </a:rPr>
+              <a:t>两个事故</a:t>
             </a:r>
             <a:endParaRPr lang="en-US" sz="1400" dirty="0"/>
           </a:p>
@@ -7064,13 +6682,12 @@
             <a:avLst/>
           </a:prstGeom>
           <a:noFill/>
-          <a:ln/>
         </p:spPr>
         <p:txBody>
           <a:bodyPr wrap="square" rtlCol="0" anchor="ctr"/>
           <a:lstStyle/>
           <a:p>
-            <a:pPr algn="l" indent="0" marL="0">
+            <a:pPr marL="0" indent="0" algn="l">
               <a:buNone/>
             </a:pPr>
             <a:r>
@@ -7078,11 +6695,11 @@
                 <a:solidFill>
                   <a:srgbClr val="1F2329"/>
                 </a:solidFill>
-                <a:latin typeface="微软雅黑" pitchFamily="34" charset="0"/>
-                <a:ea typeface="微软雅黑" pitchFamily="34" charset="-122"/>
-                <a:cs typeface="微软雅黑" pitchFamily="34" charset="-120"/>
-              </a:rPr>
-              <a:t>递归与迭代：一套问题，两种写法</a:t>
+                <a:latin typeface="微软雅黑" panose="020B0503020204020204" pitchFamily="34" charset="-122"/>
+                <a:ea typeface="微软雅黑" panose="020B0503020204020204" pitchFamily="34" charset="-122"/>
+                <a:cs typeface="微软雅黑" panose="020B0503020204020204" pitchFamily="34" charset="-120"/>
+              </a:rPr>
+              <a:t>递归的两大事故：无限递归与重复爆炸</a:t>
             </a:r>
             <a:endParaRPr lang="en-US" sz="2800" dirty="0"/>
           </a:p>
@@ -7105,7 +6722,6 @@
           <a:solidFill>
             <a:srgbClr val="F7F9FC"/>
           </a:solidFill>
-          <a:ln/>
         </p:spPr>
       </p:sp>
       <p:sp>
@@ -7125,7 +6741,6 @@
           <a:solidFill>
             <a:srgbClr val="1F4E9C"/>
           </a:solidFill>
-          <a:ln/>
         </p:spPr>
       </p:sp>
       <p:sp>
@@ -7143,13 +6758,12 @@
             <a:avLst/>
           </a:prstGeom>
           <a:noFill/>
-          <a:ln/>
         </p:spPr>
         <p:txBody>
           <a:bodyPr wrap="square" rtlCol="0" anchor="t"/>
           <a:lstStyle/>
           <a:p>
-            <a:pPr algn="l" indent="0" marL="0">
+            <a:pPr marL="0" indent="0" algn="l">
               <a:lnSpc>
                 <a:spcPct val="125000"/>
               </a:lnSpc>
@@ -7160,14 +6774,14 @@
                 <a:solidFill>
                   <a:srgbClr val="1F2329"/>
                 </a:solidFill>
-                <a:latin typeface="Consolas" pitchFamily="34" charset="0"/>
-                <a:ea typeface="Consolas" pitchFamily="34" charset="-122"/>
-                <a:cs typeface="Consolas" pitchFamily="34" charset="-120"/>
-              </a:rPr>
-              <a:t>// 迭代版阶乘
-int result = 1;
-for(int i = 1; i &lt;= n; i++)
-    result = result * i;
+                <a:latin typeface="Consolas" panose="020B0609020204030204" pitchFamily="34" charset="0"/>
+                <a:ea typeface="Consolas" panose="020B0609020204030204" pitchFamily="34" charset="-122"/>
+                <a:cs typeface="Consolas" panose="020B0609020204030204" pitchFamily="34" charset="-120"/>
+              </a:rPr>
+              <a:t>int fib(int n){
+    if(n &lt;= 1) return n;
+    return fib(n - 1) + fib(n - 2);
+}
 </a:t>
             </a:r>
             <a:endParaRPr lang="en-US" sz="1400" dirty="0"/>
@@ -7189,13 +6803,12 @@
             <a:avLst/>
           </a:prstGeom>
           <a:noFill/>
-          <a:ln/>
         </p:spPr>
         <p:txBody>
           <a:bodyPr wrap="square" rtlCol="0" anchor="t"/>
           <a:lstStyle/>
           <a:p>
-            <a:pPr algn="l" indent="0" marL="0">
+            <a:pPr marL="0" indent="0" algn="l">
               <a:lnSpc>
                 <a:spcPct val="115000"/>
               </a:lnSpc>
@@ -7206,25 +6819,68 @@
                 <a:solidFill>
                   <a:srgbClr val="1F4E9C"/>
                 </a:solidFill>
-                <a:latin typeface="微软雅黑" pitchFamily="34" charset="0"/>
-                <a:ea typeface="微软雅黑" pitchFamily="34" charset="-122"/>
-                <a:cs typeface="微软雅黑" pitchFamily="34" charset="-120"/>
+                <a:latin typeface="微软雅黑" panose="020B0503020204020204" pitchFamily="34" charset="-122"/>
+                <a:ea typeface="微软雅黑" panose="020B0503020204020204" pitchFamily="34" charset="-122"/>
+                <a:cs typeface="微软雅黑" panose="020B0503020204020204" pitchFamily="34" charset="-120"/>
               </a:rPr>
               <a:t>•  </a:t>
             </a:r>
-            <a:pPr algn="l" indent="0" marL="0">
+            <a:r>
+              <a:rPr lang="en-US" sz="1800" dirty="0">
+                <a:solidFill>
+                  <a:srgbClr val="000000"/>
+                </a:solidFill>
+              </a:rPr>
+              <a:t>忘写终止条件：一层层调下去，栈被撑爆，程序崩溃</a:t>
+            </a:r>
+            <a:endParaRPr lang="en-US" sz="1800" dirty="0"/>
+          </a:p>
+        </p:txBody>
+      </p:sp>
+      <p:sp>
+        <p:nvSpPr>
+          <p:cNvPr id="9" name="Text 7"/>
+          <p:cNvSpPr/>
+          <p:nvPr/>
+        </p:nvSpPr>
+        <p:spPr>
+          <a:xfrm>
+            <a:off x="896112" y="4576572"/>
+            <a:ext cx="10454335" cy="397764"/>
+          </a:xfrm>
+          <a:prstGeom prst="rect">
+            <a:avLst/>
+          </a:prstGeom>
+          <a:noFill/>
+        </p:spPr>
+        <p:txBody>
+          <a:bodyPr wrap="square" rtlCol="0" anchor="t"/>
+          <a:lstStyle/>
+          <a:p>
+            <a:pPr marL="0" indent="0" algn="l">
               <a:lnSpc>
                 <a:spcPct val="115000"/>
               </a:lnSpc>
               <a:buNone/>
             </a:pPr>
             <a:r>
+              <a:rPr lang="en-US" sz="1800" b="1" dirty="0">
+                <a:solidFill>
+                  <a:srgbClr val="1F4E9C"/>
+                </a:solidFill>
+                <a:latin typeface="微软雅黑" panose="020B0503020204020204" pitchFamily="34" charset="-122"/>
+                <a:ea typeface="微软雅黑" panose="020B0503020204020204" pitchFamily="34" charset="-122"/>
+                <a:cs typeface="微软雅黑" panose="020B0503020204020204" pitchFamily="34" charset="-120"/>
+              </a:rPr>
+              <a:t>•  </a:t>
+            </a:r>
+            <a:r>
               <a:rPr lang="en-US" sz="1800" dirty="0">
                 <a:solidFill>
                   <a:srgbClr val="000000"/>
                 </a:solidFill>
               </a:rPr>
-              <a:t>迭代靠循环，一层格子从头跑到尾；递归靠调用，层数随问题展开</a:t>
+              <a:t>斐波那契的写法里，同样的子问题被反复算，n稍大就慢到不能忍</a:t>
             </a:r>
             <a:endParaRPr lang="en-US" sz="1800" dirty="0"/>
           </a:p>
@@ -7232,26 +6888,25 @@
       </p:sp>
       <p:sp>
         <p:nvSpPr>
-          <p:cNvPr id="9" name="Text 7"/>
-          <p:cNvSpPr/>
-          <p:nvPr/>
-        </p:nvSpPr>
-        <p:spPr>
-          <a:xfrm>
-            <a:off x="896112" y="4576572"/>
+          <p:cNvPr id="10" name="Text 8"/>
+          <p:cNvSpPr/>
+          <p:nvPr/>
+        </p:nvSpPr>
+        <p:spPr>
+          <a:xfrm>
+            <a:off x="896112" y="5047488"/>
             <a:ext cx="10454335" cy="397764"/>
           </a:xfrm>
           <a:prstGeom prst="rect">
             <a:avLst/>
           </a:prstGeom>
           <a:noFill/>
-          <a:ln/>
         </p:spPr>
         <p:txBody>
           <a:bodyPr wrap="square" rtlCol="0" anchor="t"/>
           <a:lstStyle/>
           <a:p>
-            <a:pPr algn="l" indent="0" marL="0">
+            <a:pPr marL="0" indent="0" algn="l">
               <a:lnSpc>
                 <a:spcPct val="115000"/>
               </a:lnSpc>
@@ -7262,81 +6917,19 @@
                 <a:solidFill>
                   <a:srgbClr val="1F4E9C"/>
                 </a:solidFill>
-                <a:latin typeface="微软雅黑" pitchFamily="34" charset="0"/>
-                <a:ea typeface="微软雅黑" pitchFamily="34" charset="-122"/>
-                <a:cs typeface="微软雅黑" pitchFamily="34" charset="-120"/>
+                <a:latin typeface="微软雅黑" panose="020B0503020204020204" pitchFamily="34" charset="-122"/>
+                <a:ea typeface="微软雅黑" panose="020B0503020204020204" pitchFamily="34" charset="-122"/>
+                <a:cs typeface="微软雅黑" panose="020B0503020204020204" pitchFamily="34" charset="-120"/>
               </a:rPr>
               <a:t>•  </a:t>
             </a:r>
-            <a:pPr algn="l" indent="0" marL="0">
-              <a:lnSpc>
-                <a:spcPct val="115000"/>
-              </a:lnSpc>
-              <a:buNone/>
-            </a:pPr>
             <a:r>
               <a:rPr lang="en-US" sz="1800" dirty="0">
                 <a:solidFill>
                   <a:srgbClr val="000000"/>
                 </a:solidFill>
               </a:rPr>
-              <a:t>阶乘这种问题，迭代更省；递归的优势在结构自带层次的问题上</a:t>
-            </a:r>
-            <a:endParaRPr lang="en-US" sz="1800" dirty="0"/>
-          </a:p>
-        </p:txBody>
-      </p:sp>
-      <p:sp>
-        <p:nvSpPr>
-          <p:cNvPr id="10" name="Text 8"/>
-          <p:cNvSpPr/>
-          <p:nvPr/>
-        </p:nvSpPr>
-        <p:spPr>
-          <a:xfrm>
-            <a:off x="896112" y="5047488"/>
-            <a:ext cx="10454335" cy="397764"/>
-          </a:xfrm>
-          <a:prstGeom prst="rect">
-            <a:avLst/>
-          </a:prstGeom>
-          <a:noFill/>
-          <a:ln/>
-        </p:spPr>
-        <p:txBody>
-          <a:bodyPr wrap="square" rtlCol="0" anchor="t"/>
-          <a:lstStyle/>
-          <a:p>
-            <a:pPr algn="l" indent="0" marL="0">
-              <a:lnSpc>
-                <a:spcPct val="115000"/>
-              </a:lnSpc>
-              <a:buNone/>
-            </a:pPr>
-            <a:r>
-              <a:rPr lang="en-US" sz="1800" b="1" dirty="0">
-                <a:solidFill>
-                  <a:srgbClr val="1F4E9C"/>
-                </a:solidFill>
-                <a:latin typeface="微软雅黑" pitchFamily="34" charset="0"/>
-                <a:ea typeface="微软雅黑" pitchFamily="34" charset="-122"/>
-                <a:cs typeface="微软雅黑" pitchFamily="34" charset="-120"/>
-              </a:rPr>
-              <a:t>•  </a:t>
-            </a:r>
-            <a:pPr algn="l" indent="0" marL="0">
-              <a:lnSpc>
-                <a:spcPct val="115000"/>
-              </a:lnSpc>
-              <a:buNone/>
-            </a:pPr>
-            <a:r>
-              <a:rPr lang="en-US" sz="1800" dirty="0">
-                <a:solidFill>
-                  <a:srgbClr val="000000"/>
-                </a:solidFill>
-              </a:rPr>
-              <a:t>两种都要会：读代码要都认得，写代码按问题选</a:t>
+              <a:t>规矩：写递归先写终止条件；看见重复计算，知道有更聪明的记结果写法</a:t>
             </a:r>
             <a:endParaRPr lang="en-US" sz="1800" dirty="0"/>
           </a:p>
@@ -7350,9 +6943,9 @@
 </p:sld>
 </file>
 
-<file path=ppt/slides/slide7.xml><?xml version="1.0" encoding="utf-8"?>
+<file path=ppt/slides/slide8.xml><?xml version="1.0" encoding="utf-8"?>
 <p:sld xmlns:a="http://schemas.openxmlformats.org/drawingml/2006/main" xmlns:r="http://schemas.openxmlformats.org/officeDocument/2006/relationships" xmlns:p="http://schemas.openxmlformats.org/presentationml/2006/main">
-  <p:cSld name="Slide 7">
+  <p:cSld>
     <p:bg>
       <p:bgPr>
         <a:blipFill dpi="0" rotWithShape="1">
@@ -7396,13 +6989,12 @@
             <a:avLst/>
           </a:prstGeom>
           <a:noFill/>
-          <a:ln/>
         </p:spPr>
         <p:txBody>
           <a:bodyPr wrap="square" rtlCol="0" anchor="ctr"/>
           <a:lstStyle/>
           <a:p>
-            <a:pPr algn="r" indent="0" marL="0">
+            <a:pPr marL="0" indent="0" algn="r">
               <a:buNone/>
             </a:pPr>
             <a:r>
@@ -7410,11 +7002,11 @@
                 <a:solidFill>
                   <a:srgbClr val="8A9099"/>
                 </a:solidFill>
-                <a:latin typeface="微软雅黑" pitchFamily="34" charset="0"/>
-                <a:ea typeface="微软雅黑" pitchFamily="34" charset="-122"/>
-                <a:cs typeface="微软雅黑" pitchFamily="34" charset="-120"/>
-              </a:rPr>
-              <a:t>7 / 17</a:t>
+                <a:latin typeface="微软雅黑" panose="020B0503020204020204" pitchFamily="34" charset="-122"/>
+                <a:ea typeface="微软雅黑" panose="020B0503020204020204" pitchFamily="34" charset="-122"/>
+                <a:cs typeface="微软雅黑" panose="020B0503020204020204" pitchFamily="34" charset="-120"/>
+              </a:rPr>
+              <a:t>8 / 16</a:t>
             </a:r>
             <a:endParaRPr lang="en-US" sz="1000" dirty="0"/>
           </a:p>
@@ -7435,13 +7027,12 @@
             <a:avLst/>
           </a:prstGeom>
           <a:noFill/>
-          <a:ln/>
         </p:spPr>
         <p:txBody>
           <a:bodyPr wrap="square" rtlCol="0" anchor="ctr"/>
           <a:lstStyle/>
           <a:p>
-            <a:pPr algn="l" indent="0" marL="0">
+            <a:pPr marL="0" indent="0" algn="l">
               <a:buNone/>
             </a:pPr>
             <a:r>
@@ -7449,11 +7040,11 @@
                 <a:solidFill>
                   <a:srgbClr val="1F4E9C"/>
                 </a:solidFill>
-                <a:latin typeface="微软雅黑" pitchFamily="34" charset="0"/>
-                <a:ea typeface="微软雅黑" pitchFamily="34" charset="-122"/>
-                <a:cs typeface="微软雅黑" pitchFamily="34" charset="-120"/>
-              </a:rPr>
-              <a:t>两个事故</a:t>
+                <a:latin typeface="微软雅黑" panose="020B0503020204020204" pitchFamily="34" charset="-122"/>
+                <a:ea typeface="微软雅黑" panose="020B0503020204020204" pitchFamily="34" charset="-122"/>
+                <a:cs typeface="微软雅黑" panose="020B0503020204020204" pitchFamily="34" charset="-120"/>
+              </a:rPr>
+              <a:t>综合实战</a:t>
             </a:r>
             <a:endParaRPr lang="en-US" sz="1400" dirty="0"/>
           </a:p>
@@ -7474,13 +7065,12 @@
             <a:avLst/>
           </a:prstGeom>
           <a:noFill/>
-          <a:ln/>
         </p:spPr>
         <p:txBody>
           <a:bodyPr wrap="square" rtlCol="0" anchor="ctr"/>
           <a:lstStyle/>
           <a:p>
-            <a:pPr algn="l" indent="0" marL="0">
+            <a:pPr marL="0" indent="0" algn="l">
               <a:buNone/>
             </a:pPr>
             <a:r>
@@ -7488,11 +7078,11 @@
                 <a:solidFill>
                   <a:srgbClr val="1F2329"/>
                 </a:solidFill>
-                <a:latin typeface="微软雅黑" pitchFamily="34" charset="0"/>
-                <a:ea typeface="微软雅黑" pitchFamily="34" charset="-122"/>
-                <a:cs typeface="微软雅黑" pitchFamily="34" charset="-120"/>
-              </a:rPr>
-              <a:t>递归的两大事故：无限递归与重复爆炸</a:t>
+                <a:latin typeface="微软雅黑" panose="020B0503020204020204" pitchFamily="34" charset="-122"/>
+                <a:ea typeface="微软雅黑" panose="020B0503020204020204" pitchFamily="34" charset="-122"/>
+                <a:cs typeface="微软雅黑" panose="020B0503020204020204" pitchFamily="34" charset="-120"/>
+              </a:rPr>
+              <a:t>把四样工具装进一个能跑的程序</a:t>
             </a:r>
             <a:endParaRPr lang="en-US" sz="2800" dirty="0"/>
           </a:p>
@@ -7500,14 +7090,161 @@
       </p:sp>
       <p:sp>
         <p:nvSpPr>
-          <p:cNvPr id="5" name="Shape 3"/>
-          <p:cNvSpPr/>
-          <p:nvPr/>
-        </p:nvSpPr>
-        <p:spPr>
-          <a:xfrm>
-            <a:off x="822960" y="2395728"/>
-            <a:ext cx="10545775" cy="1508760"/>
+          <p:cNvPr id="5" name="Text 3"/>
+          <p:cNvSpPr/>
+          <p:nvPr/>
+        </p:nvSpPr>
+        <p:spPr>
+          <a:xfrm>
+            <a:off x="896112" y="2395728"/>
+            <a:ext cx="10454335" cy="397764"/>
+          </a:xfrm>
+          <a:prstGeom prst="rect">
+            <a:avLst/>
+          </a:prstGeom>
+          <a:noFill/>
+        </p:spPr>
+        <p:txBody>
+          <a:bodyPr wrap="square" rtlCol="0" anchor="t"/>
+          <a:lstStyle/>
+          <a:p>
+            <a:pPr marL="0" indent="0" algn="l">
+              <a:lnSpc>
+                <a:spcPct val="115000"/>
+              </a:lnSpc>
+              <a:buNone/>
+            </a:pPr>
+            <a:r>
+              <a:rPr lang="en-US" sz="1800" b="1" dirty="0">
+                <a:solidFill>
+                  <a:srgbClr val="1F4E9C"/>
+                </a:solidFill>
+                <a:latin typeface="微软雅黑" panose="020B0503020204020204" pitchFamily="34" charset="-122"/>
+                <a:ea typeface="微软雅黑" panose="020B0503020204020204" pitchFamily="34" charset="-122"/>
+                <a:cs typeface="微软雅黑" panose="020B0503020204020204" pitchFamily="34" charset="-120"/>
+              </a:rPr>
+              <a:t>•  </a:t>
+            </a:r>
+            <a:r>
+              <a:rPr lang="en-US" sz="1800" dirty="0">
+                <a:solidFill>
+                  <a:srgbClr val="000000"/>
+                </a:solidFill>
+              </a:rPr>
+              <a:t>目标不是学顺序表和链表：插入删除、头结点、查找那些是数据结构课的内容</a:t>
+            </a:r>
+            <a:endParaRPr lang="en-US" sz="1800" dirty="0"/>
+          </a:p>
+        </p:txBody>
+      </p:sp>
+      <p:sp>
+        <p:nvSpPr>
+          <p:cNvPr id="6" name="Text 4"/>
+          <p:cNvSpPr/>
+          <p:nvPr/>
+        </p:nvSpPr>
+        <p:spPr>
+          <a:xfrm>
+            <a:off x="896112" y="2866644"/>
+            <a:ext cx="10454335" cy="397764"/>
+          </a:xfrm>
+          <a:prstGeom prst="rect">
+            <a:avLst/>
+          </a:prstGeom>
+          <a:noFill/>
+        </p:spPr>
+        <p:txBody>
+          <a:bodyPr wrap="square" rtlCol="0" anchor="t"/>
+          <a:lstStyle/>
+          <a:p>
+            <a:pPr marL="0" indent="0" algn="l">
+              <a:lnSpc>
+                <a:spcPct val="115000"/>
+              </a:lnSpc>
+              <a:buNone/>
+            </a:pPr>
+            <a:r>
+              <a:rPr lang="en-US" sz="1800" b="1" dirty="0">
+                <a:solidFill>
+                  <a:srgbClr val="1F4E9C"/>
+                </a:solidFill>
+                <a:latin typeface="微软雅黑" panose="020B0503020204020204" pitchFamily="34" charset="-122"/>
+                <a:ea typeface="微软雅黑" panose="020B0503020204020204" pitchFamily="34" charset="-122"/>
+                <a:cs typeface="微软雅黑" panose="020B0503020204020204" pitchFamily="34" charset="-120"/>
+              </a:rPr>
+              <a:t>•  </a:t>
+            </a:r>
+            <a:r>
+              <a:rPr lang="en-US" sz="1800" dirty="0">
+                <a:solidFill>
+                  <a:srgbClr val="000000"/>
+                </a:solidFill>
+              </a:rPr>
+              <a:t>今天只练四样工具的组合：结构体、指针、动态内存、引用传参</a:t>
+            </a:r>
+            <a:endParaRPr lang="en-US" sz="1800" dirty="0"/>
+          </a:p>
+        </p:txBody>
+      </p:sp>
+      <p:sp>
+        <p:nvSpPr>
+          <p:cNvPr id="7" name="Text 5"/>
+          <p:cNvSpPr/>
+          <p:nvPr/>
+        </p:nvSpPr>
+        <p:spPr>
+          <a:xfrm>
+            <a:off x="896112" y="3337560"/>
+            <a:ext cx="10454335" cy="397764"/>
+          </a:xfrm>
+          <a:prstGeom prst="rect">
+            <a:avLst/>
+          </a:prstGeom>
+          <a:noFill/>
+        </p:spPr>
+        <p:txBody>
+          <a:bodyPr wrap="square" rtlCol="0" anchor="t"/>
+          <a:lstStyle/>
+          <a:p>
+            <a:pPr marL="0" indent="0" algn="l">
+              <a:lnSpc>
+                <a:spcPct val="115000"/>
+              </a:lnSpc>
+              <a:buNone/>
+            </a:pPr>
+            <a:r>
+              <a:rPr lang="en-US" sz="1800" b="1" dirty="0">
+                <a:solidFill>
+                  <a:srgbClr val="1F4E9C"/>
+                </a:solidFill>
+                <a:latin typeface="微软雅黑" panose="020B0503020204020204" pitchFamily="34" charset="-122"/>
+                <a:ea typeface="微软雅黑" panose="020B0503020204020204" pitchFamily="34" charset="-122"/>
+                <a:cs typeface="微软雅黑" panose="020B0503020204020204" pitchFamily="34" charset="-120"/>
+              </a:rPr>
+              <a:t>•  </a:t>
+            </a:r>
+            <a:r>
+              <a:rPr lang="en-US" sz="1800" dirty="0">
+                <a:solidFill>
+                  <a:srgbClr val="000000"/>
+                </a:solidFill>
+              </a:rPr>
+              <a:t>第一个组合：结构体里装数组，再配一个计数的成员</a:t>
+            </a:r>
+            <a:endParaRPr lang="en-US" sz="1800" dirty="0"/>
+          </a:p>
+        </p:txBody>
+      </p:sp>
+      <p:sp>
+        <p:nvSpPr>
+          <p:cNvPr id="8" name="Shape 6"/>
+          <p:cNvSpPr/>
+          <p:nvPr/>
+        </p:nvSpPr>
+        <p:spPr>
+          <a:xfrm>
+            <a:off x="822960" y="3900170"/>
+            <a:ext cx="10546080" cy="2041525"/>
           </a:xfrm>
           <a:prstGeom prst="rect">
             <a:avLst/>
@@ -7515,19 +7252,18 @@
           <a:solidFill>
             <a:srgbClr val="F7F9FC"/>
           </a:solidFill>
-          <a:ln/>
-        </p:spPr>
-      </p:sp>
-      <p:sp>
-        <p:nvSpPr>
-          <p:cNvPr id="6" name="Shape 4"/>
-          <p:cNvSpPr/>
-          <p:nvPr/>
-        </p:nvSpPr>
-        <p:spPr>
-          <a:xfrm>
-            <a:off x="822960" y="2395728"/>
-            <a:ext cx="50292" cy="1508760"/>
+        </p:spPr>
+      </p:sp>
+      <p:sp>
+        <p:nvSpPr>
+          <p:cNvPr id="9" name="Shape 7"/>
+          <p:cNvSpPr/>
+          <p:nvPr/>
+        </p:nvSpPr>
+        <p:spPr>
+          <a:xfrm>
+            <a:off x="822960" y="3900170"/>
+            <a:ext cx="76200" cy="2041525"/>
           </a:xfrm>
           <a:prstGeom prst="rect">
             <a:avLst/>
@@ -7535,31 +7271,29 @@
           <a:solidFill>
             <a:srgbClr val="1F4E9C"/>
           </a:solidFill>
-          <a:ln/>
-        </p:spPr>
-      </p:sp>
-      <p:sp>
-        <p:nvSpPr>
-          <p:cNvPr id="7" name="Text 5"/>
-          <p:cNvSpPr/>
-          <p:nvPr/>
-        </p:nvSpPr>
-        <p:spPr>
-          <a:xfrm>
-            <a:off x="1078992" y="2505456"/>
-            <a:ext cx="10033711" cy="1289304"/>
-          </a:xfrm>
-          <a:prstGeom prst="rect">
-            <a:avLst/>
-          </a:prstGeom>
-          <a:noFill/>
-          <a:ln/>
+        </p:spPr>
+      </p:sp>
+      <p:sp>
+        <p:nvSpPr>
+          <p:cNvPr id="10" name="Text 8"/>
+          <p:cNvSpPr/>
+          <p:nvPr/>
+        </p:nvSpPr>
+        <p:spPr>
+          <a:xfrm>
+            <a:off x="1078865" y="4009390"/>
+            <a:ext cx="10033635" cy="1845945"/>
+          </a:xfrm>
+          <a:prstGeom prst="rect">
+            <a:avLst/>
+          </a:prstGeom>
+          <a:noFill/>
         </p:spPr>
         <p:txBody>
           <a:bodyPr wrap="square" rtlCol="0" anchor="t"/>
           <a:lstStyle/>
           <a:p>
-            <a:pPr algn="l" indent="0" marL="0">
+            <a:pPr marL="0" indent="0" algn="l">
               <a:lnSpc>
                 <a:spcPct val="125000"/>
               </a:lnSpc>
@@ -7570,185 +7304,45 @@
                 <a:solidFill>
                   <a:srgbClr val="1F2329"/>
                 </a:solidFill>
-                <a:latin typeface="Consolas" pitchFamily="34" charset="0"/>
-                <a:ea typeface="Consolas" pitchFamily="34" charset="-122"/>
-                <a:cs typeface="Consolas" pitchFamily="34" charset="-120"/>
-              </a:rPr>
-              <a:t>int fib(int n){
-    if(n &lt;= 1) return n;
-    return fib(n - 1) + fib(n - 2);
-}
-</a:t>
+                <a:latin typeface="Consolas" panose="020B0609020204030204" pitchFamily="34" charset="0"/>
+                <a:ea typeface="Consolas" panose="020B0609020204030204" pitchFamily="34" charset="-122"/>
+                <a:cs typeface="Consolas" panose="020B0609020204030204" pitchFamily="34" charset="-120"/>
+              </a:rPr>
+              <a:t>struct List {
+    int data[10];    // 数据：结构体里装数组
+    int length;      // 计数：数组自己不知道存了几个
+};
+void initList(struct List &amp;L){ L.length = 0; }   // 引用传参改外面的表</a:t>
+            </a:r>
+            <a:endParaRPr lang="en-US" sz="1400" dirty="0">
+              <a:solidFill>
+                <a:srgbClr val="1F2329"/>
+              </a:solidFill>
+              <a:latin typeface="Consolas" panose="020B0609020204030204" pitchFamily="34" charset="0"/>
+              <a:ea typeface="Consolas" panose="020B0609020204030204" pitchFamily="34" charset="-122"/>
+              <a:cs typeface="Consolas" panose="020B0609020204030204" pitchFamily="34" charset="-120"/>
+            </a:endParaRPr>
+          </a:p>
+          <a:p>
+            <a:pPr marL="0" indent="0" algn="l">
+              <a:lnSpc>
+                <a:spcPct val="125000"/>
+              </a:lnSpc>
+              <a:buNone/>
+            </a:pPr>
+            <a:r>
+              <a:rPr lang="en-US" sz="1400" dirty="0">
+                <a:solidFill>
+                  <a:srgbClr val="1F2329"/>
+                </a:solidFill>
+                <a:latin typeface="Consolas" panose="020B0609020204030204" pitchFamily="34" charset="0"/>
+                <a:ea typeface="Consolas" panose="020B0609020204030204" pitchFamily="34" charset="-122"/>
+                <a:cs typeface="Consolas" panose="020B0609020204030204" pitchFamily="34" charset="-120"/>
+                <a:sym typeface="+mn-ea"/>
+              </a:rPr>
+              <a:t>void insert(struct List &amp;L, int x){ ... }</a:t>
             </a:r>
             <a:endParaRPr lang="en-US" sz="1400" dirty="0"/>
-          </a:p>
-        </p:txBody>
-      </p:sp>
-      <p:sp>
-        <p:nvSpPr>
-          <p:cNvPr id="8" name="Text 6"/>
-          <p:cNvSpPr/>
-          <p:nvPr/>
-        </p:nvSpPr>
-        <p:spPr>
-          <a:xfrm>
-            <a:off x="896112" y="4105656"/>
-            <a:ext cx="10454335" cy="397764"/>
-          </a:xfrm>
-          <a:prstGeom prst="rect">
-            <a:avLst/>
-          </a:prstGeom>
-          <a:noFill/>
-          <a:ln/>
-        </p:spPr>
-        <p:txBody>
-          <a:bodyPr wrap="square" rtlCol="0" anchor="t"/>
-          <a:lstStyle/>
-          <a:p>
-            <a:pPr algn="l" indent="0" marL="0">
-              <a:lnSpc>
-                <a:spcPct val="115000"/>
-              </a:lnSpc>
-              <a:buNone/>
-            </a:pPr>
-            <a:r>
-              <a:rPr lang="en-US" sz="1800" b="1" dirty="0">
-                <a:solidFill>
-                  <a:srgbClr val="1F4E9C"/>
-                </a:solidFill>
-                <a:latin typeface="微软雅黑" pitchFamily="34" charset="0"/>
-                <a:ea typeface="微软雅黑" pitchFamily="34" charset="-122"/>
-                <a:cs typeface="微软雅黑" pitchFamily="34" charset="-120"/>
-              </a:rPr>
-              <a:t>•  </a:t>
-            </a:r>
-            <a:pPr algn="l" indent="0" marL="0">
-              <a:lnSpc>
-                <a:spcPct val="115000"/>
-              </a:lnSpc>
-              <a:buNone/>
-            </a:pPr>
-            <a:r>
-              <a:rPr lang="en-US" sz="1800" dirty="0">
-                <a:solidFill>
-                  <a:srgbClr val="000000"/>
-                </a:solidFill>
-              </a:rPr>
-              <a:t>忘写终止条件：一层层调下去，栈被撑爆，程序崩溃</a:t>
-            </a:r>
-            <a:endParaRPr lang="en-US" sz="1800" dirty="0"/>
-          </a:p>
-        </p:txBody>
-      </p:sp>
-      <p:sp>
-        <p:nvSpPr>
-          <p:cNvPr id="9" name="Text 7"/>
-          <p:cNvSpPr/>
-          <p:nvPr/>
-        </p:nvSpPr>
-        <p:spPr>
-          <a:xfrm>
-            <a:off x="896112" y="4576572"/>
-            <a:ext cx="10454335" cy="397764"/>
-          </a:xfrm>
-          <a:prstGeom prst="rect">
-            <a:avLst/>
-          </a:prstGeom>
-          <a:noFill/>
-          <a:ln/>
-        </p:spPr>
-        <p:txBody>
-          <a:bodyPr wrap="square" rtlCol="0" anchor="t"/>
-          <a:lstStyle/>
-          <a:p>
-            <a:pPr algn="l" indent="0" marL="0">
-              <a:lnSpc>
-                <a:spcPct val="115000"/>
-              </a:lnSpc>
-              <a:buNone/>
-            </a:pPr>
-            <a:r>
-              <a:rPr lang="en-US" sz="1800" b="1" dirty="0">
-                <a:solidFill>
-                  <a:srgbClr val="1F4E9C"/>
-                </a:solidFill>
-                <a:latin typeface="微软雅黑" pitchFamily="34" charset="0"/>
-                <a:ea typeface="微软雅黑" pitchFamily="34" charset="-122"/>
-                <a:cs typeface="微软雅黑" pitchFamily="34" charset="-120"/>
-              </a:rPr>
-              <a:t>•  </a:t>
-            </a:r>
-            <a:pPr algn="l" indent="0" marL="0">
-              <a:lnSpc>
-                <a:spcPct val="115000"/>
-              </a:lnSpc>
-              <a:buNone/>
-            </a:pPr>
-            <a:r>
-              <a:rPr lang="en-US" sz="1800" dirty="0">
-                <a:solidFill>
-                  <a:srgbClr val="000000"/>
-                </a:solidFill>
-              </a:rPr>
-              <a:t>斐波那契的写法里，同样的子问题被反复算，n稍大就慢到不能忍</a:t>
-            </a:r>
-            <a:endParaRPr lang="en-US" sz="1800" dirty="0"/>
-          </a:p>
-        </p:txBody>
-      </p:sp>
-      <p:sp>
-        <p:nvSpPr>
-          <p:cNvPr id="10" name="Text 8"/>
-          <p:cNvSpPr/>
-          <p:nvPr/>
-        </p:nvSpPr>
-        <p:spPr>
-          <a:xfrm>
-            <a:off x="896112" y="5047488"/>
-            <a:ext cx="10454335" cy="397764"/>
-          </a:xfrm>
-          <a:prstGeom prst="rect">
-            <a:avLst/>
-          </a:prstGeom>
-          <a:noFill/>
-          <a:ln/>
-        </p:spPr>
-        <p:txBody>
-          <a:bodyPr wrap="square" rtlCol="0" anchor="t"/>
-          <a:lstStyle/>
-          <a:p>
-            <a:pPr algn="l" indent="0" marL="0">
-              <a:lnSpc>
-                <a:spcPct val="115000"/>
-              </a:lnSpc>
-              <a:buNone/>
-            </a:pPr>
-            <a:r>
-              <a:rPr lang="en-US" sz="1800" b="1" dirty="0">
-                <a:solidFill>
-                  <a:srgbClr val="1F4E9C"/>
-                </a:solidFill>
-                <a:latin typeface="微软雅黑" pitchFamily="34" charset="0"/>
-                <a:ea typeface="微软雅黑" pitchFamily="34" charset="-122"/>
-                <a:cs typeface="微软雅黑" pitchFamily="34" charset="-120"/>
-              </a:rPr>
-              <a:t>•  </a:t>
-            </a:r>
-            <a:pPr algn="l" indent="0" marL="0">
-              <a:lnSpc>
-                <a:spcPct val="115000"/>
-              </a:lnSpc>
-              <a:buNone/>
-            </a:pPr>
-            <a:r>
-              <a:rPr lang="en-US" sz="1800" dirty="0">
-                <a:solidFill>
-                  <a:srgbClr val="000000"/>
-                </a:solidFill>
-              </a:rPr>
-              <a:t>规矩：写递归先写终止条件；看见重复计算，知道有更聪明的记结果写法</a:t>
-            </a:r>
-            <a:endParaRPr lang="en-US" sz="1800" dirty="0"/>
           </a:p>
         </p:txBody>
       </p:sp>
@@ -7760,9 +7354,9 @@
 </p:sld>
 </file>
 
-<file path=ppt/slides/slide8.xml><?xml version="1.0" encoding="utf-8"?>
+<file path=ppt/slides/slide9.xml><?xml version="1.0" encoding="utf-8"?>
 <p:sld xmlns:a="http://schemas.openxmlformats.org/drawingml/2006/main" xmlns:r="http://schemas.openxmlformats.org/officeDocument/2006/relationships" xmlns:p="http://schemas.openxmlformats.org/presentationml/2006/main">
-  <p:cSld name="Slide 8">
+  <p:cSld>
     <p:bg>
       <p:bgPr>
         <a:blipFill dpi="0" rotWithShape="1">
@@ -7806,13 +7400,12 @@
             <a:avLst/>
           </a:prstGeom>
           <a:noFill/>
-          <a:ln/>
         </p:spPr>
         <p:txBody>
           <a:bodyPr wrap="square" rtlCol="0" anchor="ctr"/>
           <a:lstStyle/>
           <a:p>
-            <a:pPr algn="r" indent="0" marL="0">
+            <a:pPr marL="0" indent="0" algn="r">
               <a:buNone/>
             </a:pPr>
             <a:r>
@@ -7820,11 +7413,11 @@
                 <a:solidFill>
                   <a:srgbClr val="8A9099"/>
                 </a:solidFill>
-                <a:latin typeface="微软雅黑" pitchFamily="34" charset="0"/>
-                <a:ea typeface="微软雅黑" pitchFamily="34" charset="-122"/>
-                <a:cs typeface="微软雅黑" pitchFamily="34" charset="-120"/>
-              </a:rPr>
-              <a:t>8 / 17</a:t>
+                <a:latin typeface="微软雅黑" panose="020B0503020204020204" pitchFamily="34" charset="-122"/>
+                <a:ea typeface="微软雅黑" panose="020B0503020204020204" pitchFamily="34" charset="-122"/>
+                <a:cs typeface="微软雅黑" panose="020B0503020204020204" pitchFamily="34" charset="-120"/>
+              </a:rPr>
+              <a:t>9 / 16</a:t>
             </a:r>
             <a:endParaRPr lang="en-US" sz="1000" dirty="0"/>
           </a:p>
@@ -7845,13 +7438,12 @@
             <a:avLst/>
           </a:prstGeom>
           <a:noFill/>
-          <a:ln/>
         </p:spPr>
         <p:txBody>
           <a:bodyPr wrap="square" rtlCol="0" anchor="ctr"/>
           <a:lstStyle/>
           <a:p>
-            <a:pPr algn="l" indent="0" marL="0">
+            <a:pPr marL="0" indent="0" algn="l">
               <a:buNone/>
             </a:pPr>
             <a:r>
@@ -7859,11 +7451,11 @@
                 <a:solidFill>
                   <a:srgbClr val="1F4E9C"/>
                 </a:solidFill>
-                <a:latin typeface="微软雅黑" pitchFamily="34" charset="0"/>
-                <a:ea typeface="微软雅黑" pitchFamily="34" charset="-122"/>
-                <a:cs typeface="微软雅黑" pitchFamily="34" charset="-120"/>
-              </a:rPr>
-              <a:t>综合实战</a:t>
+                <a:latin typeface="微软雅黑" panose="020B0503020204020204" pitchFamily="34" charset="-122"/>
+                <a:ea typeface="微软雅黑" panose="020B0503020204020204" pitchFamily="34" charset="-122"/>
+                <a:cs typeface="微软雅黑" panose="020B0503020204020204" pitchFamily="34" charset="-120"/>
+              </a:rPr>
+              <a:t>结构体里装指针</a:t>
             </a:r>
             <a:endParaRPr lang="en-US" sz="1400" dirty="0"/>
           </a:p>
@@ -7884,13 +7476,12 @@
             <a:avLst/>
           </a:prstGeom>
           <a:noFill/>
-          <a:ln/>
         </p:spPr>
         <p:txBody>
           <a:bodyPr wrap="square" rtlCol="0" anchor="ctr"/>
           <a:lstStyle/>
           <a:p>
-            <a:pPr algn="l" indent="0" marL="0">
+            <a:pPr marL="0" indent="0" algn="l">
               <a:buNone/>
             </a:pPr>
             <a:r>
@@ -7898,11 +7489,11 @@
                 <a:solidFill>
                   <a:srgbClr val="1F2329"/>
                 </a:solidFill>
-                <a:latin typeface="微软雅黑" pitchFamily="34" charset="0"/>
-                <a:ea typeface="微软雅黑" pitchFamily="34" charset="-122"/>
-                <a:cs typeface="微软雅黑" pitchFamily="34" charset="-120"/>
-              </a:rPr>
-              <a:t>从零手写顺序表：数组加长度</a:t>
+                <a:latin typeface="微软雅黑" panose="020B0503020204020204" pitchFamily="34" charset="-122"/>
+                <a:ea typeface="微软雅黑" panose="020B0503020204020204" pitchFamily="34" charset="-122"/>
+                <a:cs typeface="微软雅黑" panose="020B0503020204020204" pitchFamily="34" charset="-120"/>
+              </a:rPr>
+              <a:t>自引用：成员是指向同类结构体的指针</a:t>
             </a:r>
             <a:endParaRPr lang="en-US" sz="2800" dirty="0"/>
           </a:p>
@@ -7925,7 +7516,6 @@
           <a:solidFill>
             <a:srgbClr val="F7F9FC"/>
           </a:solidFill>
-          <a:ln/>
         </p:spPr>
       </p:sp>
       <p:sp>
@@ -7945,7 +7535,6 @@
           <a:solidFill>
             <a:srgbClr val="1F4E9C"/>
           </a:solidFill>
-          <a:ln/>
         </p:spPr>
       </p:sp>
       <p:sp>
@@ -7963,13 +7552,12 @@
             <a:avLst/>
           </a:prstGeom>
           <a:noFill/>
-          <a:ln/>
         </p:spPr>
         <p:txBody>
           <a:bodyPr wrap="square" rtlCol="0" anchor="t"/>
           <a:lstStyle/>
           <a:p>
-            <a:pPr algn="l" indent="0" marL="0">
+            <a:pPr marL="0" indent="0" algn="l">
               <a:lnSpc>
                 <a:spcPct val="125000"/>
               </a:lnSpc>
@@ -7980,13 +7568,13 @@
                 <a:solidFill>
                   <a:srgbClr val="1F2329"/>
                 </a:solidFill>
-                <a:latin typeface="Consolas" pitchFamily="34" charset="0"/>
-                <a:ea typeface="Consolas" pitchFamily="34" charset="-122"/>
-                <a:cs typeface="Consolas" pitchFamily="34" charset="-120"/>
-              </a:rPr>
-              <a:t>struct List {
-    int data[10];    // 数据存这里
-    int length;      // 当前存了几个
+                <a:latin typeface="Consolas" panose="020B0609020204030204" pitchFamily="34" charset="0"/>
+                <a:ea typeface="Consolas" panose="020B0609020204030204" pitchFamily="34" charset="-122"/>
+                <a:cs typeface="Consolas" panose="020B0609020204030204" pitchFamily="34" charset="-120"/>
+              </a:rPr>
+              <a:t>struct Node {
+    int data;              // 数据
+    struct Node *next;     // 指向同类的指针
 };
 </a:t>
             </a:r>
@@ -8009,13 +7597,12 @@
             <a:avLst/>
           </a:prstGeom>
           <a:noFill/>
-          <a:ln/>
         </p:spPr>
         <p:txBody>
           <a:bodyPr wrap="square" rtlCol="0" anchor="t"/>
           <a:lstStyle/>
           <a:p>
-            <a:pPr algn="l" indent="0" marL="0">
+            <a:pPr marL="0" indent="0" algn="l">
               <a:lnSpc>
                 <a:spcPct val="115000"/>
               </a:lnSpc>
@@ -8026,25 +7613,68 @@
                 <a:solidFill>
                   <a:srgbClr val="1F4E9C"/>
                 </a:solidFill>
-                <a:latin typeface="微软雅黑" pitchFamily="34" charset="0"/>
-                <a:ea typeface="微软雅黑" pitchFamily="34" charset="-122"/>
-                <a:cs typeface="微软雅黑" pitchFamily="34" charset="-120"/>
+                <a:latin typeface="微软雅黑" panose="020B0503020204020204" pitchFamily="34" charset="-122"/>
+                <a:ea typeface="微软雅黑" panose="020B0503020204020204" pitchFamily="34" charset="-122"/>
+                <a:cs typeface="微软雅黑" panose="020B0503020204020204" pitchFamily="34" charset="-120"/>
               </a:rPr>
               <a:t>•  </a:t>
             </a:r>
-            <a:pPr algn="l" indent="0" marL="0">
+            <a:r>
+              <a:rPr lang="en-US" sz="1800" dirty="0">
+                <a:solidFill>
+                  <a:srgbClr val="000000"/>
+                </a:solidFill>
+              </a:rPr>
+              <a:t>数组必须连成一片、大小写死；要让几块分开的内存互相认识，只能用指针</a:t>
+            </a:r>
+            <a:endParaRPr lang="en-US" sz="1800" dirty="0"/>
+          </a:p>
+        </p:txBody>
+      </p:sp>
+      <p:sp>
+        <p:nvSpPr>
+          <p:cNvPr id="9" name="Text 7"/>
+          <p:cNvSpPr/>
+          <p:nvPr/>
+        </p:nvSpPr>
+        <p:spPr>
+          <a:xfrm>
+            <a:off x="896112" y="4576572"/>
+            <a:ext cx="10454335" cy="397764"/>
+          </a:xfrm>
+          <a:prstGeom prst="rect">
+            <a:avLst/>
+          </a:prstGeom>
+          <a:noFill/>
+        </p:spPr>
+        <p:txBody>
+          <a:bodyPr wrap="square" rtlCol="0" anchor="t"/>
+          <a:lstStyle/>
+          <a:p>
+            <a:pPr marL="0" indent="0" algn="l">
               <a:lnSpc>
                 <a:spcPct val="115000"/>
               </a:lnSpc>
               <a:buNone/>
             </a:pPr>
             <a:r>
+              <a:rPr lang="en-US" sz="1800" b="1" dirty="0">
+                <a:solidFill>
+                  <a:srgbClr val="1F4E9C"/>
+                </a:solidFill>
+                <a:latin typeface="微软雅黑" panose="020B0503020204020204" pitchFamily="34" charset="-122"/>
+                <a:ea typeface="微软雅黑" panose="020B0503020204020204" pitchFamily="34" charset="-122"/>
+                <a:cs typeface="微软雅黑" panose="020B0503020204020204" pitchFamily="34" charset="-120"/>
+              </a:rPr>
+              <a:t>•  </a:t>
+            </a:r>
+            <a:r>
               <a:rPr lang="en-US" sz="1800" dirty="0">
                 <a:solidFill>
                   <a:srgbClr val="000000"/>
                 </a:solidFill>
               </a:rPr>
-              <a:t>顺序表 = 数组 + 一个记录长度的数，打包成结构体</a:t>
+              <a:t>自引用合法的关键在星号：成员是地址，不需要知道Node内部多大</a:t>
             </a:r>
             <a:endParaRPr lang="en-US" sz="1800" dirty="0"/>
           </a:p>
@@ -8052,26 +7682,25 @@
       </p:sp>
       <p:sp>
         <p:nvSpPr>
-          <p:cNvPr id="9" name="Text 7"/>
-          <p:cNvSpPr/>
-          <p:nvPr/>
-        </p:nvSpPr>
-        <p:spPr>
-          <a:xfrm>
-            <a:off x="896112" y="4576572"/>
+          <p:cNvPr id="10" name="Text 8"/>
+          <p:cNvSpPr/>
+          <p:nvPr/>
+        </p:nvSpPr>
+        <p:spPr>
+          <a:xfrm>
+            <a:off x="896112" y="5047488"/>
             <a:ext cx="10454335" cy="397764"/>
           </a:xfrm>
           <a:prstGeom prst="rect">
             <a:avLst/>
           </a:prstGeom>
           <a:noFill/>
-          <a:ln/>
         </p:spPr>
         <p:txBody>
           <a:bodyPr wrap="square" rtlCol="0" anchor="t"/>
           <a:lstStyle/>
           <a:p>
-            <a:pPr algn="l" indent="0" marL="0">
+            <a:pPr marL="0" indent="0" algn="l">
               <a:lnSpc>
                 <a:spcPct val="115000"/>
               </a:lnSpc>
@@ -8082,496 +7711,70 @@
                 <a:solidFill>
                   <a:srgbClr val="1F4E9C"/>
                 </a:solidFill>
-                <a:latin typeface="微软雅黑" pitchFamily="34" charset="0"/>
-                <a:ea typeface="微软雅黑" pitchFamily="34" charset="-122"/>
-                <a:cs typeface="微软雅黑" pitchFamily="34" charset="-120"/>
+                <a:latin typeface="微软雅黑" panose="020B0503020204020204" pitchFamily="34" charset="-122"/>
+                <a:ea typeface="微软雅黑" panose="020B0503020204020204" pitchFamily="34" charset="-122"/>
+                <a:cs typeface="微软雅黑" panose="020B0503020204020204" pitchFamily="34" charset="-120"/>
               </a:rPr>
               <a:t>•  </a:t>
             </a:r>
-            <a:pPr algn="l" indent="0" marL="0">
+            <a:r>
+              <a:rPr lang="en-US" sz="1800" dirty="0">
+                <a:solidFill>
+                  <a:srgbClr val="000000"/>
+                </a:solidFill>
+              </a:rPr>
+              <a:t>成员写struct Node next（不带星号）就不行：套下去没有尽头</a:t>
+            </a:r>
+            <a:endParaRPr lang="en-US" sz="1800" dirty="0"/>
+          </a:p>
+        </p:txBody>
+      </p:sp>
+      <p:sp>
+        <p:nvSpPr>
+          <p:cNvPr id="11" name="Text 9"/>
+          <p:cNvSpPr/>
+          <p:nvPr/>
+        </p:nvSpPr>
+        <p:spPr>
+          <a:xfrm>
+            <a:off x="896112" y="5518404"/>
+            <a:ext cx="10454335" cy="397764"/>
+          </a:xfrm>
+          <a:prstGeom prst="rect">
+            <a:avLst/>
+          </a:prstGeom>
+          <a:noFill/>
+        </p:spPr>
+        <p:txBody>
+          <a:bodyPr wrap="square" rtlCol="0" anchor="t"/>
+          <a:lstStyle/>
+          <a:p>
+            <a:pPr marL="0" indent="0" algn="l">
               <a:lnSpc>
                 <a:spcPct val="115000"/>
               </a:lnSpc>
               <a:buNone/>
             </a:pPr>
             <a:r>
+              <a:rPr lang="en-US" sz="1800" b="1" dirty="0">
+                <a:solidFill>
+                  <a:srgbClr val="1F4E9C"/>
+                </a:solidFill>
+                <a:latin typeface="微软雅黑" panose="020B0503020204020204" pitchFamily="34" charset="-122"/>
+                <a:ea typeface="微软雅黑" panose="020B0503020204020204" pitchFamily="34" charset="-122"/>
+                <a:cs typeface="微软雅黑" panose="020B0503020204020204" pitchFamily="34" charset="-120"/>
+              </a:rPr>
+              <a:t>•  </a:t>
+            </a:r>
+            <a:r>
               <a:rPr lang="en-US" sz="1800" dirty="0">
                 <a:solidFill>
                   <a:srgbClr val="000000"/>
                 </a:solidFill>
               </a:rPr>
-              <a:t>length是命根子：没有它，不知道表里有几个数</a:t>
+              <a:t>定义里struct不能省，此刻还没有别名</a:t>
             </a:r>
             <a:endParaRPr lang="en-US" sz="1800" dirty="0"/>
-          </a:p>
-        </p:txBody>
-      </p:sp>
-      <p:sp>
-        <p:nvSpPr>
-          <p:cNvPr id="10" name="Text 8"/>
-          <p:cNvSpPr/>
-          <p:nvPr/>
-        </p:nvSpPr>
-        <p:spPr>
-          <a:xfrm>
-            <a:off x="896112" y="5047488"/>
-            <a:ext cx="10454335" cy="397764"/>
-          </a:xfrm>
-          <a:prstGeom prst="rect">
-            <a:avLst/>
-          </a:prstGeom>
-          <a:noFill/>
-          <a:ln/>
-        </p:spPr>
-        <p:txBody>
-          <a:bodyPr wrap="square" rtlCol="0" anchor="t"/>
-          <a:lstStyle/>
-          <a:p>
-            <a:pPr algn="l" indent="0" marL="0">
-              <a:lnSpc>
-                <a:spcPct val="115000"/>
-              </a:lnSpc>
-              <a:buNone/>
-            </a:pPr>
-            <a:r>
-              <a:rPr lang="en-US" sz="1800" b="1" dirty="0">
-                <a:solidFill>
-                  <a:srgbClr val="1F4E9C"/>
-                </a:solidFill>
-                <a:latin typeface="微软雅黑" pitchFamily="34" charset="0"/>
-                <a:ea typeface="微软雅黑" pitchFamily="34" charset="-122"/>
-                <a:cs typeface="微软雅黑" pitchFamily="34" charset="-120"/>
-              </a:rPr>
-              <a:t>•  </a:t>
-            </a:r>
-            <a:pPr algn="l" indent="0" marL="0">
-              <a:lnSpc>
-                <a:spcPct val="115000"/>
-              </a:lnSpc>
-              <a:buNone/>
-            </a:pPr>
-            <a:r>
-              <a:rPr lang="en-US" sz="1800" dirty="0">
-                <a:solidFill>
-                  <a:srgbClr val="000000"/>
-                </a:solidFill>
-              </a:rPr>
-              <a:t>前三节的工具全用上了：结构体、数组、成员访问</a:t>
-            </a:r>
-            <a:endParaRPr lang="en-US" sz="1800" dirty="0"/>
-          </a:p>
-        </p:txBody>
-      </p:sp>
-    </p:spTree>
-  </p:cSld>
-  <p:clrMapOvr>
-    <a:masterClrMapping/>
-  </p:clrMapOvr>
-</p:sld>
-</file>
-
-<file path=ppt/slides/slide9.xml><?xml version="1.0" encoding="utf-8"?>
-<p:sld xmlns:a="http://schemas.openxmlformats.org/drawingml/2006/main" xmlns:r="http://schemas.openxmlformats.org/officeDocument/2006/relationships" xmlns:p="http://schemas.openxmlformats.org/presentationml/2006/main">
-  <p:cSld name="Slide 9">
-    <p:bg>
-      <p:bgPr>
-        <a:blipFill dpi="0" rotWithShape="1">
-          <a:blip r:embed="rId1">
-            <a:lum/>
-          </a:blip>
-          <a:srcRect/>
-          <a:stretch>
-            <a:fillRect/>
-          </a:stretch>
-        </a:blipFill>
-        <a:effectLst/>
-      </p:bgPr>
-    </p:bg>
-    <p:spTree>
-      <p:nvGrpSpPr>
-        <p:cNvPr id="1" name=""/>
-        <p:cNvGrpSpPr/>
-        <p:nvPr/>
-      </p:nvGrpSpPr>
-      <p:grpSpPr>
-        <a:xfrm>
-          <a:off x="0" y="0"/>
-          <a:ext cx="0" cy="0"/>
-          <a:chOff x="0" y="0"/>
-          <a:chExt cx="0" cy="0"/>
-        </a:xfrm>
-      </p:grpSpPr>
-      <p:sp>
-        <p:nvSpPr>
-          <p:cNvPr id="2" name="Text 0"/>
-          <p:cNvSpPr/>
-          <p:nvPr/>
-        </p:nvSpPr>
-        <p:spPr>
-          <a:xfrm>
-            <a:off x="10362895" y="6016752"/>
-            <a:ext cx="1463040" cy="320040"/>
-          </a:xfrm>
-          <a:prstGeom prst="rect">
-            <a:avLst/>
-          </a:prstGeom>
-          <a:noFill/>
-          <a:ln/>
-        </p:spPr>
-        <p:txBody>
-          <a:bodyPr wrap="square" rtlCol="0" anchor="ctr"/>
-          <a:lstStyle/>
-          <a:p>
-            <a:pPr algn="r" indent="0" marL="0">
-              <a:buNone/>
-            </a:pPr>
-            <a:r>
-              <a:rPr lang="en-US" sz="1000" dirty="0">
-                <a:solidFill>
-                  <a:srgbClr val="8A9099"/>
-                </a:solidFill>
-                <a:latin typeface="微软雅黑" pitchFamily="34" charset="0"/>
-                <a:ea typeface="微软雅黑" pitchFamily="34" charset="-122"/>
-                <a:cs typeface="微软雅黑" pitchFamily="34" charset="-120"/>
-              </a:rPr>
-              <a:t>9 / 17</a:t>
-            </a:r>
-            <a:endParaRPr lang="en-US" sz="1000" dirty="0"/>
-          </a:p>
-        </p:txBody>
-      </p:sp>
-      <p:sp>
-        <p:nvSpPr>
-          <p:cNvPr id="3" name="Text 1"/>
-          <p:cNvSpPr/>
-          <p:nvPr/>
-        </p:nvSpPr>
-        <p:spPr>
-          <a:xfrm>
-            <a:off x="822960" y="960120"/>
-            <a:ext cx="10545775" cy="365760"/>
-          </a:xfrm>
-          <a:prstGeom prst="rect">
-            <a:avLst/>
-          </a:prstGeom>
-          <a:noFill/>
-          <a:ln/>
-        </p:spPr>
-        <p:txBody>
-          <a:bodyPr wrap="square" rtlCol="0" anchor="ctr"/>
-          <a:lstStyle/>
-          <a:p>
-            <a:pPr algn="l" indent="0" marL="0">
-              <a:buNone/>
-            </a:pPr>
-            <a:r>
-              <a:rPr lang="en-US" sz="1400" b="1" dirty="0">
-                <a:solidFill>
-                  <a:srgbClr val="1F4E9C"/>
-                </a:solidFill>
-                <a:latin typeface="微软雅黑" pitchFamily="34" charset="0"/>
-                <a:ea typeface="微软雅黑" pitchFamily="34" charset="-122"/>
-                <a:cs typeface="微软雅黑" pitchFamily="34" charset="-120"/>
-              </a:rPr>
-              <a:t>顺序表操作</a:t>
-            </a:r>
-            <a:endParaRPr lang="en-US" sz="1400" dirty="0"/>
-          </a:p>
-        </p:txBody>
-      </p:sp>
-      <p:sp>
-        <p:nvSpPr>
-          <p:cNvPr id="4" name="Text 2"/>
-          <p:cNvSpPr/>
-          <p:nvPr/>
-        </p:nvSpPr>
-        <p:spPr>
-          <a:xfrm>
-            <a:off x="822960" y="1344168"/>
-            <a:ext cx="10545775" cy="731520"/>
-          </a:xfrm>
-          <a:prstGeom prst="rect">
-            <a:avLst/>
-          </a:prstGeom>
-          <a:noFill/>
-          <a:ln/>
-        </p:spPr>
-        <p:txBody>
-          <a:bodyPr wrap="square" rtlCol="0" anchor="ctr"/>
-          <a:lstStyle/>
-          <a:p>
-            <a:pPr algn="l" indent="0" marL="0">
-              <a:buNone/>
-            </a:pPr>
-            <a:r>
-              <a:rPr lang="en-US" sz="2800" b="1" dirty="0">
-                <a:solidFill>
-                  <a:srgbClr val="1F2329"/>
-                </a:solidFill>
-                <a:latin typeface="微软雅黑" pitchFamily="34" charset="0"/>
-                <a:ea typeface="微软雅黑" pitchFamily="34" charset="-122"/>
-                <a:cs typeface="微软雅黑" pitchFamily="34" charset="-120"/>
-              </a:rPr>
-              <a:t>顺序表的初始化和插入：引用传参上岗</a:t>
-            </a:r>
-            <a:endParaRPr lang="en-US" sz="2800" dirty="0"/>
-          </a:p>
-        </p:txBody>
-      </p:sp>
-      <p:sp>
-        <p:nvSpPr>
-          <p:cNvPr id="5" name="Shape 3"/>
-          <p:cNvSpPr/>
-          <p:nvPr/>
-        </p:nvSpPr>
-        <p:spPr>
-          <a:xfrm>
-            <a:off x="822960" y="2395728"/>
-            <a:ext cx="10545775" cy="2152085"/>
-          </a:xfrm>
-          <a:prstGeom prst="rect">
-            <a:avLst/>
-          </a:prstGeom>
-          <a:solidFill>
-            <a:srgbClr val="F7F9FC"/>
-          </a:solidFill>
-          <a:ln/>
-        </p:spPr>
-      </p:sp>
-      <p:sp>
-        <p:nvSpPr>
-          <p:cNvPr id="6" name="Shape 4"/>
-          <p:cNvSpPr/>
-          <p:nvPr/>
-        </p:nvSpPr>
-        <p:spPr>
-          <a:xfrm>
-            <a:off x="822960" y="2395728"/>
-            <a:ext cx="50292" cy="2152085"/>
-          </a:xfrm>
-          <a:prstGeom prst="rect">
-            <a:avLst/>
-          </a:prstGeom>
-          <a:solidFill>
-            <a:srgbClr val="1F4E9C"/>
-          </a:solidFill>
-          <a:ln/>
-        </p:spPr>
-      </p:sp>
-      <p:sp>
-        <p:nvSpPr>
-          <p:cNvPr id="7" name="Text 5"/>
-          <p:cNvSpPr/>
-          <p:nvPr/>
-        </p:nvSpPr>
-        <p:spPr>
-          <a:xfrm>
-            <a:off x="1078992" y="2505456"/>
-            <a:ext cx="10033711" cy="1932629"/>
-          </a:xfrm>
-          <a:prstGeom prst="rect">
-            <a:avLst/>
-          </a:prstGeom>
-          <a:noFill/>
-          <a:ln/>
-        </p:spPr>
-        <p:txBody>
-          <a:bodyPr wrap="square" rtlCol="0" anchor="t"/>
-          <a:lstStyle/>
-          <a:p>
-            <a:pPr algn="l" indent="0" marL="0">
-              <a:lnSpc>
-                <a:spcPct val="125000"/>
-              </a:lnSpc>
-              <a:buNone/>
-            </a:pPr>
-            <a:r>
-              <a:rPr lang="en-US" sz="1300" dirty="0">
-                <a:solidFill>
-                  <a:srgbClr val="1F2329"/>
-                </a:solidFill>
-                <a:latin typeface="Consolas" pitchFamily="34" charset="0"/>
-                <a:ea typeface="Consolas" pitchFamily="34" charset="-122"/>
-                <a:cs typeface="Consolas" pitchFamily="34" charset="-120"/>
-              </a:rPr>
-              <a:t>void initList(struct List &amp;L){
-    L.length = 0;
-}
-void insert(struct List &amp;L, int x){
-    L.data[L.length] = x;
-    L.length++;
-}
-</a:t>
-            </a:r>
-            <a:endParaRPr lang="en-US" sz="1300" dirty="0"/>
-          </a:p>
-        </p:txBody>
-      </p:sp>
-      <p:sp>
-        <p:nvSpPr>
-          <p:cNvPr id="8" name="Text 6"/>
-          <p:cNvSpPr/>
-          <p:nvPr/>
-        </p:nvSpPr>
-        <p:spPr>
-          <a:xfrm>
-            <a:off x="896112" y="4748981"/>
-            <a:ext cx="10454335" cy="378714"/>
-          </a:xfrm>
-          <a:prstGeom prst="rect">
-            <a:avLst/>
-          </a:prstGeom>
-          <a:noFill/>
-          <a:ln/>
-        </p:spPr>
-        <p:txBody>
-          <a:bodyPr wrap="square" rtlCol="0" anchor="t"/>
-          <a:lstStyle/>
-          <a:p>
-            <a:pPr algn="l" indent="0" marL="0">
-              <a:lnSpc>
-                <a:spcPct val="115000"/>
-              </a:lnSpc>
-              <a:buNone/>
-            </a:pPr>
-            <a:r>
-              <a:rPr lang="en-US" sz="1700" b="1" dirty="0">
-                <a:solidFill>
-                  <a:srgbClr val="1F4E9C"/>
-                </a:solidFill>
-                <a:latin typeface="微软雅黑" pitchFamily="34" charset="0"/>
-                <a:ea typeface="微软雅黑" pitchFamily="34" charset="-122"/>
-                <a:cs typeface="微软雅黑" pitchFamily="34" charset="-120"/>
-              </a:rPr>
-              <a:t>•  </a:t>
-            </a:r>
-            <a:pPr algn="l" indent="0" marL="0">
-              <a:lnSpc>
-                <a:spcPct val="115000"/>
-              </a:lnSpc>
-              <a:buNone/>
-            </a:pPr>
-            <a:r>
-              <a:rPr lang="en-US" sz="1700" dirty="0">
-                <a:solidFill>
-                  <a:srgbClr val="000000"/>
-                </a:solidFill>
-              </a:rPr>
-              <a:t>参数写&amp;：函数改的就是外面的表，上节课的引用传参</a:t>
-            </a:r>
-            <a:endParaRPr lang="en-US" sz="1700" dirty="0"/>
-          </a:p>
-        </p:txBody>
-      </p:sp>
-      <p:sp>
-        <p:nvSpPr>
-          <p:cNvPr id="9" name="Text 7"/>
-          <p:cNvSpPr/>
-          <p:nvPr/>
-        </p:nvSpPr>
-        <p:spPr>
-          <a:xfrm>
-            <a:off x="896112" y="5200847"/>
-            <a:ext cx="10454335" cy="378714"/>
-          </a:xfrm>
-          <a:prstGeom prst="rect">
-            <a:avLst/>
-          </a:prstGeom>
-          <a:noFill/>
-          <a:ln/>
-        </p:spPr>
-        <p:txBody>
-          <a:bodyPr wrap="square" rtlCol="0" anchor="t"/>
-          <a:lstStyle/>
-          <a:p>
-            <a:pPr algn="l" indent="0" marL="0">
-              <a:lnSpc>
-                <a:spcPct val="115000"/>
-              </a:lnSpc>
-              <a:buNone/>
-            </a:pPr>
-            <a:r>
-              <a:rPr lang="en-US" sz="1700" b="1" dirty="0">
-                <a:solidFill>
-                  <a:srgbClr val="1F4E9C"/>
-                </a:solidFill>
-                <a:latin typeface="微软雅黑" pitchFamily="34" charset="0"/>
-                <a:ea typeface="微软雅黑" pitchFamily="34" charset="-122"/>
-                <a:cs typeface="微软雅黑" pitchFamily="34" charset="-120"/>
-              </a:rPr>
-              <a:t>•  </a:t>
-            </a:r>
-            <a:pPr algn="l" indent="0" marL="0">
-              <a:lnSpc>
-                <a:spcPct val="115000"/>
-              </a:lnSpc>
-              <a:buNone/>
-            </a:pPr>
-            <a:r>
-              <a:rPr lang="en-US" sz="1700" dirty="0">
-                <a:solidFill>
-                  <a:srgbClr val="000000"/>
-                </a:solidFill>
-              </a:rPr>
-              <a:t>插入就两步：放进length那格，length加1</a:t>
-            </a:r>
-            <a:endParaRPr lang="en-US" sz="1700" dirty="0"/>
-          </a:p>
-        </p:txBody>
-      </p:sp>
-      <p:sp>
-        <p:nvSpPr>
-          <p:cNvPr id="10" name="Text 8"/>
-          <p:cNvSpPr/>
-          <p:nvPr/>
-        </p:nvSpPr>
-        <p:spPr>
-          <a:xfrm>
-            <a:off x="896112" y="5652713"/>
-            <a:ext cx="10454335" cy="378714"/>
-          </a:xfrm>
-          <a:prstGeom prst="rect">
-            <a:avLst/>
-          </a:prstGeom>
-          <a:noFill/>
-          <a:ln/>
-        </p:spPr>
-        <p:txBody>
-          <a:bodyPr wrap="square" rtlCol="0" anchor="t"/>
-          <a:lstStyle/>
-          <a:p>
-            <a:pPr algn="l" indent="0" marL="0">
-              <a:lnSpc>
-                <a:spcPct val="115000"/>
-              </a:lnSpc>
-              <a:buNone/>
-            </a:pPr>
-            <a:r>
-              <a:rPr lang="en-US" sz="1700" b="1" dirty="0">
-                <a:solidFill>
-                  <a:srgbClr val="1F4E9C"/>
-                </a:solidFill>
-                <a:latin typeface="微软雅黑" pitchFamily="34" charset="0"/>
-                <a:ea typeface="微软雅黑" pitchFamily="34" charset="-122"/>
-                <a:cs typeface="微软雅黑" pitchFamily="34" charset="-120"/>
-              </a:rPr>
-              <a:t>•  </a:t>
-            </a:r>
-            <a:pPr algn="l" indent="0" marL="0">
-              <a:lnSpc>
-                <a:spcPct val="115000"/>
-              </a:lnSpc>
-              <a:buNone/>
-            </a:pPr>
-            <a:r>
-              <a:rPr lang="en-US" sz="1700" dirty="0">
-                <a:solidFill>
-                  <a:srgbClr val="000000"/>
-                </a:solidFill>
-              </a:rPr>
-              <a:t>main里造表、初始化、插几个数、遍历，一个能跑的表就成了</a:t>
-            </a:r>
-            <a:endParaRPr lang="en-US" sz="1700" dirty="0"/>
           </a:p>
         </p:txBody>
       </p:sp>
@@ -8626,7 +7829,7 @@
     </a:clrScheme>
     <a:fontScheme name="Office">
       <a:majorFont>
-        <a:latin typeface="Calibri Light" panose="020F0302020204030204"/>
+        <a:latin typeface="Calibri Light"/>
         <a:ea typeface=""/>
         <a:cs typeface=""/>
         <a:font script="Jpan" typeface="游ゴシック Light"/>
@@ -8659,26 +7862,9 @@
         <a:font script="Viet" typeface="Times New Roman"/>
         <a:font script="Uigh" typeface="Microsoft Uighur"/>
         <a:font script="Geor" typeface="Sylfaen"/>
-        <a:font script="Armn" typeface="Arial"/>
-        <a:font script="Bugi" typeface="Leelawadee UI"/>
-        <a:font script="Bopo" typeface="Microsoft JhengHei"/>
-        <a:font script="Java" typeface="Javanese Text"/>
-        <a:font script="Lisu" typeface="Segoe UI"/>
-        <a:font script="Mymr" typeface="Myanmar Text"/>
-        <a:font script="Nkoo" typeface="Ebrima"/>
-        <a:font script="Olck" typeface="Nirmala UI"/>
-        <a:font script="Osma" typeface="Ebrima"/>
-        <a:font script="Phag" typeface="Phagspa"/>
-        <a:font script="Syrn" typeface="Estrangelo Edessa"/>
-        <a:font script="Syrj" typeface="Estrangelo Edessa"/>
-        <a:font script="Syre" typeface="Estrangelo Edessa"/>
-        <a:font script="Sora" typeface="Nirmala UI"/>
-        <a:font script="Tale" typeface="Microsoft Tai Le"/>
-        <a:font script="Talu" typeface="Microsoft New Tai Lue"/>
-        <a:font script="Tfng" typeface="Ebrima"/>
       </a:majorFont>
       <a:minorFont>
-        <a:latin typeface="Calibri" panose="020F0502020204030204"/>
+        <a:latin typeface="Calibri"/>
         <a:ea typeface=""/>
         <a:cs typeface=""/>
         <a:font script="Jpan" typeface="游ゴシック"/>
@@ -8711,23 +7897,6 @@
         <a:font script="Viet" typeface="Arial"/>
         <a:font script="Uigh" typeface="Microsoft Uighur"/>
         <a:font script="Geor" typeface="Sylfaen"/>
-        <a:font script="Armn" typeface="Arial"/>
-        <a:font script="Bugi" typeface="Leelawadee UI"/>
-        <a:font script="Bopo" typeface="Microsoft JhengHei"/>
-        <a:font script="Java" typeface="Javanese Text"/>
-        <a:font script="Lisu" typeface="Segoe UI"/>
-        <a:font script="Mymr" typeface="Myanmar Text"/>
-        <a:font script="Nkoo" typeface="Ebrima"/>
-        <a:font script="Olck" typeface="Nirmala UI"/>
-        <a:font script="Osma" typeface="Ebrima"/>
-        <a:font script="Phag" typeface="Phagspa"/>
-        <a:font script="Syrn" typeface="Estrangelo Edessa"/>
-        <a:font script="Syrj" typeface="Estrangelo Edessa"/>
-        <a:font script="Syre" typeface="Estrangelo Edessa"/>
-        <a:font script="Sora" typeface="Nirmala UI"/>
-        <a:font script="Tale" typeface="Microsoft Tai Le"/>
-        <a:font script="Talu" typeface="Microsoft New Tai Lue"/>
-        <a:font script="Tfng" typeface="Ebrima"/>
       </a:minorFont>
     </a:fontScheme>
     <a:fmtScheme name="Office">
@@ -8868,8 +8037,524 @@
       </a:bgFillStyleLst>
     </a:fmtScheme>
   </a:themeElements>
-  <a:objectDefaults/>
-  <a:extraClrSchemeLst/>
+  <a:extLst>
+    <a:ext uri="{05A4C25C-085E-4340-85A3-A5531E510DB2}">
+      <thm15:themeFamily xmlns:thm15="http://schemas.microsoft.com/office/thememl/2012/main" name="Office Theme" id="{62F939B6-93AF-4DB8-9C6B-D6C7DFDC589F}" vid="{4A3C46E8-61CC-4603-A589-7422A47A8E4A}"/>
+    </a:ext>
+  </a:extLst>
+</a:theme>
+</file>
+
+<file path=ppt/theme/theme2.xml><?xml version="1.0" encoding="utf-8"?>
+<a:theme xmlns:a="http://schemas.openxmlformats.org/drawingml/2006/main" name="1_Office Theme">
+  <a:themeElements>
+    <a:clrScheme name="Office">
+      <a:dk1>
+        <a:sysClr val="windowText" lastClr="000000"/>
+      </a:dk1>
+      <a:lt1>
+        <a:sysClr val="window" lastClr="FFFFFF"/>
+      </a:lt1>
+      <a:dk2>
+        <a:srgbClr val="44546A"/>
+      </a:dk2>
+      <a:lt2>
+        <a:srgbClr val="E7E6E6"/>
+      </a:lt2>
+      <a:accent1>
+        <a:srgbClr val="4472C4"/>
+      </a:accent1>
+      <a:accent2>
+        <a:srgbClr val="ED7D31"/>
+      </a:accent2>
+      <a:accent3>
+        <a:srgbClr val="A5A5A5"/>
+      </a:accent3>
+      <a:accent4>
+        <a:srgbClr val="FFC000"/>
+      </a:accent4>
+      <a:accent5>
+        <a:srgbClr val="5B9BD5"/>
+      </a:accent5>
+      <a:accent6>
+        <a:srgbClr val="70AD47"/>
+      </a:accent6>
+      <a:hlink>
+        <a:srgbClr val="0563C1"/>
+      </a:hlink>
+      <a:folHlink>
+        <a:srgbClr val="954F72"/>
+      </a:folHlink>
+    </a:clrScheme>
+    <a:fontScheme name="Office">
+      <a:majorFont>
+        <a:latin typeface="Calibri Light"/>
+        <a:ea typeface=""/>
+        <a:cs typeface=""/>
+        <a:font script="Jpan" typeface="游ゴシック Light"/>
+        <a:font script="Hang" typeface="맑은 고딕"/>
+        <a:font script="Hans" typeface="等线 Light"/>
+        <a:font script="Hant" typeface="新細明體"/>
+        <a:font script="Arab" typeface="Times New Roman"/>
+        <a:font script="Hebr" typeface="Times New Roman"/>
+        <a:font script="Thai" typeface="Angsana New"/>
+        <a:font script="Ethi" typeface="Nyala"/>
+        <a:font script="Beng" typeface="Vrinda"/>
+        <a:font script="Gujr" typeface="Shruti"/>
+        <a:font script="Khmr" typeface="MoolBoran"/>
+        <a:font script="Knda" typeface="Tunga"/>
+        <a:font script="Guru" typeface="Raavi"/>
+        <a:font script="Cans" typeface="Euphemia"/>
+        <a:font script="Cher" typeface="Plantagenet Cherokee"/>
+        <a:font script="Yiii" typeface="Microsoft Yi Baiti"/>
+        <a:font script="Tibt" typeface="Microsoft Himalaya"/>
+        <a:font script="Thaa" typeface="MV Boli"/>
+        <a:font script="Deva" typeface="Mangal"/>
+        <a:font script="Telu" typeface="Gautami"/>
+        <a:font script="Taml" typeface="Latha"/>
+        <a:font script="Syrc" typeface="Estrangelo Edessa"/>
+        <a:font script="Orya" typeface="Kalinga"/>
+        <a:font script="Mlym" typeface="Kartika"/>
+        <a:font script="Laoo" typeface="DokChampa"/>
+        <a:font script="Sinh" typeface="Iskoola Pota"/>
+        <a:font script="Mong" typeface="Mongolian Baiti"/>
+        <a:font script="Viet" typeface="Times New Roman"/>
+        <a:font script="Uigh" typeface="Microsoft Uighur"/>
+        <a:font script="Geor" typeface="Sylfaen"/>
+      </a:majorFont>
+      <a:minorFont>
+        <a:latin typeface="Calibri"/>
+        <a:ea typeface=""/>
+        <a:cs typeface=""/>
+        <a:font script="Jpan" typeface="游ゴシック"/>
+        <a:font script="Hang" typeface="맑은 고딕"/>
+        <a:font script="Hans" typeface="等线"/>
+        <a:font script="Hant" typeface="新細明體"/>
+        <a:font script="Arab" typeface="Arial"/>
+        <a:font script="Hebr" typeface="Arial"/>
+        <a:font script="Thai" typeface="Cordia New"/>
+        <a:font script="Ethi" typeface="Nyala"/>
+        <a:font script="Beng" typeface="Vrinda"/>
+        <a:font script="Gujr" typeface="Shruti"/>
+        <a:font script="Khmr" typeface="DaunPenh"/>
+        <a:font script="Knda" typeface="Tunga"/>
+        <a:font script="Guru" typeface="Raavi"/>
+        <a:font script="Cans" typeface="Euphemia"/>
+        <a:font script="Cher" typeface="Plantagenet Cherokee"/>
+        <a:font script="Yiii" typeface="Microsoft Yi Baiti"/>
+        <a:font script="Tibt" typeface="Microsoft Himalaya"/>
+        <a:font script="Thaa" typeface="MV Boli"/>
+        <a:font script="Deva" typeface="Mangal"/>
+        <a:font script="Telu" typeface="Gautami"/>
+        <a:font script="Taml" typeface="Latha"/>
+        <a:font script="Syrc" typeface="Estrangelo Edessa"/>
+        <a:font script="Orya" typeface="Kalinga"/>
+        <a:font script="Mlym" typeface="Kartika"/>
+        <a:font script="Laoo" typeface="DokChampa"/>
+        <a:font script="Sinh" typeface="Iskoola Pota"/>
+        <a:font script="Mong" typeface="Mongolian Baiti"/>
+        <a:font script="Viet" typeface="Arial"/>
+        <a:font script="Uigh" typeface="Microsoft Uighur"/>
+        <a:font script="Geor" typeface="Sylfaen"/>
+      </a:minorFont>
+    </a:fontScheme>
+    <a:fmtScheme name="Office">
+      <a:fillStyleLst>
+        <a:solidFill>
+          <a:schemeClr val="phClr"/>
+        </a:solidFill>
+        <a:gradFill rotWithShape="1">
+          <a:gsLst>
+            <a:gs pos="0">
+              <a:schemeClr val="phClr">
+                <a:lumMod val="110000"/>
+                <a:satMod val="105000"/>
+                <a:tint val="67000"/>
+              </a:schemeClr>
+            </a:gs>
+            <a:gs pos="50000">
+              <a:schemeClr val="phClr">
+                <a:lumMod val="105000"/>
+                <a:satMod val="103000"/>
+                <a:tint val="73000"/>
+              </a:schemeClr>
+            </a:gs>
+            <a:gs pos="100000">
+              <a:schemeClr val="phClr">
+                <a:lumMod val="105000"/>
+                <a:satMod val="109000"/>
+                <a:tint val="81000"/>
+              </a:schemeClr>
+            </a:gs>
+          </a:gsLst>
+          <a:lin ang="5400000" scaled="0"/>
+        </a:gradFill>
+        <a:gradFill rotWithShape="1">
+          <a:gsLst>
+            <a:gs pos="0">
+              <a:schemeClr val="phClr">
+                <a:satMod val="103000"/>
+                <a:lumMod val="102000"/>
+                <a:tint val="94000"/>
+              </a:schemeClr>
+            </a:gs>
+            <a:gs pos="50000">
+              <a:schemeClr val="phClr">
+                <a:satMod val="110000"/>
+                <a:lumMod val="100000"/>
+                <a:shade val="100000"/>
+              </a:schemeClr>
+            </a:gs>
+            <a:gs pos="100000">
+              <a:schemeClr val="phClr">
+                <a:lumMod val="99000"/>
+                <a:satMod val="120000"/>
+                <a:shade val="78000"/>
+              </a:schemeClr>
+            </a:gs>
+          </a:gsLst>
+          <a:lin ang="5400000" scaled="0"/>
+        </a:gradFill>
+      </a:fillStyleLst>
+      <a:lnStyleLst>
+        <a:ln w="6350" cap="flat" cmpd="sng" algn="ctr">
+          <a:solidFill>
+            <a:schemeClr val="phClr"/>
+          </a:solidFill>
+          <a:prstDash val="solid"/>
+          <a:miter lim="800000"/>
+        </a:ln>
+        <a:ln w="12700" cap="flat" cmpd="sng" algn="ctr">
+          <a:solidFill>
+            <a:schemeClr val="phClr"/>
+          </a:solidFill>
+          <a:prstDash val="solid"/>
+          <a:miter lim="800000"/>
+        </a:ln>
+        <a:ln w="19050" cap="flat" cmpd="sng" algn="ctr">
+          <a:solidFill>
+            <a:schemeClr val="phClr"/>
+          </a:solidFill>
+          <a:prstDash val="solid"/>
+          <a:miter lim="800000"/>
+        </a:ln>
+      </a:lnStyleLst>
+      <a:effectStyleLst>
+        <a:effectStyle>
+          <a:effectLst/>
+        </a:effectStyle>
+        <a:effectStyle>
+          <a:effectLst/>
+        </a:effectStyle>
+        <a:effectStyle>
+          <a:effectLst>
+            <a:outerShdw blurRad="57150" dist="19050" dir="5400000" algn="ctr" rotWithShape="0">
+              <a:srgbClr val="000000">
+                <a:alpha val="63000"/>
+              </a:srgbClr>
+            </a:outerShdw>
+          </a:effectLst>
+        </a:effectStyle>
+      </a:effectStyleLst>
+      <a:bgFillStyleLst>
+        <a:solidFill>
+          <a:schemeClr val="phClr"/>
+        </a:solidFill>
+        <a:solidFill>
+          <a:schemeClr val="phClr">
+            <a:tint val="95000"/>
+            <a:satMod val="170000"/>
+          </a:schemeClr>
+        </a:solidFill>
+        <a:gradFill rotWithShape="1">
+          <a:gsLst>
+            <a:gs pos="0">
+              <a:schemeClr val="phClr">
+                <a:tint val="93000"/>
+                <a:satMod val="150000"/>
+                <a:shade val="98000"/>
+                <a:lumMod val="102000"/>
+              </a:schemeClr>
+            </a:gs>
+            <a:gs pos="50000">
+              <a:schemeClr val="phClr">
+                <a:tint val="98000"/>
+                <a:satMod val="130000"/>
+                <a:shade val="90000"/>
+                <a:lumMod val="103000"/>
+              </a:schemeClr>
+            </a:gs>
+            <a:gs pos="100000">
+              <a:schemeClr val="phClr">
+                <a:shade val="63000"/>
+                <a:satMod val="120000"/>
+              </a:schemeClr>
+            </a:gs>
+          </a:gsLst>
+          <a:lin ang="5400000" scaled="0"/>
+        </a:gradFill>
+      </a:bgFillStyleLst>
+    </a:fmtScheme>
+  </a:themeElements>
+  <a:extLst>
+    <a:ext uri="{05A4C25C-085E-4340-85A3-A5531E510DB2}">
+      <thm15:themeFamily xmlns:thm15="http://schemas.microsoft.com/office/thememl/2012/main" name="Office Theme" id="{62F939B6-93AF-4DB8-9C6B-D6C7DFDC589F}" vid="{4A3C46E8-61CC-4603-A589-7422A47A8E4A}"/>
+    </a:ext>
+  </a:extLst>
+</a:theme>
+</file>
+
+<file path=ppt/theme/theme3.xml><?xml version="1.0" encoding="utf-8"?>
+<a:theme xmlns:a="http://schemas.openxmlformats.org/drawingml/2006/main" name="Office Theme">
+  <a:themeElements>
+    <a:clrScheme name="Office">
+      <a:dk1>
+        <a:sysClr val="windowText" lastClr="000000"/>
+      </a:dk1>
+      <a:lt1>
+        <a:sysClr val="window" lastClr="FFFFFF"/>
+      </a:lt1>
+      <a:dk2>
+        <a:srgbClr val="44546A"/>
+      </a:dk2>
+      <a:lt2>
+        <a:srgbClr val="E7E6E6"/>
+      </a:lt2>
+      <a:accent1>
+        <a:srgbClr val="4472C4"/>
+      </a:accent1>
+      <a:accent2>
+        <a:srgbClr val="ED7D31"/>
+      </a:accent2>
+      <a:accent3>
+        <a:srgbClr val="A5A5A5"/>
+      </a:accent3>
+      <a:accent4>
+        <a:srgbClr val="FFC000"/>
+      </a:accent4>
+      <a:accent5>
+        <a:srgbClr val="5B9BD5"/>
+      </a:accent5>
+      <a:accent6>
+        <a:srgbClr val="70AD47"/>
+      </a:accent6>
+      <a:hlink>
+        <a:srgbClr val="0563C1"/>
+      </a:hlink>
+      <a:folHlink>
+        <a:srgbClr val="954F72"/>
+      </a:folHlink>
+    </a:clrScheme>
+    <a:fontScheme name="Office">
+      <a:majorFont>
+        <a:latin typeface="Calibri Light"/>
+        <a:ea typeface=""/>
+        <a:cs typeface=""/>
+        <a:font script="Jpan" typeface="游ゴシック Light"/>
+        <a:font script="Hang" typeface="맑은 고딕"/>
+        <a:font script="Hans" typeface="等线 Light"/>
+        <a:font script="Hant" typeface="新細明體"/>
+        <a:font script="Arab" typeface="Times New Roman"/>
+        <a:font script="Hebr" typeface="Times New Roman"/>
+        <a:font script="Thai" typeface="Angsana New"/>
+        <a:font script="Ethi" typeface="Nyala"/>
+        <a:font script="Beng" typeface="Vrinda"/>
+        <a:font script="Gujr" typeface="Shruti"/>
+        <a:font script="Khmr" typeface="MoolBoran"/>
+        <a:font script="Knda" typeface="Tunga"/>
+        <a:font script="Guru" typeface="Raavi"/>
+        <a:font script="Cans" typeface="Euphemia"/>
+        <a:font script="Cher" typeface="Plantagenet Cherokee"/>
+        <a:font script="Yiii" typeface="Microsoft Yi Baiti"/>
+        <a:font script="Tibt" typeface="Microsoft Himalaya"/>
+        <a:font script="Thaa" typeface="MV Boli"/>
+        <a:font script="Deva" typeface="Mangal"/>
+        <a:font script="Telu" typeface="Gautami"/>
+        <a:font script="Taml" typeface="Latha"/>
+        <a:font script="Syrc" typeface="Estrangelo Edessa"/>
+        <a:font script="Orya" typeface="Kalinga"/>
+        <a:font script="Mlym" typeface="Kartika"/>
+        <a:font script="Laoo" typeface="DokChampa"/>
+        <a:font script="Sinh" typeface="Iskoola Pota"/>
+        <a:font script="Mong" typeface="Mongolian Baiti"/>
+        <a:font script="Viet" typeface="Times New Roman"/>
+        <a:font script="Uigh" typeface="Microsoft Uighur"/>
+        <a:font script="Geor" typeface="Sylfaen"/>
+      </a:majorFont>
+      <a:minorFont>
+        <a:latin typeface="Calibri"/>
+        <a:ea typeface=""/>
+        <a:cs typeface=""/>
+        <a:font script="Jpan" typeface="游ゴシック"/>
+        <a:font script="Hang" typeface="맑은 고딕"/>
+        <a:font script="Hans" typeface="等线"/>
+        <a:font script="Hant" typeface="新細明體"/>
+        <a:font script="Arab" typeface="Arial"/>
+        <a:font script="Hebr" typeface="Arial"/>
+        <a:font script="Thai" typeface="Cordia New"/>
+        <a:font script="Ethi" typeface="Nyala"/>
+        <a:font script="Beng" typeface="Vrinda"/>
+        <a:font script="Gujr" typeface="Shruti"/>
+        <a:font script="Khmr" typeface="DaunPenh"/>
+        <a:font script="Knda" typeface="Tunga"/>
+        <a:font script="Guru" typeface="Raavi"/>
+        <a:font script="Cans" typeface="Euphemia"/>
+        <a:font script="Cher" typeface="Plantagenet Cherokee"/>
+        <a:font script="Yiii" typeface="Microsoft Yi Baiti"/>
+        <a:font script="Tibt" typeface="Microsoft Himalaya"/>
+        <a:font script="Thaa" typeface="MV Boli"/>
+        <a:font script="Deva" typeface="Mangal"/>
+        <a:font script="Telu" typeface="Gautami"/>
+        <a:font script="Taml" typeface="Latha"/>
+        <a:font script="Syrc" typeface="Estrangelo Edessa"/>
+        <a:font script="Orya" typeface="Kalinga"/>
+        <a:font script="Mlym" typeface="Kartika"/>
+        <a:font script="Laoo" typeface="DokChampa"/>
+        <a:font script="Sinh" typeface="Iskoola Pota"/>
+        <a:font script="Mong" typeface="Mongolian Baiti"/>
+        <a:font script="Viet" typeface="Arial"/>
+        <a:font script="Uigh" typeface="Microsoft Uighur"/>
+        <a:font script="Geor" typeface="Sylfaen"/>
+      </a:minorFont>
+    </a:fontScheme>
+    <a:fmtScheme name="Office">
+      <a:fillStyleLst>
+        <a:solidFill>
+          <a:schemeClr val="phClr"/>
+        </a:solidFill>
+        <a:gradFill rotWithShape="1">
+          <a:gsLst>
+            <a:gs pos="0">
+              <a:schemeClr val="phClr">
+                <a:lumMod val="110000"/>
+                <a:satMod val="105000"/>
+                <a:tint val="67000"/>
+              </a:schemeClr>
+            </a:gs>
+            <a:gs pos="50000">
+              <a:schemeClr val="phClr">
+                <a:lumMod val="105000"/>
+                <a:satMod val="103000"/>
+                <a:tint val="73000"/>
+              </a:schemeClr>
+            </a:gs>
+            <a:gs pos="100000">
+              <a:schemeClr val="phClr">
+                <a:lumMod val="105000"/>
+                <a:satMod val="109000"/>
+                <a:tint val="81000"/>
+              </a:schemeClr>
+            </a:gs>
+          </a:gsLst>
+          <a:lin ang="5400000" scaled="0"/>
+        </a:gradFill>
+        <a:gradFill rotWithShape="1">
+          <a:gsLst>
+            <a:gs pos="0">
+              <a:schemeClr val="phClr">
+                <a:satMod val="103000"/>
+                <a:lumMod val="102000"/>
+                <a:tint val="94000"/>
+              </a:schemeClr>
+            </a:gs>
+            <a:gs pos="50000">
+              <a:schemeClr val="phClr">
+                <a:satMod val="110000"/>
+                <a:lumMod val="100000"/>
+                <a:shade val="100000"/>
+              </a:schemeClr>
+            </a:gs>
+            <a:gs pos="100000">
+              <a:schemeClr val="phClr">
+                <a:lumMod val="99000"/>
+                <a:satMod val="120000"/>
+                <a:shade val="78000"/>
+              </a:schemeClr>
+            </a:gs>
+          </a:gsLst>
+          <a:lin ang="5400000" scaled="0"/>
+        </a:gradFill>
+      </a:fillStyleLst>
+      <a:lnStyleLst>
+        <a:ln w="6350" cap="flat" cmpd="sng" algn="ctr">
+          <a:solidFill>
+            <a:schemeClr val="phClr"/>
+          </a:solidFill>
+          <a:prstDash val="solid"/>
+          <a:miter lim="800000"/>
+        </a:ln>
+        <a:ln w="12700" cap="flat" cmpd="sng" algn="ctr">
+          <a:solidFill>
+            <a:schemeClr val="phClr"/>
+          </a:solidFill>
+          <a:prstDash val="solid"/>
+          <a:miter lim="800000"/>
+        </a:ln>
+        <a:ln w="19050" cap="flat" cmpd="sng" algn="ctr">
+          <a:solidFill>
+            <a:schemeClr val="phClr"/>
+          </a:solidFill>
+          <a:prstDash val="solid"/>
+          <a:miter lim="800000"/>
+        </a:ln>
+      </a:lnStyleLst>
+      <a:effectStyleLst>
+        <a:effectStyle>
+          <a:effectLst/>
+        </a:effectStyle>
+        <a:effectStyle>
+          <a:effectLst/>
+        </a:effectStyle>
+        <a:effectStyle>
+          <a:effectLst>
+            <a:outerShdw blurRad="57150" dist="19050" dir="5400000" algn="ctr" rotWithShape="0">
+              <a:srgbClr val="000000">
+                <a:alpha val="63000"/>
+              </a:srgbClr>
+            </a:outerShdw>
+          </a:effectLst>
+        </a:effectStyle>
+      </a:effectStyleLst>
+      <a:bgFillStyleLst>
+        <a:solidFill>
+          <a:schemeClr val="phClr"/>
+        </a:solidFill>
+        <a:solidFill>
+          <a:schemeClr val="phClr">
+            <a:tint val="95000"/>
+            <a:satMod val="170000"/>
+          </a:schemeClr>
+        </a:solidFill>
+        <a:gradFill rotWithShape="1">
+          <a:gsLst>
+            <a:gs pos="0">
+              <a:schemeClr val="phClr">
+                <a:tint val="93000"/>
+                <a:satMod val="150000"/>
+                <a:shade val="98000"/>
+                <a:lumMod val="102000"/>
+              </a:schemeClr>
+            </a:gs>
+            <a:gs pos="50000">
+              <a:schemeClr val="phClr">
+                <a:tint val="98000"/>
+                <a:satMod val="130000"/>
+                <a:shade val="90000"/>
+                <a:lumMod val="103000"/>
+              </a:schemeClr>
+            </a:gs>
+            <a:gs pos="100000">
+              <a:schemeClr val="phClr">
+                <a:shade val="63000"/>
+                <a:satMod val="120000"/>
+              </a:schemeClr>
+            </a:gs>
+          </a:gsLst>
+          <a:lin ang="5400000" scaled="0"/>
+        </a:gradFill>
+      </a:bgFillStyleLst>
+    </a:fmtScheme>
+  </a:themeElements>
   <a:extLst>
     <a:ext uri="{05A4C25C-085E-4340-85A3-A5531E510DB2}">
       <thm15:themeFamily xmlns:thm15="http://schemas.microsoft.com/office/thememl/2012/main" name="Office Theme" id="{62F939B6-93AF-4DB8-9C6B-D6C7DFDC589F}" vid="{4A3C46E8-61CC-4603-A589-7422A47A8E4A}"/>

--- a/课件/C1/C1-B-06/C1-B-06.pptx
+++ b/课件/C1/C1-B-06/C1-B-06.pptx
@@ -1,33 +1,31 @@
 
 <file path=ppt/presentation.xml><?xml version="1.0" encoding="utf-8"?>
-<p:presentation xmlns:a="http://schemas.openxmlformats.org/drawingml/2006/main" xmlns:r="http://schemas.openxmlformats.org/officeDocument/2006/relationships" xmlns:p="http://schemas.openxmlformats.org/presentationml/2006/main" autoCompressPictures="0">
+<p:presentation xmlns:a="http://schemas.openxmlformats.org/drawingml/2006/main" xmlns:r="http://schemas.openxmlformats.org/officeDocument/2006/relationships" xmlns:p="http://schemas.openxmlformats.org/presentationml/2006/main" saveSubsetFonts="1" autoCompressPictures="0">
   <p:sldMasterIdLst>
     <p:sldMasterId id="2147483648" r:id="rId1"/>
-    <p:sldMasterId id="2147483650" r:id="rId3"/>
   </p:sldMasterIdLst>
+  <p:sldIdLst>
+    <p:sldId id="256" r:id="rId2"/>
+    <p:sldId id="257" r:id="rId3"/>
+    <p:sldId id="258" r:id="rId4"/>
+    <p:sldId id="259" r:id="rId5"/>
+    <p:sldId id="260" r:id="rId6"/>
+    <p:sldId id="261" r:id="rId7"/>
+    <p:sldId id="262" r:id="rId8"/>
+    <p:sldId id="263" r:id="rId9"/>
+    <p:sldId id="264" r:id="rId10"/>
+    <p:sldId id="265" r:id="rId11"/>
+    <p:sldId id="266" r:id="rId12"/>
+    <p:sldId id="267" r:id="rId13"/>
+    <p:sldId id="268" r:id="rId14"/>
+    <p:sldId id="269" r:id="rId15"/>
+    <p:sldId id="270" r:id="rId16"/>
+  </p:sldIdLst>
   <p:notesMasterIdLst>
-    <p:notesMasterId r:id="rId5"/>
+    <p:notesMasterId r:id="rId17"/>
   </p:notesMasterIdLst>
-  <p:sldIdLst>
-    <p:sldId id="256" r:id="rId4"/>
-    <p:sldId id="257" r:id="rId6"/>
-    <p:sldId id="258" r:id="rId7"/>
-    <p:sldId id="259" r:id="rId8"/>
-    <p:sldId id="260" r:id="rId9"/>
-    <p:sldId id="261" r:id="rId10"/>
-    <p:sldId id="262" r:id="rId11"/>
-    <p:sldId id="263" r:id="rId12"/>
-    <p:sldId id="264" r:id="rId13"/>
-    <p:sldId id="265" r:id="rId14"/>
-    <p:sldId id="271" r:id="rId15"/>
-    <p:sldId id="266" r:id="rId16"/>
-    <p:sldId id="267" r:id="rId17"/>
-    <p:sldId id="268" r:id="rId18"/>
-    <p:sldId id="269" r:id="rId19"/>
-    <p:sldId id="270" r:id="rId20"/>
-  </p:sldIdLst>
-  <p:sldSz cx="12191365" cy="6858000"/>
-  <p:notesSz cx="6858000" cy="12191365"/>
+  <p:sldSz cx="12191695" cy="6858000"/>
+  <p:notesSz cx="6858000" cy="12191695"/>
   <p:defaultTextStyle>
     <a:lvl1pPr marL="0" algn="l" defTabSz="914400" rtl="0" eaLnBrk="1" latinLnBrk="0" hangingPunct="1">
       <a:defRPr sz="1800" kern="1200">
@@ -205,6 +203,7 @@
           <a:p>
             <a:fld id="{5282F153-3F37-0F45-9E97-73ACFA13230C}" type="datetimeFigureOut">
               <a:rPr lang="en-US"/>
+              <a:t>7/23/19</a:t>
             </a:fld>
             <a:endParaRPr lang="en-US"/>
           </a:p>
@@ -271,7 +270,6 @@
               <a:rPr lang="en-US"/>
               <a:t>Click to edit Master text styles</a:t>
             </a:r>
-            <a:endParaRPr lang="en-US"/>
           </a:p>
           <a:p>
             <a:pPr lvl="1"/>
@@ -279,7 +277,6 @@
               <a:rPr lang="en-US"/>
               <a:t>Second level</a:t>
             </a:r>
-            <a:endParaRPr lang="en-US"/>
           </a:p>
           <a:p>
             <a:pPr lvl="2"/>
@@ -287,7 +284,6 @@
               <a:rPr lang="en-US"/>
               <a:t>Third level</a:t>
             </a:r>
-            <a:endParaRPr lang="en-US"/>
           </a:p>
           <a:p>
             <a:pPr lvl="3"/>
@@ -295,7 +291,6 @@
               <a:rPr lang="en-US"/>
               <a:t>Fourth level</a:t>
             </a:r>
-            <a:endParaRPr lang="en-US"/>
           </a:p>
           <a:p>
             <a:pPr lvl="4"/>
@@ -303,7 +298,6 @@
               <a:rPr lang="en-US"/>
               <a:t>Fifth level</a:t>
             </a:r>
-            <a:endParaRPr lang="en-US"/>
           </a:p>
         </p:txBody>
       </p:sp>
@@ -367,12 +361,18 @@
           <a:p>
             <a:fld id="{CE5E9CC1-C706-0F49-92D6-E571CC5EEA8F}" type="slidenum">
               <a:rPr lang="en-US"/>
+              <a:t>‹#›</a:t>
             </a:fld>
             <a:endParaRPr lang="en-US"/>
           </a:p>
         </p:txBody>
       </p:sp>
     </p:spTree>
+    <p:extLst>
+      <p:ext uri="{BB962C8B-B14F-4D97-AF65-F5344CB8AC3E}">
+        <p14:creationId xmlns:p14="http://schemas.microsoft.com/office/powerpoint/2010/main" val="1024086991"/>
+      </p:ext>
+    </p:extLst>
   </p:cSld>
   <p:clrMap bg1="lt1" tx1="dk1" bg2="lt2" tx2="dk2" accent1="accent1" accent2="accent2" accent3="accent3" accent4="accent4" accent5="accent5" accent6="accent6" hlink="hlink" folHlink="folHlink"/>
   <p:notesStyle>
@@ -514,6 +514,10 @@
           <a:bodyPr/>
           <a:lstStyle/>
           <a:p>
+            <a:r>
+              <a:rPr lang="en-US" dirty="0"/>
+              <a:t/>
+            </a:r>
             <a:endParaRPr lang="en-US" dirty="0"/>
           </a:p>
         </p:txBody>
@@ -535,12 +539,18 @@
           <a:p>
             <a:fld id="{F7021451-1387-4CA6-816F-3879F97B5CBC}" type="slidenum">
               <a:rPr lang="en-US"/>
+              <a:t>1</a:t>
             </a:fld>
             <a:endParaRPr lang="en-US"/>
           </a:p>
         </p:txBody>
       </p:sp>
     </p:spTree>
+    <p:extLst>
+      <p:ext uri="{BB962C8B-B14F-4D97-AF65-F5344CB8AC3E}">
+        <p14:creationId xmlns:p14="http://schemas.microsoft.com/office/powerpoint/2010/main" val="1024086991"/>
+      </p:ext>
+    </p:extLst>
   </p:cSld>
   <p:clrMapOvr>
     <a:masterClrMapping/>
@@ -592,6 +602,10 @@
           <a:bodyPr/>
           <a:lstStyle/>
           <a:p>
+            <a:r>
+              <a:rPr lang="en-US" dirty="0"/>
+              <a:t/>
+            </a:r>
             <a:endParaRPr lang="en-US" dirty="0"/>
           </a:p>
         </p:txBody>
@@ -613,12 +627,18 @@
           <a:p>
             <a:fld id="{F7021451-1387-4CA6-816F-3879F97B5CBC}" type="slidenum">
               <a:rPr lang="en-US"/>
+              <a:t>10</a:t>
             </a:fld>
             <a:endParaRPr lang="en-US"/>
           </a:p>
         </p:txBody>
       </p:sp>
     </p:spTree>
+    <p:extLst>
+      <p:ext uri="{BB962C8B-B14F-4D97-AF65-F5344CB8AC3E}">
+        <p14:creationId xmlns:p14="http://schemas.microsoft.com/office/powerpoint/2010/main" val="1024086991"/>
+      </p:ext>
+    </p:extLst>
   </p:cSld>
   <p:clrMapOvr>
     <a:masterClrMapping/>
@@ -670,6 +690,10 @@
           <a:bodyPr/>
           <a:lstStyle/>
           <a:p>
+            <a:r>
+              <a:rPr lang="en-US" dirty="0"/>
+              <a:t/>
+            </a:r>
             <a:endParaRPr lang="en-US" dirty="0"/>
           </a:p>
         </p:txBody>
@@ -691,12 +715,18 @@
           <a:p>
             <a:fld id="{F7021451-1387-4CA6-816F-3879F97B5CBC}" type="slidenum">
               <a:rPr lang="en-US"/>
+              <a:t>11</a:t>
             </a:fld>
             <a:endParaRPr lang="en-US"/>
           </a:p>
         </p:txBody>
       </p:sp>
     </p:spTree>
+    <p:extLst>
+      <p:ext uri="{BB962C8B-B14F-4D97-AF65-F5344CB8AC3E}">
+        <p14:creationId xmlns:p14="http://schemas.microsoft.com/office/powerpoint/2010/main" val="1024086991"/>
+      </p:ext>
+    </p:extLst>
   </p:cSld>
   <p:clrMapOvr>
     <a:masterClrMapping/>
@@ -748,6 +778,10 @@
           <a:bodyPr/>
           <a:lstStyle/>
           <a:p>
+            <a:r>
+              <a:rPr lang="en-US" dirty="0"/>
+              <a:t/>
+            </a:r>
             <a:endParaRPr lang="en-US" dirty="0"/>
           </a:p>
         </p:txBody>
@@ -769,12 +803,18 @@
           <a:p>
             <a:fld id="{F7021451-1387-4CA6-816F-3879F97B5CBC}" type="slidenum">
               <a:rPr lang="en-US"/>
+              <a:t>12</a:t>
             </a:fld>
             <a:endParaRPr lang="en-US"/>
           </a:p>
         </p:txBody>
       </p:sp>
     </p:spTree>
+    <p:extLst>
+      <p:ext uri="{BB962C8B-B14F-4D97-AF65-F5344CB8AC3E}">
+        <p14:creationId xmlns:p14="http://schemas.microsoft.com/office/powerpoint/2010/main" val="1024086991"/>
+      </p:ext>
+    </p:extLst>
   </p:cSld>
   <p:clrMapOvr>
     <a:masterClrMapping/>
@@ -826,6 +866,10 @@
           <a:bodyPr/>
           <a:lstStyle/>
           <a:p>
+            <a:r>
+              <a:rPr lang="en-US" dirty="0"/>
+              <a:t/>
+            </a:r>
             <a:endParaRPr lang="en-US" dirty="0"/>
           </a:p>
         </p:txBody>
@@ -847,12 +891,18 @@
           <a:p>
             <a:fld id="{F7021451-1387-4CA6-816F-3879F97B5CBC}" type="slidenum">
               <a:rPr lang="en-US"/>
+              <a:t>13</a:t>
             </a:fld>
             <a:endParaRPr lang="en-US"/>
           </a:p>
         </p:txBody>
       </p:sp>
     </p:spTree>
+    <p:extLst>
+      <p:ext uri="{BB962C8B-B14F-4D97-AF65-F5344CB8AC3E}">
+        <p14:creationId xmlns:p14="http://schemas.microsoft.com/office/powerpoint/2010/main" val="1024086991"/>
+      </p:ext>
+    </p:extLst>
   </p:cSld>
   <p:clrMapOvr>
     <a:masterClrMapping/>
@@ -904,6 +954,10 @@
           <a:bodyPr/>
           <a:lstStyle/>
           <a:p>
+            <a:r>
+              <a:rPr lang="en-US" dirty="0"/>
+              <a:t/>
+            </a:r>
             <a:endParaRPr lang="en-US" dirty="0"/>
           </a:p>
         </p:txBody>
@@ -925,12 +979,18 @@
           <a:p>
             <a:fld id="{F7021451-1387-4CA6-816F-3879F97B5CBC}" type="slidenum">
               <a:rPr lang="en-US"/>
+              <a:t>14</a:t>
             </a:fld>
             <a:endParaRPr lang="en-US"/>
           </a:p>
         </p:txBody>
       </p:sp>
     </p:spTree>
+    <p:extLst>
+      <p:ext uri="{BB962C8B-B14F-4D97-AF65-F5344CB8AC3E}">
+        <p14:creationId xmlns:p14="http://schemas.microsoft.com/office/powerpoint/2010/main" val="1024086991"/>
+      </p:ext>
+    </p:extLst>
   </p:cSld>
   <p:clrMapOvr>
     <a:masterClrMapping/>
@@ -982,6 +1042,10 @@
           <a:bodyPr/>
           <a:lstStyle/>
           <a:p>
+            <a:r>
+              <a:rPr lang="en-US" dirty="0"/>
+              <a:t/>
+            </a:r>
             <a:endParaRPr lang="en-US" dirty="0"/>
           </a:p>
         </p:txBody>
@@ -1003,90 +1067,18 @@
           <a:p>
             <a:fld id="{F7021451-1387-4CA6-816F-3879F97B5CBC}" type="slidenum">
               <a:rPr lang="en-US"/>
+              <a:t>15</a:t>
             </a:fld>
             <a:endParaRPr lang="en-US"/>
           </a:p>
         </p:txBody>
       </p:sp>
     </p:spTree>
-  </p:cSld>
-  <p:clrMapOvr>
-    <a:masterClrMapping/>
-  </p:clrMapOvr>
-</p:notes>
-</file>
-
-<file path=ppt/notesSlides/notesSlide16.xml><?xml version="1.0" encoding="utf-8"?>
-<p:notes xmlns:a="http://schemas.openxmlformats.org/drawingml/2006/main" xmlns:r="http://schemas.openxmlformats.org/officeDocument/2006/relationships" xmlns:p="http://schemas.openxmlformats.org/presentationml/2006/main">
-  <p:cSld>
-    <p:spTree>
-      <p:nvGrpSpPr>
-        <p:cNvPr id="1" name=""/>
-        <p:cNvGrpSpPr/>
-        <p:nvPr/>
-      </p:nvGrpSpPr>
-      <p:grpSpPr>
-        <a:xfrm>
-          <a:off x="0" y="0"/>
-          <a:ext cx="0" cy="0"/>
-          <a:chOff x="0" y="0"/>
-          <a:chExt cx="0" cy="0"/>
-        </a:xfrm>
-      </p:grpSpPr>
-      <p:sp>
-        <p:nvSpPr>
-          <p:cNvPr id="2" name="Slide Image Placeholder 1"/>
-          <p:cNvSpPr>
-            <a:spLocks noGrp="1" noRot="1" noChangeAspect="1"/>
-          </p:cNvSpPr>
-          <p:nvPr>
-            <p:ph type="sldImg"/>
-          </p:nvPr>
-        </p:nvSpPr>
-        <p:spPr/>
-      </p:sp>
-      <p:sp>
-        <p:nvSpPr>
-          <p:cNvPr id="3" name="Notes Placeholder 2"/>
-          <p:cNvSpPr>
-            <a:spLocks noGrp="1"/>
-          </p:cNvSpPr>
-          <p:nvPr>
-            <p:ph type="body" idx="1"/>
-          </p:nvPr>
-        </p:nvSpPr>
-        <p:spPr/>
-        <p:txBody>
-          <a:bodyPr/>
-          <a:lstStyle/>
-          <a:p>
-            <a:endParaRPr lang="en-US" dirty="0"/>
-          </a:p>
-        </p:txBody>
-      </p:sp>
-      <p:sp>
-        <p:nvSpPr>
-          <p:cNvPr id="4" name="Slide Number Placeholder 3"/>
-          <p:cNvSpPr>
-            <a:spLocks noGrp="1"/>
-          </p:cNvSpPr>
-          <p:nvPr>
-            <p:ph type="sldNum" sz="quarter" idx="10"/>
-          </p:nvPr>
-        </p:nvSpPr>
-        <p:spPr/>
-        <p:txBody>
-          <a:bodyPr/>
-          <a:lstStyle/>
-          <a:p>
-            <a:fld id="{F7021451-1387-4CA6-816F-3879F97B5CBC}" type="slidenum">
-              <a:rPr lang="en-US"/>
-            </a:fld>
-            <a:endParaRPr lang="en-US"/>
-          </a:p>
-        </p:txBody>
-      </p:sp>
-    </p:spTree>
+    <p:extLst>
+      <p:ext uri="{BB962C8B-B14F-4D97-AF65-F5344CB8AC3E}">
+        <p14:creationId xmlns:p14="http://schemas.microsoft.com/office/powerpoint/2010/main" val="1024086991"/>
+      </p:ext>
+    </p:extLst>
   </p:cSld>
   <p:clrMapOvr>
     <a:masterClrMapping/>
@@ -1138,6 +1130,10 @@
           <a:bodyPr/>
           <a:lstStyle/>
           <a:p>
+            <a:r>
+              <a:rPr lang="en-US" dirty="0"/>
+              <a:t/>
+            </a:r>
             <a:endParaRPr lang="en-US" dirty="0"/>
           </a:p>
         </p:txBody>
@@ -1159,12 +1155,18 @@
           <a:p>
             <a:fld id="{F7021451-1387-4CA6-816F-3879F97B5CBC}" type="slidenum">
               <a:rPr lang="en-US"/>
+              <a:t>2</a:t>
             </a:fld>
             <a:endParaRPr lang="en-US"/>
           </a:p>
         </p:txBody>
       </p:sp>
     </p:spTree>
+    <p:extLst>
+      <p:ext uri="{BB962C8B-B14F-4D97-AF65-F5344CB8AC3E}">
+        <p14:creationId xmlns:p14="http://schemas.microsoft.com/office/powerpoint/2010/main" val="1024086991"/>
+      </p:ext>
+    </p:extLst>
   </p:cSld>
   <p:clrMapOvr>
     <a:masterClrMapping/>
@@ -1216,6 +1218,10 @@
           <a:bodyPr/>
           <a:lstStyle/>
           <a:p>
+            <a:r>
+              <a:rPr lang="en-US" dirty="0"/>
+              <a:t/>
+            </a:r>
             <a:endParaRPr lang="en-US" dirty="0"/>
           </a:p>
         </p:txBody>
@@ -1237,12 +1243,18 @@
           <a:p>
             <a:fld id="{F7021451-1387-4CA6-816F-3879F97B5CBC}" type="slidenum">
               <a:rPr lang="en-US"/>
+              <a:t>3</a:t>
             </a:fld>
             <a:endParaRPr lang="en-US"/>
           </a:p>
         </p:txBody>
       </p:sp>
     </p:spTree>
+    <p:extLst>
+      <p:ext uri="{BB962C8B-B14F-4D97-AF65-F5344CB8AC3E}">
+        <p14:creationId xmlns:p14="http://schemas.microsoft.com/office/powerpoint/2010/main" val="1024086991"/>
+      </p:ext>
+    </p:extLst>
   </p:cSld>
   <p:clrMapOvr>
     <a:masterClrMapping/>
@@ -1294,6 +1306,10 @@
           <a:bodyPr/>
           <a:lstStyle/>
           <a:p>
+            <a:r>
+              <a:rPr lang="en-US" dirty="0"/>
+              <a:t/>
+            </a:r>
             <a:endParaRPr lang="en-US" dirty="0"/>
           </a:p>
         </p:txBody>
@@ -1315,12 +1331,18 @@
           <a:p>
             <a:fld id="{F7021451-1387-4CA6-816F-3879F97B5CBC}" type="slidenum">
               <a:rPr lang="en-US"/>
+              <a:t>4</a:t>
             </a:fld>
             <a:endParaRPr lang="en-US"/>
           </a:p>
         </p:txBody>
       </p:sp>
     </p:spTree>
+    <p:extLst>
+      <p:ext uri="{BB962C8B-B14F-4D97-AF65-F5344CB8AC3E}">
+        <p14:creationId xmlns:p14="http://schemas.microsoft.com/office/powerpoint/2010/main" val="1024086991"/>
+      </p:ext>
+    </p:extLst>
   </p:cSld>
   <p:clrMapOvr>
     <a:masterClrMapping/>
@@ -1372,6 +1394,10 @@
           <a:bodyPr/>
           <a:lstStyle/>
           <a:p>
+            <a:r>
+              <a:rPr lang="en-US" dirty="0"/>
+              <a:t/>
+            </a:r>
             <a:endParaRPr lang="en-US" dirty="0"/>
           </a:p>
         </p:txBody>
@@ -1393,12 +1419,18 @@
           <a:p>
             <a:fld id="{F7021451-1387-4CA6-816F-3879F97B5CBC}" type="slidenum">
               <a:rPr lang="en-US"/>
+              <a:t>5</a:t>
             </a:fld>
             <a:endParaRPr lang="en-US"/>
           </a:p>
         </p:txBody>
       </p:sp>
     </p:spTree>
+    <p:extLst>
+      <p:ext uri="{BB962C8B-B14F-4D97-AF65-F5344CB8AC3E}">
+        <p14:creationId xmlns:p14="http://schemas.microsoft.com/office/powerpoint/2010/main" val="1024086991"/>
+      </p:ext>
+    </p:extLst>
   </p:cSld>
   <p:clrMapOvr>
     <a:masterClrMapping/>
@@ -1450,6 +1482,10 @@
           <a:bodyPr/>
           <a:lstStyle/>
           <a:p>
+            <a:r>
+              <a:rPr lang="en-US" dirty="0"/>
+              <a:t/>
+            </a:r>
             <a:endParaRPr lang="en-US" dirty="0"/>
           </a:p>
         </p:txBody>
@@ -1471,12 +1507,18 @@
           <a:p>
             <a:fld id="{F7021451-1387-4CA6-816F-3879F97B5CBC}" type="slidenum">
               <a:rPr lang="en-US"/>
+              <a:t>6</a:t>
             </a:fld>
             <a:endParaRPr lang="en-US"/>
           </a:p>
         </p:txBody>
       </p:sp>
     </p:spTree>
+    <p:extLst>
+      <p:ext uri="{BB962C8B-B14F-4D97-AF65-F5344CB8AC3E}">
+        <p14:creationId xmlns:p14="http://schemas.microsoft.com/office/powerpoint/2010/main" val="1024086991"/>
+      </p:ext>
+    </p:extLst>
   </p:cSld>
   <p:clrMapOvr>
     <a:masterClrMapping/>
@@ -1528,6 +1570,10 @@
           <a:bodyPr/>
           <a:lstStyle/>
           <a:p>
+            <a:r>
+              <a:rPr lang="en-US" dirty="0"/>
+              <a:t/>
+            </a:r>
             <a:endParaRPr lang="en-US" dirty="0"/>
           </a:p>
         </p:txBody>
@@ -1549,12 +1595,18 @@
           <a:p>
             <a:fld id="{F7021451-1387-4CA6-816F-3879F97B5CBC}" type="slidenum">
               <a:rPr lang="en-US"/>
+              <a:t>7</a:t>
             </a:fld>
             <a:endParaRPr lang="en-US"/>
           </a:p>
         </p:txBody>
       </p:sp>
     </p:spTree>
+    <p:extLst>
+      <p:ext uri="{BB962C8B-B14F-4D97-AF65-F5344CB8AC3E}">
+        <p14:creationId xmlns:p14="http://schemas.microsoft.com/office/powerpoint/2010/main" val="1024086991"/>
+      </p:ext>
+    </p:extLst>
   </p:cSld>
   <p:clrMapOvr>
     <a:masterClrMapping/>
@@ -1606,6 +1658,10 @@
           <a:bodyPr/>
           <a:lstStyle/>
           <a:p>
+            <a:r>
+              <a:rPr lang="en-US" dirty="0"/>
+              <a:t/>
+            </a:r>
             <a:endParaRPr lang="en-US" dirty="0"/>
           </a:p>
         </p:txBody>
@@ -1627,12 +1683,18 @@
           <a:p>
             <a:fld id="{F7021451-1387-4CA6-816F-3879F97B5CBC}" type="slidenum">
               <a:rPr lang="en-US"/>
+              <a:t>8</a:t>
             </a:fld>
             <a:endParaRPr lang="en-US"/>
           </a:p>
         </p:txBody>
       </p:sp>
     </p:spTree>
+    <p:extLst>
+      <p:ext uri="{BB962C8B-B14F-4D97-AF65-F5344CB8AC3E}">
+        <p14:creationId xmlns:p14="http://schemas.microsoft.com/office/powerpoint/2010/main" val="1024086991"/>
+      </p:ext>
+    </p:extLst>
   </p:cSld>
   <p:clrMapOvr>
     <a:masterClrMapping/>
@@ -1684,6 +1746,10 @@
           <a:bodyPr/>
           <a:lstStyle/>
           <a:p>
+            <a:r>
+              <a:rPr lang="en-US" dirty="0"/>
+              <a:t/>
+            </a:r>
             <a:endParaRPr lang="en-US" dirty="0"/>
           </a:p>
         </p:txBody>
@@ -1705,12 +1771,18 @@
           <a:p>
             <a:fld id="{F7021451-1387-4CA6-816F-3879F97B5CBC}" type="slidenum">
               <a:rPr lang="en-US"/>
+              <a:t>9</a:t>
             </a:fld>
             <a:endParaRPr lang="en-US"/>
           </a:p>
         </p:txBody>
       </p:sp>
     </p:spTree>
+    <p:extLst>
+      <p:ext uri="{BB962C8B-B14F-4D97-AF65-F5344CB8AC3E}">
+        <p14:creationId xmlns:p14="http://schemas.microsoft.com/office/powerpoint/2010/main" val="1024086991"/>
+      </p:ext>
+    </p:extLst>
   </p:cSld>
   <p:clrMapOvr>
     <a:masterClrMapping/>
@@ -1748,44 +1820,9 @@
 </p:sldLayout>
 </file>
 
-<file path=ppt/slideLayouts/slideLayout2.xml><?xml version="1.0" encoding="utf-8"?>
-<p:sldLayout xmlns:a="http://schemas.openxmlformats.org/drawingml/2006/main" xmlns:r="http://schemas.openxmlformats.org/officeDocument/2006/relationships" xmlns:p="http://schemas.openxmlformats.org/presentationml/2006/main" preserve="1">
-  <p:cSld name="DEFAULT">
-    <p:bg>
-      <p:bgRef idx="1001">
-        <a:schemeClr val="bg1"/>
-      </p:bgRef>
-    </p:bg>
-    <p:spTree>
-      <p:nvGrpSpPr>
-        <p:cNvPr id="1" name=""/>
-        <p:cNvGrpSpPr/>
-        <p:nvPr/>
-      </p:nvGrpSpPr>
-      <p:grpSpPr>
-        <a:xfrm>
-          <a:off x="0" y="0"/>
-          <a:ext cx="0" cy="0"/>
-          <a:chOff x="0" y="0"/>
-          <a:chExt cx="0" cy="0"/>
-        </a:xfrm>
-      </p:grpSpPr>
-    </p:spTree>
-  </p:cSld>
-  <p:clrMapOvr>
-    <a:masterClrMapping/>
-  </p:clrMapOvr>
-</p:sldLayout>
-</file>
-
 <file path=ppt/slideMasters/slideMaster1.xml><?xml version="1.0" encoding="utf-8"?>
 <p:sldMaster xmlns:a="http://schemas.openxmlformats.org/drawingml/2006/main" xmlns:r="http://schemas.openxmlformats.org/officeDocument/2006/relationships" xmlns:p="http://schemas.openxmlformats.org/presentationml/2006/main">
   <p:cSld>
-    <p:bg>
-      <p:bgRef idx="1001">
-        <a:schemeClr val="bg1"/>
-      </p:bgRef>
-    </p:bg>
     <p:spTree>
       <p:nvGrpSpPr>
         <p:cNvPr id="1" name=""/>
@@ -1829,7 +1866,7 @@
         <a:spcBef>
           <a:spcPct val="20000"/>
         </a:spcBef>
-        <a:buFont typeface="Arial" panose="020B0604020202020204" pitchFamily="34" charset="0"/>
+        <a:buFont typeface="Arial" pitchFamily="34" charset="0"/>
         <a:buChar char="•"/>
         <a:defRPr sz="3200" kern="1200">
           <a:solidFill>
@@ -1844,7 +1881,7 @@
         <a:spcBef>
           <a:spcPct val="20000"/>
         </a:spcBef>
-        <a:buFont typeface="Arial" panose="020B0604020202020204" pitchFamily="34" charset="0"/>
+        <a:buFont typeface="Arial" pitchFamily="34" charset="0"/>
         <a:buChar char="–"/>
         <a:defRPr sz="2800" kern="1200">
           <a:solidFill>
@@ -1859,7 +1896,7 @@
         <a:spcBef>
           <a:spcPct val="20000"/>
         </a:spcBef>
-        <a:buFont typeface="Arial" panose="020B0604020202020204" pitchFamily="34" charset="0"/>
+        <a:buFont typeface="Arial" pitchFamily="34" charset="0"/>
         <a:buChar char="•"/>
         <a:defRPr sz="2400" kern="1200">
           <a:solidFill>
@@ -1874,7 +1911,7 @@
         <a:spcBef>
           <a:spcPct val="20000"/>
         </a:spcBef>
-        <a:buFont typeface="Arial" panose="020B0604020202020204" pitchFamily="34" charset="0"/>
+        <a:buFont typeface="Arial" pitchFamily="34" charset="0"/>
         <a:buChar char="–"/>
         <a:defRPr sz="2000" kern="1200">
           <a:solidFill>
@@ -1889,7 +1926,7 @@
         <a:spcBef>
           <a:spcPct val="20000"/>
         </a:spcBef>
-        <a:buFont typeface="Arial" panose="020B0604020202020204" pitchFamily="34" charset="0"/>
+        <a:buFont typeface="Arial" pitchFamily="34" charset="0"/>
         <a:buChar char="»"/>
         <a:defRPr sz="2000" kern="1200">
           <a:solidFill>
@@ -1904,7 +1941,7 @@
         <a:spcBef>
           <a:spcPct val="20000"/>
         </a:spcBef>
-        <a:buFont typeface="Arial" panose="020B0604020202020204" pitchFamily="34" charset="0"/>
+        <a:buFont typeface="Arial" pitchFamily="34" charset="0"/>
         <a:buChar char="•"/>
         <a:defRPr sz="2000" kern="1200">
           <a:solidFill>
@@ -1919,7 +1956,7 @@
         <a:spcBef>
           <a:spcPct val="20000"/>
         </a:spcBef>
-        <a:buFont typeface="Arial" panose="020B0604020202020204" pitchFamily="34" charset="0"/>
+        <a:buFont typeface="Arial" pitchFamily="34" charset="0"/>
         <a:buChar char="•"/>
         <a:defRPr sz="2000" kern="1200">
           <a:solidFill>
@@ -1934,7 +1971,7 @@
         <a:spcBef>
           <a:spcPct val="20000"/>
         </a:spcBef>
-        <a:buFont typeface="Arial" panose="020B0604020202020204" pitchFamily="34" charset="0"/>
+        <a:buFont typeface="Arial" pitchFamily="34" charset="0"/>
         <a:buChar char="•"/>
         <a:defRPr sz="2000" kern="1200">
           <a:solidFill>
@@ -1949,289 +1986,7 @@
         <a:spcBef>
           <a:spcPct val="20000"/>
         </a:spcBef>
-        <a:buFont typeface="Arial" panose="020B0604020202020204" pitchFamily="34" charset="0"/>
-        <a:buChar char="•"/>
-        <a:defRPr sz="2000" kern="1200">
-          <a:solidFill>
-            <a:schemeClr val="tx1"/>
-          </a:solidFill>
-          <a:latin typeface="+mn-lt"/>
-          <a:ea typeface="+mn-ea"/>
-          <a:cs typeface="+mn-cs"/>
-        </a:defRPr>
-      </a:lvl9pPr>
-    </p:bodyStyle>
-    <p:otherStyle>
-      <a:defPPr>
-        <a:defRPr lang="en-US"/>
-      </a:defPPr>
-      <a:lvl1pPr marL="0" algn="l" defTabSz="914400" rtl="0" eaLnBrk="1" latinLnBrk="0" hangingPunct="1">
-        <a:defRPr sz="1800" kern="1200">
-          <a:solidFill>
-            <a:schemeClr val="tx1"/>
-          </a:solidFill>
-          <a:latin typeface="+mn-lt"/>
-          <a:ea typeface="+mn-ea"/>
-          <a:cs typeface="+mn-cs"/>
-        </a:defRPr>
-      </a:lvl1pPr>
-      <a:lvl2pPr marL="457200" algn="l" defTabSz="914400" rtl="0" eaLnBrk="1" latinLnBrk="0" hangingPunct="1">
-        <a:defRPr sz="1800" kern="1200">
-          <a:solidFill>
-            <a:schemeClr val="tx1"/>
-          </a:solidFill>
-          <a:latin typeface="+mn-lt"/>
-          <a:ea typeface="+mn-ea"/>
-          <a:cs typeface="+mn-cs"/>
-        </a:defRPr>
-      </a:lvl2pPr>
-      <a:lvl3pPr marL="914400" algn="l" defTabSz="914400" rtl="0" eaLnBrk="1" latinLnBrk="0" hangingPunct="1">
-        <a:defRPr sz="1800" kern="1200">
-          <a:solidFill>
-            <a:schemeClr val="tx1"/>
-          </a:solidFill>
-          <a:latin typeface="+mn-lt"/>
-          <a:ea typeface="+mn-ea"/>
-          <a:cs typeface="+mn-cs"/>
-        </a:defRPr>
-      </a:lvl3pPr>
-      <a:lvl4pPr marL="1371600" algn="l" defTabSz="914400" rtl="0" eaLnBrk="1" latinLnBrk="0" hangingPunct="1">
-        <a:defRPr sz="1800" kern="1200">
-          <a:solidFill>
-            <a:schemeClr val="tx1"/>
-          </a:solidFill>
-          <a:latin typeface="+mn-lt"/>
-          <a:ea typeface="+mn-ea"/>
-          <a:cs typeface="+mn-cs"/>
-        </a:defRPr>
-      </a:lvl4pPr>
-      <a:lvl5pPr marL="1828800" algn="l" defTabSz="914400" rtl="0" eaLnBrk="1" latinLnBrk="0" hangingPunct="1">
-        <a:defRPr sz="1800" kern="1200">
-          <a:solidFill>
-            <a:schemeClr val="tx1"/>
-          </a:solidFill>
-          <a:latin typeface="+mn-lt"/>
-          <a:ea typeface="+mn-ea"/>
-          <a:cs typeface="+mn-cs"/>
-        </a:defRPr>
-      </a:lvl5pPr>
-      <a:lvl6pPr marL="2286000" algn="l" defTabSz="914400" rtl="0" eaLnBrk="1" latinLnBrk="0" hangingPunct="1">
-        <a:defRPr sz="1800" kern="1200">
-          <a:solidFill>
-            <a:schemeClr val="tx1"/>
-          </a:solidFill>
-          <a:latin typeface="+mn-lt"/>
-          <a:ea typeface="+mn-ea"/>
-          <a:cs typeface="+mn-cs"/>
-        </a:defRPr>
-      </a:lvl6pPr>
-      <a:lvl7pPr marL="2743200" algn="l" defTabSz="914400" rtl="0" eaLnBrk="1" latinLnBrk="0" hangingPunct="1">
-        <a:defRPr sz="1800" kern="1200">
-          <a:solidFill>
-            <a:schemeClr val="tx1"/>
-          </a:solidFill>
-          <a:latin typeface="+mn-lt"/>
-          <a:ea typeface="+mn-ea"/>
-          <a:cs typeface="+mn-cs"/>
-        </a:defRPr>
-      </a:lvl7pPr>
-      <a:lvl8pPr marL="3200400" algn="l" defTabSz="914400" rtl="0" eaLnBrk="1" latinLnBrk="0" hangingPunct="1">
-        <a:defRPr sz="1800" kern="1200">
-          <a:solidFill>
-            <a:schemeClr val="tx1"/>
-          </a:solidFill>
-          <a:latin typeface="+mn-lt"/>
-          <a:ea typeface="+mn-ea"/>
-          <a:cs typeface="+mn-cs"/>
-        </a:defRPr>
-      </a:lvl8pPr>
-      <a:lvl9pPr marL="3657600" algn="l" defTabSz="914400" rtl="0" eaLnBrk="1" latinLnBrk="0" hangingPunct="1">
-        <a:defRPr sz="1800" kern="1200">
-          <a:solidFill>
-            <a:schemeClr val="tx1"/>
-          </a:solidFill>
-          <a:latin typeface="+mn-lt"/>
-          <a:ea typeface="+mn-ea"/>
-          <a:cs typeface="+mn-cs"/>
-        </a:defRPr>
-      </a:lvl9pPr>
-    </p:otherStyle>
-  </p:txStyles>
-</p:sldMaster>
-</file>
-
-<file path=ppt/slideMasters/slideMaster2.xml><?xml version="1.0" encoding="utf-8"?>
-<p:sldMaster xmlns:a="http://schemas.openxmlformats.org/drawingml/2006/main" xmlns:r="http://schemas.openxmlformats.org/officeDocument/2006/relationships" xmlns:p="http://schemas.openxmlformats.org/presentationml/2006/main">
-  <p:cSld>
-    <p:bg>
-      <p:bgRef idx="1001">
-        <a:schemeClr val="bg1"/>
-      </p:bgRef>
-    </p:bg>
-    <p:spTree>
-      <p:nvGrpSpPr>
-        <p:cNvPr id="1" name=""/>
-        <p:cNvGrpSpPr/>
-        <p:nvPr/>
-      </p:nvGrpSpPr>
-      <p:grpSpPr>
-        <a:xfrm>
-          <a:off x="0" y="0"/>
-          <a:ext cx="0" cy="0"/>
-          <a:chOff x="0" y="0"/>
-          <a:chExt cx="0" cy="0"/>
-        </a:xfrm>
-      </p:grpSpPr>
-    </p:spTree>
-  </p:cSld>
-  <p:clrMap bg1="lt1" tx1="dk1" bg2="lt2" tx2="dk2" accent1="accent1" accent2="accent2" accent3="accent3" accent4="accent4" accent5="accent5" accent6="accent6" hlink="hlink" folHlink="folHlink"/>
-  <p:sldLayoutIdLst>
-    <p:sldLayoutId id="2147483651" r:id="rId1"/>
-  </p:sldLayoutIdLst>
-  <p:hf sldNum="0" hdr="0" ftr="0" dt="0"/>
-  <p:txStyles>
-    <p:titleStyle>
-      <a:lvl1pPr algn="ctr" defTabSz="914400" rtl="0" eaLnBrk="1" latinLnBrk="0" hangingPunct="1">
-        <a:spcBef>
-          <a:spcPct val="0"/>
-        </a:spcBef>
-        <a:buNone/>
-        <a:defRPr sz="4400" kern="1200">
-          <a:solidFill>
-            <a:schemeClr val="tx1"/>
-          </a:solidFill>
-          <a:latin typeface="+mj-lt"/>
-          <a:ea typeface="+mj-ea"/>
-          <a:cs typeface="+mj-cs"/>
-        </a:defRPr>
-      </a:lvl1pPr>
-    </p:titleStyle>
-    <p:bodyStyle>
-      <a:lvl1pPr marL="342900" indent="-342900" algn="l" defTabSz="914400" rtl="0" eaLnBrk="1" latinLnBrk="0" hangingPunct="1">
-        <a:spcBef>
-          <a:spcPct val="20000"/>
-        </a:spcBef>
-        <a:buFont typeface="Arial" panose="020B0604020202020204" pitchFamily="34" charset="0"/>
-        <a:buChar char="•"/>
-        <a:defRPr sz="3200" kern="1200">
-          <a:solidFill>
-            <a:schemeClr val="tx1"/>
-          </a:solidFill>
-          <a:latin typeface="+mn-lt"/>
-          <a:ea typeface="+mn-ea"/>
-          <a:cs typeface="+mn-cs"/>
-        </a:defRPr>
-      </a:lvl1pPr>
-      <a:lvl2pPr marL="742950" indent="-285750" algn="l" defTabSz="914400" rtl="0" eaLnBrk="1" latinLnBrk="0" hangingPunct="1">
-        <a:spcBef>
-          <a:spcPct val="20000"/>
-        </a:spcBef>
-        <a:buFont typeface="Arial" panose="020B0604020202020204" pitchFamily="34" charset="0"/>
-        <a:buChar char="–"/>
-        <a:defRPr sz="2800" kern="1200">
-          <a:solidFill>
-            <a:schemeClr val="tx1"/>
-          </a:solidFill>
-          <a:latin typeface="+mn-lt"/>
-          <a:ea typeface="+mn-ea"/>
-          <a:cs typeface="+mn-cs"/>
-        </a:defRPr>
-      </a:lvl2pPr>
-      <a:lvl3pPr marL="1143000" indent="-228600" algn="l" defTabSz="914400" rtl="0" eaLnBrk="1" latinLnBrk="0" hangingPunct="1">
-        <a:spcBef>
-          <a:spcPct val="20000"/>
-        </a:spcBef>
-        <a:buFont typeface="Arial" panose="020B0604020202020204" pitchFamily="34" charset="0"/>
-        <a:buChar char="•"/>
-        <a:defRPr sz="2400" kern="1200">
-          <a:solidFill>
-            <a:schemeClr val="tx1"/>
-          </a:solidFill>
-          <a:latin typeface="+mn-lt"/>
-          <a:ea typeface="+mn-ea"/>
-          <a:cs typeface="+mn-cs"/>
-        </a:defRPr>
-      </a:lvl3pPr>
-      <a:lvl4pPr marL="1600200" indent="-228600" algn="l" defTabSz="914400" rtl="0" eaLnBrk="1" latinLnBrk="0" hangingPunct="1">
-        <a:spcBef>
-          <a:spcPct val="20000"/>
-        </a:spcBef>
-        <a:buFont typeface="Arial" panose="020B0604020202020204" pitchFamily="34" charset="0"/>
-        <a:buChar char="–"/>
-        <a:defRPr sz="2000" kern="1200">
-          <a:solidFill>
-            <a:schemeClr val="tx1"/>
-          </a:solidFill>
-          <a:latin typeface="+mn-lt"/>
-          <a:ea typeface="+mn-ea"/>
-          <a:cs typeface="+mn-cs"/>
-        </a:defRPr>
-      </a:lvl4pPr>
-      <a:lvl5pPr marL="2057400" indent="-228600" algn="l" defTabSz="914400" rtl="0" eaLnBrk="1" latinLnBrk="0" hangingPunct="1">
-        <a:spcBef>
-          <a:spcPct val="20000"/>
-        </a:spcBef>
-        <a:buFont typeface="Arial" panose="020B0604020202020204" pitchFamily="34" charset="0"/>
-        <a:buChar char="»"/>
-        <a:defRPr sz="2000" kern="1200">
-          <a:solidFill>
-            <a:schemeClr val="tx1"/>
-          </a:solidFill>
-          <a:latin typeface="+mn-lt"/>
-          <a:ea typeface="+mn-ea"/>
-          <a:cs typeface="+mn-cs"/>
-        </a:defRPr>
-      </a:lvl5pPr>
-      <a:lvl6pPr marL="2514600" indent="-228600" algn="l" defTabSz="914400" rtl="0" eaLnBrk="1" latinLnBrk="0" hangingPunct="1">
-        <a:spcBef>
-          <a:spcPct val="20000"/>
-        </a:spcBef>
-        <a:buFont typeface="Arial" panose="020B0604020202020204" pitchFamily="34" charset="0"/>
-        <a:buChar char="•"/>
-        <a:defRPr sz="2000" kern="1200">
-          <a:solidFill>
-            <a:schemeClr val="tx1"/>
-          </a:solidFill>
-          <a:latin typeface="+mn-lt"/>
-          <a:ea typeface="+mn-ea"/>
-          <a:cs typeface="+mn-cs"/>
-        </a:defRPr>
-      </a:lvl6pPr>
-      <a:lvl7pPr marL="2971800" indent="-228600" algn="l" defTabSz="914400" rtl="0" eaLnBrk="1" latinLnBrk="0" hangingPunct="1">
-        <a:spcBef>
-          <a:spcPct val="20000"/>
-        </a:spcBef>
-        <a:buFont typeface="Arial" panose="020B0604020202020204" pitchFamily="34" charset="0"/>
-        <a:buChar char="•"/>
-        <a:defRPr sz="2000" kern="1200">
-          <a:solidFill>
-            <a:schemeClr val="tx1"/>
-          </a:solidFill>
-          <a:latin typeface="+mn-lt"/>
-          <a:ea typeface="+mn-ea"/>
-          <a:cs typeface="+mn-cs"/>
-        </a:defRPr>
-      </a:lvl7pPr>
-      <a:lvl8pPr marL="3429000" indent="-228600" algn="l" defTabSz="914400" rtl="0" eaLnBrk="1" latinLnBrk="0" hangingPunct="1">
-        <a:spcBef>
-          <a:spcPct val="20000"/>
-        </a:spcBef>
-        <a:buFont typeface="Arial" panose="020B0604020202020204" pitchFamily="34" charset="0"/>
-        <a:buChar char="•"/>
-        <a:defRPr sz="2000" kern="1200">
-          <a:solidFill>
-            <a:schemeClr val="tx1"/>
-          </a:solidFill>
-          <a:latin typeface="+mn-lt"/>
-          <a:ea typeface="+mn-ea"/>
-          <a:cs typeface="+mn-cs"/>
-        </a:defRPr>
-      </a:lvl8pPr>
-      <a:lvl9pPr marL="3886200" indent="-228600" algn="l" defTabSz="914400" rtl="0" eaLnBrk="1" latinLnBrk="0" hangingPunct="1">
-        <a:spcBef>
-          <a:spcPct val="20000"/>
-        </a:spcBef>
-        <a:buFont typeface="Arial" panose="020B0604020202020204" pitchFamily="34" charset="0"/>
+        <a:buFont typeface="Arial" pitchFamily="34" charset="0"/>
         <a:buChar char="•"/>
         <a:defRPr sz="2000" kern="1200">
           <a:solidFill>
@@ -2344,7 +2099,7 @@
 
 <file path=ppt/slides/slide1.xml><?xml version="1.0" encoding="utf-8"?>
 <p:sld xmlns:a="http://schemas.openxmlformats.org/drawingml/2006/main" xmlns:r="http://schemas.openxmlformats.org/officeDocument/2006/relationships" xmlns:p="http://schemas.openxmlformats.org/presentationml/2006/main">
-  <p:cSld>
+  <p:cSld name="Slide 1">
     <p:bg>
       <p:bgPr>
         <a:blipFill dpi="0" rotWithShape="1">
@@ -2388,12 +2143,13 @@
             <a:avLst/>
           </a:prstGeom>
           <a:noFill/>
+          <a:ln/>
         </p:spPr>
         <p:txBody>
           <a:bodyPr wrap="square" rtlCol="0" anchor="ctr"/>
           <a:lstStyle/>
           <a:p>
-            <a:pPr marL="0" indent="0" algn="r">
+            <a:pPr algn="r" indent="0" marL="0">
               <a:buNone/>
             </a:pPr>
             <a:r>
@@ -2401,11 +2157,11 @@
                 <a:solidFill>
                   <a:srgbClr val="8A9099"/>
                 </a:solidFill>
-                <a:latin typeface="微软雅黑" panose="020B0503020204020204" pitchFamily="34" charset="-122"/>
-                <a:ea typeface="微软雅黑" panose="020B0503020204020204" pitchFamily="34" charset="-122"/>
-                <a:cs typeface="微软雅黑" panose="020B0503020204020204" pitchFamily="34" charset="-120"/>
-              </a:rPr>
-              <a:t>1 / 16</a:t>
+                <a:latin typeface="微软雅黑" pitchFamily="34" charset="0"/>
+                <a:ea typeface="微软雅黑" pitchFamily="34" charset="-122"/>
+                <a:cs typeface="微软雅黑" pitchFamily="34" charset="-120"/>
+              </a:rPr>
+              <a:t>1 / 15</a:t>
             </a:r>
             <a:endParaRPr lang="en-US" sz="1000" dirty="0"/>
           </a:p>
@@ -2426,12 +2182,13 @@
             <a:avLst/>
           </a:prstGeom>
           <a:noFill/>
+          <a:ln/>
         </p:spPr>
         <p:txBody>
           <a:bodyPr wrap="square" rtlCol="0" anchor="ctr"/>
           <a:lstStyle/>
           <a:p>
-            <a:pPr marL="0" indent="0" algn="ctr">
+            <a:pPr algn="ctr" indent="0" marL="0">
               <a:buNone/>
             </a:pPr>
             <a:r>
@@ -2439,9 +2196,9 @@
                 <a:solidFill>
                   <a:srgbClr val="1F4E9C"/>
                 </a:solidFill>
-                <a:latin typeface="微软雅黑" panose="020B0503020204020204" pitchFamily="34" charset="-122"/>
-                <a:ea typeface="微软雅黑" panose="020B0503020204020204" pitchFamily="34" charset="-122"/>
-                <a:cs typeface="微软雅黑" panose="020B0503020204020204" pitchFamily="34" charset="-120"/>
+                <a:latin typeface="微软雅黑" pitchFamily="34" charset="0"/>
+                <a:ea typeface="微软雅黑" pitchFamily="34" charset="-122"/>
+                <a:cs typeface="微软雅黑" pitchFamily="34" charset="-120"/>
               </a:rPr>
               <a:t>重邮802 数据结构代码课程</a:t>
             </a:r>
@@ -2464,12 +2221,13 @@
             <a:avLst/>
           </a:prstGeom>
           <a:noFill/>
+          <a:ln/>
         </p:spPr>
         <p:txBody>
           <a:bodyPr wrap="square" rtlCol="0" anchor="ctr"/>
           <a:lstStyle/>
           <a:p>
-            <a:pPr marL="0" indent="0" algn="ctr">
+            <a:pPr algn="ctr" indent="0" marL="0">
               <a:buNone/>
             </a:pPr>
             <a:r>
@@ -2477,9 +2235,9 @@
                 <a:solidFill>
                   <a:srgbClr val="1F2329"/>
                 </a:solidFill>
-                <a:latin typeface="微软雅黑" panose="020B0503020204020204" pitchFamily="34" charset="-122"/>
-                <a:ea typeface="微软雅黑" panose="020B0503020204020204" pitchFamily="34" charset="-122"/>
-                <a:cs typeface="微软雅黑" panose="020B0503020204020204" pitchFamily="34" charset="-120"/>
+                <a:latin typeface="微软雅黑" pitchFamily="34" charset="0"/>
+                <a:ea typeface="微软雅黑" pitchFamily="34" charset="-122"/>
+                <a:cs typeface="微软雅黑" pitchFamily="34" charset="-120"/>
               </a:rPr>
               <a:t>C语言强化阶段</a:t>
             </a:r>
@@ -2502,12 +2260,13 @@
             <a:avLst/>
           </a:prstGeom>
           <a:noFill/>
+          <a:ln/>
         </p:spPr>
         <p:txBody>
           <a:bodyPr wrap="square" rtlCol="0" anchor="ctr"/>
           <a:lstStyle/>
           <a:p>
-            <a:pPr marL="0" indent="0" algn="ctr">
+            <a:pPr algn="ctr" indent="0" marL="0">
               <a:buNone/>
             </a:pPr>
             <a:r>
@@ -2515,9 +2274,9 @@
                 <a:solidFill>
                   <a:srgbClr val="1F2329"/>
                 </a:solidFill>
-                <a:latin typeface="微软雅黑" panose="020B0503020204020204" pitchFamily="34" charset="-122"/>
-                <a:ea typeface="微软雅黑" panose="020B0503020204020204" pitchFamily="34" charset="-122"/>
-                <a:cs typeface="微软雅黑" panose="020B0503020204020204" pitchFamily="34" charset="-120"/>
+                <a:latin typeface="微软雅黑" pitchFamily="34" charset="0"/>
+                <a:ea typeface="微软雅黑" pitchFamily="34" charset="-122"/>
+                <a:cs typeface="微软雅黑" pitchFamily="34" charset="-120"/>
               </a:rPr>
               <a:t>第6节 递归与综合实战</a:t>
             </a:r>
@@ -2540,12 +2299,13 @@
             <a:avLst/>
           </a:prstGeom>
           <a:noFill/>
+          <a:ln/>
         </p:spPr>
         <p:txBody>
           <a:bodyPr wrap="square" rtlCol="0" anchor="ctr"/>
           <a:lstStyle/>
           <a:p>
-            <a:pPr marL="0" indent="0" algn="ctr">
+            <a:pPr algn="ctr" indent="0" marL="0">
               <a:buNone/>
             </a:pPr>
             <a:r>
@@ -2553,9 +2313,9 @@
                 <a:solidFill>
                   <a:srgbClr val="8A9099"/>
                 </a:solidFill>
-                <a:latin typeface="微软雅黑" panose="020B0503020204020204" pitchFamily="34" charset="-122"/>
-                <a:ea typeface="微软雅黑" panose="020B0503020204020204" pitchFamily="34" charset="-122"/>
-                <a:cs typeface="微软雅黑" panose="020B0503020204020204" pitchFamily="34" charset="-120"/>
+                <a:latin typeface="微软雅黑" pitchFamily="34" charset="0"/>
+                <a:ea typeface="微软雅黑" pitchFamily="34" charset="-122"/>
+                <a:cs typeface="微软雅黑" pitchFamily="34" charset="-120"/>
               </a:rPr>
               <a:t>阶段：强化 ｜ 主讲：牙膏学长 ｜ 预计42分钟 ｜ 资料答疑：伴梦研途QQ群</a:t>
             </a:r>
@@ -2573,7 +2333,7 @@
 
 <file path=ppt/slides/slide10.xml><?xml version="1.0" encoding="utf-8"?>
 <p:sld xmlns:a="http://schemas.openxmlformats.org/drawingml/2006/main" xmlns:r="http://schemas.openxmlformats.org/officeDocument/2006/relationships" xmlns:p="http://schemas.openxmlformats.org/presentationml/2006/main">
-  <p:cSld>
+  <p:cSld name="Slide 10">
     <p:bg>
       <p:bgPr>
         <a:blipFill dpi="0" rotWithShape="1">
@@ -2617,12 +2377,13 @@
             <a:avLst/>
           </a:prstGeom>
           <a:noFill/>
+          <a:ln/>
         </p:spPr>
         <p:txBody>
           <a:bodyPr wrap="square" rtlCol="0" anchor="ctr"/>
           <a:lstStyle/>
           <a:p>
-            <a:pPr marL="0" indent="0" algn="r">
+            <a:pPr algn="r" indent="0" marL="0">
               <a:buNone/>
             </a:pPr>
             <a:r>
@@ -2630,11 +2391,11 @@
                 <a:solidFill>
                   <a:srgbClr val="8A9099"/>
                 </a:solidFill>
-                <a:latin typeface="微软雅黑" panose="020B0503020204020204" pitchFamily="34" charset="-122"/>
-                <a:ea typeface="微软雅黑" panose="020B0503020204020204" pitchFamily="34" charset="-122"/>
-                <a:cs typeface="微软雅黑" panose="020B0503020204020204" pitchFamily="34" charset="-120"/>
-              </a:rPr>
-              <a:t>10 / 16</a:t>
+                <a:latin typeface="微软雅黑" pitchFamily="34" charset="0"/>
+                <a:ea typeface="微软雅黑" pitchFamily="34" charset="-122"/>
+                <a:cs typeface="微软雅黑" pitchFamily="34" charset="-120"/>
+              </a:rPr>
+              <a:t>10 / 15</a:t>
             </a:r>
             <a:endParaRPr lang="en-US" sz="1000" dirty="0"/>
           </a:p>
@@ -2655,12 +2416,13 @@
             <a:avLst/>
           </a:prstGeom>
           <a:noFill/>
+          <a:ln/>
         </p:spPr>
         <p:txBody>
           <a:bodyPr wrap="square" rtlCol="0" anchor="ctr"/>
           <a:lstStyle/>
           <a:p>
-            <a:pPr marL="0" indent="0" algn="l">
+            <a:pPr algn="l" indent="0" marL="0">
               <a:buNone/>
             </a:pPr>
             <a:r>
@@ -2668,9 +2430,9 @@
                 <a:solidFill>
                   <a:srgbClr val="1F4E9C"/>
                 </a:solidFill>
-                <a:latin typeface="微软雅黑" panose="020B0503020204020204" pitchFamily="34" charset="-122"/>
-                <a:ea typeface="微软雅黑" panose="020B0503020204020204" pitchFamily="34" charset="-122"/>
-                <a:cs typeface="微软雅黑" panose="020B0503020204020204" pitchFamily="34" charset="-120"/>
+                <a:latin typeface="微软雅黑" pitchFamily="34" charset="0"/>
+                <a:ea typeface="微软雅黑" pitchFamily="34" charset="-122"/>
+                <a:cs typeface="微软雅黑" pitchFamily="34" charset="-120"/>
               </a:rPr>
               <a:t>造、串、走、还</a:t>
             </a:r>
@@ -2693,12 +2455,13 @@
             <a:avLst/>
           </a:prstGeom>
           <a:noFill/>
+          <a:ln/>
         </p:spPr>
         <p:txBody>
           <a:bodyPr wrap="square" rtlCol="0" anchor="ctr"/>
           <a:lstStyle/>
           <a:p>
-            <a:pPr marL="0" indent="0" algn="l">
+            <a:pPr algn="l" indent="0" marL="0">
               <a:buNone/>
             </a:pPr>
             <a:r>
@@ -2706,9 +2469,9 @@
                 <a:solidFill>
                   <a:srgbClr val="1F2329"/>
                 </a:solidFill>
-                <a:latin typeface="微软雅黑" panose="020B0503020204020204" pitchFamily="34" charset="-122"/>
-                <a:ea typeface="微软雅黑" panose="020B0503020204020204" pitchFamily="34" charset="-122"/>
-                <a:cs typeface="微软雅黑" panose="020B0503020204020204" pitchFamily="34" charset="-120"/>
+                <a:latin typeface="微软雅黑" pitchFamily="34" charset="0"/>
+                <a:ea typeface="微软雅黑" pitchFamily="34" charset="-122"/>
+                <a:cs typeface="微软雅黑" pitchFamily="34" charset="-120"/>
               </a:rPr>
               <a:t>malloc造结构体，箭头串起来，指针走一遍</a:t>
             </a:r>
@@ -2733,6 +2496,7 @@
           <a:solidFill>
             <a:srgbClr val="F7F9FC"/>
           </a:solidFill>
+          <a:ln/>
         </p:spPr>
       </p:sp>
       <p:sp>
@@ -2752,6 +2516,7 @@
           <a:solidFill>
             <a:srgbClr val="1F4E9C"/>
           </a:solidFill>
+          <a:ln/>
         </p:spPr>
       </p:sp>
       <p:sp>
@@ -2769,12 +2534,13 @@
             <a:avLst/>
           </a:prstGeom>
           <a:noFill/>
+          <a:ln/>
         </p:spPr>
         <p:txBody>
           <a:bodyPr wrap="square" rtlCol="0" anchor="t"/>
           <a:lstStyle/>
           <a:p>
-            <a:pPr marL="0" indent="0" algn="l">
+            <a:pPr algn="l" indent="0" marL="0">
               <a:lnSpc>
                 <a:spcPct val="125000"/>
               </a:lnSpc>
@@ -2785,9 +2551,9 @@
                 <a:solidFill>
                   <a:srgbClr val="1F2329"/>
                 </a:solidFill>
-                <a:latin typeface="Consolas" panose="020B0609020204030204" pitchFamily="34" charset="0"/>
-                <a:ea typeface="Consolas" panose="020B0609020204030204" pitchFamily="34" charset="-122"/>
-                <a:cs typeface="Consolas" panose="020B0609020204030204" pitchFamily="34" charset="-120"/>
+                <a:latin typeface="Consolas" pitchFamily="34" charset="0"/>
+                <a:ea typeface="Consolas" pitchFamily="34" charset="-122"/>
+                <a:cs typeface="Consolas" pitchFamily="34" charset="-120"/>
               </a:rPr>
               <a:t>struct Node *p = (struct Node *)malloc(sizeof(struct Node));
 if (p == NULL) return 1;
@@ -2814,12 +2580,13 @@
             <a:avLst/>
           </a:prstGeom>
           <a:noFill/>
+          <a:ln/>
         </p:spPr>
         <p:txBody>
           <a:bodyPr wrap="square" rtlCol="0" anchor="t"/>
           <a:lstStyle/>
           <a:p>
-            <a:pPr marL="0" indent="0" algn="l">
+            <a:pPr algn="l" indent="0" marL="0">
               <a:lnSpc>
                 <a:spcPct val="115000"/>
               </a:lnSpc>
@@ -2830,12 +2597,18 @@
                 <a:solidFill>
                   <a:srgbClr val="1F4E9C"/>
                 </a:solidFill>
-                <a:latin typeface="微软雅黑" panose="020B0503020204020204" pitchFamily="34" charset="-122"/>
-                <a:ea typeface="微软雅黑" panose="020B0503020204020204" pitchFamily="34" charset="-122"/>
-                <a:cs typeface="微软雅黑" panose="020B0503020204020204" pitchFamily="34" charset="-120"/>
+                <a:latin typeface="微软雅黑" pitchFamily="34" charset="0"/>
+                <a:ea typeface="微软雅黑" pitchFamily="34" charset="-122"/>
+                <a:cs typeface="微软雅黑" pitchFamily="34" charset="-120"/>
               </a:rPr>
               <a:t>•  </a:t>
             </a:r>
+            <a:pPr algn="l" indent="0" marL="0">
+              <a:lnSpc>
+                <a:spcPct val="115000"/>
+              </a:lnSpc>
+              <a:buNone/>
+            </a:pPr>
             <a:r>
               <a:rPr lang="en-US" sz="1700" dirty="0">
                 <a:solidFill>
@@ -2863,12 +2636,13 @@
             <a:avLst/>
           </a:prstGeom>
           <a:noFill/>
+          <a:ln/>
         </p:spPr>
         <p:txBody>
           <a:bodyPr wrap="square" rtlCol="0" anchor="t"/>
           <a:lstStyle/>
           <a:p>
-            <a:pPr marL="0" indent="0" algn="l">
+            <a:pPr algn="l" indent="0" marL="0">
               <a:lnSpc>
                 <a:spcPct val="115000"/>
               </a:lnSpc>
@@ -2879,12 +2653,18 @@
                 <a:solidFill>
                   <a:srgbClr val="1F4E9C"/>
                 </a:solidFill>
-                <a:latin typeface="微软雅黑" panose="020B0503020204020204" pitchFamily="34" charset="-122"/>
-                <a:ea typeface="微软雅黑" panose="020B0503020204020204" pitchFamily="34" charset="-122"/>
-                <a:cs typeface="微软雅黑" panose="020B0503020204020204" pitchFamily="34" charset="-120"/>
+                <a:latin typeface="微软雅黑" pitchFamily="34" charset="0"/>
+                <a:ea typeface="微软雅黑" pitchFamily="34" charset="-122"/>
+                <a:cs typeface="微软雅黑" pitchFamily="34" charset="-120"/>
               </a:rPr>
               <a:t>•  </a:t>
             </a:r>
+            <a:pPr algn="l" indent="0" marL="0">
+              <a:lnSpc>
+                <a:spcPct val="115000"/>
+              </a:lnSpc>
+              <a:buNone/>
+            </a:pPr>
             <a:r>
               <a:rPr lang="en-US" sz="1700" dirty="0">
                 <a:solidFill>
@@ -2912,12 +2692,13 @@
             <a:avLst/>
           </a:prstGeom>
           <a:noFill/>
+          <a:ln/>
         </p:spPr>
         <p:txBody>
           <a:bodyPr wrap="square" rtlCol="0" anchor="t"/>
           <a:lstStyle/>
           <a:p>
-            <a:pPr marL="0" indent="0" algn="l">
+            <a:pPr algn="l" indent="0" marL="0">
               <a:lnSpc>
                 <a:spcPct val="115000"/>
               </a:lnSpc>
@@ -2928,12 +2709,18 @@
                 <a:solidFill>
                   <a:srgbClr val="1F4E9C"/>
                 </a:solidFill>
-                <a:latin typeface="微软雅黑" panose="020B0503020204020204" pitchFamily="34" charset="-122"/>
-                <a:ea typeface="微软雅黑" panose="020B0503020204020204" pitchFamily="34" charset="-122"/>
-                <a:cs typeface="微软雅黑" panose="020B0503020204020204" pitchFamily="34" charset="-120"/>
+                <a:latin typeface="微软雅黑" pitchFamily="34" charset="0"/>
+                <a:ea typeface="微软雅黑" pitchFamily="34" charset="-122"/>
+                <a:cs typeface="微软雅黑" pitchFamily="34" charset="-120"/>
               </a:rPr>
               <a:t>•  </a:t>
             </a:r>
+            <a:pPr algn="l" indent="0" marL="0">
+              <a:lnSpc>
+                <a:spcPct val="115000"/>
+              </a:lnSpc>
+              <a:buNone/>
+            </a:pPr>
             <a:r>
               <a:rPr lang="en-US" sz="1700" dirty="0">
                 <a:solidFill>
@@ -2961,12 +2748,13 @@
             <a:avLst/>
           </a:prstGeom>
           <a:noFill/>
+          <a:ln/>
         </p:spPr>
         <p:txBody>
           <a:bodyPr wrap="square" rtlCol="0" anchor="t"/>
           <a:lstStyle/>
           <a:p>
-            <a:pPr marL="0" indent="0" algn="l">
+            <a:pPr algn="l" indent="0" marL="0">
               <a:lnSpc>
                 <a:spcPct val="115000"/>
               </a:lnSpc>
@@ -2977,12 +2765,18 @@
                 <a:solidFill>
                   <a:srgbClr val="1F4E9C"/>
                 </a:solidFill>
-                <a:latin typeface="微软雅黑" panose="020B0503020204020204" pitchFamily="34" charset="-122"/>
-                <a:ea typeface="微软雅黑" panose="020B0503020204020204" pitchFamily="34" charset="-122"/>
-                <a:cs typeface="微软雅黑" panose="020B0503020204020204" pitchFamily="34" charset="-120"/>
+                <a:latin typeface="微软雅黑" pitchFamily="34" charset="0"/>
+                <a:ea typeface="微软雅黑" pitchFamily="34" charset="-122"/>
+                <a:cs typeface="微软雅黑" pitchFamily="34" charset="-120"/>
               </a:rPr>
               <a:t>•  </a:t>
             </a:r>
+            <a:pPr algn="l" indent="0" marL="0">
+              <a:lnSpc>
+                <a:spcPct val="115000"/>
+              </a:lnSpc>
+              <a:buNone/>
+            </a:pPr>
             <a:r>
               <a:rPr lang="en-US" sz="1700" dirty="0">
                 <a:solidFill>
@@ -3005,7 +2799,7 @@
 
 <file path=ppt/slides/slide11.xml><?xml version="1.0" encoding="utf-8"?>
 <p:sld xmlns:a="http://schemas.openxmlformats.org/drawingml/2006/main" xmlns:r="http://schemas.openxmlformats.org/officeDocument/2006/relationships" xmlns:p="http://schemas.openxmlformats.org/presentationml/2006/main">
-  <p:cSld>
+  <p:cSld name="Slide 11">
     <p:bg>
       <p:bgPr>
         <a:blipFill dpi="0" rotWithShape="1">
@@ -3049,12 +2843,13 @@
             <a:avLst/>
           </a:prstGeom>
           <a:noFill/>
+          <a:ln/>
         </p:spPr>
         <p:txBody>
           <a:bodyPr wrap="square" rtlCol="0" anchor="ctr"/>
           <a:lstStyle/>
           <a:p>
-            <a:pPr marL="0" indent="0" algn="r">
+            <a:pPr algn="r" indent="0" marL="0">
               <a:buNone/>
             </a:pPr>
             <a:r>
@@ -3062,13 +2857,315 @@
                 <a:solidFill>
                   <a:srgbClr val="8A9099"/>
                 </a:solidFill>
-                <a:latin typeface="微软雅黑" panose="020B0503020204020204" pitchFamily="34" charset="-122"/>
-                <a:ea typeface="微软雅黑" panose="020B0503020204020204" pitchFamily="34" charset="-122"/>
-                <a:cs typeface="微软雅黑" panose="020B0503020204020204" pitchFamily="34" charset="-120"/>
-              </a:rPr>
-              <a:t>11 / 16</a:t>
+                <a:latin typeface="微软雅黑" pitchFamily="34" charset="0"/>
+                <a:ea typeface="微软雅黑" pitchFamily="34" charset="-122"/>
+                <a:cs typeface="微软雅黑" pitchFamily="34" charset="-120"/>
+              </a:rPr>
+              <a:t>11 / 15</a:t>
             </a:r>
             <a:endParaRPr lang="en-US" sz="1000" dirty="0"/>
+          </a:p>
+        </p:txBody>
+      </p:sp>
+      <p:sp>
+        <p:nvSpPr>
+          <p:cNvPr id="3" name="Text 1"/>
+          <p:cNvSpPr/>
+          <p:nvPr/>
+        </p:nvSpPr>
+        <p:spPr>
+          <a:xfrm>
+            <a:off x="822960" y="960120"/>
+            <a:ext cx="10545775" cy="365760"/>
+          </a:xfrm>
+          <a:prstGeom prst="rect">
+            <a:avLst/>
+          </a:prstGeom>
+          <a:noFill/>
+          <a:ln/>
+        </p:spPr>
+        <p:txBody>
+          <a:bodyPr wrap="square" rtlCol="0" anchor="ctr"/>
+          <a:lstStyle/>
+          <a:p>
+            <a:pPr algn="l" indent="0" marL="0">
+              <a:buNone/>
+            </a:pPr>
+            <a:r>
+              <a:rPr lang="en-US" sz="1400" b="1" dirty="0">
+                <a:solidFill>
+                  <a:srgbClr val="1F4E9C"/>
+                </a:solidFill>
+                <a:latin typeface="微软雅黑" pitchFamily="34" charset="0"/>
+                <a:ea typeface="微软雅黑" pitchFamily="34" charset="-122"/>
+                <a:cs typeface="微软雅黑" pitchFamily="34" charset="-120"/>
+              </a:rPr>
+              <a:t>综合内存图推演</a:t>
+            </a:r>
+            <a:endParaRPr lang="en-US" sz="1400" dirty="0"/>
+          </a:p>
+        </p:txBody>
+      </p:sp>
+      <p:sp>
+        <p:nvSpPr>
+          <p:cNvPr id="4" name="Text 2"/>
+          <p:cNvSpPr/>
+          <p:nvPr/>
+        </p:nvSpPr>
+        <p:spPr>
+          <a:xfrm>
+            <a:off x="822960" y="1344168"/>
+            <a:ext cx="10545775" cy="731520"/>
+          </a:xfrm>
+          <a:prstGeom prst="rect">
+            <a:avLst/>
+          </a:prstGeom>
+          <a:noFill/>
+          <a:ln/>
+        </p:spPr>
+        <p:txBody>
+          <a:bodyPr wrap="square" rtlCol="0" anchor="ctr"/>
+          <a:lstStyle/>
+          <a:p>
+            <a:pPr algn="l" indent="0" marL="0">
+              <a:buNone/>
+            </a:pPr>
+            <a:r>
+              <a:rPr lang="en-US" sz="2800" b="1" dirty="0">
+                <a:solidFill>
+                  <a:srgbClr val="1F2329"/>
+                </a:solidFill>
+                <a:latin typeface="微软雅黑" pitchFamily="34" charset="0"/>
+                <a:ea typeface="微软雅黑" pitchFamily="34" charset="-122"/>
+                <a:cs typeface="微软雅黑" pitchFamily="34" charset="-120"/>
+              </a:rPr>
+              <a:t>一张图把这一阶段全画上（拿纸跟着画）</a:t>
+            </a:r>
+            <a:endParaRPr lang="en-US" sz="2800" dirty="0"/>
+          </a:p>
+        </p:txBody>
+      </p:sp>
+      <p:sp>
+        <p:nvSpPr>
+          <p:cNvPr id="5" name="Text 3"/>
+          <p:cNvSpPr/>
+          <p:nvPr/>
+        </p:nvSpPr>
+        <p:spPr>
+          <a:xfrm>
+            <a:off x="896112" y="2395728"/>
+            <a:ext cx="10454335" cy="397764"/>
+          </a:xfrm>
+          <a:prstGeom prst="rect">
+            <a:avLst/>
+          </a:prstGeom>
+          <a:noFill/>
+          <a:ln/>
+        </p:spPr>
+        <p:txBody>
+          <a:bodyPr wrap="square" rtlCol="0" anchor="t"/>
+          <a:lstStyle/>
+          <a:p>
+            <a:pPr algn="l" indent="0" marL="0">
+              <a:lnSpc>
+                <a:spcPct val="115000"/>
+              </a:lnSpc>
+              <a:buNone/>
+            </a:pPr>
+            <a:r>
+              <a:rPr lang="en-US" sz="1800" b="1" dirty="0">
+                <a:solidFill>
+                  <a:srgbClr val="1F4E9C"/>
+                </a:solidFill>
+                <a:latin typeface="微软雅黑" pitchFamily="34" charset="0"/>
+                <a:ea typeface="微软雅黑" pitchFamily="34" charset="-122"/>
+                <a:cs typeface="微软雅黑" pitchFamily="34" charset="-120"/>
+              </a:rPr>
+              <a:t>•  </a:t>
+            </a:r>
+            <a:pPr algn="l" indent="0" marL="0">
+              <a:lnSpc>
+                <a:spcPct val="115000"/>
+              </a:lnSpc>
+              <a:buNone/>
+            </a:pPr>
+            <a:r>
+              <a:rPr lang="en-US" sz="1800" dirty="0">
+                <a:solidFill>
+                  <a:srgbClr val="000000"/>
+                </a:solidFill>
+              </a:rPr>
+              <a:t>① 画栈：一个格子标p，里面装地址（局部变量住栈上）</a:t>
+            </a:r>
+            <a:endParaRPr lang="en-US" sz="1800" dirty="0"/>
+          </a:p>
+        </p:txBody>
+      </p:sp>
+      <p:sp>
+        <p:nvSpPr>
+          <p:cNvPr id="6" name="Text 4"/>
+          <p:cNvSpPr/>
+          <p:nvPr/>
+        </p:nvSpPr>
+        <p:spPr>
+          <a:xfrm>
+            <a:off x="896112" y="2866644"/>
+            <a:ext cx="10454335" cy="397764"/>
+          </a:xfrm>
+          <a:prstGeom prst="rect">
+            <a:avLst/>
+          </a:prstGeom>
+          <a:noFill/>
+          <a:ln/>
+        </p:spPr>
+        <p:txBody>
+          <a:bodyPr wrap="square" rtlCol="0" anchor="t"/>
+          <a:lstStyle/>
+          <a:p>
+            <a:pPr algn="l" indent="0" marL="0">
+              <a:lnSpc>
+                <a:spcPct val="115000"/>
+              </a:lnSpc>
+              <a:buNone/>
+            </a:pPr>
+            <a:r>
+              <a:rPr lang="en-US" sz="1800" b="1" dirty="0">
+                <a:solidFill>
+                  <a:srgbClr val="1F4E9C"/>
+                </a:solidFill>
+                <a:latin typeface="微软雅黑" pitchFamily="34" charset="0"/>
+                <a:ea typeface="微软雅黑" pitchFamily="34" charset="-122"/>
+                <a:cs typeface="微软雅黑" pitchFamily="34" charset="-120"/>
+              </a:rPr>
+              <a:t>•  </a:t>
+            </a:r>
+            <a:pPr algn="l" indent="0" marL="0">
+              <a:lnSpc>
+                <a:spcPct val="115000"/>
+              </a:lnSpc>
+              <a:buNone/>
+            </a:pPr>
+            <a:r>
+              <a:rPr lang="en-US" sz="1800" dirty="0">
+                <a:solidFill>
+                  <a:srgbClr val="000000"/>
+                </a:solidFill>
+              </a:rPr>
+              <a:t>② 画堆上三片分开的结构体格，每片两格：左data右next，填10、20、30</a:t>
+            </a:r>
+            <a:endParaRPr lang="en-US" sz="1800" dirty="0"/>
+          </a:p>
+        </p:txBody>
+      </p:sp>
+      <p:sp>
+        <p:nvSpPr>
+          <p:cNvPr id="7" name="Text 5"/>
+          <p:cNvSpPr/>
+          <p:nvPr/>
+        </p:nvSpPr>
+        <p:spPr>
+          <a:xfrm>
+            <a:off x="896112" y="3337560"/>
+            <a:ext cx="10454335" cy="397764"/>
+          </a:xfrm>
+          <a:prstGeom prst="rect">
+            <a:avLst/>
+          </a:prstGeom>
+          <a:noFill/>
+          <a:ln/>
+        </p:spPr>
+        <p:txBody>
+          <a:bodyPr wrap="square" rtlCol="0" anchor="t"/>
+          <a:lstStyle/>
+          <a:p>
+            <a:pPr algn="l" indent="0" marL="0">
+              <a:lnSpc>
+                <a:spcPct val="115000"/>
+              </a:lnSpc>
+              <a:buNone/>
+            </a:pPr>
+            <a:r>
+              <a:rPr lang="en-US" sz="1800" b="1" dirty="0">
+                <a:solidFill>
+                  <a:srgbClr val="1F4E9C"/>
+                </a:solidFill>
+                <a:latin typeface="微软雅黑" pitchFamily="34" charset="0"/>
+                <a:ea typeface="微软雅黑" pitchFamily="34" charset="-122"/>
+                <a:cs typeface="微软雅黑" pitchFamily="34" charset="-120"/>
+              </a:rPr>
+              <a:t>•  </a:t>
+            </a:r>
+            <a:pPr algn="l" indent="0" marL="0">
+              <a:lnSpc>
+                <a:spcPct val="115000"/>
+              </a:lnSpc>
+              <a:buNone/>
+            </a:pPr>
+            <a:r>
+              <a:rPr lang="en-US" sz="1800" dirty="0">
+                <a:solidFill>
+                  <a:srgbClr val="000000"/>
+                </a:solidFill>
+              </a:rPr>
+              <a:t>③ next互串画箭头，最后一片next写NULL；p的箭头指到第一片</a:t>
+            </a:r>
+            <a:endParaRPr lang="en-US" sz="1800" dirty="0"/>
+          </a:p>
+        </p:txBody>
+      </p:sp>
+      <p:sp>
+        <p:nvSpPr>
+          <p:cNvPr id="8" name="Text 6"/>
+          <p:cNvSpPr/>
+          <p:nvPr/>
+        </p:nvSpPr>
+        <p:spPr>
+          <a:xfrm>
+            <a:off x="896112" y="3808476"/>
+            <a:ext cx="10454335" cy="397764"/>
+          </a:xfrm>
+          <a:prstGeom prst="rect">
+            <a:avLst/>
+          </a:prstGeom>
+          <a:noFill/>
+          <a:ln/>
+        </p:spPr>
+        <p:txBody>
+          <a:bodyPr wrap="square" rtlCol="0" anchor="t"/>
+          <a:lstStyle/>
+          <a:p>
+            <a:pPr algn="l" indent="0" marL="0">
+              <a:lnSpc>
+                <a:spcPct val="115000"/>
+              </a:lnSpc>
+              <a:buNone/>
+            </a:pPr>
+            <a:r>
+              <a:rPr lang="en-US" sz="1800" b="1" dirty="0">
+                <a:solidFill>
+                  <a:srgbClr val="1F4E9C"/>
+                </a:solidFill>
+                <a:latin typeface="微软雅黑" pitchFamily="34" charset="0"/>
+                <a:ea typeface="微软雅黑" pitchFamily="34" charset="-122"/>
+                <a:cs typeface="微软雅黑" pitchFamily="34" charset="-120"/>
+              </a:rPr>
+              <a:t>•  </a:t>
+            </a:r>
+            <a:pPr algn="l" indent="0" marL="0">
+              <a:lnSpc>
+                <a:spcPct val="115000"/>
+              </a:lnSpc>
+              <a:buNone/>
+            </a:pPr>
+            <a:r>
+              <a:rPr lang="en-US" sz="1800" dirty="0">
+                <a:solidFill>
+                  <a:srgbClr val="000000"/>
+                </a:solidFill>
+              </a:rPr>
+              <a:t>④ 走一遍：p沿箭头挪三次打印，变NULL时循环停；free后格子涂掉、箭头失效</a:t>
+            </a:r>
+            <a:endParaRPr lang="en-US" sz="1800" dirty="0"/>
           </a:p>
         </p:txBody>
       </p:sp>
@@ -3082,7 +3179,7 @@
 
 <file path=ppt/slides/slide12.xml><?xml version="1.0" encoding="utf-8"?>
 <p:sld xmlns:a="http://schemas.openxmlformats.org/drawingml/2006/main" xmlns:r="http://schemas.openxmlformats.org/officeDocument/2006/relationships" xmlns:p="http://schemas.openxmlformats.org/presentationml/2006/main">
-  <p:cSld>
+  <p:cSld name="Slide 12">
     <p:bg>
       <p:bgPr>
         <a:blipFill dpi="0" rotWithShape="1">
@@ -3126,12 +3223,13 @@
             <a:avLst/>
           </a:prstGeom>
           <a:noFill/>
+          <a:ln/>
         </p:spPr>
         <p:txBody>
           <a:bodyPr wrap="square" rtlCol="0" anchor="ctr"/>
           <a:lstStyle/>
           <a:p>
-            <a:pPr marL="0" indent="0" algn="r">
+            <a:pPr algn="r" indent="0" marL="0">
               <a:buNone/>
             </a:pPr>
             <a:r>
@@ -3139,11 +3237,11 @@
                 <a:solidFill>
                   <a:srgbClr val="8A9099"/>
                 </a:solidFill>
-                <a:latin typeface="微软雅黑" panose="020B0503020204020204" pitchFamily="34" charset="-122"/>
-                <a:ea typeface="微软雅黑" panose="020B0503020204020204" pitchFamily="34" charset="-122"/>
-                <a:cs typeface="微软雅黑" panose="020B0503020204020204" pitchFamily="34" charset="-120"/>
-              </a:rPr>
-              <a:t>12 / 16</a:t>
+                <a:latin typeface="微软雅黑" pitchFamily="34" charset="0"/>
+                <a:ea typeface="微软雅黑" pitchFamily="34" charset="-122"/>
+                <a:cs typeface="微软雅黑" pitchFamily="34" charset="-120"/>
+              </a:rPr>
+              <a:t>12 / 15</a:t>
             </a:r>
             <a:endParaRPr lang="en-US" sz="1000" dirty="0"/>
           </a:p>
@@ -3164,12 +3262,13 @@
             <a:avLst/>
           </a:prstGeom>
           <a:noFill/>
+          <a:ln/>
         </p:spPr>
         <p:txBody>
           <a:bodyPr wrap="square" rtlCol="0" anchor="ctr"/>
           <a:lstStyle/>
           <a:p>
-            <a:pPr marL="0" indent="0" algn="l">
+            <a:pPr algn="l" indent="0" marL="0">
               <a:buNone/>
             </a:pPr>
             <a:r>
@@ -3177,11 +3276,11 @@
                 <a:solidFill>
                   <a:srgbClr val="1F4E9C"/>
                 </a:solidFill>
-                <a:latin typeface="微软雅黑" panose="020B0503020204020204" pitchFamily="34" charset="-122"/>
-                <a:ea typeface="微软雅黑" panose="020B0503020204020204" pitchFamily="34" charset="-122"/>
-                <a:cs typeface="微软雅黑" panose="020B0503020204020204" pitchFamily="34" charset="-120"/>
-              </a:rPr>
-              <a:t>综合内存图推演</a:t>
+                <a:latin typeface="微软雅黑" pitchFamily="34" charset="0"/>
+                <a:ea typeface="微软雅黑" pitchFamily="34" charset="-122"/>
+                <a:cs typeface="微软雅黑" pitchFamily="34" charset="-120"/>
+              </a:rPr>
+              <a:t>本节小结</a:t>
             </a:r>
             <a:endParaRPr lang="en-US" sz="1400" dirty="0"/>
           </a:p>
@@ -3202,12 +3301,13 @@
             <a:avLst/>
           </a:prstGeom>
           <a:noFill/>
+          <a:ln/>
         </p:spPr>
         <p:txBody>
           <a:bodyPr wrap="square" rtlCol="0" anchor="ctr"/>
           <a:lstStyle/>
           <a:p>
-            <a:pPr marL="0" indent="0" algn="l">
+            <a:pPr algn="l" indent="0" marL="0">
               <a:buNone/>
             </a:pPr>
             <a:r>
@@ -3215,11 +3315,11 @@
                 <a:solidFill>
                   <a:srgbClr val="1F2329"/>
                 </a:solidFill>
-                <a:latin typeface="微软雅黑" panose="020B0503020204020204" pitchFamily="34" charset="-122"/>
-                <a:ea typeface="微软雅黑" panose="020B0503020204020204" pitchFamily="34" charset="-122"/>
-                <a:cs typeface="微软雅黑" panose="020B0503020204020204" pitchFamily="34" charset="-120"/>
-              </a:rPr>
-              <a:t>一张图把这一阶段全画上（拿纸跟着画）</a:t>
+                <a:latin typeface="微软雅黑" pitchFamily="34" charset="0"/>
+                <a:ea typeface="微软雅黑" pitchFamily="34" charset="-122"/>
+                <a:cs typeface="微软雅黑" pitchFamily="34" charset="-120"/>
+              </a:rPr>
+              <a:t>今天就两件事</a:t>
             </a:r>
             <a:endParaRPr lang="en-US" sz="2800" dirty="0"/>
           </a:p>
@@ -3240,12 +3340,13 @@
             <a:avLst/>
           </a:prstGeom>
           <a:noFill/>
+          <a:ln/>
         </p:spPr>
         <p:txBody>
           <a:bodyPr wrap="square" rtlCol="0" anchor="t"/>
           <a:lstStyle/>
           <a:p>
-            <a:pPr marL="0" indent="0" algn="l">
+            <a:pPr algn="l" indent="0" marL="0">
               <a:lnSpc>
                 <a:spcPct val="115000"/>
               </a:lnSpc>
@@ -3256,19 +3357,25 @@
                 <a:solidFill>
                   <a:srgbClr val="1F4E9C"/>
                 </a:solidFill>
-                <a:latin typeface="微软雅黑" panose="020B0503020204020204" pitchFamily="34" charset="-122"/>
-                <a:ea typeface="微软雅黑" panose="020B0503020204020204" pitchFamily="34" charset="-122"/>
-                <a:cs typeface="微软雅黑" panose="020B0503020204020204" pitchFamily="34" charset="-120"/>
+                <a:latin typeface="微软雅黑" pitchFamily="34" charset="0"/>
+                <a:ea typeface="微软雅黑" pitchFamily="34" charset="-122"/>
+                <a:cs typeface="微软雅黑" pitchFamily="34" charset="-120"/>
               </a:rPr>
               <a:t>•  </a:t>
             </a:r>
+            <a:pPr algn="l" indent="0" marL="0">
+              <a:lnSpc>
+                <a:spcPct val="115000"/>
+              </a:lnSpc>
+              <a:buNone/>
+            </a:pPr>
             <a:r>
               <a:rPr lang="en-US" sz="1800" dirty="0">
                 <a:solidFill>
                   <a:srgbClr val="000000"/>
                 </a:solidFill>
               </a:rPr>
-              <a:t>① 画栈：一个格子标p，里面装地址（局部变量住栈上）</a:t>
+              <a:t>递归三要素：终止条件、缩小规模、返回值；运行过程是调用栈的展开与收回</a:t>
             </a:r>
             <a:endParaRPr lang="en-US" sz="1800" dirty="0"/>
           </a:p>
@@ -3283,18 +3390,75 @@
         <p:spPr>
           <a:xfrm>
             <a:off x="896112" y="2866644"/>
+            <a:ext cx="10454335" cy="740664"/>
+          </a:xfrm>
+          <a:prstGeom prst="rect">
+            <a:avLst/>
+          </a:prstGeom>
+          <a:noFill/>
+          <a:ln/>
+        </p:spPr>
+        <p:txBody>
+          <a:bodyPr wrap="square" rtlCol="0" anchor="t"/>
+          <a:lstStyle/>
+          <a:p>
+            <a:pPr algn="l" indent="0" marL="0">
+              <a:lnSpc>
+                <a:spcPct val="115000"/>
+              </a:lnSpc>
+              <a:buNone/>
+            </a:pPr>
+            <a:r>
+              <a:rPr lang="en-US" sz="1800" b="1" dirty="0">
+                <a:solidFill>
+                  <a:srgbClr val="1F4E9C"/>
+                </a:solidFill>
+                <a:latin typeface="微软雅黑" pitchFamily="34" charset="0"/>
+                <a:ea typeface="微软雅黑" pitchFamily="34" charset="-122"/>
+                <a:cs typeface="微软雅黑" pitchFamily="34" charset="-120"/>
+              </a:rPr>
+              <a:t>•  </a:t>
+            </a:r>
+            <a:pPr algn="l" indent="0" marL="0">
+              <a:lnSpc>
+                <a:spcPct val="115000"/>
+              </a:lnSpc>
+              <a:buNone/>
+            </a:pPr>
+            <a:r>
+              <a:rPr lang="en-US" sz="1800" dirty="0">
+                <a:solidFill>
+                  <a:srgbClr val="000000"/>
+                </a:solidFill>
+              </a:rPr>
+              <a:t>四样工具的组合：结构体装数组也装指针、malloc造结构体、引用传参改外面、free平账</a:t>
+            </a:r>
+            <a:endParaRPr lang="en-US" sz="1800" dirty="0"/>
+          </a:p>
+        </p:txBody>
+      </p:sp>
+      <p:sp>
+        <p:nvSpPr>
+          <p:cNvPr id="7" name="Text 5"/>
+          <p:cNvSpPr/>
+          <p:nvPr/>
+        </p:nvSpPr>
+        <p:spPr>
+          <a:xfrm>
+            <a:off x="896112" y="3680460"/>
             <a:ext cx="10454335" cy="397764"/>
           </a:xfrm>
           <a:prstGeom prst="rect">
             <a:avLst/>
           </a:prstGeom>
           <a:noFill/>
+          <a:ln/>
         </p:spPr>
         <p:txBody>
           <a:bodyPr wrap="square" rtlCol="0" anchor="t"/>
           <a:lstStyle/>
           <a:p>
-            <a:pPr marL="0" indent="0" algn="l">
+            <a:pPr algn="l" indent="0" marL="0">
               <a:lnSpc>
                 <a:spcPct val="115000"/>
               </a:lnSpc>
@@ -3305,19 +3469,25 @@
                 <a:solidFill>
                   <a:srgbClr val="1F4E9C"/>
                 </a:solidFill>
-                <a:latin typeface="微软雅黑" panose="020B0503020204020204" pitchFamily="34" charset="-122"/>
-                <a:ea typeface="微软雅黑" panose="020B0503020204020204" pitchFamily="34" charset="-122"/>
-                <a:cs typeface="微软雅黑" panose="020B0503020204020204" pitchFamily="34" charset="-120"/>
+                <a:latin typeface="微软雅黑" pitchFamily="34" charset="0"/>
+                <a:ea typeface="微软雅黑" pitchFamily="34" charset="-122"/>
+                <a:cs typeface="微软雅黑" pitchFamily="34" charset="-120"/>
               </a:rPr>
               <a:t>•  </a:t>
             </a:r>
+            <a:pPr algn="l" indent="0" marL="0">
+              <a:lnSpc>
+                <a:spcPct val="115000"/>
+              </a:lnSpc>
+              <a:buNone/>
+            </a:pPr>
             <a:r>
               <a:rPr lang="en-US" sz="1800" dirty="0">
                 <a:solidFill>
                   <a:srgbClr val="000000"/>
                 </a:solidFill>
               </a:rPr>
-              <a:t>② 画堆上三片分开的结构体格，每片两格：左data右next，填10、20、30</a:t>
+              <a:t>一张综合内存图：栈上指针、堆上分开的结构体格、箭头、NULL</a:t>
             </a:r>
             <a:endParaRPr lang="en-US" sz="1800" dirty="0"/>
           </a:p>
@@ -3325,99 +3495,40 @@
       </p:sp>
       <p:sp>
         <p:nvSpPr>
-          <p:cNvPr id="7" name="Text 5"/>
-          <p:cNvSpPr/>
-          <p:nvPr/>
-        </p:nvSpPr>
-        <p:spPr>
-          <a:xfrm>
-            <a:off x="896112" y="3337560"/>
-            <a:ext cx="10454335" cy="397764"/>
-          </a:xfrm>
-          <a:prstGeom prst="rect">
-            <a:avLst/>
-          </a:prstGeom>
-          <a:noFill/>
+          <p:cNvPr id="8" name="Text 6"/>
+          <p:cNvSpPr/>
+          <p:nvPr/>
+        </p:nvSpPr>
+        <p:spPr>
+          <a:xfrm>
+            <a:off x="822960" y="4242816"/>
+            <a:ext cx="10545775" cy="358902"/>
+          </a:xfrm>
+          <a:prstGeom prst="rect">
+            <a:avLst/>
+          </a:prstGeom>
+          <a:noFill/>
+          <a:ln/>
         </p:spPr>
         <p:txBody>
           <a:bodyPr wrap="square" rtlCol="0" anchor="t"/>
           <a:lstStyle/>
           <a:p>
-            <a:pPr marL="0" indent="0" algn="l">
-              <a:lnSpc>
-                <a:spcPct val="115000"/>
-              </a:lnSpc>
-              <a:buNone/>
-            </a:pPr>
-            <a:r>
-              <a:rPr lang="en-US" sz="1800" b="1" dirty="0">
-                <a:solidFill>
-                  <a:srgbClr val="1F4E9C"/>
-                </a:solidFill>
-                <a:latin typeface="微软雅黑" panose="020B0503020204020204" pitchFamily="34" charset="-122"/>
-                <a:ea typeface="微软雅黑" panose="020B0503020204020204" pitchFamily="34" charset="-122"/>
-                <a:cs typeface="微软雅黑" panose="020B0503020204020204" pitchFamily="34" charset="-120"/>
-              </a:rPr>
-              <a:t>•  </a:t>
-            </a:r>
-            <a:r>
-              <a:rPr lang="en-US" sz="1800" dirty="0">
-                <a:solidFill>
-                  <a:srgbClr val="000000"/>
-                </a:solidFill>
-              </a:rPr>
-              <a:t>③ next互串画箭头，最后一片next写NULL；p的箭头指到第一片</a:t>
-            </a:r>
-            <a:endParaRPr lang="en-US" sz="1800" dirty="0"/>
-          </a:p>
-        </p:txBody>
-      </p:sp>
-      <p:sp>
-        <p:nvSpPr>
-          <p:cNvPr id="8" name="Text 6"/>
-          <p:cNvSpPr/>
-          <p:nvPr/>
-        </p:nvSpPr>
-        <p:spPr>
-          <a:xfrm>
-            <a:off x="896112" y="3808476"/>
-            <a:ext cx="10454335" cy="397764"/>
-          </a:xfrm>
-          <a:prstGeom prst="rect">
-            <a:avLst/>
-          </a:prstGeom>
-          <a:noFill/>
-        </p:spPr>
-        <p:txBody>
-          <a:bodyPr wrap="square" rtlCol="0" anchor="t"/>
-          <a:lstStyle/>
-          <a:p>
-            <a:pPr marL="0" indent="0" algn="l">
-              <a:lnSpc>
-                <a:spcPct val="115000"/>
-              </a:lnSpc>
-              <a:buNone/>
-            </a:pPr>
-            <a:r>
-              <a:rPr lang="en-US" sz="1800" b="1" dirty="0">
-                <a:solidFill>
-                  <a:srgbClr val="1F4E9C"/>
-                </a:solidFill>
-                <a:latin typeface="微软雅黑" panose="020B0503020204020204" pitchFamily="34" charset="-122"/>
-                <a:ea typeface="微软雅黑" panose="020B0503020204020204" pitchFamily="34" charset="-122"/>
-                <a:cs typeface="微软雅黑" panose="020B0503020204020204" pitchFamily="34" charset="-120"/>
-              </a:rPr>
-              <a:t>•  </a:t>
-            </a:r>
-            <a:r>
-              <a:rPr lang="en-US" sz="1800" dirty="0">
-                <a:solidFill>
-                  <a:srgbClr val="000000"/>
-                </a:solidFill>
-              </a:rPr>
-              <a:t>④ 走一遍：p沿箭头挪三次打印，变NULL时循环停；free后格子涂掉、箭头失效</a:t>
-            </a:r>
-            <a:endParaRPr lang="en-US" sz="1800" dirty="0"/>
+            <a:pPr algn="l" indent="0" marL="0">
+              <a:buNone/>
+            </a:pPr>
+            <a:r>
+              <a:rPr lang="en-US" sz="1500" dirty="0">
+                <a:solidFill>
+                  <a:srgbClr val="8A9099"/>
+                </a:solidFill>
+                <a:latin typeface="微软雅黑" pitchFamily="34" charset="0"/>
+                <a:ea typeface="微软雅黑" pitchFamily="34" charset="-122"/>
+                <a:cs typeface="微软雅黑" pitchFamily="34" charset="-120"/>
+              </a:rPr>
+              <a:t>顺序表与链表的正式内容（插删、头结点、查找）在数据结构课讲；强化阶段到此完结</a:t>
+            </a:r>
+            <a:endParaRPr lang="en-US" sz="1500" dirty="0"/>
           </a:p>
         </p:txBody>
       </p:sp>
@@ -3431,7 +3542,7 @@
 
 <file path=ppt/slides/slide13.xml><?xml version="1.0" encoding="utf-8"?>
 <p:sld xmlns:a="http://schemas.openxmlformats.org/drawingml/2006/main" xmlns:r="http://schemas.openxmlformats.org/officeDocument/2006/relationships" xmlns:p="http://schemas.openxmlformats.org/presentationml/2006/main">
-  <p:cSld>
+  <p:cSld name="Slide 13">
     <p:bg>
       <p:bgPr>
         <a:blipFill dpi="0" rotWithShape="1">
@@ -3475,12 +3586,13 @@
             <a:avLst/>
           </a:prstGeom>
           <a:noFill/>
+          <a:ln/>
         </p:spPr>
         <p:txBody>
           <a:bodyPr wrap="square" rtlCol="0" anchor="ctr"/>
           <a:lstStyle/>
           <a:p>
-            <a:pPr marL="0" indent="0" algn="r">
+            <a:pPr algn="r" indent="0" marL="0">
               <a:buNone/>
             </a:pPr>
             <a:r>
@@ -3488,11 +3600,11 @@
                 <a:solidFill>
                   <a:srgbClr val="8A9099"/>
                 </a:solidFill>
-                <a:latin typeface="微软雅黑" panose="020B0503020204020204" pitchFamily="34" charset="-122"/>
-                <a:ea typeface="微软雅黑" panose="020B0503020204020204" pitchFamily="34" charset="-122"/>
-                <a:cs typeface="微软雅黑" panose="020B0503020204020204" pitchFamily="34" charset="-120"/>
-              </a:rPr>
-              <a:t>13 / 16</a:t>
+                <a:latin typeface="微软雅黑" pitchFamily="34" charset="0"/>
+                <a:ea typeface="微软雅黑" pitchFamily="34" charset="-122"/>
+                <a:cs typeface="微软雅黑" pitchFamily="34" charset="-120"/>
+              </a:rPr>
+              <a:t>13 / 15</a:t>
             </a:r>
             <a:endParaRPr lang="en-US" sz="1000" dirty="0"/>
           </a:p>
@@ -3513,12 +3625,13 @@
             <a:avLst/>
           </a:prstGeom>
           <a:noFill/>
+          <a:ln/>
         </p:spPr>
         <p:txBody>
           <a:bodyPr wrap="square" rtlCol="0" anchor="ctr"/>
           <a:lstStyle/>
           <a:p>
-            <a:pPr marL="0" indent="0" algn="l">
+            <a:pPr algn="l" indent="0" marL="0">
               <a:buNone/>
             </a:pPr>
             <a:r>
@@ -3526,11 +3639,11 @@
                 <a:solidFill>
                   <a:srgbClr val="1F4E9C"/>
                 </a:solidFill>
-                <a:latin typeface="微软雅黑" panose="020B0503020204020204" pitchFamily="34" charset="-122"/>
-                <a:ea typeface="微软雅黑" panose="020B0503020204020204" pitchFamily="34" charset="-122"/>
-                <a:cs typeface="微软雅黑" panose="020B0503020204020204" pitchFamily="34" charset="-120"/>
-              </a:rPr>
-              <a:t>本节小结</a:t>
+                <a:latin typeface="微软雅黑" pitchFamily="34" charset="0"/>
+                <a:ea typeface="微软雅黑" pitchFamily="34" charset="-122"/>
+                <a:cs typeface="微软雅黑" pitchFamily="34" charset="-120"/>
+              </a:rPr>
+              <a:t>课后任务</a:t>
             </a:r>
             <a:endParaRPr lang="en-US" sz="1400" dirty="0"/>
           </a:p>
@@ -3551,12 +3664,13 @@
             <a:avLst/>
           </a:prstGeom>
           <a:noFill/>
+          <a:ln/>
         </p:spPr>
         <p:txBody>
           <a:bodyPr wrap="square" rtlCol="0" anchor="ctr"/>
           <a:lstStyle/>
           <a:p>
-            <a:pPr marL="0" indent="0" algn="l">
+            <a:pPr algn="l" indent="0" marL="0">
               <a:buNone/>
             </a:pPr>
             <a:r>
@@ -3564,11 +3678,11 @@
                 <a:solidFill>
                   <a:srgbClr val="1F2329"/>
                 </a:solidFill>
-                <a:latin typeface="微软雅黑" panose="020B0503020204020204" pitchFamily="34" charset="-122"/>
-                <a:ea typeface="微软雅黑" panose="020B0503020204020204" pitchFamily="34" charset="-122"/>
-                <a:cs typeface="微软雅黑" panose="020B0503020204020204" pitchFamily="34" charset="-120"/>
-              </a:rPr>
-              <a:t>今天就两件事</a:t>
+                <a:latin typeface="微软雅黑" pitchFamily="34" charset="0"/>
+                <a:ea typeface="微软雅黑" pitchFamily="34" charset="-122"/>
+                <a:cs typeface="微软雅黑" pitchFamily="34" charset="-120"/>
+              </a:rPr>
+              <a:t>1道跟练 ＋ 1道模仿</a:t>
             </a:r>
             <a:endParaRPr lang="en-US" sz="2800" dirty="0"/>
           </a:p>
@@ -3589,12 +3703,13 @@
             <a:avLst/>
           </a:prstGeom>
           <a:noFill/>
+          <a:ln/>
         </p:spPr>
         <p:txBody>
           <a:bodyPr wrap="square" rtlCol="0" anchor="t"/>
           <a:lstStyle/>
           <a:p>
-            <a:pPr marL="0" indent="0" algn="l">
+            <a:pPr algn="l" indent="0" marL="0">
               <a:lnSpc>
                 <a:spcPct val="115000"/>
               </a:lnSpc>
@@ -3605,19 +3720,39 @@
                 <a:solidFill>
                   <a:srgbClr val="1F4E9C"/>
                 </a:solidFill>
-                <a:latin typeface="微软雅黑" panose="020B0503020204020204" pitchFamily="34" charset="-122"/>
-                <a:ea typeface="微软雅黑" panose="020B0503020204020204" pitchFamily="34" charset="-122"/>
-                <a:cs typeface="微软雅黑" panose="020B0503020204020204" pitchFamily="34" charset="-120"/>
+                <a:latin typeface="微软雅黑" pitchFamily="34" charset="0"/>
+                <a:ea typeface="微软雅黑" pitchFamily="34" charset="-122"/>
+                <a:cs typeface="微软雅黑" pitchFamily="34" charset="-120"/>
               </a:rPr>
               <a:t>•  </a:t>
             </a:r>
+            <a:pPr algn="l" indent="0" marL="0">
+              <a:lnSpc>
+                <a:spcPct val="115000"/>
+              </a:lnSpc>
+              <a:buNone/>
+            </a:pPr>
+            <a:r>
+              <a:rPr lang="en-US" sz="1800" b="1" dirty="0">
+                <a:solidFill>
+                  <a:srgbClr val="000000"/>
+                </a:solidFill>
+              </a:rPr>
+              <a:t>跟练题</a:t>
+            </a:r>
+            <a:pPr algn="l" indent="0" marL="0">
+              <a:lnSpc>
+                <a:spcPct val="115000"/>
+              </a:lnSpc>
+              <a:buNone/>
+            </a:pPr>
             <a:r>
               <a:rPr lang="en-US" sz="1800" dirty="0">
                 <a:solidFill>
                   <a:srgbClr val="000000"/>
                 </a:solidFill>
               </a:rPr>
-              <a:t>递归三要素：终止条件、缩小规模、返回值；运行过程是调用栈的展开与收回</a:t>
+              <a:t>：手写阶乘的递归版与迭代版，都跑通，再把fact(3)的调用栈画一遍</a:t>
             </a:r>
             <a:endParaRPr lang="en-US" sz="1800" dirty="0"/>
           </a:p>
@@ -3638,12 +3773,13 @@
             <a:avLst/>
           </a:prstGeom>
           <a:noFill/>
+          <a:ln/>
         </p:spPr>
         <p:txBody>
           <a:bodyPr wrap="square" rtlCol="0" anchor="t"/>
           <a:lstStyle/>
           <a:p>
-            <a:pPr marL="0" indent="0" algn="l">
+            <a:pPr algn="l" indent="0" marL="0">
               <a:lnSpc>
                 <a:spcPct val="115000"/>
               </a:lnSpc>
@@ -3654,19 +3790,39 @@
                 <a:solidFill>
                   <a:srgbClr val="1F4E9C"/>
                 </a:solidFill>
-                <a:latin typeface="微软雅黑" panose="020B0503020204020204" pitchFamily="34" charset="-122"/>
-                <a:ea typeface="微软雅黑" panose="020B0503020204020204" pitchFamily="34" charset="-122"/>
-                <a:cs typeface="微软雅黑" panose="020B0503020204020204" pitchFamily="34" charset="-120"/>
+                <a:latin typeface="微软雅黑" pitchFamily="34" charset="0"/>
+                <a:ea typeface="微软雅黑" pitchFamily="34" charset="-122"/>
+                <a:cs typeface="微软雅黑" pitchFamily="34" charset="-120"/>
               </a:rPr>
               <a:t>•  </a:t>
             </a:r>
+            <a:pPr algn="l" indent="0" marL="0">
+              <a:lnSpc>
+                <a:spcPct val="115000"/>
+              </a:lnSpc>
+              <a:buNone/>
+            </a:pPr>
+            <a:r>
+              <a:rPr lang="en-US" sz="1800" b="1" dirty="0">
+                <a:solidFill>
+                  <a:srgbClr val="000000"/>
+                </a:solidFill>
+              </a:rPr>
+              <a:t>模仿题</a:t>
+            </a:r>
+            <a:pPr algn="l" indent="0" marL="0">
+              <a:lnSpc>
+                <a:spcPct val="115000"/>
+              </a:lnSpc>
+              <a:buNone/>
+            </a:pPr>
             <a:r>
               <a:rPr lang="en-US" sz="1800" dirty="0">
                 <a:solidFill>
                   <a:srgbClr val="000000"/>
                 </a:solidFill>
               </a:rPr>
-              <a:t>四样工具的组合：结构体装数组也装指针、malloc造结构体、引用传参改外面、free平账</a:t>
+              <a:t>：malloc三个struct Node，data填1、2、3，用next串起来，遍历打印后全部free</a:t>
             </a:r>
             <a:endParaRPr lang="en-US" sz="1800" dirty="0"/>
           </a:p>
@@ -3681,18 +3837,19 @@
         <p:spPr>
           <a:xfrm>
             <a:off x="896112" y="3680460"/>
-            <a:ext cx="10454335" cy="397764"/>
-          </a:xfrm>
-          <a:prstGeom prst="rect">
-            <a:avLst/>
-          </a:prstGeom>
-          <a:noFill/>
+            <a:ext cx="10454335" cy="740664"/>
+          </a:xfrm>
+          <a:prstGeom prst="rect">
+            <a:avLst/>
+          </a:prstGeom>
+          <a:noFill/>
+          <a:ln/>
         </p:spPr>
         <p:txBody>
           <a:bodyPr wrap="square" rtlCol="0" anchor="t"/>
           <a:lstStyle/>
           <a:p>
-            <a:pPr marL="0" indent="0" algn="l">
+            <a:pPr algn="l" indent="0" marL="0">
               <a:lnSpc>
                 <a:spcPct val="115000"/>
               </a:lnSpc>
@@ -3703,19 +3860,25 @@
                 <a:solidFill>
                   <a:srgbClr val="1F4E9C"/>
                 </a:solidFill>
-                <a:latin typeface="微软雅黑" panose="020B0503020204020204" pitchFamily="34" charset="-122"/>
-                <a:ea typeface="微软雅黑" panose="020B0503020204020204" pitchFamily="34" charset="-122"/>
-                <a:cs typeface="微软雅黑" panose="020B0503020204020204" pitchFamily="34" charset="-120"/>
+                <a:latin typeface="微软雅黑" pitchFamily="34" charset="0"/>
+                <a:ea typeface="微软雅黑" pitchFamily="34" charset="-122"/>
+                <a:cs typeface="微软雅黑" pitchFamily="34" charset="-120"/>
               </a:rPr>
               <a:t>•  </a:t>
             </a:r>
+            <a:pPr algn="l" indent="0" marL="0">
+              <a:lnSpc>
+                <a:spcPct val="115000"/>
+              </a:lnSpc>
+              <a:buNone/>
+            </a:pPr>
             <a:r>
               <a:rPr lang="en-US" sz="1800" dirty="0">
                 <a:solidFill>
                   <a:srgbClr val="000000"/>
                 </a:solidFill>
               </a:rPr>
-              <a:t>一张综合内存图：栈上指针、堆上分开的结构体格、箭头、NULL</a:t>
+              <a:t>要求：合上资料能默写fact递归版、struct Node定义、malloc＋判空＋箭头赋值＋free四步</a:t>
             </a:r>
             <a:endParaRPr lang="en-US" sz="1800" dirty="0"/>
           </a:p>
@@ -3729,19 +3892,20 @@
         </p:nvSpPr>
         <p:spPr>
           <a:xfrm>
-            <a:off x="822960" y="4242816"/>
+            <a:off x="822960" y="4585716"/>
             <a:ext cx="10545775" cy="358902"/>
           </a:xfrm>
           <a:prstGeom prst="rect">
             <a:avLst/>
           </a:prstGeom>
           <a:noFill/>
+          <a:ln/>
         </p:spPr>
         <p:txBody>
           <a:bodyPr wrap="square" rtlCol="0" anchor="t"/>
           <a:lstStyle/>
           <a:p>
-            <a:pPr marL="0" indent="0" algn="l">
+            <a:pPr algn="l" indent="0" marL="0">
               <a:buNone/>
             </a:pPr>
             <a:r>
@@ -3749,11 +3913,11 @@
                 <a:solidFill>
                   <a:srgbClr val="8A9099"/>
                 </a:solidFill>
-                <a:latin typeface="微软雅黑" panose="020B0503020204020204" pitchFamily="34" charset="-122"/>
-                <a:ea typeface="微软雅黑" panose="020B0503020204020204" pitchFamily="34" charset="-122"/>
-                <a:cs typeface="微软雅黑" panose="020B0503020204020204" pitchFamily="34" charset="-120"/>
-              </a:rPr>
-              <a:t>顺序表与链表的正式内容（插删、头结点、查找）在数据结构课讲；强化阶段到此完结</a:t>
+                <a:latin typeface="微软雅黑" pitchFamily="34" charset="0"/>
+                <a:ea typeface="微软雅黑" pitchFamily="34" charset="-122"/>
+                <a:cs typeface="微软雅黑" pitchFamily="34" charset="-120"/>
+              </a:rPr>
+              <a:t>参考答案在本PPT最后两页，课后自行对照</a:t>
             </a:r>
             <a:endParaRPr lang="en-US" sz="1500" dirty="0"/>
           </a:p>
@@ -3769,7 +3933,7 @@
 
 <file path=ppt/slides/slide14.xml><?xml version="1.0" encoding="utf-8"?>
 <p:sld xmlns:a="http://schemas.openxmlformats.org/drawingml/2006/main" xmlns:r="http://schemas.openxmlformats.org/officeDocument/2006/relationships" xmlns:p="http://schemas.openxmlformats.org/presentationml/2006/main">
-  <p:cSld>
+  <p:cSld name="Slide 14">
     <p:bg>
       <p:bgPr>
         <a:blipFill dpi="0" rotWithShape="1">
@@ -3813,12 +3977,13 @@
             <a:avLst/>
           </a:prstGeom>
           <a:noFill/>
+          <a:ln/>
         </p:spPr>
         <p:txBody>
           <a:bodyPr wrap="square" rtlCol="0" anchor="ctr"/>
           <a:lstStyle/>
           <a:p>
-            <a:pPr marL="0" indent="0" algn="r">
+            <a:pPr algn="r" indent="0" marL="0">
               <a:buNone/>
             </a:pPr>
             <a:r>
@@ -3826,11 +3991,11 @@
                 <a:solidFill>
                   <a:srgbClr val="8A9099"/>
                 </a:solidFill>
-                <a:latin typeface="微软雅黑" panose="020B0503020204020204" pitchFamily="34" charset="-122"/>
-                <a:ea typeface="微软雅黑" panose="020B0503020204020204" pitchFamily="34" charset="-122"/>
-                <a:cs typeface="微软雅黑" panose="020B0503020204020204" pitchFamily="34" charset="-120"/>
-              </a:rPr>
-              <a:t>14 / 16</a:t>
+                <a:latin typeface="微软雅黑" pitchFamily="34" charset="0"/>
+                <a:ea typeface="微软雅黑" pitchFamily="34" charset="-122"/>
+                <a:cs typeface="微软雅黑" pitchFamily="34" charset="-120"/>
+              </a:rPr>
+              <a:t>14 / 15</a:t>
             </a:r>
             <a:endParaRPr lang="en-US" sz="1000" dirty="0"/>
           </a:p>
@@ -3851,12 +4016,13 @@
             <a:avLst/>
           </a:prstGeom>
           <a:noFill/>
+          <a:ln/>
         </p:spPr>
         <p:txBody>
           <a:bodyPr wrap="square" rtlCol="0" anchor="ctr"/>
           <a:lstStyle/>
           <a:p>
-            <a:pPr marL="0" indent="0" algn="l">
+            <a:pPr algn="l" indent="0" marL="0">
               <a:buNone/>
             </a:pPr>
             <a:r>
@@ -3864,11 +4030,11 @@
                 <a:solidFill>
                   <a:srgbClr val="1F4E9C"/>
                 </a:solidFill>
-                <a:latin typeface="微软雅黑" panose="020B0503020204020204" pitchFamily="34" charset="-122"/>
-                <a:ea typeface="微软雅黑" panose="020B0503020204020204" pitchFamily="34" charset="-122"/>
-                <a:cs typeface="微软雅黑" panose="020B0503020204020204" pitchFamily="34" charset="-120"/>
-              </a:rPr>
-              <a:t>课后任务</a:t>
+                <a:latin typeface="微软雅黑" pitchFamily="34" charset="0"/>
+                <a:ea typeface="微软雅黑" pitchFamily="34" charset="-122"/>
+                <a:cs typeface="微软雅黑" pitchFamily="34" charset="-120"/>
+              </a:rPr>
+              <a:t>参考答案 · 跟练题</a:t>
             </a:r>
             <a:endParaRPr lang="en-US" sz="1400" dirty="0"/>
           </a:p>
@@ -3889,12 +4055,13 @@
             <a:avLst/>
           </a:prstGeom>
           <a:noFill/>
+          <a:ln/>
         </p:spPr>
         <p:txBody>
           <a:bodyPr wrap="square" rtlCol="0" anchor="ctr"/>
           <a:lstStyle/>
           <a:p>
-            <a:pPr marL="0" indent="0" algn="l">
+            <a:pPr algn="l" indent="0" marL="0">
               <a:buNone/>
             </a:pPr>
             <a:r>
@@ -3902,11 +4069,11 @@
                 <a:solidFill>
                   <a:srgbClr val="1F2329"/>
                 </a:solidFill>
-                <a:latin typeface="微软雅黑" panose="020B0503020204020204" pitchFamily="34" charset="-122"/>
-                <a:ea typeface="微软雅黑" panose="020B0503020204020204" pitchFamily="34" charset="-122"/>
-                <a:cs typeface="微软雅黑" panose="020B0503020204020204" pitchFamily="34" charset="-120"/>
-              </a:rPr>
-              <a:t>1道跟练 ＋ 1道模仿</a:t>
+                <a:latin typeface="微软雅黑" pitchFamily="34" charset="0"/>
+                <a:ea typeface="微软雅黑" pitchFamily="34" charset="-122"/>
+                <a:cs typeface="微软雅黑" pitchFamily="34" charset="-120"/>
+              </a:rPr>
+              <a:t>跟练题参考答案（自行对照）</a:t>
             </a:r>
             <a:endParaRPr lang="en-US" sz="2800" dirty="0"/>
           </a:p>
@@ -3914,25 +4081,114 @@
       </p:sp>
       <p:sp>
         <p:nvSpPr>
-          <p:cNvPr id="5" name="Text 3"/>
-          <p:cNvSpPr/>
-          <p:nvPr/>
-        </p:nvSpPr>
-        <p:spPr>
-          <a:xfrm>
-            <a:off x="896112" y="2395728"/>
+          <p:cNvPr id="5" name="Shape 3"/>
+          <p:cNvSpPr/>
+          <p:nvPr/>
+        </p:nvSpPr>
+        <p:spPr>
+          <a:xfrm>
+            <a:off x="822960" y="2395728"/>
+            <a:ext cx="10545775" cy="1984248"/>
+          </a:xfrm>
+          <a:prstGeom prst="rect">
+            <a:avLst/>
+          </a:prstGeom>
+          <a:solidFill>
+            <a:srgbClr val="F7F9FC"/>
+          </a:solidFill>
+          <a:ln/>
+        </p:spPr>
+      </p:sp>
+      <p:sp>
+        <p:nvSpPr>
+          <p:cNvPr id="6" name="Shape 4"/>
+          <p:cNvSpPr/>
+          <p:nvPr/>
+        </p:nvSpPr>
+        <p:spPr>
+          <a:xfrm>
+            <a:off x="822960" y="2395728"/>
+            <a:ext cx="50292" cy="1984248"/>
+          </a:xfrm>
+          <a:prstGeom prst="rect">
+            <a:avLst/>
+          </a:prstGeom>
+          <a:solidFill>
+            <a:srgbClr val="1F4E9C"/>
+          </a:solidFill>
+          <a:ln/>
+        </p:spPr>
+      </p:sp>
+      <p:sp>
+        <p:nvSpPr>
+          <p:cNvPr id="7" name="Text 5"/>
+          <p:cNvSpPr/>
+          <p:nvPr/>
+        </p:nvSpPr>
+        <p:spPr>
+          <a:xfrm>
+            <a:off x="1078992" y="2505456"/>
+            <a:ext cx="10033711" cy="1764792"/>
+          </a:xfrm>
+          <a:prstGeom prst="rect">
+            <a:avLst/>
+          </a:prstGeom>
+          <a:noFill/>
+          <a:ln/>
+        </p:spPr>
+        <p:txBody>
+          <a:bodyPr wrap="square" rtlCol="0" anchor="t"/>
+          <a:lstStyle/>
+          <a:p>
+            <a:pPr algn="l" indent="0" marL="0">
+              <a:lnSpc>
+                <a:spcPct val="125000"/>
+              </a:lnSpc>
+              <a:buNone/>
+            </a:pPr>
+            <a:r>
+              <a:rPr lang="en-US" sz="1400" dirty="0">
+                <a:solidFill>
+                  <a:srgbClr val="1F2329"/>
+                </a:solidFill>
+                <a:latin typeface="Consolas" pitchFamily="34" charset="0"/>
+                <a:ea typeface="Consolas" pitchFamily="34" charset="-122"/>
+                <a:cs typeface="Consolas" pitchFamily="34" charset="-120"/>
+              </a:rPr>
+              <a:t>// 阶乘递归版（fact(5)=120）
+int fact(int n){
+    if (n == 0) return 1;    // 终止条件
+    return n * fact(n - 1);  // 缩小 + 返回
+}
+// 迭代版：result=1; for(i=1;i&lt;=n;i++) result*=i;
+</a:t>
+            </a:r>
+            <a:endParaRPr lang="en-US" sz="1400" dirty="0"/>
+          </a:p>
+        </p:txBody>
+      </p:sp>
+      <p:sp>
+        <p:nvSpPr>
+          <p:cNvPr id="8" name="Text 6"/>
+          <p:cNvSpPr/>
+          <p:nvPr/>
+        </p:nvSpPr>
+        <p:spPr>
+          <a:xfrm>
+            <a:off x="896112" y="4581144"/>
             <a:ext cx="10454335" cy="397764"/>
           </a:xfrm>
           <a:prstGeom prst="rect">
             <a:avLst/>
           </a:prstGeom>
           <a:noFill/>
+          <a:ln/>
         </p:spPr>
         <p:txBody>
           <a:bodyPr wrap="square" rtlCol="0" anchor="t"/>
           <a:lstStyle/>
           <a:p>
-            <a:pPr marL="0" indent="0" algn="l">
+            <a:pPr algn="l" indent="0" marL="0">
               <a:lnSpc>
                 <a:spcPct val="115000"/>
               </a:lnSpc>
@@ -3943,173 +4199,83 @@
                 <a:solidFill>
                   <a:srgbClr val="1F4E9C"/>
                 </a:solidFill>
-                <a:latin typeface="微软雅黑" panose="020B0503020204020204" pitchFamily="34" charset="-122"/>
-                <a:ea typeface="微软雅黑" panose="020B0503020204020204" pitchFamily="34" charset="-122"/>
-                <a:cs typeface="微软雅黑" panose="020B0503020204020204" pitchFamily="34" charset="-120"/>
+                <a:latin typeface="微软雅黑" pitchFamily="34" charset="0"/>
+                <a:ea typeface="微软雅黑" pitchFamily="34" charset="-122"/>
+                <a:cs typeface="微软雅黑" pitchFamily="34" charset="-120"/>
               </a:rPr>
               <a:t>•  </a:t>
             </a:r>
+            <a:pPr algn="l" indent="0" marL="0">
+              <a:lnSpc>
+                <a:spcPct val="115000"/>
+              </a:lnSpc>
+              <a:buNone/>
+            </a:pPr>
+            <a:r>
+              <a:rPr lang="en-US" sz="1800" dirty="0">
+                <a:solidFill>
+                  <a:srgbClr val="000000"/>
+                </a:solidFill>
+              </a:rPr>
+              <a:t>fact(3)调用栈：3→2→1→0四层展开，返回1、1、2、6</a:t>
+            </a:r>
+            <a:endParaRPr lang="en-US" sz="1800" dirty="0"/>
+          </a:p>
+        </p:txBody>
+      </p:sp>
+      <p:sp>
+        <p:nvSpPr>
+          <p:cNvPr id="9" name="Text 7"/>
+          <p:cNvSpPr/>
+          <p:nvPr/>
+        </p:nvSpPr>
+        <p:spPr>
+          <a:xfrm>
+            <a:off x="896112" y="5052060"/>
+            <a:ext cx="10454335" cy="397764"/>
+          </a:xfrm>
+          <a:prstGeom prst="rect">
+            <a:avLst/>
+          </a:prstGeom>
+          <a:noFill/>
+          <a:ln/>
+        </p:spPr>
+        <p:txBody>
+          <a:bodyPr wrap="square" rtlCol="0" anchor="t"/>
+          <a:lstStyle/>
+          <a:p>
+            <a:pPr algn="l" indent="0" marL="0">
+              <a:lnSpc>
+                <a:spcPct val="115000"/>
+              </a:lnSpc>
+              <a:buNone/>
+            </a:pPr>
             <a:r>
               <a:rPr lang="en-US" sz="1800" b="1" dirty="0">
                 <a:solidFill>
+                  <a:srgbClr val="1F4E9C"/>
+                </a:solidFill>
+                <a:latin typeface="微软雅黑" pitchFamily="34" charset="0"/>
+                <a:ea typeface="微软雅黑" pitchFamily="34" charset="-122"/>
+                <a:cs typeface="微软雅黑" pitchFamily="34" charset="-120"/>
+              </a:rPr>
+              <a:t>•  </a:t>
+            </a:r>
+            <a:pPr algn="l" indent="0" marL="0">
+              <a:lnSpc>
+                <a:spcPct val="115000"/>
+              </a:lnSpc>
+              <a:buNone/>
+            </a:pPr>
+            <a:r>
+              <a:rPr lang="en-US" sz="1800" dirty="0">
+                <a:solidFill>
                   <a:srgbClr val="000000"/>
                 </a:solidFill>
               </a:rPr>
-              <a:t>跟练题</a:t>
-            </a:r>
-            <a:r>
-              <a:rPr lang="en-US" sz="1800" dirty="0">
-                <a:solidFill>
-                  <a:srgbClr val="000000"/>
-                </a:solidFill>
-              </a:rPr>
-              <a:t>：手写阶乘的递归版与迭代版，都跑通，再把fact(3)的调用栈画一遍</a:t>
+              <a:t>迭代版只用result和i两个变量，空间从头到尾不变</a:t>
             </a:r>
             <a:endParaRPr lang="en-US" sz="1800" dirty="0"/>
-          </a:p>
-        </p:txBody>
-      </p:sp>
-      <p:sp>
-        <p:nvSpPr>
-          <p:cNvPr id="6" name="Text 4"/>
-          <p:cNvSpPr/>
-          <p:nvPr/>
-        </p:nvSpPr>
-        <p:spPr>
-          <a:xfrm>
-            <a:off x="896112" y="2866644"/>
-            <a:ext cx="10454335" cy="740664"/>
-          </a:xfrm>
-          <a:prstGeom prst="rect">
-            <a:avLst/>
-          </a:prstGeom>
-          <a:noFill/>
-        </p:spPr>
-        <p:txBody>
-          <a:bodyPr wrap="square" rtlCol="0" anchor="t"/>
-          <a:lstStyle/>
-          <a:p>
-            <a:pPr marL="0" indent="0" algn="l">
-              <a:lnSpc>
-                <a:spcPct val="115000"/>
-              </a:lnSpc>
-              <a:buNone/>
-            </a:pPr>
-            <a:r>
-              <a:rPr lang="en-US" sz="1800" b="1" dirty="0">
-                <a:solidFill>
-                  <a:srgbClr val="1F4E9C"/>
-                </a:solidFill>
-                <a:latin typeface="微软雅黑" panose="020B0503020204020204" pitchFamily="34" charset="-122"/>
-                <a:ea typeface="微软雅黑" panose="020B0503020204020204" pitchFamily="34" charset="-122"/>
-                <a:cs typeface="微软雅黑" panose="020B0503020204020204" pitchFamily="34" charset="-120"/>
-              </a:rPr>
-              <a:t>•  </a:t>
-            </a:r>
-            <a:r>
-              <a:rPr lang="en-US" sz="1800" b="1" dirty="0">
-                <a:solidFill>
-                  <a:srgbClr val="000000"/>
-                </a:solidFill>
-              </a:rPr>
-              <a:t>模仿题</a:t>
-            </a:r>
-            <a:r>
-              <a:rPr lang="en-US" sz="1800" dirty="0">
-                <a:solidFill>
-                  <a:srgbClr val="000000"/>
-                </a:solidFill>
-              </a:rPr>
-              <a:t>：malloc三个struct Node，data填1、2、3，用next串起来，遍历打印后全部free</a:t>
-            </a:r>
-            <a:endParaRPr lang="en-US" sz="1800" dirty="0"/>
-          </a:p>
-        </p:txBody>
-      </p:sp>
-      <p:sp>
-        <p:nvSpPr>
-          <p:cNvPr id="7" name="Text 5"/>
-          <p:cNvSpPr/>
-          <p:nvPr/>
-        </p:nvSpPr>
-        <p:spPr>
-          <a:xfrm>
-            <a:off x="896112" y="3680460"/>
-            <a:ext cx="10454335" cy="740664"/>
-          </a:xfrm>
-          <a:prstGeom prst="rect">
-            <a:avLst/>
-          </a:prstGeom>
-          <a:noFill/>
-        </p:spPr>
-        <p:txBody>
-          <a:bodyPr wrap="square" rtlCol="0" anchor="t"/>
-          <a:lstStyle/>
-          <a:p>
-            <a:pPr marL="0" indent="0" algn="l">
-              <a:lnSpc>
-                <a:spcPct val="115000"/>
-              </a:lnSpc>
-              <a:buNone/>
-            </a:pPr>
-            <a:r>
-              <a:rPr lang="en-US" sz="1800" b="1" dirty="0">
-                <a:solidFill>
-                  <a:srgbClr val="1F4E9C"/>
-                </a:solidFill>
-                <a:latin typeface="微软雅黑" panose="020B0503020204020204" pitchFamily="34" charset="-122"/>
-                <a:ea typeface="微软雅黑" panose="020B0503020204020204" pitchFamily="34" charset="-122"/>
-                <a:cs typeface="微软雅黑" panose="020B0503020204020204" pitchFamily="34" charset="-120"/>
-              </a:rPr>
-              <a:t>•  </a:t>
-            </a:r>
-            <a:r>
-              <a:rPr lang="en-US" sz="1800" dirty="0">
-                <a:solidFill>
-                  <a:srgbClr val="000000"/>
-                </a:solidFill>
-              </a:rPr>
-              <a:t>要求：合上资料能默写fact递归版、struct Node定义、malloc＋判空＋箭头赋值＋free四步</a:t>
-            </a:r>
-            <a:endParaRPr lang="en-US" sz="1800" dirty="0"/>
-          </a:p>
-        </p:txBody>
-      </p:sp>
-      <p:sp>
-        <p:nvSpPr>
-          <p:cNvPr id="8" name="Text 6"/>
-          <p:cNvSpPr/>
-          <p:nvPr/>
-        </p:nvSpPr>
-        <p:spPr>
-          <a:xfrm>
-            <a:off x="822960" y="4585716"/>
-            <a:ext cx="10545775" cy="358902"/>
-          </a:xfrm>
-          <a:prstGeom prst="rect">
-            <a:avLst/>
-          </a:prstGeom>
-          <a:noFill/>
-        </p:spPr>
-        <p:txBody>
-          <a:bodyPr wrap="square" rtlCol="0" anchor="t"/>
-          <a:lstStyle/>
-          <a:p>
-            <a:pPr marL="0" indent="0" algn="l">
-              <a:buNone/>
-            </a:pPr>
-            <a:r>
-              <a:rPr lang="en-US" sz="1500" dirty="0">
-                <a:solidFill>
-                  <a:srgbClr val="8A9099"/>
-                </a:solidFill>
-                <a:latin typeface="微软雅黑" panose="020B0503020204020204" pitchFamily="34" charset="-122"/>
-                <a:ea typeface="微软雅黑" panose="020B0503020204020204" pitchFamily="34" charset="-122"/>
-                <a:cs typeface="微软雅黑" panose="020B0503020204020204" pitchFamily="34" charset="-120"/>
-              </a:rPr>
-              <a:t>参考答案在本PPT最后两页，课后自行对照</a:t>
-            </a:r>
-            <a:endParaRPr lang="en-US" sz="1500" dirty="0"/>
           </a:p>
         </p:txBody>
       </p:sp>
@@ -4123,7 +4289,7 @@
 
 <file path=ppt/slides/slide15.xml><?xml version="1.0" encoding="utf-8"?>
 <p:sld xmlns:a="http://schemas.openxmlformats.org/drawingml/2006/main" xmlns:r="http://schemas.openxmlformats.org/officeDocument/2006/relationships" xmlns:p="http://schemas.openxmlformats.org/presentationml/2006/main">
-  <p:cSld>
+  <p:cSld name="Slide 15">
     <p:bg>
       <p:bgPr>
         <a:blipFill dpi="0" rotWithShape="1">
@@ -4167,12 +4333,13 @@
             <a:avLst/>
           </a:prstGeom>
           <a:noFill/>
+          <a:ln/>
         </p:spPr>
         <p:txBody>
           <a:bodyPr wrap="square" rtlCol="0" anchor="ctr"/>
           <a:lstStyle/>
           <a:p>
-            <a:pPr marL="0" indent="0" algn="r">
+            <a:pPr algn="r" indent="0" marL="0">
               <a:buNone/>
             </a:pPr>
             <a:r>
@@ -4180,11 +4347,11 @@
                 <a:solidFill>
                   <a:srgbClr val="8A9099"/>
                 </a:solidFill>
-                <a:latin typeface="微软雅黑" panose="020B0503020204020204" pitchFamily="34" charset="-122"/>
-                <a:ea typeface="微软雅黑" panose="020B0503020204020204" pitchFamily="34" charset="-122"/>
-                <a:cs typeface="微软雅黑" panose="020B0503020204020204" pitchFamily="34" charset="-120"/>
-              </a:rPr>
-              <a:t>15 / 16</a:t>
+                <a:latin typeface="微软雅黑" pitchFamily="34" charset="0"/>
+                <a:ea typeface="微软雅黑" pitchFamily="34" charset="-122"/>
+                <a:cs typeface="微软雅黑" pitchFamily="34" charset="-120"/>
+              </a:rPr>
+              <a:t>15 / 15</a:t>
             </a:r>
             <a:endParaRPr lang="en-US" sz="1000" dirty="0"/>
           </a:p>
@@ -4205,12 +4372,13 @@
             <a:avLst/>
           </a:prstGeom>
           <a:noFill/>
+          <a:ln/>
         </p:spPr>
         <p:txBody>
           <a:bodyPr wrap="square" rtlCol="0" anchor="ctr"/>
           <a:lstStyle/>
           <a:p>
-            <a:pPr marL="0" indent="0" algn="l">
+            <a:pPr algn="l" indent="0" marL="0">
               <a:buNone/>
             </a:pPr>
             <a:r>
@@ -4218,11 +4386,11 @@
                 <a:solidFill>
                   <a:srgbClr val="1F4E9C"/>
                 </a:solidFill>
-                <a:latin typeface="微软雅黑" panose="020B0503020204020204" pitchFamily="34" charset="-122"/>
-                <a:ea typeface="微软雅黑" panose="020B0503020204020204" pitchFamily="34" charset="-122"/>
-                <a:cs typeface="微软雅黑" panose="020B0503020204020204" pitchFamily="34" charset="-120"/>
-              </a:rPr>
-              <a:t>参考答案 · 跟练题</a:t>
+                <a:latin typeface="微软雅黑" pitchFamily="34" charset="0"/>
+                <a:ea typeface="微软雅黑" pitchFamily="34" charset="-122"/>
+                <a:cs typeface="微软雅黑" pitchFamily="34" charset="-120"/>
+              </a:rPr>
+              <a:t>参考答案 · 模仿题</a:t>
             </a:r>
             <a:endParaRPr lang="en-US" sz="1400" dirty="0"/>
           </a:p>
@@ -4243,12 +4411,13 @@
             <a:avLst/>
           </a:prstGeom>
           <a:noFill/>
+          <a:ln/>
         </p:spPr>
         <p:txBody>
           <a:bodyPr wrap="square" rtlCol="0" anchor="ctr"/>
           <a:lstStyle/>
           <a:p>
-            <a:pPr marL="0" indent="0" algn="l">
+            <a:pPr algn="l" indent="0" marL="0">
               <a:buNone/>
             </a:pPr>
             <a:r>
@@ -4256,11 +4425,11 @@
                 <a:solidFill>
                   <a:srgbClr val="1F2329"/>
                 </a:solidFill>
-                <a:latin typeface="微软雅黑" panose="020B0503020204020204" pitchFamily="34" charset="-122"/>
-                <a:ea typeface="微软雅黑" panose="020B0503020204020204" pitchFamily="34" charset="-122"/>
-                <a:cs typeface="微软雅黑" panose="020B0503020204020204" pitchFamily="34" charset="-120"/>
-              </a:rPr>
-              <a:t>跟练题参考答案（自行对照）</a:t>
+                <a:latin typeface="微软雅黑" pitchFamily="34" charset="0"/>
+                <a:ea typeface="微软雅黑" pitchFamily="34" charset="-122"/>
+                <a:cs typeface="微软雅黑" pitchFamily="34" charset="-120"/>
+              </a:rPr>
+              <a:t>模仿题参考答案（自行对照）</a:t>
             </a:r>
             <a:endParaRPr lang="en-US" sz="2800" dirty="0"/>
           </a:p>
@@ -4275,7 +4444,7 @@
         <p:spPr>
           <a:xfrm>
             <a:off x="822960" y="2395728"/>
-            <a:ext cx="10545775" cy="1984248"/>
+            <a:ext cx="10545775" cy="2253654"/>
           </a:xfrm>
           <a:prstGeom prst="rect">
             <a:avLst/>
@@ -4283,6 +4452,7 @@
           <a:solidFill>
             <a:srgbClr val="F7F9FC"/>
           </a:solidFill>
+          <a:ln/>
         </p:spPr>
       </p:sp>
       <p:sp>
@@ -4294,7 +4464,7 @@
         <p:spPr>
           <a:xfrm>
             <a:off x="822960" y="2395728"/>
-            <a:ext cx="50292" cy="1984248"/>
+            <a:ext cx="50292" cy="2253654"/>
           </a:xfrm>
           <a:prstGeom prst="rect">
             <a:avLst/>
@@ -4302,6 +4472,7 @@
           <a:solidFill>
             <a:srgbClr val="1F4E9C"/>
           </a:solidFill>
+          <a:ln/>
         </p:spPr>
       </p:sp>
       <p:sp>
@@ -4313,41 +4484,44 @@
         <p:spPr>
           <a:xfrm>
             <a:off x="1078992" y="2505456"/>
-            <a:ext cx="10033711" cy="1764792"/>
-          </a:xfrm>
-          <a:prstGeom prst="rect">
-            <a:avLst/>
-          </a:prstGeom>
-          <a:noFill/>
+            <a:ext cx="10033711" cy="2034198"/>
+          </a:xfrm>
+          <a:prstGeom prst="rect">
+            <a:avLst/>
+          </a:prstGeom>
+          <a:noFill/>
+          <a:ln/>
         </p:spPr>
         <p:txBody>
           <a:bodyPr wrap="square" rtlCol="0" anchor="t"/>
           <a:lstStyle/>
           <a:p>
-            <a:pPr marL="0" indent="0" algn="l">
+            <a:pPr algn="l" indent="0" marL="0">
               <a:lnSpc>
                 <a:spcPct val="125000"/>
               </a:lnSpc>
               <a:buNone/>
             </a:pPr>
             <a:r>
-              <a:rPr lang="en-US" sz="1400" dirty="0">
+              <a:rPr lang="en-US" sz="1200" dirty="0">
                 <a:solidFill>
                   <a:srgbClr val="1F2329"/>
                 </a:solidFill>
-                <a:latin typeface="Consolas" panose="020B0609020204030204" pitchFamily="34" charset="0"/>
-                <a:ea typeface="Consolas" panose="020B0609020204030204" pitchFamily="34" charset="-122"/>
-                <a:cs typeface="Consolas" panose="020B0609020204030204" pitchFamily="34" charset="-120"/>
-              </a:rPr>
-              <a:t>// 阶乘递归版（fact(5)=120）
-int fact(int n){
-    if (n == 0) return 1;    // 终止条件
-    return n * fact(n - 1);  // 缩小 + 返回
-}
-// 迭代版：result=1; for(i=1;i&lt;=n;i++) result*=i;
+                <a:latin typeface="Consolas" pitchFamily="34" charset="0"/>
+                <a:ea typeface="Consolas" pitchFamily="34" charset="-122"/>
+                <a:cs typeface="Consolas" pitchFamily="34" charset="-120"/>
+              </a:rPr>
+              <a:t>// 三结点单链表：造、串、走、还
+struct Node { int data; struct Node *next; };
+struct Node *a = (struct Node *)malloc(sizeof(struct Node));
+// b、c同样造法，判空不能省；data分别填1、2、3
+a-&gt;next = b;  b-&gt;next = c;  c-&gt;next = NULL;
+struct Node *p = a;
+while(p != NULL){ printf("%d ", p-&gt;data); p = p-&gt;next; }
+free(a); free(b); free(c);
 </a:t>
             </a:r>
-            <a:endParaRPr lang="en-US" sz="1400" dirty="0"/>
+            <a:endParaRPr lang="en-US" sz="1200" dirty="0"/>
           </a:p>
         </p:txBody>
       </p:sp>
@@ -4359,44 +4533,51 @@
         </p:nvSpPr>
         <p:spPr>
           <a:xfrm>
-            <a:off x="896112" y="4581144"/>
-            <a:ext cx="10454335" cy="397764"/>
-          </a:xfrm>
-          <a:prstGeom prst="rect">
-            <a:avLst/>
-          </a:prstGeom>
-          <a:noFill/>
+            <a:off x="896112" y="4850550"/>
+            <a:ext cx="10454335" cy="359664"/>
+          </a:xfrm>
+          <a:prstGeom prst="rect">
+            <a:avLst/>
+          </a:prstGeom>
+          <a:noFill/>
+          <a:ln/>
         </p:spPr>
         <p:txBody>
           <a:bodyPr wrap="square" rtlCol="0" anchor="t"/>
           <a:lstStyle/>
           <a:p>
-            <a:pPr marL="0" indent="0" algn="l">
-              <a:lnSpc>
-                <a:spcPct val="115000"/>
-              </a:lnSpc>
-              <a:buNone/>
-            </a:pPr>
-            <a:r>
-              <a:rPr lang="en-US" sz="1800" b="1" dirty="0">
+            <a:pPr algn="l" indent="0" marL="0">
+              <a:lnSpc>
+                <a:spcPct val="115000"/>
+              </a:lnSpc>
+              <a:buNone/>
+            </a:pPr>
+            <a:r>
+              <a:rPr lang="en-US" sz="1600" b="1" dirty="0">
                 <a:solidFill>
                   <a:srgbClr val="1F4E9C"/>
                 </a:solidFill>
-                <a:latin typeface="微软雅黑" panose="020B0503020204020204" pitchFamily="34" charset="-122"/>
-                <a:ea typeface="微软雅黑" panose="020B0503020204020204" pitchFamily="34" charset="-122"/>
-                <a:cs typeface="微软雅黑" panose="020B0503020204020204" pitchFamily="34" charset="-120"/>
+                <a:latin typeface="微软雅黑" pitchFamily="34" charset="0"/>
+                <a:ea typeface="微软雅黑" pitchFamily="34" charset="-122"/>
+                <a:cs typeface="微软雅黑" pitchFamily="34" charset="-120"/>
               </a:rPr>
               <a:t>•  </a:t>
             </a:r>
-            <a:r>
-              <a:rPr lang="en-US" sz="1800" dirty="0">
+            <a:pPr algn="l" indent="0" marL="0">
+              <a:lnSpc>
+                <a:spcPct val="115000"/>
+              </a:lnSpc>
+              <a:buNone/>
+            </a:pPr>
+            <a:r>
+              <a:rPr lang="en-US" sz="1600" dirty="0">
                 <a:solidFill>
                   <a:srgbClr val="000000"/>
                 </a:solidFill>
               </a:rPr>
-              <a:t>fact(3)调用栈：3→2→1→0四层展开，返回1、1、2、6</a:t>
-            </a:r>
-            <a:endParaRPr lang="en-US" sz="1800" dirty="0"/>
+              <a:t>输出1 2 3；串联就是前一个的next存后一个的地址，遍历到NULL停</a:t>
+            </a:r>
+            <a:endParaRPr lang="en-US" sz="1600" dirty="0"/>
           </a:p>
         </p:txBody>
       </p:sp>
@@ -4408,44 +4589,107 @@
         </p:nvSpPr>
         <p:spPr>
           <a:xfrm>
-            <a:off x="896112" y="5052060"/>
-            <a:ext cx="10454335" cy="397764"/>
-          </a:xfrm>
-          <a:prstGeom prst="rect">
-            <a:avLst/>
-          </a:prstGeom>
-          <a:noFill/>
+            <a:off x="896112" y="5283366"/>
+            <a:ext cx="10454335" cy="359664"/>
+          </a:xfrm>
+          <a:prstGeom prst="rect">
+            <a:avLst/>
+          </a:prstGeom>
+          <a:noFill/>
+          <a:ln/>
         </p:spPr>
         <p:txBody>
           <a:bodyPr wrap="square" rtlCol="0" anchor="t"/>
           <a:lstStyle/>
           <a:p>
-            <a:pPr marL="0" indent="0" algn="l">
-              <a:lnSpc>
-                <a:spcPct val="115000"/>
-              </a:lnSpc>
-              <a:buNone/>
-            </a:pPr>
-            <a:r>
-              <a:rPr lang="en-US" sz="1800" b="1" dirty="0">
+            <a:pPr algn="l" indent="0" marL="0">
+              <a:lnSpc>
+                <a:spcPct val="115000"/>
+              </a:lnSpc>
+              <a:buNone/>
+            </a:pPr>
+            <a:r>
+              <a:rPr lang="en-US" sz="1600" b="1" dirty="0">
                 <a:solidFill>
                   <a:srgbClr val="1F4E9C"/>
                 </a:solidFill>
-                <a:latin typeface="微软雅黑" panose="020B0503020204020204" pitchFamily="34" charset="-122"/>
-                <a:ea typeface="微软雅黑" panose="020B0503020204020204" pitchFamily="34" charset="-122"/>
-                <a:cs typeface="微软雅黑" panose="020B0503020204020204" pitchFamily="34" charset="-120"/>
+                <a:latin typeface="微软雅黑" pitchFamily="34" charset="0"/>
+                <a:ea typeface="微软雅黑" pitchFamily="34" charset="-122"/>
+                <a:cs typeface="微软雅黑" pitchFamily="34" charset="-120"/>
               </a:rPr>
               <a:t>•  </a:t>
             </a:r>
-            <a:r>
-              <a:rPr lang="en-US" sz="1800" dirty="0">
+            <a:pPr algn="l" indent="0" marL="0">
+              <a:lnSpc>
+                <a:spcPct val="115000"/>
+              </a:lnSpc>
+              <a:buNone/>
+            </a:pPr>
+            <a:r>
+              <a:rPr lang="en-US" sz="1600" dirty="0">
                 <a:solidFill>
                   <a:srgbClr val="000000"/>
                 </a:solidFill>
               </a:rPr>
-              <a:t>迭代版只用result和i两个变量，空间从头到尾不变</a:t>
-            </a:r>
-            <a:endParaRPr lang="en-US" sz="1800" dirty="0"/>
+              <a:t>三个结点都要free，有借有还</a:t>
+            </a:r>
+            <a:endParaRPr lang="en-US" sz="1600" dirty="0"/>
+          </a:p>
+        </p:txBody>
+      </p:sp>
+      <p:sp>
+        <p:nvSpPr>
+          <p:cNvPr id="10" name="Text 8"/>
+          <p:cNvSpPr/>
+          <p:nvPr/>
+        </p:nvSpPr>
+        <p:spPr>
+          <a:xfrm>
+            <a:off x="896112" y="5716182"/>
+            <a:ext cx="10454335" cy="359664"/>
+          </a:xfrm>
+          <a:prstGeom prst="rect">
+            <a:avLst/>
+          </a:prstGeom>
+          <a:noFill/>
+          <a:ln/>
+        </p:spPr>
+        <p:txBody>
+          <a:bodyPr wrap="square" rtlCol="0" anchor="t"/>
+          <a:lstStyle/>
+          <a:p>
+            <a:pPr algn="l" indent="0" marL="0">
+              <a:lnSpc>
+                <a:spcPct val="115000"/>
+              </a:lnSpc>
+              <a:buNone/>
+            </a:pPr>
+            <a:r>
+              <a:rPr lang="en-US" sz="1600" b="1" dirty="0">
+                <a:solidFill>
+                  <a:srgbClr val="1F4E9C"/>
+                </a:solidFill>
+                <a:latin typeface="微软雅黑" pitchFamily="34" charset="0"/>
+                <a:ea typeface="微软雅黑" pitchFamily="34" charset="-122"/>
+                <a:cs typeface="微软雅黑" pitchFamily="34" charset="-120"/>
+              </a:rPr>
+              <a:t>•  </a:t>
+            </a:r>
+            <a:pPr algn="l" indent="0" marL="0">
+              <a:lnSpc>
+                <a:spcPct val="115000"/>
+              </a:lnSpc>
+              <a:buNone/>
+            </a:pPr>
+            <a:r>
+              <a:rPr lang="en-US" sz="1600" dirty="0">
+                <a:solidFill>
+                  <a:srgbClr val="000000"/>
+                </a:solidFill>
+              </a:rPr>
+              <a:t>代码省略头文件与main骨架</a:t>
+            </a:r>
+            <a:endParaRPr lang="en-US" sz="1600" dirty="0"/>
           </a:p>
         </p:txBody>
       </p:sp>
@@ -4457,9 +4701,9 @@
 </p:sld>
 </file>
 
-<file path=ppt/slides/slide16.xml><?xml version="1.0" encoding="utf-8"?>
+<file path=ppt/slides/slide2.xml><?xml version="1.0" encoding="utf-8"?>
 <p:sld xmlns:a="http://schemas.openxmlformats.org/drawingml/2006/main" xmlns:r="http://schemas.openxmlformats.org/officeDocument/2006/relationships" xmlns:p="http://schemas.openxmlformats.org/presentationml/2006/main">
-  <p:cSld>
+  <p:cSld name="Slide 2">
     <p:bg>
       <p:bgPr>
         <a:blipFill dpi="0" rotWithShape="1">
@@ -4503,12 +4747,13 @@
             <a:avLst/>
           </a:prstGeom>
           <a:noFill/>
+          <a:ln/>
         </p:spPr>
         <p:txBody>
           <a:bodyPr wrap="square" rtlCol="0" anchor="ctr"/>
           <a:lstStyle/>
           <a:p>
-            <a:pPr marL="0" indent="0" algn="r">
+            <a:pPr algn="r" indent="0" marL="0">
               <a:buNone/>
             </a:pPr>
             <a:r>
@@ -4516,11 +4761,11 @@
                 <a:solidFill>
                   <a:srgbClr val="8A9099"/>
                 </a:solidFill>
-                <a:latin typeface="微软雅黑" panose="020B0503020204020204" pitchFamily="34" charset="-122"/>
-                <a:ea typeface="微软雅黑" panose="020B0503020204020204" pitchFamily="34" charset="-122"/>
-                <a:cs typeface="微软雅黑" panose="020B0503020204020204" pitchFamily="34" charset="-120"/>
-              </a:rPr>
-              <a:t>16 / 16</a:t>
+                <a:latin typeface="微软雅黑" pitchFamily="34" charset="0"/>
+                <a:ea typeface="微软雅黑" pitchFamily="34" charset="-122"/>
+                <a:cs typeface="微软雅黑" pitchFamily="34" charset="-120"/>
+              </a:rPr>
+              <a:t>2 / 15</a:t>
             </a:r>
             <a:endParaRPr lang="en-US" sz="1000" dirty="0"/>
           </a:p>
@@ -4541,12 +4786,13 @@
             <a:avLst/>
           </a:prstGeom>
           <a:noFill/>
+          <a:ln/>
         </p:spPr>
         <p:txBody>
           <a:bodyPr wrap="square" rtlCol="0" anchor="ctr"/>
           <a:lstStyle/>
           <a:p>
-            <a:pPr marL="0" indent="0" algn="l">
+            <a:pPr algn="l" indent="0" marL="0">
               <a:buNone/>
             </a:pPr>
             <a:r>
@@ -4554,11 +4800,11 @@
                 <a:solidFill>
                   <a:srgbClr val="1F4E9C"/>
                 </a:solidFill>
-                <a:latin typeface="微软雅黑" panose="020B0503020204020204" pitchFamily="34" charset="-122"/>
-                <a:ea typeface="微软雅黑" panose="020B0503020204020204" pitchFamily="34" charset="-122"/>
-                <a:cs typeface="微软雅黑" panose="020B0503020204020204" pitchFamily="34" charset="-120"/>
-              </a:rPr>
-              <a:t>参考答案 · 模仿题</a:t>
+                <a:latin typeface="微软雅黑" pitchFamily="34" charset="0"/>
+                <a:ea typeface="微软雅黑" pitchFamily="34" charset="-122"/>
+                <a:cs typeface="微软雅黑" pitchFamily="34" charset="-120"/>
+              </a:rPr>
+              <a:t>引题</a:t>
             </a:r>
             <a:endParaRPr lang="en-US" sz="1400" dirty="0"/>
           </a:p>
@@ -4579,12 +4825,13 @@
             <a:avLst/>
           </a:prstGeom>
           <a:noFill/>
+          <a:ln/>
         </p:spPr>
         <p:txBody>
           <a:bodyPr wrap="square" rtlCol="0" anchor="ctr"/>
           <a:lstStyle/>
           <a:p>
-            <a:pPr marL="0" indent="0" algn="l">
+            <a:pPr algn="l" indent="0" marL="0">
               <a:buNone/>
             </a:pPr>
             <a:r>
@@ -4592,11 +4839,11 @@
                 <a:solidFill>
                   <a:srgbClr val="1F2329"/>
                 </a:solidFill>
-                <a:latin typeface="微软雅黑" panose="020B0503020204020204" pitchFamily="34" charset="-122"/>
-                <a:ea typeface="微软雅黑" panose="020B0503020204020204" pitchFamily="34" charset="-122"/>
-                <a:cs typeface="微软雅黑" panose="020B0503020204020204" pitchFamily="34" charset="-120"/>
-              </a:rPr>
-              <a:t>模仿题参考答案（自行对照）</a:t>
+                <a:latin typeface="微软雅黑" pitchFamily="34" charset="0"/>
+                <a:ea typeface="微软雅黑" pitchFamily="34" charset="-122"/>
+                <a:cs typeface="微软雅黑" pitchFamily="34" charset="-120"/>
+              </a:rPr>
+              <a:t>函数调用自己，允许吗</a:t>
             </a:r>
             <a:endParaRPr lang="en-US" sz="2800" dirty="0"/>
           </a:p>
@@ -4611,7 +4858,7 @@
         <p:spPr>
           <a:xfrm>
             <a:off x="822960" y="2395728"/>
-            <a:ext cx="10545775" cy="2253654"/>
+            <a:ext cx="10545775" cy="1508760"/>
           </a:xfrm>
           <a:prstGeom prst="rect">
             <a:avLst/>
@@ -4619,6 +4866,7 @@
           <a:solidFill>
             <a:srgbClr val="F7F9FC"/>
           </a:solidFill>
+          <a:ln/>
         </p:spPr>
       </p:sp>
       <p:sp>
@@ -4630,7 +4878,7 @@
         <p:spPr>
           <a:xfrm>
             <a:off x="822960" y="2395728"/>
-            <a:ext cx="50292" cy="2253654"/>
+            <a:ext cx="50292" cy="1508760"/>
           </a:xfrm>
           <a:prstGeom prst="rect">
             <a:avLst/>
@@ -4638,6 +4886,7 @@
           <a:solidFill>
             <a:srgbClr val="1F4E9C"/>
           </a:solidFill>
+          <a:ln/>
         </p:spPr>
       </p:sp>
       <p:sp>
@@ -4649,43 +4898,40 @@
         <p:spPr>
           <a:xfrm>
             <a:off x="1078992" y="2505456"/>
-            <a:ext cx="10033711" cy="2034198"/>
-          </a:xfrm>
-          <a:prstGeom prst="rect">
-            <a:avLst/>
-          </a:prstGeom>
-          <a:noFill/>
+            <a:ext cx="10033711" cy="1289304"/>
+          </a:xfrm>
+          <a:prstGeom prst="rect">
+            <a:avLst/>
+          </a:prstGeom>
+          <a:noFill/>
+          <a:ln/>
         </p:spPr>
         <p:txBody>
           <a:bodyPr wrap="square" rtlCol="0" anchor="t"/>
           <a:lstStyle/>
           <a:p>
-            <a:pPr marL="0" indent="0" algn="l">
+            <a:pPr algn="l" indent="0" marL="0">
               <a:lnSpc>
                 <a:spcPct val="125000"/>
               </a:lnSpc>
               <a:buNone/>
             </a:pPr>
             <a:r>
-              <a:rPr lang="en-US" sz="1200" dirty="0">
+              <a:rPr lang="en-US" sz="1400" dirty="0">
                 <a:solidFill>
                   <a:srgbClr val="1F2329"/>
                 </a:solidFill>
-                <a:latin typeface="Consolas" panose="020B0609020204030204" pitchFamily="34" charset="0"/>
-                <a:ea typeface="Consolas" panose="020B0609020204030204" pitchFamily="34" charset="-122"/>
-                <a:cs typeface="Consolas" panose="020B0609020204030204" pitchFamily="34" charset="-120"/>
-              </a:rPr>
-              <a:t>// 三结点单链表：造、串、走、还
-struct Node { int data; struct Node *next; };
-struct Node *a = (struct Node *)malloc(sizeof(struct Node));
-// b、c同样造法，判空不能省；data分别填1、2、3
-a-&gt;next = b;  b-&gt;next = c;  c-&gt;next = NULL;
-struct Node *p = a;
-while(p != NULL){ printf("%d ", p-&gt;data); p = p-&gt;next; }
-free(a); free(b); free(c);
+                <a:latin typeface="Consolas" pitchFamily="34" charset="0"/>
+                <a:ea typeface="Consolas" pitchFamily="34" charset="-122"/>
+                <a:cs typeface="Consolas" pitchFamily="34" charset="-120"/>
+              </a:rPr>
+              <a:t>void countdown(int n){
+    printf("%d ", n);
+    countdown(n - 1);      // 函数调用自己
+}
 </a:t>
             </a:r>
-            <a:endParaRPr lang="en-US" sz="1200" dirty="0"/>
+            <a:endParaRPr lang="en-US" sz="1400" dirty="0"/>
           </a:p>
         </p:txBody>
       </p:sp>
@@ -4697,44 +4943,79 @@
         </p:nvSpPr>
         <p:spPr>
           <a:xfrm>
-            <a:off x="896112" y="4850550"/>
-            <a:ext cx="10454335" cy="359664"/>
-          </a:xfrm>
-          <a:prstGeom prst="rect">
-            <a:avLst/>
-          </a:prstGeom>
-          <a:noFill/>
+            <a:off x="896112" y="4105656"/>
+            <a:ext cx="10454335" cy="397764"/>
+          </a:xfrm>
+          <a:prstGeom prst="rect">
+            <a:avLst/>
+          </a:prstGeom>
+          <a:noFill/>
+          <a:ln/>
         </p:spPr>
         <p:txBody>
           <a:bodyPr wrap="square" rtlCol="0" anchor="t"/>
           <a:lstStyle/>
           <a:p>
-            <a:pPr marL="0" indent="0" algn="l">
-              <a:lnSpc>
-                <a:spcPct val="115000"/>
-              </a:lnSpc>
-              <a:buNone/>
-            </a:pPr>
-            <a:r>
-              <a:rPr lang="en-US" sz="1600" b="1" dirty="0">
+            <a:pPr algn="l" indent="0" marL="0">
+              <a:lnSpc>
+                <a:spcPct val="115000"/>
+              </a:lnSpc>
+              <a:buNone/>
+            </a:pPr>
+            <a:r>
+              <a:rPr lang="en-US" sz="1800" b="1" dirty="0">
                 <a:solidFill>
                   <a:srgbClr val="1F4E9C"/>
                 </a:solidFill>
-                <a:latin typeface="微软雅黑" panose="020B0503020204020204" pitchFamily="34" charset="-122"/>
-                <a:ea typeface="微软雅黑" panose="020B0503020204020204" pitchFamily="34" charset="-122"/>
-                <a:cs typeface="微软雅黑" panose="020B0503020204020204" pitchFamily="34" charset="-120"/>
+                <a:latin typeface="微软雅黑" pitchFamily="34" charset="0"/>
+                <a:ea typeface="微软雅黑" pitchFamily="34" charset="-122"/>
+                <a:cs typeface="微软雅黑" pitchFamily="34" charset="-120"/>
               </a:rPr>
               <a:t>•  </a:t>
             </a:r>
-            <a:r>
-              <a:rPr lang="en-US" sz="1600" dirty="0">
+            <a:pPr algn="l" indent="0" marL="0">
+              <a:lnSpc>
+                <a:spcPct val="115000"/>
+              </a:lnSpc>
+              <a:buNone/>
+            </a:pPr>
+            <a:r>
+              <a:rPr lang="en-US" sz="1800" dirty="0">
                 <a:solidFill>
                   <a:srgbClr val="000000"/>
                 </a:solidFill>
               </a:rPr>
-              <a:t>输出1 2 3；串联就是前一个的next存后一个的地址，遍历到NULL停</a:t>
-            </a:r>
-            <a:endParaRPr lang="en-US" sz="1600" dirty="0"/>
+              <a:t>允许，这叫</a:t>
+            </a:r>
+            <a:pPr algn="l" indent="0" marL="0">
+              <a:lnSpc>
+                <a:spcPct val="115000"/>
+              </a:lnSpc>
+              <a:buNone/>
+            </a:pPr>
+            <a:r>
+              <a:rPr lang="en-US" sz="1800" b="1" dirty="0">
+                <a:solidFill>
+                  <a:srgbClr val="000000"/>
+                </a:solidFill>
+              </a:rPr>
+              <a:t>递归</a:t>
+            </a:r>
+            <a:pPr algn="l" indent="0" marL="0">
+              <a:lnSpc>
+                <a:spcPct val="115000"/>
+              </a:lnSpc>
+              <a:buNone/>
+            </a:pPr>
+            <a:r>
+              <a:rPr lang="en-US" sz="1800" dirty="0">
+                <a:solidFill>
+                  <a:srgbClr val="000000"/>
+                </a:solidFill>
+              </a:rPr>
+              <a:t>：函数自己调自己</a:t>
+            </a:r>
+            <a:endParaRPr lang="en-US" sz="1800" dirty="0"/>
           </a:p>
         </p:txBody>
       </p:sp>
@@ -4746,44 +5027,51 @@
         </p:nvSpPr>
         <p:spPr>
           <a:xfrm>
-            <a:off x="896112" y="5283366"/>
-            <a:ext cx="10454335" cy="359664"/>
-          </a:xfrm>
-          <a:prstGeom prst="rect">
-            <a:avLst/>
-          </a:prstGeom>
-          <a:noFill/>
+            <a:off x="896112" y="4576572"/>
+            <a:ext cx="10454335" cy="397764"/>
+          </a:xfrm>
+          <a:prstGeom prst="rect">
+            <a:avLst/>
+          </a:prstGeom>
+          <a:noFill/>
+          <a:ln/>
         </p:spPr>
         <p:txBody>
           <a:bodyPr wrap="square" rtlCol="0" anchor="t"/>
           <a:lstStyle/>
           <a:p>
-            <a:pPr marL="0" indent="0" algn="l">
-              <a:lnSpc>
-                <a:spcPct val="115000"/>
-              </a:lnSpc>
-              <a:buNone/>
-            </a:pPr>
-            <a:r>
-              <a:rPr lang="en-US" sz="1600" b="1" dirty="0">
+            <a:pPr algn="l" indent="0" marL="0">
+              <a:lnSpc>
+                <a:spcPct val="115000"/>
+              </a:lnSpc>
+              <a:buNone/>
+            </a:pPr>
+            <a:r>
+              <a:rPr lang="en-US" sz="1800" b="1" dirty="0">
                 <a:solidFill>
                   <a:srgbClr val="1F4E9C"/>
                 </a:solidFill>
-                <a:latin typeface="微软雅黑" panose="020B0503020204020204" pitchFamily="34" charset="-122"/>
-                <a:ea typeface="微软雅黑" panose="020B0503020204020204" pitchFamily="34" charset="-122"/>
-                <a:cs typeface="微软雅黑" panose="020B0503020204020204" pitchFamily="34" charset="-120"/>
+                <a:latin typeface="微软雅黑" pitchFamily="34" charset="0"/>
+                <a:ea typeface="微软雅黑" pitchFamily="34" charset="-122"/>
+                <a:cs typeface="微软雅黑" pitchFamily="34" charset="-120"/>
               </a:rPr>
               <a:t>•  </a:t>
             </a:r>
-            <a:r>
-              <a:rPr lang="en-US" sz="1600" dirty="0">
+            <a:pPr algn="l" indent="0" marL="0">
+              <a:lnSpc>
+                <a:spcPct val="115000"/>
+              </a:lnSpc>
+              <a:buNone/>
+            </a:pPr>
+            <a:r>
+              <a:rPr lang="en-US" sz="1800" dirty="0">
                 <a:solidFill>
                   <a:srgbClr val="000000"/>
                 </a:solidFill>
               </a:rPr>
-              <a:t>三个结点都要free，有借有还</a:t>
-            </a:r>
-            <a:endParaRPr lang="en-US" sz="1600" dirty="0"/>
+              <a:t>但这段代码有问题：它永远停不下来</a:t>
+            </a:r>
+            <a:endParaRPr lang="en-US" sz="1800" dirty="0"/>
           </a:p>
         </p:txBody>
       </p:sp>
@@ -4795,44 +5083,51 @@
         </p:nvSpPr>
         <p:spPr>
           <a:xfrm>
-            <a:off x="896112" y="5716182"/>
-            <a:ext cx="10454335" cy="359664"/>
-          </a:xfrm>
-          <a:prstGeom prst="rect">
-            <a:avLst/>
-          </a:prstGeom>
-          <a:noFill/>
+            <a:off x="896112" y="5047488"/>
+            <a:ext cx="10454335" cy="397764"/>
+          </a:xfrm>
+          <a:prstGeom prst="rect">
+            <a:avLst/>
+          </a:prstGeom>
+          <a:noFill/>
+          <a:ln/>
         </p:spPr>
         <p:txBody>
           <a:bodyPr wrap="square" rtlCol="0" anchor="t"/>
           <a:lstStyle/>
           <a:p>
-            <a:pPr marL="0" indent="0" algn="l">
-              <a:lnSpc>
-                <a:spcPct val="115000"/>
-              </a:lnSpc>
-              <a:buNone/>
-            </a:pPr>
-            <a:r>
-              <a:rPr lang="en-US" sz="1600" b="1" dirty="0">
+            <a:pPr algn="l" indent="0" marL="0">
+              <a:lnSpc>
+                <a:spcPct val="115000"/>
+              </a:lnSpc>
+              <a:buNone/>
+            </a:pPr>
+            <a:r>
+              <a:rPr lang="en-US" sz="1800" b="1" dirty="0">
                 <a:solidFill>
                   <a:srgbClr val="1F4E9C"/>
                 </a:solidFill>
-                <a:latin typeface="微软雅黑" panose="020B0503020204020204" pitchFamily="34" charset="-122"/>
-                <a:ea typeface="微软雅黑" panose="020B0503020204020204" pitchFamily="34" charset="-122"/>
-                <a:cs typeface="微软雅黑" panose="020B0503020204020204" pitchFamily="34" charset="-120"/>
+                <a:latin typeface="微软雅黑" pitchFamily="34" charset="0"/>
+                <a:ea typeface="微软雅黑" pitchFamily="34" charset="-122"/>
+                <a:cs typeface="微软雅黑" pitchFamily="34" charset="-120"/>
               </a:rPr>
               <a:t>•  </a:t>
             </a:r>
-            <a:r>
-              <a:rPr lang="en-US" sz="1600" dirty="0">
+            <a:pPr algn="l" indent="0" marL="0">
+              <a:lnSpc>
+                <a:spcPct val="115000"/>
+              </a:lnSpc>
+              <a:buNone/>
+            </a:pPr>
+            <a:r>
+              <a:rPr lang="en-US" sz="1800" dirty="0">
                 <a:solidFill>
                   <a:srgbClr val="000000"/>
                 </a:solidFill>
               </a:rPr>
-              <a:t>代码省略头文件与main骨架</a:t>
-            </a:r>
-            <a:endParaRPr lang="en-US" sz="1600" dirty="0"/>
+              <a:t>本节目标：学会递归的三要素，看懂调用栈，最后从零手写顺序表和单链表</a:t>
+            </a:r>
+            <a:endParaRPr lang="en-US" sz="1800" dirty="0"/>
           </a:p>
         </p:txBody>
       </p:sp>
@@ -4844,9 +5139,9 @@
 </p:sld>
 </file>
 
-<file path=ppt/slides/slide2.xml><?xml version="1.0" encoding="utf-8"?>
+<file path=ppt/slides/slide3.xml><?xml version="1.0" encoding="utf-8"?>
 <p:sld xmlns:a="http://schemas.openxmlformats.org/drawingml/2006/main" xmlns:r="http://schemas.openxmlformats.org/officeDocument/2006/relationships" xmlns:p="http://schemas.openxmlformats.org/presentationml/2006/main">
-  <p:cSld>
+  <p:cSld name="Slide 3">
     <p:bg>
       <p:bgPr>
         <a:blipFill dpi="0" rotWithShape="1">
@@ -4890,12 +5185,13 @@
             <a:avLst/>
           </a:prstGeom>
           <a:noFill/>
+          <a:ln/>
         </p:spPr>
         <p:txBody>
           <a:bodyPr wrap="square" rtlCol="0" anchor="ctr"/>
           <a:lstStyle/>
           <a:p>
-            <a:pPr marL="0" indent="0" algn="r">
+            <a:pPr algn="r" indent="0" marL="0">
               <a:buNone/>
             </a:pPr>
             <a:r>
@@ -4903,11 +5199,11 @@
                 <a:solidFill>
                   <a:srgbClr val="8A9099"/>
                 </a:solidFill>
-                <a:latin typeface="微软雅黑" panose="020B0503020204020204" pitchFamily="34" charset="-122"/>
-                <a:ea typeface="微软雅黑" panose="020B0503020204020204" pitchFamily="34" charset="-122"/>
-                <a:cs typeface="微软雅黑" panose="020B0503020204020204" pitchFamily="34" charset="-120"/>
-              </a:rPr>
-              <a:t>2 / 16</a:t>
+                <a:latin typeface="微软雅黑" pitchFamily="34" charset="0"/>
+                <a:ea typeface="微软雅黑" pitchFamily="34" charset="-122"/>
+                <a:cs typeface="微软雅黑" pitchFamily="34" charset="-120"/>
+              </a:rPr>
+              <a:t>3 / 15</a:t>
             </a:r>
             <a:endParaRPr lang="en-US" sz="1000" dirty="0"/>
           </a:p>
@@ -4928,12 +5224,13 @@
             <a:avLst/>
           </a:prstGeom>
           <a:noFill/>
+          <a:ln/>
         </p:spPr>
         <p:txBody>
           <a:bodyPr wrap="square" rtlCol="0" anchor="ctr"/>
           <a:lstStyle/>
           <a:p>
-            <a:pPr marL="0" indent="0" algn="l">
+            <a:pPr algn="l" indent="0" marL="0">
               <a:buNone/>
             </a:pPr>
             <a:r>
@@ -4941,11 +5238,11 @@
                 <a:solidFill>
                   <a:srgbClr val="1F4E9C"/>
                 </a:solidFill>
-                <a:latin typeface="微软雅黑" panose="020B0503020204020204" pitchFamily="34" charset="-122"/>
-                <a:ea typeface="微软雅黑" panose="020B0503020204020204" pitchFamily="34" charset="-122"/>
-                <a:cs typeface="微软雅黑" panose="020B0503020204020204" pitchFamily="34" charset="-120"/>
-              </a:rPr>
-              <a:t>引题</a:t>
+                <a:latin typeface="微软雅黑" pitchFamily="34" charset="0"/>
+                <a:ea typeface="微软雅黑" pitchFamily="34" charset="-122"/>
+                <a:cs typeface="微软雅黑" pitchFamily="34" charset="-120"/>
+              </a:rPr>
+              <a:t>递归三要素</a:t>
             </a:r>
             <a:endParaRPr lang="en-US" sz="1400" dirty="0"/>
           </a:p>
@@ -4966,12 +5263,13 @@
             <a:avLst/>
           </a:prstGeom>
           <a:noFill/>
+          <a:ln/>
         </p:spPr>
         <p:txBody>
           <a:bodyPr wrap="square" rtlCol="0" anchor="ctr"/>
           <a:lstStyle/>
           <a:p>
-            <a:pPr marL="0" indent="0" algn="l">
+            <a:pPr algn="l" indent="0" marL="0">
               <a:buNone/>
             </a:pPr>
             <a:r>
@@ -4979,11 +5277,11 @@
                 <a:solidFill>
                   <a:srgbClr val="1F2329"/>
                 </a:solidFill>
-                <a:latin typeface="微软雅黑" panose="020B0503020204020204" pitchFamily="34" charset="-122"/>
-                <a:ea typeface="微软雅黑" panose="020B0503020204020204" pitchFamily="34" charset="-122"/>
-                <a:cs typeface="微软雅黑" panose="020B0503020204020204" pitchFamily="34" charset="-120"/>
-              </a:rPr>
-              <a:t>函数调用自己，允许吗</a:t>
+                <a:latin typeface="微软雅黑" pitchFamily="34" charset="0"/>
+                <a:ea typeface="微软雅黑" pitchFamily="34" charset="-122"/>
+                <a:cs typeface="微软雅黑" pitchFamily="34" charset="-120"/>
+              </a:rPr>
+              <a:t>递归三要素：终止、缩小、返回</a:t>
             </a:r>
             <a:endParaRPr lang="en-US" sz="2800" dirty="0"/>
           </a:p>
@@ -5006,6 +5304,7 @@
           <a:solidFill>
             <a:srgbClr val="F7F9FC"/>
           </a:solidFill>
+          <a:ln/>
         </p:spPr>
       </p:sp>
       <p:sp>
@@ -5025,6 +5324,7 @@
           <a:solidFill>
             <a:srgbClr val="1F4E9C"/>
           </a:solidFill>
+          <a:ln/>
         </p:spPr>
       </p:sp>
       <p:sp>
@@ -5042,12 +5342,13 @@
             <a:avLst/>
           </a:prstGeom>
           <a:noFill/>
+          <a:ln/>
         </p:spPr>
         <p:txBody>
           <a:bodyPr wrap="square" rtlCol="0" anchor="t"/>
           <a:lstStyle/>
           <a:p>
-            <a:pPr marL="0" indent="0" algn="l">
+            <a:pPr algn="l" indent="0" marL="0">
               <a:lnSpc>
                 <a:spcPct val="125000"/>
               </a:lnSpc>
@@ -5058,13 +5359,13 @@
                 <a:solidFill>
                   <a:srgbClr val="1F2329"/>
                 </a:solidFill>
-                <a:latin typeface="Consolas" panose="020B0609020204030204" pitchFamily="34" charset="0"/>
-                <a:ea typeface="Consolas" panose="020B0609020204030204" pitchFamily="34" charset="-122"/>
-                <a:cs typeface="Consolas" panose="020B0609020204030204" pitchFamily="34" charset="-120"/>
-              </a:rPr>
-              <a:t>void countdown(int n){
-    printf("%d ", n);
-    countdown(n - 1);      // 函数调用自己
+                <a:latin typeface="Consolas" pitchFamily="34" charset="0"/>
+                <a:ea typeface="Consolas" pitchFamily="34" charset="-122"/>
+                <a:cs typeface="Consolas" pitchFamily="34" charset="-120"/>
+              </a:rPr>
+              <a:t>int fact(int n){           // 求n的阶乘
+    if (n == 0) return 1;  // ① 终止条件
+    return n * fact(n - 1);// ② 缩小规模 ③ 返回结果
 }
 </a:t>
             </a:r>
@@ -5087,12 +5388,13 @@
             <a:avLst/>
           </a:prstGeom>
           <a:noFill/>
+          <a:ln/>
         </p:spPr>
         <p:txBody>
           <a:bodyPr wrap="square" rtlCol="0" anchor="t"/>
           <a:lstStyle/>
           <a:p>
-            <a:pPr marL="0" indent="0" algn="l">
+            <a:pPr algn="l" indent="0" marL="0">
               <a:lnSpc>
                 <a:spcPct val="115000"/>
               </a:lnSpc>
@@ -5103,35 +5405,25 @@
                 <a:solidFill>
                   <a:srgbClr val="1F4E9C"/>
                 </a:solidFill>
-                <a:latin typeface="微软雅黑" panose="020B0503020204020204" pitchFamily="34" charset="-122"/>
-                <a:ea typeface="微软雅黑" panose="020B0503020204020204" pitchFamily="34" charset="-122"/>
-                <a:cs typeface="微软雅黑" panose="020B0503020204020204" pitchFamily="34" charset="-120"/>
+                <a:latin typeface="微软雅黑" pitchFamily="34" charset="0"/>
+                <a:ea typeface="微软雅黑" pitchFamily="34" charset="-122"/>
+                <a:cs typeface="微软雅黑" pitchFamily="34" charset="-120"/>
               </a:rPr>
               <a:t>•  </a:t>
             </a:r>
+            <a:pPr algn="l" indent="0" marL="0">
+              <a:lnSpc>
+                <a:spcPct val="115000"/>
+              </a:lnSpc>
+              <a:buNone/>
+            </a:pPr>
             <a:r>
               <a:rPr lang="en-US" sz="1800" dirty="0">
                 <a:solidFill>
                   <a:srgbClr val="000000"/>
                 </a:solidFill>
               </a:rPr>
-              <a:t>允许，这叫</a:t>
-            </a:r>
-            <a:r>
-              <a:rPr lang="en-US" sz="1800" b="1" dirty="0">
-                <a:solidFill>
-                  <a:srgbClr val="000000"/>
-                </a:solidFill>
-              </a:rPr>
-              <a:t>递归</a:t>
-            </a:r>
-            <a:r>
-              <a:rPr lang="en-US" sz="1800" dirty="0">
-                <a:solidFill>
-                  <a:srgbClr val="000000"/>
-                </a:solidFill>
-              </a:rPr>
-              <a:t>：函数自己调自己</a:t>
+              <a:t>终止条件：什么时候不再调用自己，没有它就是无底洞</a:t>
             </a:r>
             <a:endParaRPr lang="en-US" sz="1800" dirty="0"/>
           </a:p>
@@ -5152,12 +5444,13 @@
             <a:avLst/>
           </a:prstGeom>
           <a:noFill/>
+          <a:ln/>
         </p:spPr>
         <p:txBody>
           <a:bodyPr wrap="square" rtlCol="0" anchor="t"/>
           <a:lstStyle/>
           <a:p>
-            <a:pPr marL="0" indent="0" algn="l">
+            <a:pPr algn="l" indent="0" marL="0">
               <a:lnSpc>
                 <a:spcPct val="115000"/>
               </a:lnSpc>
@@ -5168,19 +5461,25 @@
                 <a:solidFill>
                   <a:srgbClr val="1F4E9C"/>
                 </a:solidFill>
-                <a:latin typeface="微软雅黑" panose="020B0503020204020204" pitchFamily="34" charset="-122"/>
-                <a:ea typeface="微软雅黑" panose="020B0503020204020204" pitchFamily="34" charset="-122"/>
-                <a:cs typeface="微软雅黑" panose="020B0503020204020204" pitchFamily="34" charset="-120"/>
+                <a:latin typeface="微软雅黑" pitchFamily="34" charset="0"/>
+                <a:ea typeface="微软雅黑" pitchFamily="34" charset="-122"/>
+                <a:cs typeface="微软雅黑" pitchFamily="34" charset="-120"/>
               </a:rPr>
               <a:t>•  </a:t>
             </a:r>
+            <a:pPr algn="l" indent="0" marL="0">
+              <a:lnSpc>
+                <a:spcPct val="115000"/>
+              </a:lnSpc>
+              <a:buNone/>
+            </a:pPr>
             <a:r>
               <a:rPr lang="en-US" sz="1800" dirty="0">
                 <a:solidFill>
                   <a:srgbClr val="000000"/>
                 </a:solidFill>
               </a:rPr>
-              <a:t>但这段代码有问题：它永远停不下来</a:t>
+              <a:t>缩小规模：每次调用都要离终止更近一步</a:t>
             </a:r>
             <a:endParaRPr lang="en-US" sz="1800" dirty="0"/>
           </a:p>
@@ -5201,12 +5500,13 @@
             <a:avLst/>
           </a:prstGeom>
           <a:noFill/>
+          <a:ln/>
         </p:spPr>
         <p:txBody>
           <a:bodyPr wrap="square" rtlCol="0" anchor="t"/>
           <a:lstStyle/>
           <a:p>
-            <a:pPr marL="0" indent="0" algn="l">
+            <a:pPr algn="l" indent="0" marL="0">
               <a:lnSpc>
                 <a:spcPct val="115000"/>
               </a:lnSpc>
@@ -5217,19 +5517,25 @@
                 <a:solidFill>
                   <a:srgbClr val="1F4E9C"/>
                 </a:solidFill>
-                <a:latin typeface="微软雅黑" panose="020B0503020204020204" pitchFamily="34" charset="-122"/>
-                <a:ea typeface="微软雅黑" panose="020B0503020204020204" pitchFamily="34" charset="-122"/>
-                <a:cs typeface="微软雅黑" panose="020B0503020204020204" pitchFamily="34" charset="-120"/>
+                <a:latin typeface="微软雅黑" pitchFamily="34" charset="0"/>
+                <a:ea typeface="微软雅黑" pitchFamily="34" charset="-122"/>
+                <a:cs typeface="微软雅黑" pitchFamily="34" charset="-120"/>
               </a:rPr>
               <a:t>•  </a:t>
             </a:r>
+            <a:pPr algn="l" indent="0" marL="0">
+              <a:lnSpc>
+                <a:spcPct val="115000"/>
+              </a:lnSpc>
+              <a:buNone/>
+            </a:pPr>
             <a:r>
               <a:rPr lang="en-US" sz="1800" dirty="0">
                 <a:solidFill>
                   <a:srgbClr val="000000"/>
                 </a:solidFill>
               </a:rPr>
-              <a:t>本节目标：学会递归的三要素，看懂调用栈，最后从零手写顺序表和单链表</a:t>
+              <a:t>返回值：把自己这层的结果交回给上一层</a:t>
             </a:r>
             <a:endParaRPr lang="en-US" sz="1800" dirty="0"/>
           </a:p>
@@ -5243,9 +5549,9 @@
 </p:sld>
 </file>
 
-<file path=ppt/slides/slide3.xml><?xml version="1.0" encoding="utf-8"?>
+<file path=ppt/slides/slide4.xml><?xml version="1.0" encoding="utf-8"?>
 <p:sld xmlns:a="http://schemas.openxmlformats.org/drawingml/2006/main" xmlns:r="http://schemas.openxmlformats.org/officeDocument/2006/relationships" xmlns:p="http://schemas.openxmlformats.org/presentationml/2006/main">
-  <p:cSld>
+  <p:cSld name="Slide 4">
     <p:bg>
       <p:bgPr>
         <a:blipFill dpi="0" rotWithShape="1">
@@ -5289,12 +5595,13 @@
             <a:avLst/>
           </a:prstGeom>
           <a:noFill/>
+          <a:ln/>
         </p:spPr>
         <p:txBody>
           <a:bodyPr wrap="square" rtlCol="0" anchor="ctr"/>
           <a:lstStyle/>
           <a:p>
-            <a:pPr marL="0" indent="0" algn="r">
+            <a:pPr algn="r" indent="0" marL="0">
               <a:buNone/>
             </a:pPr>
             <a:r>
@@ -5302,11 +5609,11 @@
                 <a:solidFill>
                   <a:srgbClr val="8A9099"/>
                 </a:solidFill>
-                <a:latin typeface="微软雅黑" panose="020B0503020204020204" pitchFamily="34" charset="-122"/>
-                <a:ea typeface="微软雅黑" panose="020B0503020204020204" pitchFamily="34" charset="-122"/>
-                <a:cs typeface="微软雅黑" panose="020B0503020204020204" pitchFamily="34" charset="-120"/>
-              </a:rPr>
-              <a:t>3 / 16</a:t>
+                <a:latin typeface="微软雅黑" pitchFamily="34" charset="0"/>
+                <a:ea typeface="微软雅黑" pitchFamily="34" charset="-122"/>
+                <a:cs typeface="微软雅黑" pitchFamily="34" charset="-120"/>
+              </a:rPr>
+              <a:t>4 / 15</a:t>
             </a:r>
             <a:endParaRPr lang="en-US" sz="1000" dirty="0"/>
           </a:p>
@@ -5327,12 +5634,13 @@
             <a:avLst/>
           </a:prstGeom>
           <a:noFill/>
+          <a:ln/>
         </p:spPr>
         <p:txBody>
           <a:bodyPr wrap="square" rtlCol="0" anchor="ctr"/>
           <a:lstStyle/>
           <a:p>
-            <a:pPr marL="0" indent="0" algn="l">
+            <a:pPr algn="l" indent="0" marL="0">
               <a:buNone/>
             </a:pPr>
             <a:r>
@@ -5340,11 +5648,11 @@
                 <a:solidFill>
                   <a:srgbClr val="1F4E9C"/>
                 </a:solidFill>
-                <a:latin typeface="微软雅黑" panose="020B0503020204020204" pitchFamily="34" charset="-122"/>
-                <a:ea typeface="微软雅黑" panose="020B0503020204020204" pitchFamily="34" charset="-122"/>
-                <a:cs typeface="微软雅黑" panose="020B0503020204020204" pitchFamily="34" charset="-120"/>
-              </a:rPr>
-              <a:t>递归三要素</a:t>
+                <a:latin typeface="微软雅黑" pitchFamily="34" charset="0"/>
+                <a:ea typeface="微软雅黑" pitchFamily="34" charset="-122"/>
+                <a:cs typeface="微软雅黑" pitchFamily="34" charset="-120"/>
+              </a:rPr>
+              <a:t>调用栈</a:t>
             </a:r>
             <a:endParaRPr lang="en-US" sz="1400" dirty="0"/>
           </a:p>
@@ -5365,12 +5673,13 @@
             <a:avLst/>
           </a:prstGeom>
           <a:noFill/>
+          <a:ln/>
         </p:spPr>
         <p:txBody>
           <a:bodyPr wrap="square" rtlCol="0" anchor="ctr"/>
           <a:lstStyle/>
           <a:p>
-            <a:pPr marL="0" indent="0" algn="l">
+            <a:pPr algn="l" indent="0" marL="0">
               <a:buNone/>
             </a:pPr>
             <a:r>
@@ -5378,11 +5687,11 @@
                 <a:solidFill>
                   <a:srgbClr val="1F2329"/>
                 </a:solidFill>
-                <a:latin typeface="微软雅黑" panose="020B0503020204020204" pitchFamily="34" charset="-122"/>
-                <a:ea typeface="微软雅黑" panose="020B0503020204020204" pitchFamily="34" charset="-122"/>
-                <a:cs typeface="微软雅黑" panose="020B0503020204020204" pitchFamily="34" charset="-120"/>
-              </a:rPr>
-              <a:t>递归三要素：终止、缩小、返回</a:t>
+                <a:latin typeface="微软雅黑" pitchFamily="34" charset="0"/>
+                <a:ea typeface="微软雅黑" pitchFamily="34" charset="-122"/>
+                <a:cs typeface="微软雅黑" pitchFamily="34" charset="-120"/>
+              </a:rPr>
+              <a:t>递归怎么运行：一层一层展开，再一层一层收回</a:t>
             </a:r>
             <a:endParaRPr lang="en-US" sz="2800" dirty="0"/>
           </a:p>
@@ -5390,41 +5699,115 @@
       </p:sp>
       <p:sp>
         <p:nvSpPr>
-          <p:cNvPr id="5" name="Shape 3"/>
-          <p:cNvSpPr/>
-          <p:nvPr/>
-        </p:nvSpPr>
-        <p:spPr>
-          <a:xfrm>
-            <a:off x="822960" y="2395728"/>
-            <a:ext cx="10545775" cy="1508760"/>
-          </a:xfrm>
-          <a:prstGeom prst="rect">
-            <a:avLst/>
-          </a:prstGeom>
-          <a:solidFill>
-            <a:srgbClr val="F7F9FC"/>
-          </a:solidFill>
-        </p:spPr>
-      </p:sp>
-      <p:sp>
-        <p:nvSpPr>
-          <p:cNvPr id="6" name="Shape 4"/>
-          <p:cNvSpPr/>
-          <p:nvPr/>
-        </p:nvSpPr>
-        <p:spPr>
-          <a:xfrm>
-            <a:off x="822960" y="2395728"/>
-            <a:ext cx="50292" cy="1508760"/>
-          </a:xfrm>
-          <a:prstGeom prst="rect">
-            <a:avLst/>
-          </a:prstGeom>
-          <a:solidFill>
-            <a:srgbClr val="1F4E9C"/>
-          </a:solidFill>
-        </p:spPr>
+          <p:cNvPr id="5" name="Text 3"/>
+          <p:cNvSpPr/>
+          <p:nvPr/>
+        </p:nvSpPr>
+        <p:spPr>
+          <a:xfrm>
+            <a:off x="896112" y="2395728"/>
+            <a:ext cx="10454335" cy="740664"/>
+          </a:xfrm>
+          <a:prstGeom prst="rect">
+            <a:avLst/>
+          </a:prstGeom>
+          <a:noFill/>
+          <a:ln/>
+        </p:spPr>
+        <p:txBody>
+          <a:bodyPr wrap="square" rtlCol="0" anchor="t"/>
+          <a:lstStyle/>
+          <a:p>
+            <a:pPr algn="l" indent="0" marL="0">
+              <a:lnSpc>
+                <a:spcPct val="115000"/>
+              </a:lnSpc>
+              <a:buNone/>
+            </a:pPr>
+            <a:r>
+              <a:rPr lang="en-US" sz="1800" b="1" dirty="0">
+                <a:solidFill>
+                  <a:srgbClr val="1F4E9C"/>
+                </a:solidFill>
+                <a:latin typeface="微软雅黑" pitchFamily="34" charset="0"/>
+                <a:ea typeface="微软雅黑" pitchFamily="34" charset="-122"/>
+                <a:cs typeface="微软雅黑" pitchFamily="34" charset="-120"/>
+              </a:rPr>
+              <a:t>•  </a:t>
+            </a:r>
+            <a:pPr algn="l" indent="0" marL="0">
+              <a:lnSpc>
+                <a:spcPct val="115000"/>
+              </a:lnSpc>
+              <a:buNone/>
+            </a:pPr>
+            <a:r>
+              <a:rPr lang="en-US" sz="1800" dirty="0">
+                <a:solidFill>
+                  <a:srgbClr val="000000"/>
+                </a:solidFill>
+              </a:rPr>
+              <a:t>fact(3)调fact(2)，fact(2)调fact(1)，一路到fact(0)触发终止</a:t>
+            </a:r>
+            <a:endParaRPr lang="en-US" sz="1800" dirty="0"/>
+          </a:p>
+        </p:txBody>
+      </p:sp>
+      <p:sp>
+        <p:nvSpPr>
+          <p:cNvPr id="6" name="Text 4"/>
+          <p:cNvSpPr/>
+          <p:nvPr/>
+        </p:nvSpPr>
+        <p:spPr>
+          <a:xfrm>
+            <a:off x="896112" y="3209544"/>
+            <a:ext cx="10454335" cy="397764"/>
+          </a:xfrm>
+          <a:prstGeom prst="rect">
+            <a:avLst/>
+          </a:prstGeom>
+          <a:noFill/>
+          <a:ln/>
+        </p:spPr>
+        <p:txBody>
+          <a:bodyPr wrap="square" rtlCol="0" anchor="t"/>
+          <a:lstStyle/>
+          <a:p>
+            <a:pPr algn="l" indent="0" marL="0">
+              <a:lnSpc>
+                <a:spcPct val="115000"/>
+              </a:lnSpc>
+              <a:buNone/>
+            </a:pPr>
+            <a:r>
+              <a:rPr lang="en-US" sz="1800" b="1" dirty="0">
+                <a:solidFill>
+                  <a:srgbClr val="1F4E9C"/>
+                </a:solidFill>
+                <a:latin typeface="微软雅黑" pitchFamily="34" charset="0"/>
+                <a:ea typeface="微软雅黑" pitchFamily="34" charset="-122"/>
+                <a:cs typeface="微软雅黑" pitchFamily="34" charset="-120"/>
+              </a:rPr>
+              <a:t>•  </a:t>
+            </a:r>
+            <a:pPr algn="l" indent="0" marL="0">
+              <a:lnSpc>
+                <a:spcPct val="115000"/>
+              </a:lnSpc>
+              <a:buNone/>
+            </a:pPr>
+            <a:r>
+              <a:rPr lang="en-US" sz="1800" dirty="0">
+                <a:solidFill>
+                  <a:srgbClr val="000000"/>
+                </a:solidFill>
+              </a:rPr>
+              <a:t>每层调用都有自己的格子：参数n各是各的，互不干扰</a:t>
+            </a:r>
+            <a:endParaRPr lang="en-US" sz="1800" dirty="0"/>
+          </a:p>
+        </p:txBody>
       </p:sp>
       <p:sp>
         <p:nvSpPr>
@@ -5434,64 +5817,20 @@
         </p:nvSpPr>
         <p:spPr>
           <a:xfrm>
-            <a:off x="1078992" y="2505456"/>
-            <a:ext cx="10033711" cy="1289304"/>
-          </a:xfrm>
-          <a:prstGeom prst="rect">
-            <a:avLst/>
-          </a:prstGeom>
-          <a:noFill/>
+            <a:off x="896112" y="3680460"/>
+            <a:ext cx="10454335" cy="397764"/>
+          </a:xfrm>
+          <a:prstGeom prst="rect">
+            <a:avLst/>
+          </a:prstGeom>
+          <a:noFill/>
+          <a:ln/>
         </p:spPr>
         <p:txBody>
           <a:bodyPr wrap="square" rtlCol="0" anchor="t"/>
           <a:lstStyle/>
           <a:p>
-            <a:pPr marL="0" indent="0" algn="l">
-              <a:lnSpc>
-                <a:spcPct val="125000"/>
-              </a:lnSpc>
-              <a:buNone/>
-            </a:pPr>
-            <a:r>
-              <a:rPr lang="en-US" sz="1400" dirty="0">
-                <a:solidFill>
-                  <a:srgbClr val="1F2329"/>
-                </a:solidFill>
-                <a:latin typeface="Consolas" panose="020B0609020204030204" pitchFamily="34" charset="0"/>
-                <a:ea typeface="Consolas" panose="020B0609020204030204" pitchFamily="34" charset="-122"/>
-                <a:cs typeface="Consolas" panose="020B0609020204030204" pitchFamily="34" charset="-120"/>
-              </a:rPr>
-              <a:t>int fact(int n){           // 求n的阶乘
-    if (n == 0) return 1;  // ① 终止条件
-    return n * fact(n - 1);// ② 缩小规模 ③ 返回结果
-}
-</a:t>
-            </a:r>
-            <a:endParaRPr lang="en-US" sz="1400" dirty="0"/>
-          </a:p>
-        </p:txBody>
-      </p:sp>
-      <p:sp>
-        <p:nvSpPr>
-          <p:cNvPr id="8" name="Text 6"/>
-          <p:cNvSpPr/>
-          <p:nvPr/>
-        </p:nvSpPr>
-        <p:spPr>
-          <a:xfrm>
-            <a:off x="896112" y="4105656"/>
-            <a:ext cx="10454335" cy="397764"/>
-          </a:xfrm>
-          <a:prstGeom prst="rect">
-            <a:avLst/>
-          </a:prstGeom>
-          <a:noFill/>
-        </p:spPr>
-        <p:txBody>
-          <a:bodyPr wrap="square" rtlCol="0" anchor="t"/>
-          <a:lstStyle/>
-          <a:p>
-            <a:pPr marL="0" indent="0" algn="l">
+            <a:pPr algn="l" indent="0" marL="0">
               <a:lnSpc>
                 <a:spcPct val="115000"/>
               </a:lnSpc>
@@ -5502,117 +5841,25 @@
                 <a:solidFill>
                   <a:srgbClr val="1F4E9C"/>
                 </a:solidFill>
-                <a:latin typeface="微软雅黑" panose="020B0503020204020204" pitchFamily="34" charset="-122"/>
-                <a:ea typeface="微软雅黑" panose="020B0503020204020204" pitchFamily="34" charset="-122"/>
-                <a:cs typeface="微软雅黑" panose="020B0503020204020204" pitchFamily="34" charset="-120"/>
+                <a:latin typeface="微软雅黑" pitchFamily="34" charset="0"/>
+                <a:ea typeface="微软雅黑" pitchFamily="34" charset="-122"/>
+                <a:cs typeface="微软雅黑" pitchFamily="34" charset="-120"/>
               </a:rPr>
               <a:t>•  </a:t>
             </a:r>
+            <a:pPr algn="l" indent="0" marL="0">
+              <a:lnSpc>
+                <a:spcPct val="115000"/>
+              </a:lnSpc>
+              <a:buNone/>
+            </a:pPr>
             <a:r>
               <a:rPr lang="en-US" sz="1800" dirty="0">
                 <a:solidFill>
                   <a:srgbClr val="000000"/>
                 </a:solidFill>
               </a:rPr>
-              <a:t>终止条件：什么时候不再调用自己，没有它就是无底洞</a:t>
-            </a:r>
-            <a:endParaRPr lang="en-US" sz="1800" dirty="0"/>
-          </a:p>
-        </p:txBody>
-      </p:sp>
-      <p:sp>
-        <p:nvSpPr>
-          <p:cNvPr id="9" name="Text 7"/>
-          <p:cNvSpPr/>
-          <p:nvPr/>
-        </p:nvSpPr>
-        <p:spPr>
-          <a:xfrm>
-            <a:off x="896112" y="4576572"/>
-            <a:ext cx="10454335" cy="397764"/>
-          </a:xfrm>
-          <a:prstGeom prst="rect">
-            <a:avLst/>
-          </a:prstGeom>
-          <a:noFill/>
-        </p:spPr>
-        <p:txBody>
-          <a:bodyPr wrap="square" rtlCol="0" anchor="t"/>
-          <a:lstStyle/>
-          <a:p>
-            <a:pPr marL="0" indent="0" algn="l">
-              <a:lnSpc>
-                <a:spcPct val="115000"/>
-              </a:lnSpc>
-              <a:buNone/>
-            </a:pPr>
-            <a:r>
-              <a:rPr lang="en-US" sz="1800" b="1" dirty="0">
-                <a:solidFill>
-                  <a:srgbClr val="1F4E9C"/>
-                </a:solidFill>
-                <a:latin typeface="微软雅黑" panose="020B0503020204020204" pitchFamily="34" charset="-122"/>
-                <a:ea typeface="微软雅黑" panose="020B0503020204020204" pitchFamily="34" charset="-122"/>
-                <a:cs typeface="微软雅黑" panose="020B0503020204020204" pitchFamily="34" charset="-120"/>
-              </a:rPr>
-              <a:t>•  </a:t>
-            </a:r>
-            <a:r>
-              <a:rPr lang="en-US" sz="1800" dirty="0">
-                <a:solidFill>
-                  <a:srgbClr val="000000"/>
-                </a:solidFill>
-              </a:rPr>
-              <a:t>缩小规模：每次调用都要离终止更近一步</a:t>
-            </a:r>
-            <a:endParaRPr lang="en-US" sz="1800" dirty="0"/>
-          </a:p>
-        </p:txBody>
-      </p:sp>
-      <p:sp>
-        <p:nvSpPr>
-          <p:cNvPr id="10" name="Text 8"/>
-          <p:cNvSpPr/>
-          <p:nvPr/>
-        </p:nvSpPr>
-        <p:spPr>
-          <a:xfrm>
-            <a:off x="896112" y="5047488"/>
-            <a:ext cx="10454335" cy="397764"/>
-          </a:xfrm>
-          <a:prstGeom prst="rect">
-            <a:avLst/>
-          </a:prstGeom>
-          <a:noFill/>
-        </p:spPr>
-        <p:txBody>
-          <a:bodyPr wrap="square" rtlCol="0" anchor="t"/>
-          <a:lstStyle/>
-          <a:p>
-            <a:pPr marL="0" indent="0" algn="l">
-              <a:lnSpc>
-                <a:spcPct val="115000"/>
-              </a:lnSpc>
-              <a:buNone/>
-            </a:pPr>
-            <a:r>
-              <a:rPr lang="en-US" sz="1800" b="1" dirty="0">
-                <a:solidFill>
-                  <a:srgbClr val="1F4E9C"/>
-                </a:solidFill>
-                <a:latin typeface="微软雅黑" panose="020B0503020204020204" pitchFamily="34" charset="-122"/>
-                <a:ea typeface="微软雅黑" panose="020B0503020204020204" pitchFamily="34" charset="-122"/>
-                <a:cs typeface="微软雅黑" panose="020B0503020204020204" pitchFamily="34" charset="-120"/>
-              </a:rPr>
-              <a:t>•  </a:t>
-            </a:r>
-            <a:r>
-              <a:rPr lang="en-US" sz="1800" dirty="0">
-                <a:solidFill>
-                  <a:srgbClr val="000000"/>
-                </a:solidFill>
-              </a:rPr>
-              <a:t>返回值：把自己这层的结果交回给上一层</a:t>
+              <a:t>收回时逐层交结果：1、1、2、6，最后fact(3)返回6</a:t>
             </a:r>
             <a:endParaRPr lang="en-US" sz="1800" dirty="0"/>
           </a:p>
@@ -5626,9 +5873,9 @@
 </p:sld>
 </file>
 
-<file path=ppt/slides/slide4.xml><?xml version="1.0" encoding="utf-8"?>
+<file path=ppt/slides/slide5.xml><?xml version="1.0" encoding="utf-8"?>
 <p:sld xmlns:a="http://schemas.openxmlformats.org/drawingml/2006/main" xmlns:r="http://schemas.openxmlformats.org/officeDocument/2006/relationships" xmlns:p="http://schemas.openxmlformats.org/presentationml/2006/main">
-  <p:cSld>
+  <p:cSld name="Slide 5">
     <p:bg>
       <p:bgPr>
         <a:blipFill dpi="0" rotWithShape="1">
@@ -5672,12 +5919,13 @@
             <a:avLst/>
           </a:prstGeom>
           <a:noFill/>
+          <a:ln/>
         </p:spPr>
         <p:txBody>
           <a:bodyPr wrap="square" rtlCol="0" anchor="ctr"/>
           <a:lstStyle/>
           <a:p>
-            <a:pPr marL="0" indent="0" algn="r">
+            <a:pPr algn="r" indent="0" marL="0">
               <a:buNone/>
             </a:pPr>
             <a:r>
@@ -5685,11 +5933,11 @@
                 <a:solidFill>
                   <a:srgbClr val="8A9099"/>
                 </a:solidFill>
-                <a:latin typeface="微软雅黑" panose="020B0503020204020204" pitchFamily="34" charset="-122"/>
-                <a:ea typeface="微软雅黑" panose="020B0503020204020204" pitchFamily="34" charset="-122"/>
-                <a:cs typeface="微软雅黑" panose="020B0503020204020204" pitchFamily="34" charset="-120"/>
-              </a:rPr>
-              <a:t>4 / 16</a:t>
+                <a:latin typeface="微软雅黑" pitchFamily="34" charset="0"/>
+                <a:ea typeface="微软雅黑" pitchFamily="34" charset="-122"/>
+                <a:cs typeface="微软雅黑" pitchFamily="34" charset="-120"/>
+              </a:rPr>
+              <a:t>5 / 15</a:t>
             </a:r>
             <a:endParaRPr lang="en-US" sz="1000" dirty="0"/>
           </a:p>
@@ -5710,12 +5958,13 @@
             <a:avLst/>
           </a:prstGeom>
           <a:noFill/>
+          <a:ln/>
         </p:spPr>
         <p:txBody>
           <a:bodyPr wrap="square" rtlCol="0" anchor="ctr"/>
           <a:lstStyle/>
           <a:p>
-            <a:pPr marL="0" indent="0" algn="l">
+            <a:pPr algn="l" indent="0" marL="0">
               <a:buNone/>
             </a:pPr>
             <a:r>
@@ -5723,11 +5972,11 @@
                 <a:solidFill>
                   <a:srgbClr val="1F4E9C"/>
                 </a:solidFill>
-                <a:latin typeface="微软雅黑" panose="020B0503020204020204" pitchFamily="34" charset="-122"/>
-                <a:ea typeface="微软雅黑" panose="020B0503020204020204" pitchFamily="34" charset="-122"/>
-                <a:cs typeface="微软雅黑" panose="020B0503020204020204" pitchFamily="34" charset="-120"/>
-              </a:rPr>
-              <a:t>调用栈</a:t>
+                <a:latin typeface="微软雅黑" pitchFamily="34" charset="0"/>
+                <a:ea typeface="微软雅黑" pitchFamily="34" charset="-122"/>
+                <a:cs typeface="微软雅黑" pitchFamily="34" charset="-120"/>
+              </a:rPr>
+              <a:t>调用栈推演</a:t>
             </a:r>
             <a:endParaRPr lang="en-US" sz="1400" dirty="0"/>
           </a:p>
@@ -5748,12 +5997,13 @@
             <a:avLst/>
           </a:prstGeom>
           <a:noFill/>
+          <a:ln/>
         </p:spPr>
         <p:txBody>
           <a:bodyPr wrap="square" rtlCol="0" anchor="ctr"/>
           <a:lstStyle/>
           <a:p>
-            <a:pPr marL="0" indent="0" algn="l">
+            <a:pPr algn="l" indent="0" marL="0">
               <a:buNone/>
             </a:pPr>
             <a:r>
@@ -5761,11 +6011,11 @@
                 <a:solidFill>
                   <a:srgbClr val="1F2329"/>
                 </a:solidFill>
-                <a:latin typeface="微软雅黑" panose="020B0503020204020204" pitchFamily="34" charset="-122"/>
-                <a:ea typeface="微软雅黑" panose="020B0503020204020204" pitchFamily="34" charset="-122"/>
-                <a:cs typeface="微软雅黑" panose="020B0503020204020204" pitchFamily="34" charset="-120"/>
-              </a:rPr>
-              <a:t>递归怎么运行：一层一层展开，再一层一层收回</a:t>
+                <a:latin typeface="微软雅黑" pitchFamily="34" charset="0"/>
+                <a:ea typeface="微软雅黑" pitchFamily="34" charset="-122"/>
+                <a:cs typeface="微软雅黑" pitchFamily="34" charset="-120"/>
+              </a:rPr>
+              <a:t>fact(3)的调用栈：展开与收回（拿纸跟着画）</a:t>
             </a:r>
             <a:endParaRPr lang="en-US" sz="2800" dirty="0"/>
           </a:p>
@@ -5786,12 +6036,13 @@
             <a:avLst/>
           </a:prstGeom>
           <a:noFill/>
+          <a:ln/>
         </p:spPr>
         <p:txBody>
           <a:bodyPr wrap="square" rtlCol="0" anchor="t"/>
           <a:lstStyle/>
           <a:p>
-            <a:pPr marL="0" indent="0" algn="l">
+            <a:pPr algn="l" indent="0" marL="0">
               <a:lnSpc>
                 <a:spcPct val="115000"/>
               </a:lnSpc>
@@ -5802,19 +6053,25 @@
                 <a:solidFill>
                   <a:srgbClr val="1F4E9C"/>
                 </a:solidFill>
-                <a:latin typeface="微软雅黑" panose="020B0503020204020204" pitchFamily="34" charset="-122"/>
-                <a:ea typeface="微软雅黑" panose="020B0503020204020204" pitchFamily="34" charset="-122"/>
-                <a:cs typeface="微软雅黑" panose="020B0503020204020204" pitchFamily="34" charset="-120"/>
+                <a:latin typeface="微软雅黑" pitchFamily="34" charset="0"/>
+                <a:ea typeface="微软雅黑" pitchFamily="34" charset="-122"/>
+                <a:cs typeface="微软雅黑" pitchFamily="34" charset="-120"/>
               </a:rPr>
               <a:t>•  </a:t>
             </a:r>
+            <a:pPr algn="l" indent="0" marL="0">
+              <a:lnSpc>
+                <a:spcPct val="115000"/>
+              </a:lnSpc>
+              <a:buNone/>
+            </a:pPr>
             <a:r>
               <a:rPr lang="en-US" sz="1800" dirty="0">
                 <a:solidFill>
                   <a:srgbClr val="000000"/>
                 </a:solidFill>
               </a:rPr>
-              <a:t>fact(3)调fact(2)，fact(2)调fact(1)，一路到fact(0)触发终止</a:t>
+              <a:t>① 竖着叠四层框：fact(3)、fact(2)、fact(1)、fact(0)，每层标自己的n，向下箭头是调用</a:t>
             </a:r>
             <a:endParaRPr lang="en-US" sz="1800" dirty="0"/>
           </a:p>
@@ -5835,12 +6092,13 @@
             <a:avLst/>
           </a:prstGeom>
           <a:noFill/>
+          <a:ln/>
         </p:spPr>
         <p:txBody>
           <a:bodyPr wrap="square" rtlCol="0" anchor="t"/>
           <a:lstStyle/>
           <a:p>
-            <a:pPr marL="0" indent="0" algn="l">
+            <a:pPr algn="l" indent="0" marL="0">
               <a:lnSpc>
                 <a:spcPct val="115000"/>
               </a:lnSpc>
@@ -5851,68 +6109,25 @@
                 <a:solidFill>
                   <a:srgbClr val="1F4E9C"/>
                 </a:solidFill>
-                <a:latin typeface="微软雅黑" panose="020B0503020204020204" pitchFamily="34" charset="-122"/>
-                <a:ea typeface="微软雅黑" panose="020B0503020204020204" pitchFamily="34" charset="-122"/>
-                <a:cs typeface="微软雅黑" panose="020B0503020204020204" pitchFamily="34" charset="-120"/>
+                <a:latin typeface="微软雅黑" pitchFamily="34" charset="0"/>
+                <a:ea typeface="微软雅黑" pitchFamily="34" charset="-122"/>
+                <a:cs typeface="微软雅黑" pitchFamily="34" charset="-120"/>
               </a:rPr>
               <a:t>•  </a:t>
             </a:r>
+            <a:pPr algn="l" indent="0" marL="0">
+              <a:lnSpc>
+                <a:spcPct val="115000"/>
+              </a:lnSpc>
+              <a:buNone/>
+            </a:pPr>
             <a:r>
               <a:rPr lang="en-US" sz="1800" dirty="0">
                 <a:solidFill>
                   <a:srgbClr val="000000"/>
                 </a:solidFill>
               </a:rPr>
-              <a:t>每层调用都有自己的格子：参数n各是各的，互不干扰</a:t>
-            </a:r>
-            <a:endParaRPr lang="en-US" sz="1800" dirty="0"/>
-          </a:p>
-        </p:txBody>
-      </p:sp>
-      <p:sp>
-        <p:nvSpPr>
-          <p:cNvPr id="7" name="Text 5"/>
-          <p:cNvSpPr/>
-          <p:nvPr/>
-        </p:nvSpPr>
-        <p:spPr>
-          <a:xfrm>
-            <a:off x="896112" y="3680460"/>
-            <a:ext cx="10454335" cy="397764"/>
-          </a:xfrm>
-          <a:prstGeom prst="rect">
-            <a:avLst/>
-          </a:prstGeom>
-          <a:noFill/>
-        </p:spPr>
-        <p:txBody>
-          <a:bodyPr wrap="square" rtlCol="0" anchor="t"/>
-          <a:lstStyle/>
-          <a:p>
-            <a:pPr marL="0" indent="0" algn="l">
-              <a:lnSpc>
-                <a:spcPct val="115000"/>
-              </a:lnSpc>
-              <a:buNone/>
-            </a:pPr>
-            <a:r>
-              <a:rPr lang="en-US" sz="1800" b="1" dirty="0">
-                <a:solidFill>
-                  <a:srgbClr val="1F4E9C"/>
-                </a:solidFill>
-                <a:latin typeface="微软雅黑" panose="020B0503020204020204" pitchFamily="34" charset="-122"/>
-                <a:ea typeface="微软雅黑" panose="020B0503020204020204" pitchFamily="34" charset="-122"/>
-                <a:cs typeface="微软雅黑" panose="020B0503020204020204" pitchFamily="34" charset="-120"/>
-              </a:rPr>
-              <a:t>•  </a:t>
-            </a:r>
-            <a:r>
-              <a:rPr lang="en-US" sz="1800" dirty="0">
-                <a:solidFill>
-                  <a:srgbClr val="000000"/>
-                </a:solidFill>
-              </a:rPr>
-              <a:t>收回时逐层交结果：1、1、2、6，最后fact(3)返回6</a:t>
+              <a:t>② 从fact(0)往上画返回箭头：逐层交回1、1、2、6，向上箭头是返回</a:t>
             </a:r>
             <a:endParaRPr lang="en-US" sz="1800" dirty="0"/>
           </a:p>
@@ -5926,9 +6141,9 @@
 </p:sld>
 </file>
 
-<file path=ppt/slides/slide5.xml><?xml version="1.0" encoding="utf-8"?>
+<file path=ppt/slides/slide6.xml><?xml version="1.0" encoding="utf-8"?>
 <p:sld xmlns:a="http://schemas.openxmlformats.org/drawingml/2006/main" xmlns:r="http://schemas.openxmlformats.org/officeDocument/2006/relationships" xmlns:p="http://schemas.openxmlformats.org/presentationml/2006/main">
-  <p:cSld>
+  <p:cSld name="Slide 6">
     <p:bg>
       <p:bgPr>
         <a:blipFill dpi="0" rotWithShape="1">
@@ -5972,12 +6187,13 @@
             <a:avLst/>
           </a:prstGeom>
           <a:noFill/>
+          <a:ln/>
         </p:spPr>
         <p:txBody>
           <a:bodyPr wrap="square" rtlCol="0" anchor="ctr"/>
           <a:lstStyle/>
           <a:p>
-            <a:pPr marL="0" indent="0" algn="r">
+            <a:pPr algn="r" indent="0" marL="0">
               <a:buNone/>
             </a:pPr>
             <a:r>
@@ -5985,11 +6201,11 @@
                 <a:solidFill>
                   <a:srgbClr val="8A9099"/>
                 </a:solidFill>
-                <a:latin typeface="微软雅黑" panose="020B0503020204020204" pitchFamily="34" charset="-122"/>
-                <a:ea typeface="微软雅黑" panose="020B0503020204020204" pitchFamily="34" charset="-122"/>
-                <a:cs typeface="微软雅黑" panose="020B0503020204020204" pitchFamily="34" charset="-120"/>
-              </a:rPr>
-              <a:t>5 / 16</a:t>
+                <a:latin typeface="微软雅黑" pitchFamily="34" charset="0"/>
+                <a:ea typeface="微软雅黑" pitchFamily="34" charset="-122"/>
+                <a:cs typeface="微软雅黑" pitchFamily="34" charset="-120"/>
+              </a:rPr>
+              <a:t>6 / 15</a:t>
             </a:r>
             <a:endParaRPr lang="en-US" sz="1000" dirty="0"/>
           </a:p>
@@ -6010,12 +6226,13 @@
             <a:avLst/>
           </a:prstGeom>
           <a:noFill/>
+          <a:ln/>
         </p:spPr>
         <p:txBody>
           <a:bodyPr wrap="square" rtlCol="0" anchor="ctr"/>
           <a:lstStyle/>
           <a:p>
-            <a:pPr marL="0" indent="0" algn="l">
+            <a:pPr algn="l" indent="0" marL="0">
               <a:buNone/>
             </a:pPr>
             <a:r>
@@ -6023,11 +6240,11 @@
                 <a:solidFill>
                   <a:srgbClr val="1F4E9C"/>
                 </a:solidFill>
-                <a:latin typeface="微软雅黑" panose="020B0503020204020204" pitchFamily="34" charset="-122"/>
-                <a:ea typeface="微软雅黑" panose="020B0503020204020204" pitchFamily="34" charset="-122"/>
-                <a:cs typeface="微软雅黑" panose="020B0503020204020204" pitchFamily="34" charset="-120"/>
-              </a:rPr>
-              <a:t>调用栈推演</a:t>
+                <a:latin typeface="微软雅黑" pitchFamily="34" charset="0"/>
+                <a:ea typeface="微软雅黑" pitchFamily="34" charset="-122"/>
+                <a:cs typeface="微软雅黑" pitchFamily="34" charset="-120"/>
+              </a:rPr>
+              <a:t>对比</a:t>
             </a:r>
             <a:endParaRPr lang="en-US" sz="1400" dirty="0"/>
           </a:p>
@@ -6048,12 +6265,13 @@
             <a:avLst/>
           </a:prstGeom>
           <a:noFill/>
+          <a:ln/>
         </p:spPr>
         <p:txBody>
           <a:bodyPr wrap="square" rtlCol="0" anchor="ctr"/>
           <a:lstStyle/>
           <a:p>
-            <a:pPr marL="0" indent="0" algn="l">
+            <a:pPr algn="l" indent="0" marL="0">
               <a:buNone/>
             </a:pPr>
             <a:r>
@@ -6061,11 +6279,11 @@
                 <a:solidFill>
                   <a:srgbClr val="1F2329"/>
                 </a:solidFill>
-                <a:latin typeface="微软雅黑" panose="020B0503020204020204" pitchFamily="34" charset="-122"/>
-                <a:ea typeface="微软雅黑" panose="020B0503020204020204" pitchFamily="34" charset="-122"/>
-                <a:cs typeface="微软雅黑" panose="020B0503020204020204" pitchFamily="34" charset="-120"/>
-              </a:rPr>
-              <a:t>fact(3)的调用栈：展开与收回（拿纸跟着画）</a:t>
+                <a:latin typeface="微软雅黑" pitchFamily="34" charset="0"/>
+                <a:ea typeface="微软雅黑" pitchFamily="34" charset="-122"/>
+                <a:cs typeface="微软雅黑" pitchFamily="34" charset="-120"/>
+              </a:rPr>
+              <a:t>递归与迭代：一套问题，两种写法</a:t>
             </a:r>
             <a:endParaRPr lang="en-US" sz="2800" dirty="0"/>
           </a:p>
@@ -6073,25 +6291,112 @@
       </p:sp>
       <p:sp>
         <p:nvSpPr>
-          <p:cNvPr id="5" name="Text 3"/>
-          <p:cNvSpPr/>
-          <p:nvPr/>
-        </p:nvSpPr>
-        <p:spPr>
-          <a:xfrm>
-            <a:off x="896112" y="2395728"/>
-            <a:ext cx="10454335" cy="740664"/>
-          </a:xfrm>
-          <a:prstGeom prst="rect">
-            <a:avLst/>
-          </a:prstGeom>
-          <a:noFill/>
+          <p:cNvPr id="5" name="Shape 3"/>
+          <p:cNvSpPr/>
+          <p:nvPr/>
+        </p:nvSpPr>
+        <p:spPr>
+          <a:xfrm>
+            <a:off x="822960" y="2395728"/>
+            <a:ext cx="10545775" cy="1508760"/>
+          </a:xfrm>
+          <a:prstGeom prst="rect">
+            <a:avLst/>
+          </a:prstGeom>
+          <a:solidFill>
+            <a:srgbClr val="F7F9FC"/>
+          </a:solidFill>
+          <a:ln/>
+        </p:spPr>
+      </p:sp>
+      <p:sp>
+        <p:nvSpPr>
+          <p:cNvPr id="6" name="Shape 4"/>
+          <p:cNvSpPr/>
+          <p:nvPr/>
+        </p:nvSpPr>
+        <p:spPr>
+          <a:xfrm>
+            <a:off x="822960" y="2395728"/>
+            <a:ext cx="50292" cy="1508760"/>
+          </a:xfrm>
+          <a:prstGeom prst="rect">
+            <a:avLst/>
+          </a:prstGeom>
+          <a:solidFill>
+            <a:srgbClr val="1F4E9C"/>
+          </a:solidFill>
+          <a:ln/>
+        </p:spPr>
+      </p:sp>
+      <p:sp>
+        <p:nvSpPr>
+          <p:cNvPr id="7" name="Text 5"/>
+          <p:cNvSpPr/>
+          <p:nvPr/>
+        </p:nvSpPr>
+        <p:spPr>
+          <a:xfrm>
+            <a:off x="1078992" y="2505456"/>
+            <a:ext cx="10033711" cy="1289304"/>
+          </a:xfrm>
+          <a:prstGeom prst="rect">
+            <a:avLst/>
+          </a:prstGeom>
+          <a:noFill/>
+          <a:ln/>
         </p:spPr>
         <p:txBody>
           <a:bodyPr wrap="square" rtlCol="0" anchor="t"/>
           <a:lstStyle/>
           <a:p>
-            <a:pPr marL="0" indent="0" algn="l">
+            <a:pPr algn="l" indent="0" marL="0">
+              <a:lnSpc>
+                <a:spcPct val="125000"/>
+              </a:lnSpc>
+              <a:buNone/>
+            </a:pPr>
+            <a:r>
+              <a:rPr lang="en-US" sz="1400" dirty="0">
+                <a:solidFill>
+                  <a:srgbClr val="1F2329"/>
+                </a:solidFill>
+                <a:latin typeface="Consolas" pitchFamily="34" charset="0"/>
+                <a:ea typeface="Consolas" pitchFamily="34" charset="-122"/>
+                <a:cs typeface="Consolas" pitchFamily="34" charset="-120"/>
+              </a:rPr>
+              <a:t>// 迭代版阶乘
+int result = 1;
+for(int i = 1; i &lt;= n; i++)
+    result = result * i;
+</a:t>
+            </a:r>
+            <a:endParaRPr lang="en-US" sz="1400" dirty="0"/>
+          </a:p>
+        </p:txBody>
+      </p:sp>
+      <p:sp>
+        <p:nvSpPr>
+          <p:cNvPr id="8" name="Text 6"/>
+          <p:cNvSpPr/>
+          <p:nvPr/>
+        </p:nvSpPr>
+        <p:spPr>
+          <a:xfrm>
+            <a:off x="896112" y="4105656"/>
+            <a:ext cx="10454335" cy="397764"/>
+          </a:xfrm>
+          <a:prstGeom prst="rect">
+            <a:avLst/>
+          </a:prstGeom>
+          <a:noFill/>
+          <a:ln/>
+        </p:spPr>
+        <p:txBody>
+          <a:bodyPr wrap="square" rtlCol="0" anchor="t"/>
+          <a:lstStyle/>
+          <a:p>
+            <a:pPr algn="l" indent="0" marL="0">
               <a:lnSpc>
                 <a:spcPct val="115000"/>
               </a:lnSpc>
@@ -6102,19 +6407,25 @@
                 <a:solidFill>
                   <a:srgbClr val="1F4E9C"/>
                 </a:solidFill>
-                <a:latin typeface="微软雅黑" panose="020B0503020204020204" pitchFamily="34" charset="-122"/>
-                <a:ea typeface="微软雅黑" panose="020B0503020204020204" pitchFamily="34" charset="-122"/>
-                <a:cs typeface="微软雅黑" panose="020B0503020204020204" pitchFamily="34" charset="-120"/>
+                <a:latin typeface="微软雅黑" pitchFamily="34" charset="0"/>
+                <a:ea typeface="微软雅黑" pitchFamily="34" charset="-122"/>
+                <a:cs typeface="微软雅黑" pitchFamily="34" charset="-120"/>
               </a:rPr>
               <a:t>•  </a:t>
             </a:r>
+            <a:pPr algn="l" indent="0" marL="0">
+              <a:lnSpc>
+                <a:spcPct val="115000"/>
+              </a:lnSpc>
+              <a:buNone/>
+            </a:pPr>
             <a:r>
               <a:rPr lang="en-US" sz="1800" dirty="0">
                 <a:solidFill>
                   <a:srgbClr val="000000"/>
                 </a:solidFill>
               </a:rPr>
-              <a:t>① 竖着叠四层框：fact(3)、fact(2)、fact(1)、fact(0)，每层标自己的n，向下箭头是调用</a:t>
+              <a:t>迭代靠循环，一层格子从头跑到尾；递归靠调用，层数随问题展开</a:t>
             </a:r>
             <a:endParaRPr lang="en-US" sz="1800" dirty="0"/>
           </a:p>
@@ -6122,25 +6433,26 @@
       </p:sp>
       <p:sp>
         <p:nvSpPr>
-          <p:cNvPr id="6" name="Text 4"/>
-          <p:cNvSpPr/>
-          <p:nvPr/>
-        </p:nvSpPr>
-        <p:spPr>
-          <a:xfrm>
-            <a:off x="896112" y="3209544"/>
+          <p:cNvPr id="9" name="Text 7"/>
+          <p:cNvSpPr/>
+          <p:nvPr/>
+        </p:nvSpPr>
+        <p:spPr>
+          <a:xfrm>
+            <a:off x="896112" y="4576572"/>
             <a:ext cx="10454335" cy="397764"/>
           </a:xfrm>
           <a:prstGeom prst="rect">
             <a:avLst/>
           </a:prstGeom>
           <a:noFill/>
+          <a:ln/>
         </p:spPr>
         <p:txBody>
           <a:bodyPr wrap="square" rtlCol="0" anchor="t"/>
           <a:lstStyle/>
           <a:p>
-            <a:pPr marL="0" indent="0" algn="l">
+            <a:pPr algn="l" indent="0" marL="0">
               <a:lnSpc>
                 <a:spcPct val="115000"/>
               </a:lnSpc>
@@ -6151,19 +6463,81 @@
                 <a:solidFill>
                   <a:srgbClr val="1F4E9C"/>
                 </a:solidFill>
-                <a:latin typeface="微软雅黑" panose="020B0503020204020204" pitchFamily="34" charset="-122"/>
-                <a:ea typeface="微软雅黑" panose="020B0503020204020204" pitchFamily="34" charset="-122"/>
-                <a:cs typeface="微软雅黑" panose="020B0503020204020204" pitchFamily="34" charset="-120"/>
+                <a:latin typeface="微软雅黑" pitchFamily="34" charset="0"/>
+                <a:ea typeface="微软雅黑" pitchFamily="34" charset="-122"/>
+                <a:cs typeface="微软雅黑" pitchFamily="34" charset="-120"/>
               </a:rPr>
               <a:t>•  </a:t>
             </a:r>
+            <a:pPr algn="l" indent="0" marL="0">
+              <a:lnSpc>
+                <a:spcPct val="115000"/>
+              </a:lnSpc>
+              <a:buNone/>
+            </a:pPr>
             <a:r>
               <a:rPr lang="en-US" sz="1800" dirty="0">
                 <a:solidFill>
                   <a:srgbClr val="000000"/>
                 </a:solidFill>
               </a:rPr>
-              <a:t>② 从fact(0)往上画返回箭头：逐层交回1、1、2、6，向上箭头是返回</a:t>
+              <a:t>阶乘这种问题，迭代更省；递归的优势在结构自带层次的问题上</a:t>
+            </a:r>
+            <a:endParaRPr lang="en-US" sz="1800" dirty="0"/>
+          </a:p>
+        </p:txBody>
+      </p:sp>
+      <p:sp>
+        <p:nvSpPr>
+          <p:cNvPr id="10" name="Text 8"/>
+          <p:cNvSpPr/>
+          <p:nvPr/>
+        </p:nvSpPr>
+        <p:spPr>
+          <a:xfrm>
+            <a:off x="896112" y="5047488"/>
+            <a:ext cx="10454335" cy="397764"/>
+          </a:xfrm>
+          <a:prstGeom prst="rect">
+            <a:avLst/>
+          </a:prstGeom>
+          <a:noFill/>
+          <a:ln/>
+        </p:spPr>
+        <p:txBody>
+          <a:bodyPr wrap="square" rtlCol="0" anchor="t"/>
+          <a:lstStyle/>
+          <a:p>
+            <a:pPr algn="l" indent="0" marL="0">
+              <a:lnSpc>
+                <a:spcPct val="115000"/>
+              </a:lnSpc>
+              <a:buNone/>
+            </a:pPr>
+            <a:r>
+              <a:rPr lang="en-US" sz="1800" b="1" dirty="0">
+                <a:solidFill>
+                  <a:srgbClr val="1F4E9C"/>
+                </a:solidFill>
+                <a:latin typeface="微软雅黑" pitchFamily="34" charset="0"/>
+                <a:ea typeface="微软雅黑" pitchFamily="34" charset="-122"/>
+                <a:cs typeface="微软雅黑" pitchFamily="34" charset="-120"/>
+              </a:rPr>
+              <a:t>•  </a:t>
+            </a:r>
+            <a:pPr algn="l" indent="0" marL="0">
+              <a:lnSpc>
+                <a:spcPct val="115000"/>
+              </a:lnSpc>
+              <a:buNone/>
+            </a:pPr>
+            <a:r>
+              <a:rPr lang="en-US" sz="1800" dirty="0">
+                <a:solidFill>
+                  <a:srgbClr val="000000"/>
+                </a:solidFill>
+              </a:rPr>
+              <a:t>两种都要会：读代码要都认得，写代码按问题选</a:t>
             </a:r>
             <a:endParaRPr lang="en-US" sz="1800" dirty="0"/>
           </a:p>
@@ -6177,9 +6551,9 @@
 </p:sld>
 </file>
 
-<file path=ppt/slides/slide6.xml><?xml version="1.0" encoding="utf-8"?>
+<file path=ppt/slides/slide7.xml><?xml version="1.0" encoding="utf-8"?>
 <p:sld xmlns:a="http://schemas.openxmlformats.org/drawingml/2006/main" xmlns:r="http://schemas.openxmlformats.org/officeDocument/2006/relationships" xmlns:p="http://schemas.openxmlformats.org/presentationml/2006/main">
-  <p:cSld>
+  <p:cSld name="Slide 7">
     <p:bg>
       <p:bgPr>
         <a:blipFill dpi="0" rotWithShape="1">
@@ -6223,12 +6597,13 @@
             <a:avLst/>
           </a:prstGeom>
           <a:noFill/>
+          <a:ln/>
         </p:spPr>
         <p:txBody>
           <a:bodyPr wrap="square" rtlCol="0" anchor="ctr"/>
           <a:lstStyle/>
           <a:p>
-            <a:pPr marL="0" indent="0" algn="r">
+            <a:pPr algn="r" indent="0" marL="0">
               <a:buNone/>
             </a:pPr>
             <a:r>
@@ -6236,11 +6611,11 @@
                 <a:solidFill>
                   <a:srgbClr val="8A9099"/>
                 </a:solidFill>
-                <a:latin typeface="微软雅黑" panose="020B0503020204020204" pitchFamily="34" charset="-122"/>
-                <a:ea typeface="微软雅黑" panose="020B0503020204020204" pitchFamily="34" charset="-122"/>
-                <a:cs typeface="微软雅黑" panose="020B0503020204020204" pitchFamily="34" charset="-120"/>
-              </a:rPr>
-              <a:t>6 / 16</a:t>
+                <a:latin typeface="微软雅黑" pitchFamily="34" charset="0"/>
+                <a:ea typeface="微软雅黑" pitchFamily="34" charset="-122"/>
+                <a:cs typeface="微软雅黑" pitchFamily="34" charset="-120"/>
+              </a:rPr>
+              <a:t>7 / 15</a:t>
             </a:r>
             <a:endParaRPr lang="en-US" sz="1000" dirty="0"/>
           </a:p>
@@ -6261,12 +6636,13 @@
             <a:avLst/>
           </a:prstGeom>
           <a:noFill/>
+          <a:ln/>
         </p:spPr>
         <p:txBody>
           <a:bodyPr wrap="square" rtlCol="0" anchor="ctr"/>
           <a:lstStyle/>
           <a:p>
-            <a:pPr marL="0" indent="0" algn="l">
+            <a:pPr algn="l" indent="0" marL="0">
               <a:buNone/>
             </a:pPr>
             <a:r>
@@ -6274,11 +6650,11 @@
                 <a:solidFill>
                   <a:srgbClr val="1F4E9C"/>
                 </a:solidFill>
-                <a:latin typeface="微软雅黑" panose="020B0503020204020204" pitchFamily="34" charset="-122"/>
-                <a:ea typeface="微软雅黑" panose="020B0503020204020204" pitchFamily="34" charset="-122"/>
-                <a:cs typeface="微软雅黑" panose="020B0503020204020204" pitchFamily="34" charset="-120"/>
-              </a:rPr>
-              <a:t>对比</a:t>
+                <a:latin typeface="微软雅黑" pitchFamily="34" charset="0"/>
+                <a:ea typeface="微软雅黑" pitchFamily="34" charset="-122"/>
+                <a:cs typeface="微软雅黑" pitchFamily="34" charset="-120"/>
+              </a:rPr>
+              <a:t>两个事故</a:t>
             </a:r>
             <a:endParaRPr lang="en-US" sz="1400" dirty="0"/>
           </a:p>
@@ -6299,12 +6675,13 @@
             <a:avLst/>
           </a:prstGeom>
           <a:noFill/>
+          <a:ln/>
         </p:spPr>
         <p:txBody>
           <a:bodyPr wrap="square" rtlCol="0" anchor="ctr"/>
           <a:lstStyle/>
           <a:p>
-            <a:pPr marL="0" indent="0" algn="l">
+            <a:pPr algn="l" indent="0" marL="0">
               <a:buNone/>
             </a:pPr>
             <a:r>
@@ -6312,11 +6689,11 @@
                 <a:solidFill>
                   <a:srgbClr val="1F2329"/>
                 </a:solidFill>
-                <a:latin typeface="微软雅黑" panose="020B0503020204020204" pitchFamily="34" charset="-122"/>
-                <a:ea typeface="微软雅黑" panose="020B0503020204020204" pitchFamily="34" charset="-122"/>
-                <a:cs typeface="微软雅黑" panose="020B0503020204020204" pitchFamily="34" charset="-120"/>
-              </a:rPr>
-              <a:t>递归与迭代：一套问题，两种写法</a:t>
+                <a:latin typeface="微软雅黑" pitchFamily="34" charset="0"/>
+                <a:ea typeface="微软雅黑" pitchFamily="34" charset="-122"/>
+                <a:cs typeface="微软雅黑" pitchFamily="34" charset="-120"/>
+              </a:rPr>
+              <a:t>递归的两大事故：无限递归与重复爆炸</a:t>
             </a:r>
             <a:endParaRPr lang="en-US" sz="2800" dirty="0"/>
           </a:p>
@@ -6339,6 +6716,7 @@
           <a:solidFill>
             <a:srgbClr val="F7F9FC"/>
           </a:solidFill>
+          <a:ln/>
         </p:spPr>
       </p:sp>
       <p:sp>
@@ -6358,6 +6736,7 @@
           <a:solidFill>
             <a:srgbClr val="1F4E9C"/>
           </a:solidFill>
+          <a:ln/>
         </p:spPr>
       </p:sp>
       <p:sp>
@@ -6375,12 +6754,13 @@
             <a:avLst/>
           </a:prstGeom>
           <a:noFill/>
+          <a:ln/>
         </p:spPr>
         <p:txBody>
           <a:bodyPr wrap="square" rtlCol="0" anchor="t"/>
           <a:lstStyle/>
           <a:p>
-            <a:pPr marL="0" indent="0" algn="l">
+            <a:pPr algn="l" indent="0" marL="0">
               <a:lnSpc>
                 <a:spcPct val="125000"/>
               </a:lnSpc>
@@ -6391,14 +6771,14 @@
                 <a:solidFill>
                   <a:srgbClr val="1F2329"/>
                 </a:solidFill>
-                <a:latin typeface="Consolas" panose="020B0609020204030204" pitchFamily="34" charset="0"/>
-                <a:ea typeface="Consolas" panose="020B0609020204030204" pitchFamily="34" charset="-122"/>
-                <a:cs typeface="Consolas" panose="020B0609020204030204" pitchFamily="34" charset="-120"/>
-              </a:rPr>
-              <a:t>// 迭代版阶乘
-int result = 1;
-for(int i = 1; i &lt;= n; i++)
-    result = result * i;
+                <a:latin typeface="Consolas" pitchFamily="34" charset="0"/>
+                <a:ea typeface="Consolas" pitchFamily="34" charset="-122"/>
+                <a:cs typeface="Consolas" pitchFamily="34" charset="-120"/>
+              </a:rPr>
+              <a:t>int fib(int n){
+    if(n &lt;= 1) return n;
+    return fib(n - 1) + fib(n - 2);
+}
 </a:t>
             </a:r>
             <a:endParaRPr lang="en-US" sz="1400" dirty="0"/>
@@ -6420,12 +6800,13 @@
             <a:avLst/>
           </a:prstGeom>
           <a:noFill/>
+          <a:ln/>
         </p:spPr>
         <p:txBody>
           <a:bodyPr wrap="square" rtlCol="0" anchor="t"/>
           <a:lstStyle/>
           <a:p>
-            <a:pPr marL="0" indent="0" algn="l">
+            <a:pPr algn="l" indent="0" marL="0">
               <a:lnSpc>
                 <a:spcPct val="115000"/>
               </a:lnSpc>
@@ -6436,19 +6817,25 @@
                 <a:solidFill>
                   <a:srgbClr val="1F4E9C"/>
                 </a:solidFill>
-                <a:latin typeface="微软雅黑" panose="020B0503020204020204" pitchFamily="34" charset="-122"/>
-                <a:ea typeface="微软雅黑" panose="020B0503020204020204" pitchFamily="34" charset="-122"/>
-                <a:cs typeface="微软雅黑" panose="020B0503020204020204" pitchFamily="34" charset="-120"/>
+                <a:latin typeface="微软雅黑" pitchFamily="34" charset="0"/>
+                <a:ea typeface="微软雅黑" pitchFamily="34" charset="-122"/>
+                <a:cs typeface="微软雅黑" pitchFamily="34" charset="-120"/>
               </a:rPr>
               <a:t>•  </a:t>
             </a:r>
+            <a:pPr algn="l" indent="0" marL="0">
+              <a:lnSpc>
+                <a:spcPct val="115000"/>
+              </a:lnSpc>
+              <a:buNone/>
+            </a:pPr>
             <a:r>
               <a:rPr lang="en-US" sz="1800" dirty="0">
                 <a:solidFill>
                   <a:srgbClr val="000000"/>
                 </a:solidFill>
               </a:rPr>
-              <a:t>迭代靠循环，一层格子从头跑到尾；递归靠调用，层数随问题展开</a:t>
+              <a:t>忘写终止条件：一层层调下去，栈被撑爆，程序崩溃</a:t>
             </a:r>
             <a:endParaRPr lang="en-US" sz="1800" dirty="0"/>
           </a:p>
@@ -6469,12 +6856,13 @@
             <a:avLst/>
           </a:prstGeom>
           <a:noFill/>
+          <a:ln/>
         </p:spPr>
         <p:txBody>
           <a:bodyPr wrap="square" rtlCol="0" anchor="t"/>
           <a:lstStyle/>
           <a:p>
-            <a:pPr marL="0" indent="0" algn="l">
+            <a:pPr algn="l" indent="0" marL="0">
               <a:lnSpc>
                 <a:spcPct val="115000"/>
               </a:lnSpc>
@@ -6485,19 +6873,25 @@
                 <a:solidFill>
                   <a:srgbClr val="1F4E9C"/>
                 </a:solidFill>
-                <a:latin typeface="微软雅黑" panose="020B0503020204020204" pitchFamily="34" charset="-122"/>
-                <a:ea typeface="微软雅黑" panose="020B0503020204020204" pitchFamily="34" charset="-122"/>
-                <a:cs typeface="微软雅黑" panose="020B0503020204020204" pitchFamily="34" charset="-120"/>
+                <a:latin typeface="微软雅黑" pitchFamily="34" charset="0"/>
+                <a:ea typeface="微软雅黑" pitchFamily="34" charset="-122"/>
+                <a:cs typeface="微软雅黑" pitchFamily="34" charset="-120"/>
               </a:rPr>
               <a:t>•  </a:t>
             </a:r>
+            <a:pPr algn="l" indent="0" marL="0">
+              <a:lnSpc>
+                <a:spcPct val="115000"/>
+              </a:lnSpc>
+              <a:buNone/>
+            </a:pPr>
             <a:r>
               <a:rPr lang="en-US" sz="1800" dirty="0">
                 <a:solidFill>
                   <a:srgbClr val="000000"/>
                 </a:solidFill>
               </a:rPr>
-              <a:t>阶乘这种问题，迭代更省；递归的优势在结构自带层次的问题上</a:t>
+              <a:t>斐波那契的写法里，同样的子问题被反复算，n稍大就慢到不能忍</a:t>
             </a:r>
             <a:endParaRPr lang="en-US" sz="1800" dirty="0"/>
           </a:p>
@@ -6518,12 +6912,13 @@
             <a:avLst/>
           </a:prstGeom>
           <a:noFill/>
+          <a:ln/>
         </p:spPr>
         <p:txBody>
           <a:bodyPr wrap="square" rtlCol="0" anchor="t"/>
           <a:lstStyle/>
           <a:p>
-            <a:pPr marL="0" indent="0" algn="l">
+            <a:pPr algn="l" indent="0" marL="0">
               <a:lnSpc>
                 <a:spcPct val="115000"/>
               </a:lnSpc>
@@ -6534,19 +6929,25 @@
                 <a:solidFill>
                   <a:srgbClr val="1F4E9C"/>
                 </a:solidFill>
-                <a:latin typeface="微软雅黑" panose="020B0503020204020204" pitchFamily="34" charset="-122"/>
-                <a:ea typeface="微软雅黑" panose="020B0503020204020204" pitchFamily="34" charset="-122"/>
-                <a:cs typeface="微软雅黑" panose="020B0503020204020204" pitchFamily="34" charset="-120"/>
+                <a:latin typeface="微软雅黑" pitchFamily="34" charset="0"/>
+                <a:ea typeface="微软雅黑" pitchFamily="34" charset="-122"/>
+                <a:cs typeface="微软雅黑" pitchFamily="34" charset="-120"/>
               </a:rPr>
               <a:t>•  </a:t>
             </a:r>
+            <a:pPr algn="l" indent="0" marL="0">
+              <a:lnSpc>
+                <a:spcPct val="115000"/>
+              </a:lnSpc>
+              <a:buNone/>
+            </a:pPr>
             <a:r>
               <a:rPr lang="en-US" sz="1800" dirty="0">
                 <a:solidFill>
                   <a:srgbClr val="000000"/>
                 </a:solidFill>
               </a:rPr>
-              <a:t>两种都要会：读代码要都认得，写代码按问题选</a:t>
+              <a:t>规矩：写递归先写终止条件；看见重复计算，知道有更聪明的记结果写法</a:t>
             </a:r>
             <a:endParaRPr lang="en-US" sz="1800" dirty="0"/>
           </a:p>
@@ -6560,9 +6961,9 @@
 </p:sld>
 </file>
 
-<file path=ppt/slides/slide7.xml><?xml version="1.0" encoding="utf-8"?>
+<file path=ppt/slides/slide8.xml><?xml version="1.0" encoding="utf-8"?>
 <p:sld xmlns:a="http://schemas.openxmlformats.org/drawingml/2006/main" xmlns:r="http://schemas.openxmlformats.org/officeDocument/2006/relationships" xmlns:p="http://schemas.openxmlformats.org/presentationml/2006/main">
-  <p:cSld>
+  <p:cSld name="Slide 8">
     <p:bg>
       <p:bgPr>
         <a:blipFill dpi="0" rotWithShape="1">
@@ -6606,12 +7007,13 @@
             <a:avLst/>
           </a:prstGeom>
           <a:noFill/>
+          <a:ln/>
         </p:spPr>
         <p:txBody>
           <a:bodyPr wrap="square" rtlCol="0" anchor="ctr"/>
           <a:lstStyle/>
           <a:p>
-            <a:pPr marL="0" indent="0" algn="r">
+            <a:pPr algn="r" indent="0" marL="0">
               <a:buNone/>
             </a:pPr>
             <a:r>
@@ -6619,11 +7021,11 @@
                 <a:solidFill>
                   <a:srgbClr val="8A9099"/>
                 </a:solidFill>
-                <a:latin typeface="微软雅黑" panose="020B0503020204020204" pitchFamily="34" charset="-122"/>
-                <a:ea typeface="微软雅黑" panose="020B0503020204020204" pitchFamily="34" charset="-122"/>
-                <a:cs typeface="微软雅黑" panose="020B0503020204020204" pitchFamily="34" charset="-120"/>
-              </a:rPr>
-              <a:t>7 / 16</a:t>
+                <a:latin typeface="微软雅黑" pitchFamily="34" charset="0"/>
+                <a:ea typeface="微软雅黑" pitchFamily="34" charset="-122"/>
+                <a:cs typeface="微软雅黑" pitchFamily="34" charset="-120"/>
+              </a:rPr>
+              <a:t>8 / 15</a:t>
             </a:r>
             <a:endParaRPr lang="en-US" sz="1000" dirty="0"/>
           </a:p>
@@ -6644,12 +7046,13 @@
             <a:avLst/>
           </a:prstGeom>
           <a:noFill/>
+          <a:ln/>
         </p:spPr>
         <p:txBody>
           <a:bodyPr wrap="square" rtlCol="0" anchor="ctr"/>
           <a:lstStyle/>
           <a:p>
-            <a:pPr marL="0" indent="0" algn="l">
+            <a:pPr algn="l" indent="0" marL="0">
               <a:buNone/>
             </a:pPr>
             <a:r>
@@ -6657,11 +7060,11 @@
                 <a:solidFill>
                   <a:srgbClr val="1F4E9C"/>
                 </a:solidFill>
-                <a:latin typeface="微软雅黑" panose="020B0503020204020204" pitchFamily="34" charset="-122"/>
-                <a:ea typeface="微软雅黑" panose="020B0503020204020204" pitchFamily="34" charset="-122"/>
-                <a:cs typeface="微软雅黑" panose="020B0503020204020204" pitchFamily="34" charset="-120"/>
-              </a:rPr>
-              <a:t>两个事故</a:t>
+                <a:latin typeface="微软雅黑" pitchFamily="34" charset="0"/>
+                <a:ea typeface="微软雅黑" pitchFamily="34" charset="-122"/>
+                <a:cs typeface="微软雅黑" pitchFamily="34" charset="-120"/>
+              </a:rPr>
+              <a:t>综合实战</a:t>
             </a:r>
             <a:endParaRPr lang="en-US" sz="1400" dirty="0"/>
           </a:p>
@@ -6682,12 +7085,13 @@
             <a:avLst/>
           </a:prstGeom>
           <a:noFill/>
+          <a:ln/>
         </p:spPr>
         <p:txBody>
           <a:bodyPr wrap="square" rtlCol="0" anchor="ctr"/>
           <a:lstStyle/>
           <a:p>
-            <a:pPr marL="0" indent="0" algn="l">
+            <a:pPr algn="l" indent="0" marL="0">
               <a:buNone/>
             </a:pPr>
             <a:r>
@@ -6695,11 +7099,11 @@
                 <a:solidFill>
                   <a:srgbClr val="1F2329"/>
                 </a:solidFill>
-                <a:latin typeface="微软雅黑" panose="020B0503020204020204" pitchFamily="34" charset="-122"/>
-                <a:ea typeface="微软雅黑" panose="020B0503020204020204" pitchFamily="34" charset="-122"/>
-                <a:cs typeface="微软雅黑" panose="020B0503020204020204" pitchFamily="34" charset="-120"/>
-              </a:rPr>
-              <a:t>递归的两大事故：无限递归与重复爆炸</a:t>
+                <a:latin typeface="微软雅黑" pitchFamily="34" charset="0"/>
+                <a:ea typeface="微软雅黑" pitchFamily="34" charset="-122"/>
+                <a:cs typeface="微软雅黑" pitchFamily="34" charset="-120"/>
+              </a:rPr>
+              <a:t>把四样工具装进一个能跑的程序</a:t>
             </a:r>
             <a:endParaRPr lang="en-US" sz="2800" dirty="0"/>
           </a:p>
@@ -6707,14 +7111,182 @@
       </p:sp>
       <p:sp>
         <p:nvSpPr>
-          <p:cNvPr id="5" name="Shape 3"/>
-          <p:cNvSpPr/>
-          <p:nvPr/>
-        </p:nvSpPr>
-        <p:spPr>
-          <a:xfrm>
-            <a:off x="822960" y="2395728"/>
-            <a:ext cx="10545775" cy="1508760"/>
+          <p:cNvPr id="5" name="Text 3"/>
+          <p:cNvSpPr/>
+          <p:nvPr/>
+        </p:nvSpPr>
+        <p:spPr>
+          <a:xfrm>
+            <a:off x="896112" y="2395728"/>
+            <a:ext cx="10454335" cy="397764"/>
+          </a:xfrm>
+          <a:prstGeom prst="rect">
+            <a:avLst/>
+          </a:prstGeom>
+          <a:noFill/>
+          <a:ln/>
+        </p:spPr>
+        <p:txBody>
+          <a:bodyPr wrap="square" rtlCol="0" anchor="t"/>
+          <a:lstStyle/>
+          <a:p>
+            <a:pPr algn="l" indent="0" marL="0">
+              <a:lnSpc>
+                <a:spcPct val="115000"/>
+              </a:lnSpc>
+              <a:buNone/>
+            </a:pPr>
+            <a:r>
+              <a:rPr lang="en-US" sz="1800" b="1" dirty="0">
+                <a:solidFill>
+                  <a:srgbClr val="1F4E9C"/>
+                </a:solidFill>
+                <a:latin typeface="微软雅黑" pitchFamily="34" charset="0"/>
+                <a:ea typeface="微软雅黑" pitchFamily="34" charset="-122"/>
+                <a:cs typeface="微软雅黑" pitchFamily="34" charset="-120"/>
+              </a:rPr>
+              <a:t>•  </a:t>
+            </a:r>
+            <a:pPr algn="l" indent="0" marL="0">
+              <a:lnSpc>
+                <a:spcPct val="115000"/>
+              </a:lnSpc>
+              <a:buNone/>
+            </a:pPr>
+            <a:r>
+              <a:rPr lang="en-US" sz="1800" dirty="0">
+                <a:solidFill>
+                  <a:srgbClr val="000000"/>
+                </a:solidFill>
+              </a:rPr>
+              <a:t>目标不是学顺序表和链表：插入删除、头结点、查找那些是数据结构课的内容</a:t>
+            </a:r>
+            <a:endParaRPr lang="en-US" sz="1800" dirty="0"/>
+          </a:p>
+        </p:txBody>
+      </p:sp>
+      <p:sp>
+        <p:nvSpPr>
+          <p:cNvPr id="6" name="Text 4"/>
+          <p:cNvSpPr/>
+          <p:nvPr/>
+        </p:nvSpPr>
+        <p:spPr>
+          <a:xfrm>
+            <a:off x="896112" y="2866644"/>
+            <a:ext cx="10454335" cy="397764"/>
+          </a:xfrm>
+          <a:prstGeom prst="rect">
+            <a:avLst/>
+          </a:prstGeom>
+          <a:noFill/>
+          <a:ln/>
+        </p:spPr>
+        <p:txBody>
+          <a:bodyPr wrap="square" rtlCol="0" anchor="t"/>
+          <a:lstStyle/>
+          <a:p>
+            <a:pPr algn="l" indent="0" marL="0">
+              <a:lnSpc>
+                <a:spcPct val="115000"/>
+              </a:lnSpc>
+              <a:buNone/>
+            </a:pPr>
+            <a:r>
+              <a:rPr lang="en-US" sz="1800" b="1" dirty="0">
+                <a:solidFill>
+                  <a:srgbClr val="1F4E9C"/>
+                </a:solidFill>
+                <a:latin typeface="微软雅黑" pitchFamily="34" charset="0"/>
+                <a:ea typeface="微软雅黑" pitchFamily="34" charset="-122"/>
+                <a:cs typeface="微软雅黑" pitchFamily="34" charset="-120"/>
+              </a:rPr>
+              <a:t>•  </a:t>
+            </a:r>
+            <a:pPr algn="l" indent="0" marL="0">
+              <a:lnSpc>
+                <a:spcPct val="115000"/>
+              </a:lnSpc>
+              <a:buNone/>
+            </a:pPr>
+            <a:r>
+              <a:rPr lang="en-US" sz="1800" dirty="0">
+                <a:solidFill>
+                  <a:srgbClr val="000000"/>
+                </a:solidFill>
+              </a:rPr>
+              <a:t>今天只练四样工具的组合：结构体、指针、动态内存、引用传参</a:t>
+            </a:r>
+            <a:endParaRPr lang="en-US" sz="1800" dirty="0"/>
+          </a:p>
+        </p:txBody>
+      </p:sp>
+      <p:sp>
+        <p:nvSpPr>
+          <p:cNvPr id="7" name="Text 5"/>
+          <p:cNvSpPr/>
+          <p:nvPr/>
+        </p:nvSpPr>
+        <p:spPr>
+          <a:xfrm>
+            <a:off x="896112" y="3337560"/>
+            <a:ext cx="10454335" cy="397764"/>
+          </a:xfrm>
+          <a:prstGeom prst="rect">
+            <a:avLst/>
+          </a:prstGeom>
+          <a:noFill/>
+          <a:ln/>
+        </p:spPr>
+        <p:txBody>
+          <a:bodyPr wrap="square" rtlCol="0" anchor="t"/>
+          <a:lstStyle/>
+          <a:p>
+            <a:pPr algn="l" indent="0" marL="0">
+              <a:lnSpc>
+                <a:spcPct val="115000"/>
+              </a:lnSpc>
+              <a:buNone/>
+            </a:pPr>
+            <a:r>
+              <a:rPr lang="en-US" sz="1800" b="1" dirty="0">
+                <a:solidFill>
+                  <a:srgbClr val="1F4E9C"/>
+                </a:solidFill>
+                <a:latin typeface="微软雅黑" pitchFamily="34" charset="0"/>
+                <a:ea typeface="微软雅黑" pitchFamily="34" charset="-122"/>
+                <a:cs typeface="微软雅黑" pitchFamily="34" charset="-120"/>
+              </a:rPr>
+              <a:t>•  </a:t>
+            </a:r>
+            <a:pPr algn="l" indent="0" marL="0">
+              <a:lnSpc>
+                <a:spcPct val="115000"/>
+              </a:lnSpc>
+              <a:buNone/>
+            </a:pPr>
+            <a:r>
+              <a:rPr lang="en-US" sz="1800" dirty="0">
+                <a:solidFill>
+                  <a:srgbClr val="000000"/>
+                </a:solidFill>
+              </a:rPr>
+              <a:t>第一个组合：结构体里装数组，再配一个计数的成员</a:t>
+            </a:r>
+            <a:endParaRPr lang="en-US" sz="1800" dirty="0"/>
+          </a:p>
+        </p:txBody>
+      </p:sp>
+      <p:sp>
+        <p:nvSpPr>
+          <p:cNvPr id="8" name="Shape 6"/>
+          <p:cNvSpPr/>
+          <p:nvPr/>
+        </p:nvSpPr>
+        <p:spPr>
+          <a:xfrm>
+            <a:off x="822960" y="3899916"/>
+            <a:ext cx="10545775" cy="1746504"/>
           </a:xfrm>
           <a:prstGeom prst="rect">
             <a:avLst/>
@@ -6722,18 +7294,19 @@
           <a:solidFill>
             <a:srgbClr val="F7F9FC"/>
           </a:solidFill>
-        </p:spPr>
-      </p:sp>
-      <p:sp>
-        <p:nvSpPr>
-          <p:cNvPr id="6" name="Shape 4"/>
-          <p:cNvSpPr/>
-          <p:nvPr/>
-        </p:nvSpPr>
-        <p:spPr>
-          <a:xfrm>
-            <a:off x="822960" y="2395728"/>
-            <a:ext cx="50292" cy="1508760"/>
+          <a:ln/>
+        </p:spPr>
+      </p:sp>
+      <p:sp>
+        <p:nvSpPr>
+          <p:cNvPr id="9" name="Shape 7"/>
+          <p:cNvSpPr/>
+          <p:nvPr/>
+        </p:nvSpPr>
+        <p:spPr>
+          <a:xfrm>
+            <a:off x="822960" y="3899916"/>
+            <a:ext cx="50292" cy="1746504"/>
           </a:xfrm>
           <a:prstGeom prst="rect">
             <a:avLst/>
@@ -6741,29 +7314,31 @@
           <a:solidFill>
             <a:srgbClr val="1F4E9C"/>
           </a:solidFill>
-        </p:spPr>
-      </p:sp>
-      <p:sp>
-        <p:nvSpPr>
-          <p:cNvPr id="7" name="Text 5"/>
-          <p:cNvSpPr/>
-          <p:nvPr/>
-        </p:nvSpPr>
-        <p:spPr>
-          <a:xfrm>
-            <a:off x="1078992" y="2505456"/>
-            <a:ext cx="10033711" cy="1289304"/>
-          </a:xfrm>
-          <a:prstGeom prst="rect">
-            <a:avLst/>
-          </a:prstGeom>
-          <a:noFill/>
+          <a:ln/>
+        </p:spPr>
+      </p:sp>
+      <p:sp>
+        <p:nvSpPr>
+          <p:cNvPr id="10" name="Text 8"/>
+          <p:cNvSpPr/>
+          <p:nvPr/>
+        </p:nvSpPr>
+        <p:spPr>
+          <a:xfrm>
+            <a:off x="1078992" y="4009644"/>
+            <a:ext cx="10033711" cy="1527048"/>
+          </a:xfrm>
+          <a:prstGeom prst="rect">
+            <a:avLst/>
+          </a:prstGeom>
+          <a:noFill/>
+          <a:ln/>
         </p:spPr>
         <p:txBody>
           <a:bodyPr wrap="square" rtlCol="0" anchor="t"/>
           <a:lstStyle/>
           <a:p>
-            <a:pPr marL="0" indent="0" algn="l">
+            <a:pPr algn="l" indent="0" marL="0">
               <a:lnSpc>
                 <a:spcPct val="125000"/>
               </a:lnSpc>
@@ -6774,164 +7349,18 @@
                 <a:solidFill>
                   <a:srgbClr val="1F2329"/>
                 </a:solidFill>
-                <a:latin typeface="Consolas" panose="020B0609020204030204" pitchFamily="34" charset="0"/>
-                <a:ea typeface="Consolas" panose="020B0609020204030204" pitchFamily="34" charset="-122"/>
-                <a:cs typeface="Consolas" panose="020B0609020204030204" pitchFamily="34" charset="-120"/>
-              </a:rPr>
-              <a:t>int fib(int n){
-    if(n &lt;= 1) return n;
-    return fib(n - 1) + fib(n - 2);
-}
+                <a:latin typeface="Consolas" pitchFamily="34" charset="0"/>
+                <a:ea typeface="Consolas" pitchFamily="34" charset="-122"/>
+                <a:cs typeface="Consolas" pitchFamily="34" charset="-120"/>
+              </a:rPr>
+              <a:t>struct List {
+    int data[10];    // 数据：结构体里装数组
+    int length;      // 计数：数组自己不知道存了几个
+};
+void initList(struct List &amp;L){ L.length = 0; }   // 引用传参改外面的表
 </a:t>
             </a:r>
             <a:endParaRPr lang="en-US" sz="1400" dirty="0"/>
-          </a:p>
-        </p:txBody>
-      </p:sp>
-      <p:sp>
-        <p:nvSpPr>
-          <p:cNvPr id="8" name="Text 6"/>
-          <p:cNvSpPr/>
-          <p:nvPr/>
-        </p:nvSpPr>
-        <p:spPr>
-          <a:xfrm>
-            <a:off x="896112" y="4105656"/>
-            <a:ext cx="10454335" cy="397764"/>
-          </a:xfrm>
-          <a:prstGeom prst="rect">
-            <a:avLst/>
-          </a:prstGeom>
-          <a:noFill/>
-        </p:spPr>
-        <p:txBody>
-          <a:bodyPr wrap="square" rtlCol="0" anchor="t"/>
-          <a:lstStyle/>
-          <a:p>
-            <a:pPr marL="0" indent="0" algn="l">
-              <a:lnSpc>
-                <a:spcPct val="115000"/>
-              </a:lnSpc>
-              <a:buNone/>
-            </a:pPr>
-            <a:r>
-              <a:rPr lang="en-US" sz="1800" b="1" dirty="0">
-                <a:solidFill>
-                  <a:srgbClr val="1F4E9C"/>
-                </a:solidFill>
-                <a:latin typeface="微软雅黑" panose="020B0503020204020204" pitchFamily="34" charset="-122"/>
-                <a:ea typeface="微软雅黑" panose="020B0503020204020204" pitchFamily="34" charset="-122"/>
-                <a:cs typeface="微软雅黑" panose="020B0503020204020204" pitchFamily="34" charset="-120"/>
-              </a:rPr>
-              <a:t>•  </a:t>
-            </a:r>
-            <a:r>
-              <a:rPr lang="en-US" sz="1800" dirty="0">
-                <a:solidFill>
-                  <a:srgbClr val="000000"/>
-                </a:solidFill>
-              </a:rPr>
-              <a:t>忘写终止条件：一层层调下去，栈被撑爆，程序崩溃</a:t>
-            </a:r>
-            <a:endParaRPr lang="en-US" sz="1800" dirty="0"/>
-          </a:p>
-        </p:txBody>
-      </p:sp>
-      <p:sp>
-        <p:nvSpPr>
-          <p:cNvPr id="9" name="Text 7"/>
-          <p:cNvSpPr/>
-          <p:nvPr/>
-        </p:nvSpPr>
-        <p:spPr>
-          <a:xfrm>
-            <a:off x="896112" y="4576572"/>
-            <a:ext cx="10454335" cy="397764"/>
-          </a:xfrm>
-          <a:prstGeom prst="rect">
-            <a:avLst/>
-          </a:prstGeom>
-          <a:noFill/>
-        </p:spPr>
-        <p:txBody>
-          <a:bodyPr wrap="square" rtlCol="0" anchor="t"/>
-          <a:lstStyle/>
-          <a:p>
-            <a:pPr marL="0" indent="0" algn="l">
-              <a:lnSpc>
-                <a:spcPct val="115000"/>
-              </a:lnSpc>
-              <a:buNone/>
-            </a:pPr>
-            <a:r>
-              <a:rPr lang="en-US" sz="1800" b="1" dirty="0">
-                <a:solidFill>
-                  <a:srgbClr val="1F4E9C"/>
-                </a:solidFill>
-                <a:latin typeface="微软雅黑" panose="020B0503020204020204" pitchFamily="34" charset="-122"/>
-                <a:ea typeface="微软雅黑" panose="020B0503020204020204" pitchFamily="34" charset="-122"/>
-                <a:cs typeface="微软雅黑" panose="020B0503020204020204" pitchFamily="34" charset="-120"/>
-              </a:rPr>
-              <a:t>•  </a:t>
-            </a:r>
-            <a:r>
-              <a:rPr lang="en-US" sz="1800" dirty="0">
-                <a:solidFill>
-                  <a:srgbClr val="000000"/>
-                </a:solidFill>
-              </a:rPr>
-              <a:t>斐波那契的写法里，同样的子问题被反复算，n稍大就慢到不能忍</a:t>
-            </a:r>
-            <a:endParaRPr lang="en-US" sz="1800" dirty="0"/>
-          </a:p>
-        </p:txBody>
-      </p:sp>
-      <p:sp>
-        <p:nvSpPr>
-          <p:cNvPr id="10" name="Text 8"/>
-          <p:cNvSpPr/>
-          <p:nvPr/>
-        </p:nvSpPr>
-        <p:spPr>
-          <a:xfrm>
-            <a:off x="896112" y="5047488"/>
-            <a:ext cx="10454335" cy="397764"/>
-          </a:xfrm>
-          <a:prstGeom prst="rect">
-            <a:avLst/>
-          </a:prstGeom>
-          <a:noFill/>
-        </p:spPr>
-        <p:txBody>
-          <a:bodyPr wrap="square" rtlCol="0" anchor="t"/>
-          <a:lstStyle/>
-          <a:p>
-            <a:pPr marL="0" indent="0" algn="l">
-              <a:lnSpc>
-                <a:spcPct val="115000"/>
-              </a:lnSpc>
-              <a:buNone/>
-            </a:pPr>
-            <a:r>
-              <a:rPr lang="en-US" sz="1800" b="1" dirty="0">
-                <a:solidFill>
-                  <a:srgbClr val="1F4E9C"/>
-                </a:solidFill>
-                <a:latin typeface="微软雅黑" panose="020B0503020204020204" pitchFamily="34" charset="-122"/>
-                <a:ea typeface="微软雅黑" panose="020B0503020204020204" pitchFamily="34" charset="-122"/>
-                <a:cs typeface="微软雅黑" panose="020B0503020204020204" pitchFamily="34" charset="-120"/>
-              </a:rPr>
-              <a:t>•  </a:t>
-            </a:r>
-            <a:r>
-              <a:rPr lang="en-US" sz="1800" dirty="0">
-                <a:solidFill>
-                  <a:srgbClr val="000000"/>
-                </a:solidFill>
-              </a:rPr>
-              <a:t>规矩：写递归先写终止条件；看见重复计算，知道有更聪明的记结果写法</a:t>
-            </a:r>
-            <a:endParaRPr lang="en-US" sz="1800" dirty="0"/>
           </a:p>
         </p:txBody>
       </p:sp>
@@ -6943,9 +7372,9 @@
 </p:sld>
 </file>
 
-<file path=ppt/slides/slide8.xml><?xml version="1.0" encoding="utf-8"?>
+<file path=ppt/slides/slide9.xml><?xml version="1.0" encoding="utf-8"?>
 <p:sld xmlns:a="http://schemas.openxmlformats.org/drawingml/2006/main" xmlns:r="http://schemas.openxmlformats.org/officeDocument/2006/relationships" xmlns:p="http://schemas.openxmlformats.org/presentationml/2006/main">
-  <p:cSld>
+  <p:cSld name="Slide 9">
     <p:bg>
       <p:bgPr>
         <a:blipFill dpi="0" rotWithShape="1">
@@ -6989,12 +7418,13 @@
             <a:avLst/>
           </a:prstGeom>
           <a:noFill/>
+          <a:ln/>
         </p:spPr>
         <p:txBody>
           <a:bodyPr wrap="square" rtlCol="0" anchor="ctr"/>
           <a:lstStyle/>
           <a:p>
-            <a:pPr marL="0" indent="0" algn="r">
+            <a:pPr algn="r" indent="0" marL="0">
               <a:buNone/>
             </a:pPr>
             <a:r>
@@ -7002,11 +7432,11 @@
                 <a:solidFill>
                   <a:srgbClr val="8A9099"/>
                 </a:solidFill>
-                <a:latin typeface="微软雅黑" panose="020B0503020204020204" pitchFamily="34" charset="-122"/>
-                <a:ea typeface="微软雅黑" panose="020B0503020204020204" pitchFamily="34" charset="-122"/>
-                <a:cs typeface="微软雅黑" panose="020B0503020204020204" pitchFamily="34" charset="-120"/>
-              </a:rPr>
-              <a:t>8 / 16</a:t>
+                <a:latin typeface="微软雅黑" pitchFamily="34" charset="0"/>
+                <a:ea typeface="微软雅黑" pitchFamily="34" charset="-122"/>
+                <a:cs typeface="微软雅黑" pitchFamily="34" charset="-120"/>
+              </a:rPr>
+              <a:t>9 / 15</a:t>
             </a:r>
             <a:endParaRPr lang="en-US" sz="1000" dirty="0"/>
           </a:p>
@@ -7027,12 +7457,13 @@
             <a:avLst/>
           </a:prstGeom>
           <a:noFill/>
+          <a:ln/>
         </p:spPr>
         <p:txBody>
           <a:bodyPr wrap="square" rtlCol="0" anchor="ctr"/>
           <a:lstStyle/>
           <a:p>
-            <a:pPr marL="0" indent="0" algn="l">
+            <a:pPr algn="l" indent="0" marL="0">
               <a:buNone/>
             </a:pPr>
             <a:r>
@@ -7040,11 +7471,11 @@
                 <a:solidFill>
                   <a:srgbClr val="1F4E9C"/>
                 </a:solidFill>
-                <a:latin typeface="微软雅黑" panose="020B0503020204020204" pitchFamily="34" charset="-122"/>
-                <a:ea typeface="微软雅黑" panose="020B0503020204020204" pitchFamily="34" charset="-122"/>
-                <a:cs typeface="微软雅黑" panose="020B0503020204020204" pitchFamily="34" charset="-120"/>
-              </a:rPr>
-              <a:t>综合实战</a:t>
+                <a:latin typeface="微软雅黑" pitchFamily="34" charset="0"/>
+                <a:ea typeface="微软雅黑" pitchFamily="34" charset="-122"/>
+                <a:cs typeface="微软雅黑" pitchFamily="34" charset="-120"/>
+              </a:rPr>
+              <a:t>结构体里装指针</a:t>
             </a:r>
             <a:endParaRPr lang="en-US" sz="1400" dirty="0"/>
           </a:p>
@@ -7065,12 +7496,13 @@
             <a:avLst/>
           </a:prstGeom>
           <a:noFill/>
+          <a:ln/>
         </p:spPr>
         <p:txBody>
           <a:bodyPr wrap="square" rtlCol="0" anchor="ctr"/>
           <a:lstStyle/>
           <a:p>
-            <a:pPr marL="0" indent="0" algn="l">
+            <a:pPr algn="l" indent="0" marL="0">
               <a:buNone/>
             </a:pPr>
             <a:r>
@@ -7078,11 +7510,11 @@
                 <a:solidFill>
                   <a:srgbClr val="1F2329"/>
                 </a:solidFill>
-                <a:latin typeface="微软雅黑" panose="020B0503020204020204" pitchFamily="34" charset="-122"/>
-                <a:ea typeface="微软雅黑" panose="020B0503020204020204" pitchFamily="34" charset="-122"/>
-                <a:cs typeface="微软雅黑" panose="020B0503020204020204" pitchFamily="34" charset="-120"/>
-              </a:rPr>
-              <a:t>把四样工具装进一个能跑的程序</a:t>
+                <a:latin typeface="微软雅黑" pitchFamily="34" charset="0"/>
+                <a:ea typeface="微软雅黑" pitchFamily="34" charset="-122"/>
+                <a:cs typeface="微软雅黑" pitchFamily="34" charset="-120"/>
+              </a:rPr>
+              <a:t>自引用：成员是指向同类结构体的指针</a:t>
             </a:r>
             <a:endParaRPr lang="en-US" sz="2800" dirty="0"/>
           </a:p>
@@ -7090,161 +7522,14 @@
       </p:sp>
       <p:sp>
         <p:nvSpPr>
-          <p:cNvPr id="5" name="Text 3"/>
-          <p:cNvSpPr/>
-          <p:nvPr/>
-        </p:nvSpPr>
-        <p:spPr>
-          <a:xfrm>
-            <a:off x="896112" y="2395728"/>
-            <a:ext cx="10454335" cy="397764"/>
-          </a:xfrm>
-          <a:prstGeom prst="rect">
-            <a:avLst/>
-          </a:prstGeom>
-          <a:noFill/>
-        </p:spPr>
-        <p:txBody>
-          <a:bodyPr wrap="square" rtlCol="0" anchor="t"/>
-          <a:lstStyle/>
-          <a:p>
-            <a:pPr marL="0" indent="0" algn="l">
-              <a:lnSpc>
-                <a:spcPct val="115000"/>
-              </a:lnSpc>
-              <a:buNone/>
-            </a:pPr>
-            <a:r>
-              <a:rPr lang="en-US" sz="1800" b="1" dirty="0">
-                <a:solidFill>
-                  <a:srgbClr val="1F4E9C"/>
-                </a:solidFill>
-                <a:latin typeface="微软雅黑" panose="020B0503020204020204" pitchFamily="34" charset="-122"/>
-                <a:ea typeface="微软雅黑" panose="020B0503020204020204" pitchFamily="34" charset="-122"/>
-                <a:cs typeface="微软雅黑" panose="020B0503020204020204" pitchFamily="34" charset="-120"/>
-              </a:rPr>
-              <a:t>•  </a:t>
-            </a:r>
-            <a:r>
-              <a:rPr lang="en-US" sz="1800" dirty="0">
-                <a:solidFill>
-                  <a:srgbClr val="000000"/>
-                </a:solidFill>
-              </a:rPr>
-              <a:t>目标不是学顺序表和链表：插入删除、头结点、查找那些是数据结构课的内容</a:t>
-            </a:r>
-            <a:endParaRPr lang="en-US" sz="1800" dirty="0"/>
-          </a:p>
-        </p:txBody>
-      </p:sp>
-      <p:sp>
-        <p:nvSpPr>
-          <p:cNvPr id="6" name="Text 4"/>
-          <p:cNvSpPr/>
-          <p:nvPr/>
-        </p:nvSpPr>
-        <p:spPr>
-          <a:xfrm>
-            <a:off x="896112" y="2866644"/>
-            <a:ext cx="10454335" cy="397764"/>
-          </a:xfrm>
-          <a:prstGeom prst="rect">
-            <a:avLst/>
-          </a:prstGeom>
-          <a:noFill/>
-        </p:spPr>
-        <p:txBody>
-          <a:bodyPr wrap="square" rtlCol="0" anchor="t"/>
-          <a:lstStyle/>
-          <a:p>
-            <a:pPr marL="0" indent="0" algn="l">
-              <a:lnSpc>
-                <a:spcPct val="115000"/>
-              </a:lnSpc>
-              <a:buNone/>
-            </a:pPr>
-            <a:r>
-              <a:rPr lang="en-US" sz="1800" b="1" dirty="0">
-                <a:solidFill>
-                  <a:srgbClr val="1F4E9C"/>
-                </a:solidFill>
-                <a:latin typeface="微软雅黑" panose="020B0503020204020204" pitchFamily="34" charset="-122"/>
-                <a:ea typeface="微软雅黑" panose="020B0503020204020204" pitchFamily="34" charset="-122"/>
-                <a:cs typeface="微软雅黑" panose="020B0503020204020204" pitchFamily="34" charset="-120"/>
-              </a:rPr>
-              <a:t>•  </a:t>
-            </a:r>
-            <a:r>
-              <a:rPr lang="en-US" sz="1800" dirty="0">
-                <a:solidFill>
-                  <a:srgbClr val="000000"/>
-                </a:solidFill>
-              </a:rPr>
-              <a:t>今天只练四样工具的组合：结构体、指针、动态内存、引用传参</a:t>
-            </a:r>
-            <a:endParaRPr lang="en-US" sz="1800" dirty="0"/>
-          </a:p>
-        </p:txBody>
-      </p:sp>
-      <p:sp>
-        <p:nvSpPr>
-          <p:cNvPr id="7" name="Text 5"/>
-          <p:cNvSpPr/>
-          <p:nvPr/>
-        </p:nvSpPr>
-        <p:spPr>
-          <a:xfrm>
-            <a:off x="896112" y="3337560"/>
-            <a:ext cx="10454335" cy="397764"/>
-          </a:xfrm>
-          <a:prstGeom prst="rect">
-            <a:avLst/>
-          </a:prstGeom>
-          <a:noFill/>
-        </p:spPr>
-        <p:txBody>
-          <a:bodyPr wrap="square" rtlCol="0" anchor="t"/>
-          <a:lstStyle/>
-          <a:p>
-            <a:pPr marL="0" indent="0" algn="l">
-              <a:lnSpc>
-                <a:spcPct val="115000"/>
-              </a:lnSpc>
-              <a:buNone/>
-            </a:pPr>
-            <a:r>
-              <a:rPr lang="en-US" sz="1800" b="1" dirty="0">
-                <a:solidFill>
-                  <a:srgbClr val="1F4E9C"/>
-                </a:solidFill>
-                <a:latin typeface="微软雅黑" panose="020B0503020204020204" pitchFamily="34" charset="-122"/>
-                <a:ea typeface="微软雅黑" panose="020B0503020204020204" pitchFamily="34" charset="-122"/>
-                <a:cs typeface="微软雅黑" panose="020B0503020204020204" pitchFamily="34" charset="-120"/>
-              </a:rPr>
-              <a:t>•  </a:t>
-            </a:r>
-            <a:r>
-              <a:rPr lang="en-US" sz="1800" dirty="0">
-                <a:solidFill>
-                  <a:srgbClr val="000000"/>
-                </a:solidFill>
-              </a:rPr>
-              <a:t>第一个组合：结构体里装数组，再配一个计数的成员</a:t>
-            </a:r>
-            <a:endParaRPr lang="en-US" sz="1800" dirty="0"/>
-          </a:p>
-        </p:txBody>
-      </p:sp>
-      <p:sp>
-        <p:nvSpPr>
-          <p:cNvPr id="8" name="Shape 6"/>
-          <p:cNvSpPr/>
-          <p:nvPr/>
-        </p:nvSpPr>
-        <p:spPr>
-          <a:xfrm>
-            <a:off x="822960" y="3900170"/>
-            <a:ext cx="10546080" cy="2041525"/>
+          <p:cNvPr id="5" name="Shape 3"/>
+          <p:cNvSpPr/>
+          <p:nvPr/>
+        </p:nvSpPr>
+        <p:spPr>
+          <a:xfrm>
+            <a:off x="822960" y="2395728"/>
+            <a:ext cx="10545775" cy="1508760"/>
           </a:xfrm>
           <a:prstGeom prst="rect">
             <a:avLst/>
@@ -7252,18 +7537,19 @@
           <a:solidFill>
             <a:srgbClr val="F7F9FC"/>
           </a:solidFill>
-        </p:spPr>
-      </p:sp>
-      <p:sp>
-        <p:nvSpPr>
-          <p:cNvPr id="9" name="Shape 7"/>
-          <p:cNvSpPr/>
-          <p:nvPr/>
-        </p:nvSpPr>
-        <p:spPr>
-          <a:xfrm>
-            <a:off x="822960" y="3900170"/>
-            <a:ext cx="76200" cy="2041525"/>
+          <a:ln/>
+        </p:spPr>
+      </p:sp>
+      <p:sp>
+        <p:nvSpPr>
+          <p:cNvPr id="6" name="Shape 4"/>
+          <p:cNvSpPr/>
+          <p:nvPr/>
+        </p:nvSpPr>
+        <p:spPr>
+          <a:xfrm>
+            <a:off x="822960" y="2395728"/>
+            <a:ext cx="50292" cy="1508760"/>
           </a:xfrm>
           <a:prstGeom prst="rect">
             <a:avLst/>
@@ -7271,270 +7557,7 @@
           <a:solidFill>
             <a:srgbClr val="1F4E9C"/>
           </a:solidFill>
-        </p:spPr>
-      </p:sp>
-      <p:sp>
-        <p:nvSpPr>
-          <p:cNvPr id="10" name="Text 8"/>
-          <p:cNvSpPr/>
-          <p:nvPr/>
-        </p:nvSpPr>
-        <p:spPr>
-          <a:xfrm>
-            <a:off x="1078865" y="4009390"/>
-            <a:ext cx="10033635" cy="1845945"/>
-          </a:xfrm>
-          <a:prstGeom prst="rect">
-            <a:avLst/>
-          </a:prstGeom>
-          <a:noFill/>
-        </p:spPr>
-        <p:txBody>
-          <a:bodyPr wrap="square" rtlCol="0" anchor="t"/>
-          <a:lstStyle/>
-          <a:p>
-            <a:pPr marL="0" indent="0" algn="l">
-              <a:lnSpc>
-                <a:spcPct val="125000"/>
-              </a:lnSpc>
-              <a:buNone/>
-            </a:pPr>
-            <a:r>
-              <a:rPr lang="en-US" sz="1400" dirty="0">
-                <a:solidFill>
-                  <a:srgbClr val="1F2329"/>
-                </a:solidFill>
-                <a:latin typeface="Consolas" panose="020B0609020204030204" pitchFamily="34" charset="0"/>
-                <a:ea typeface="Consolas" panose="020B0609020204030204" pitchFamily="34" charset="-122"/>
-                <a:cs typeface="Consolas" panose="020B0609020204030204" pitchFamily="34" charset="-120"/>
-              </a:rPr>
-              <a:t>struct List {
-    int data[10];    // 数据：结构体里装数组
-    int length;      // 计数：数组自己不知道存了几个
-};
-void initList(struct List &amp;L){ L.length = 0; }   // 引用传参改外面的表</a:t>
-            </a:r>
-            <a:endParaRPr lang="en-US" sz="1400" dirty="0">
-              <a:solidFill>
-                <a:srgbClr val="1F2329"/>
-              </a:solidFill>
-              <a:latin typeface="Consolas" panose="020B0609020204030204" pitchFamily="34" charset="0"/>
-              <a:ea typeface="Consolas" panose="020B0609020204030204" pitchFamily="34" charset="-122"/>
-              <a:cs typeface="Consolas" panose="020B0609020204030204" pitchFamily="34" charset="-120"/>
-            </a:endParaRPr>
-          </a:p>
-          <a:p>
-            <a:pPr marL="0" indent="0" algn="l">
-              <a:lnSpc>
-                <a:spcPct val="125000"/>
-              </a:lnSpc>
-              <a:buNone/>
-            </a:pPr>
-            <a:r>
-              <a:rPr lang="en-US" sz="1400" dirty="0">
-                <a:solidFill>
-                  <a:srgbClr val="1F2329"/>
-                </a:solidFill>
-                <a:latin typeface="Consolas" panose="020B0609020204030204" pitchFamily="34" charset="0"/>
-                <a:ea typeface="Consolas" panose="020B0609020204030204" pitchFamily="34" charset="-122"/>
-                <a:cs typeface="Consolas" panose="020B0609020204030204" pitchFamily="34" charset="-120"/>
-                <a:sym typeface="+mn-ea"/>
-              </a:rPr>
-              <a:t>void insert(struct List &amp;L, int x){ ... }</a:t>
-            </a:r>
-            <a:endParaRPr lang="en-US" sz="1400" dirty="0"/>
-          </a:p>
-        </p:txBody>
-      </p:sp>
-    </p:spTree>
-  </p:cSld>
-  <p:clrMapOvr>
-    <a:masterClrMapping/>
-  </p:clrMapOvr>
-</p:sld>
-</file>
-
-<file path=ppt/slides/slide9.xml><?xml version="1.0" encoding="utf-8"?>
-<p:sld xmlns:a="http://schemas.openxmlformats.org/drawingml/2006/main" xmlns:r="http://schemas.openxmlformats.org/officeDocument/2006/relationships" xmlns:p="http://schemas.openxmlformats.org/presentationml/2006/main">
-  <p:cSld>
-    <p:bg>
-      <p:bgPr>
-        <a:blipFill dpi="0" rotWithShape="1">
-          <a:blip r:embed="rId1">
-            <a:lum/>
-          </a:blip>
-          <a:srcRect/>
-          <a:stretch>
-            <a:fillRect/>
-          </a:stretch>
-        </a:blipFill>
-        <a:effectLst/>
-      </p:bgPr>
-    </p:bg>
-    <p:spTree>
-      <p:nvGrpSpPr>
-        <p:cNvPr id="1" name=""/>
-        <p:cNvGrpSpPr/>
-        <p:nvPr/>
-      </p:nvGrpSpPr>
-      <p:grpSpPr>
-        <a:xfrm>
-          <a:off x="0" y="0"/>
-          <a:ext cx="0" cy="0"/>
-          <a:chOff x="0" y="0"/>
-          <a:chExt cx="0" cy="0"/>
-        </a:xfrm>
-      </p:grpSpPr>
-      <p:sp>
-        <p:nvSpPr>
-          <p:cNvPr id="2" name="Text 0"/>
-          <p:cNvSpPr/>
-          <p:nvPr/>
-        </p:nvSpPr>
-        <p:spPr>
-          <a:xfrm>
-            <a:off x="10362895" y="6016752"/>
-            <a:ext cx="1463040" cy="320040"/>
-          </a:xfrm>
-          <a:prstGeom prst="rect">
-            <a:avLst/>
-          </a:prstGeom>
-          <a:noFill/>
-        </p:spPr>
-        <p:txBody>
-          <a:bodyPr wrap="square" rtlCol="0" anchor="ctr"/>
-          <a:lstStyle/>
-          <a:p>
-            <a:pPr marL="0" indent="0" algn="r">
-              <a:buNone/>
-            </a:pPr>
-            <a:r>
-              <a:rPr lang="en-US" sz="1000" dirty="0">
-                <a:solidFill>
-                  <a:srgbClr val="8A9099"/>
-                </a:solidFill>
-                <a:latin typeface="微软雅黑" panose="020B0503020204020204" pitchFamily="34" charset="-122"/>
-                <a:ea typeface="微软雅黑" panose="020B0503020204020204" pitchFamily="34" charset="-122"/>
-                <a:cs typeface="微软雅黑" panose="020B0503020204020204" pitchFamily="34" charset="-120"/>
-              </a:rPr>
-              <a:t>9 / 16</a:t>
-            </a:r>
-            <a:endParaRPr lang="en-US" sz="1000" dirty="0"/>
-          </a:p>
-        </p:txBody>
-      </p:sp>
-      <p:sp>
-        <p:nvSpPr>
-          <p:cNvPr id="3" name="Text 1"/>
-          <p:cNvSpPr/>
-          <p:nvPr/>
-        </p:nvSpPr>
-        <p:spPr>
-          <a:xfrm>
-            <a:off x="822960" y="960120"/>
-            <a:ext cx="10545775" cy="365760"/>
-          </a:xfrm>
-          <a:prstGeom prst="rect">
-            <a:avLst/>
-          </a:prstGeom>
-          <a:noFill/>
-        </p:spPr>
-        <p:txBody>
-          <a:bodyPr wrap="square" rtlCol="0" anchor="ctr"/>
-          <a:lstStyle/>
-          <a:p>
-            <a:pPr marL="0" indent="0" algn="l">
-              <a:buNone/>
-            </a:pPr>
-            <a:r>
-              <a:rPr lang="en-US" sz="1400" b="1" dirty="0">
-                <a:solidFill>
-                  <a:srgbClr val="1F4E9C"/>
-                </a:solidFill>
-                <a:latin typeface="微软雅黑" panose="020B0503020204020204" pitchFamily="34" charset="-122"/>
-                <a:ea typeface="微软雅黑" panose="020B0503020204020204" pitchFamily="34" charset="-122"/>
-                <a:cs typeface="微软雅黑" panose="020B0503020204020204" pitchFamily="34" charset="-120"/>
-              </a:rPr>
-              <a:t>结构体里装指针</a:t>
-            </a:r>
-            <a:endParaRPr lang="en-US" sz="1400" dirty="0"/>
-          </a:p>
-        </p:txBody>
-      </p:sp>
-      <p:sp>
-        <p:nvSpPr>
-          <p:cNvPr id="4" name="Text 2"/>
-          <p:cNvSpPr/>
-          <p:nvPr/>
-        </p:nvSpPr>
-        <p:spPr>
-          <a:xfrm>
-            <a:off x="822960" y="1344168"/>
-            <a:ext cx="10545775" cy="731520"/>
-          </a:xfrm>
-          <a:prstGeom prst="rect">
-            <a:avLst/>
-          </a:prstGeom>
-          <a:noFill/>
-        </p:spPr>
-        <p:txBody>
-          <a:bodyPr wrap="square" rtlCol="0" anchor="ctr"/>
-          <a:lstStyle/>
-          <a:p>
-            <a:pPr marL="0" indent="0" algn="l">
-              <a:buNone/>
-            </a:pPr>
-            <a:r>
-              <a:rPr lang="en-US" sz="2800" b="1" dirty="0">
-                <a:solidFill>
-                  <a:srgbClr val="1F2329"/>
-                </a:solidFill>
-                <a:latin typeface="微软雅黑" panose="020B0503020204020204" pitchFamily="34" charset="-122"/>
-                <a:ea typeface="微软雅黑" panose="020B0503020204020204" pitchFamily="34" charset="-122"/>
-                <a:cs typeface="微软雅黑" panose="020B0503020204020204" pitchFamily="34" charset="-120"/>
-              </a:rPr>
-              <a:t>自引用：成员是指向同类结构体的指针</a:t>
-            </a:r>
-            <a:endParaRPr lang="en-US" sz="2800" dirty="0"/>
-          </a:p>
-        </p:txBody>
-      </p:sp>
-      <p:sp>
-        <p:nvSpPr>
-          <p:cNvPr id="5" name="Shape 3"/>
-          <p:cNvSpPr/>
-          <p:nvPr/>
-        </p:nvSpPr>
-        <p:spPr>
-          <a:xfrm>
-            <a:off x="822960" y="2395728"/>
-            <a:ext cx="10545775" cy="1508760"/>
-          </a:xfrm>
-          <a:prstGeom prst="rect">
-            <a:avLst/>
-          </a:prstGeom>
-          <a:solidFill>
-            <a:srgbClr val="F7F9FC"/>
-          </a:solidFill>
-        </p:spPr>
-      </p:sp>
-      <p:sp>
-        <p:nvSpPr>
-          <p:cNvPr id="6" name="Shape 4"/>
-          <p:cNvSpPr/>
-          <p:nvPr/>
-        </p:nvSpPr>
-        <p:spPr>
-          <a:xfrm>
-            <a:off x="822960" y="2395728"/>
-            <a:ext cx="50292" cy="1508760"/>
-          </a:xfrm>
-          <a:prstGeom prst="rect">
-            <a:avLst/>
-          </a:prstGeom>
-          <a:solidFill>
-            <a:srgbClr val="1F4E9C"/>
-          </a:solidFill>
+          <a:ln/>
         </p:spPr>
       </p:sp>
       <p:sp>
@@ -7552,12 +7575,13 @@
             <a:avLst/>
           </a:prstGeom>
           <a:noFill/>
+          <a:ln/>
         </p:spPr>
         <p:txBody>
           <a:bodyPr wrap="square" rtlCol="0" anchor="t"/>
           <a:lstStyle/>
           <a:p>
-            <a:pPr marL="0" indent="0" algn="l">
+            <a:pPr algn="l" indent="0" marL="0">
               <a:lnSpc>
                 <a:spcPct val="125000"/>
               </a:lnSpc>
@@ -7568,9 +7592,9 @@
                 <a:solidFill>
                   <a:srgbClr val="1F2329"/>
                 </a:solidFill>
-                <a:latin typeface="Consolas" panose="020B0609020204030204" pitchFamily="34" charset="0"/>
-                <a:ea typeface="Consolas" panose="020B0609020204030204" pitchFamily="34" charset="-122"/>
-                <a:cs typeface="Consolas" panose="020B0609020204030204" pitchFamily="34" charset="-120"/>
+                <a:latin typeface="Consolas" pitchFamily="34" charset="0"/>
+                <a:ea typeface="Consolas" pitchFamily="34" charset="-122"/>
+                <a:cs typeface="Consolas" pitchFamily="34" charset="-120"/>
               </a:rPr>
               <a:t>struct Node {
     int data;              // 数据
@@ -7597,12 +7621,13 @@
             <a:avLst/>
           </a:prstGeom>
           <a:noFill/>
+          <a:ln/>
         </p:spPr>
         <p:txBody>
           <a:bodyPr wrap="square" rtlCol="0" anchor="t"/>
           <a:lstStyle/>
           <a:p>
-            <a:pPr marL="0" indent="0" algn="l">
+            <a:pPr algn="l" indent="0" marL="0">
               <a:lnSpc>
                 <a:spcPct val="115000"/>
               </a:lnSpc>
@@ -7613,12 +7638,18 @@
                 <a:solidFill>
                   <a:srgbClr val="1F4E9C"/>
                 </a:solidFill>
-                <a:latin typeface="微软雅黑" panose="020B0503020204020204" pitchFamily="34" charset="-122"/>
-                <a:ea typeface="微软雅黑" panose="020B0503020204020204" pitchFamily="34" charset="-122"/>
-                <a:cs typeface="微软雅黑" panose="020B0503020204020204" pitchFamily="34" charset="-120"/>
+                <a:latin typeface="微软雅黑" pitchFamily="34" charset="0"/>
+                <a:ea typeface="微软雅黑" pitchFamily="34" charset="-122"/>
+                <a:cs typeface="微软雅黑" pitchFamily="34" charset="-120"/>
               </a:rPr>
               <a:t>•  </a:t>
             </a:r>
+            <a:pPr algn="l" indent="0" marL="0">
+              <a:lnSpc>
+                <a:spcPct val="115000"/>
+              </a:lnSpc>
+              <a:buNone/>
+            </a:pPr>
             <a:r>
               <a:rPr lang="en-US" sz="1800" dirty="0">
                 <a:solidFill>
@@ -7646,12 +7677,13 @@
             <a:avLst/>
           </a:prstGeom>
           <a:noFill/>
+          <a:ln/>
         </p:spPr>
         <p:txBody>
           <a:bodyPr wrap="square" rtlCol="0" anchor="t"/>
           <a:lstStyle/>
           <a:p>
-            <a:pPr marL="0" indent="0" algn="l">
+            <a:pPr algn="l" indent="0" marL="0">
               <a:lnSpc>
                 <a:spcPct val="115000"/>
               </a:lnSpc>
@@ -7662,12 +7694,18 @@
                 <a:solidFill>
                   <a:srgbClr val="1F4E9C"/>
                 </a:solidFill>
-                <a:latin typeface="微软雅黑" panose="020B0503020204020204" pitchFamily="34" charset="-122"/>
-                <a:ea typeface="微软雅黑" panose="020B0503020204020204" pitchFamily="34" charset="-122"/>
-                <a:cs typeface="微软雅黑" panose="020B0503020204020204" pitchFamily="34" charset="-120"/>
+                <a:latin typeface="微软雅黑" pitchFamily="34" charset="0"/>
+                <a:ea typeface="微软雅黑" pitchFamily="34" charset="-122"/>
+                <a:cs typeface="微软雅黑" pitchFamily="34" charset="-120"/>
               </a:rPr>
               <a:t>•  </a:t>
             </a:r>
+            <a:pPr algn="l" indent="0" marL="0">
+              <a:lnSpc>
+                <a:spcPct val="115000"/>
+              </a:lnSpc>
+              <a:buNone/>
+            </a:pPr>
             <a:r>
               <a:rPr lang="en-US" sz="1800" dirty="0">
                 <a:solidFill>
@@ -7695,12 +7733,13 @@
             <a:avLst/>
           </a:prstGeom>
           <a:noFill/>
+          <a:ln/>
         </p:spPr>
         <p:txBody>
           <a:bodyPr wrap="square" rtlCol="0" anchor="t"/>
           <a:lstStyle/>
           <a:p>
-            <a:pPr marL="0" indent="0" algn="l">
+            <a:pPr algn="l" indent="0" marL="0">
               <a:lnSpc>
                 <a:spcPct val="115000"/>
               </a:lnSpc>
@@ -7711,12 +7750,18 @@
                 <a:solidFill>
                   <a:srgbClr val="1F4E9C"/>
                 </a:solidFill>
-                <a:latin typeface="微软雅黑" panose="020B0503020204020204" pitchFamily="34" charset="-122"/>
-                <a:ea typeface="微软雅黑" panose="020B0503020204020204" pitchFamily="34" charset="-122"/>
-                <a:cs typeface="微软雅黑" panose="020B0503020204020204" pitchFamily="34" charset="-120"/>
+                <a:latin typeface="微软雅黑" pitchFamily="34" charset="0"/>
+                <a:ea typeface="微软雅黑" pitchFamily="34" charset="-122"/>
+                <a:cs typeface="微软雅黑" pitchFamily="34" charset="-120"/>
               </a:rPr>
               <a:t>•  </a:t>
             </a:r>
+            <a:pPr algn="l" indent="0" marL="0">
+              <a:lnSpc>
+                <a:spcPct val="115000"/>
+              </a:lnSpc>
+              <a:buNone/>
+            </a:pPr>
             <a:r>
               <a:rPr lang="en-US" sz="1800" dirty="0">
                 <a:solidFill>
@@ -7744,12 +7789,13 @@
             <a:avLst/>
           </a:prstGeom>
           <a:noFill/>
+          <a:ln/>
         </p:spPr>
         <p:txBody>
           <a:bodyPr wrap="square" rtlCol="0" anchor="t"/>
           <a:lstStyle/>
           <a:p>
-            <a:pPr marL="0" indent="0" algn="l">
+            <a:pPr algn="l" indent="0" marL="0">
               <a:lnSpc>
                 <a:spcPct val="115000"/>
               </a:lnSpc>
@@ -7760,12 +7806,18 @@
                 <a:solidFill>
                   <a:srgbClr val="1F4E9C"/>
                 </a:solidFill>
-                <a:latin typeface="微软雅黑" panose="020B0503020204020204" pitchFamily="34" charset="-122"/>
-                <a:ea typeface="微软雅黑" panose="020B0503020204020204" pitchFamily="34" charset="-122"/>
-                <a:cs typeface="微软雅黑" panose="020B0503020204020204" pitchFamily="34" charset="-120"/>
+                <a:latin typeface="微软雅黑" pitchFamily="34" charset="0"/>
+                <a:ea typeface="微软雅黑" pitchFamily="34" charset="-122"/>
+                <a:cs typeface="微软雅黑" pitchFamily="34" charset="-120"/>
               </a:rPr>
               <a:t>•  </a:t>
             </a:r>
+            <a:pPr algn="l" indent="0" marL="0">
+              <a:lnSpc>
+                <a:spcPct val="115000"/>
+              </a:lnSpc>
+              <a:buNone/>
+            </a:pPr>
             <a:r>
               <a:rPr lang="en-US" sz="1800" dirty="0">
                 <a:solidFill>
@@ -7829,7 +7881,7 @@
     </a:clrScheme>
     <a:fontScheme name="Office">
       <a:majorFont>
-        <a:latin typeface="Calibri Light"/>
+        <a:latin typeface="Calibri Light" panose="020F0302020204030204"/>
         <a:ea typeface=""/>
         <a:cs typeface=""/>
         <a:font script="Jpan" typeface="游ゴシック Light"/>
@@ -7862,9 +7914,26 @@
         <a:font script="Viet" typeface="Times New Roman"/>
         <a:font script="Uigh" typeface="Microsoft Uighur"/>
         <a:font script="Geor" typeface="Sylfaen"/>
+        <a:font script="Armn" typeface="Arial"/>
+        <a:font script="Bugi" typeface="Leelawadee UI"/>
+        <a:font script="Bopo" typeface="Microsoft JhengHei"/>
+        <a:font script="Java" typeface="Javanese Text"/>
+        <a:font script="Lisu" typeface="Segoe UI"/>
+        <a:font script="Mymr" typeface="Myanmar Text"/>
+        <a:font script="Nkoo" typeface="Ebrima"/>
+        <a:font script="Olck" typeface="Nirmala UI"/>
+        <a:font script="Osma" typeface="Ebrima"/>
+        <a:font script="Phag" typeface="Phagspa"/>
+        <a:font script="Syrn" typeface="Estrangelo Edessa"/>
+        <a:font script="Syrj" typeface="Estrangelo Edessa"/>
+        <a:font script="Syre" typeface="Estrangelo Edessa"/>
+        <a:font script="Sora" typeface="Nirmala UI"/>
+        <a:font script="Tale" typeface="Microsoft Tai Le"/>
+        <a:font script="Talu" typeface="Microsoft New Tai Lue"/>
+        <a:font script="Tfng" typeface="Ebrima"/>
       </a:majorFont>
       <a:minorFont>
-        <a:latin typeface="Calibri"/>
+        <a:latin typeface="Calibri" panose="020F0502020204030204"/>
         <a:ea typeface=""/>
         <a:cs typeface=""/>
         <a:font script="Jpan" typeface="游ゴシック"/>
@@ -7897,6 +7966,23 @@
         <a:font script="Viet" typeface="Arial"/>
         <a:font script="Uigh" typeface="Microsoft Uighur"/>
         <a:font script="Geor" typeface="Sylfaen"/>
+        <a:font script="Armn" typeface="Arial"/>
+        <a:font script="Bugi" typeface="Leelawadee UI"/>
+        <a:font script="Bopo" typeface="Microsoft JhengHei"/>
+        <a:font script="Java" typeface="Javanese Text"/>
+        <a:font script="Lisu" typeface="Segoe UI"/>
+        <a:font script="Mymr" typeface="Myanmar Text"/>
+        <a:font script="Nkoo" typeface="Ebrima"/>
+        <a:font script="Olck" typeface="Nirmala UI"/>
+        <a:font script="Osma" typeface="Ebrima"/>
+        <a:font script="Phag" typeface="Phagspa"/>
+        <a:font script="Syrn" typeface="Estrangelo Edessa"/>
+        <a:font script="Syrj" typeface="Estrangelo Edessa"/>
+        <a:font script="Syre" typeface="Estrangelo Edessa"/>
+        <a:font script="Sora" typeface="Nirmala UI"/>
+        <a:font script="Tale" typeface="Microsoft Tai Le"/>
+        <a:font script="Talu" typeface="Microsoft New Tai Lue"/>
+        <a:font script="Tfng" typeface="Ebrima"/>
       </a:minorFont>
     </a:fontScheme>
     <a:fmtScheme name="Office">
@@ -8037,524 +8123,8 @@
       </a:bgFillStyleLst>
     </a:fmtScheme>
   </a:themeElements>
-  <a:extLst>
-    <a:ext uri="{05A4C25C-085E-4340-85A3-A5531E510DB2}">
-      <thm15:themeFamily xmlns:thm15="http://schemas.microsoft.com/office/thememl/2012/main" name="Office Theme" id="{62F939B6-93AF-4DB8-9C6B-D6C7DFDC589F}" vid="{4A3C46E8-61CC-4603-A589-7422A47A8E4A}"/>
-    </a:ext>
-  </a:extLst>
-</a:theme>
-</file>
-
-<file path=ppt/theme/theme2.xml><?xml version="1.0" encoding="utf-8"?>
-<a:theme xmlns:a="http://schemas.openxmlformats.org/drawingml/2006/main" name="1_Office Theme">
-  <a:themeElements>
-    <a:clrScheme name="Office">
-      <a:dk1>
-        <a:sysClr val="windowText" lastClr="000000"/>
-      </a:dk1>
-      <a:lt1>
-        <a:sysClr val="window" lastClr="FFFFFF"/>
-      </a:lt1>
-      <a:dk2>
-        <a:srgbClr val="44546A"/>
-      </a:dk2>
-      <a:lt2>
-        <a:srgbClr val="E7E6E6"/>
-      </a:lt2>
-      <a:accent1>
-        <a:srgbClr val="4472C4"/>
-      </a:accent1>
-      <a:accent2>
-        <a:srgbClr val="ED7D31"/>
-      </a:accent2>
-      <a:accent3>
-        <a:srgbClr val="A5A5A5"/>
-      </a:accent3>
-      <a:accent4>
-        <a:srgbClr val="FFC000"/>
-      </a:accent4>
-      <a:accent5>
-        <a:srgbClr val="5B9BD5"/>
-      </a:accent5>
-      <a:accent6>
-        <a:srgbClr val="70AD47"/>
-      </a:accent6>
-      <a:hlink>
-        <a:srgbClr val="0563C1"/>
-      </a:hlink>
-      <a:folHlink>
-        <a:srgbClr val="954F72"/>
-      </a:folHlink>
-    </a:clrScheme>
-    <a:fontScheme name="Office">
-      <a:majorFont>
-        <a:latin typeface="Calibri Light"/>
-        <a:ea typeface=""/>
-        <a:cs typeface=""/>
-        <a:font script="Jpan" typeface="游ゴシック Light"/>
-        <a:font script="Hang" typeface="맑은 고딕"/>
-        <a:font script="Hans" typeface="等线 Light"/>
-        <a:font script="Hant" typeface="新細明體"/>
-        <a:font script="Arab" typeface="Times New Roman"/>
-        <a:font script="Hebr" typeface="Times New Roman"/>
-        <a:font script="Thai" typeface="Angsana New"/>
-        <a:font script="Ethi" typeface="Nyala"/>
-        <a:font script="Beng" typeface="Vrinda"/>
-        <a:font script="Gujr" typeface="Shruti"/>
-        <a:font script="Khmr" typeface="MoolBoran"/>
-        <a:font script="Knda" typeface="Tunga"/>
-        <a:font script="Guru" typeface="Raavi"/>
-        <a:font script="Cans" typeface="Euphemia"/>
-        <a:font script="Cher" typeface="Plantagenet Cherokee"/>
-        <a:font script="Yiii" typeface="Microsoft Yi Baiti"/>
-        <a:font script="Tibt" typeface="Microsoft Himalaya"/>
-        <a:font script="Thaa" typeface="MV Boli"/>
-        <a:font script="Deva" typeface="Mangal"/>
-        <a:font script="Telu" typeface="Gautami"/>
-        <a:font script="Taml" typeface="Latha"/>
-        <a:font script="Syrc" typeface="Estrangelo Edessa"/>
-        <a:font script="Orya" typeface="Kalinga"/>
-        <a:font script="Mlym" typeface="Kartika"/>
-        <a:font script="Laoo" typeface="DokChampa"/>
-        <a:font script="Sinh" typeface="Iskoola Pota"/>
-        <a:font script="Mong" typeface="Mongolian Baiti"/>
-        <a:font script="Viet" typeface="Times New Roman"/>
-        <a:font script="Uigh" typeface="Microsoft Uighur"/>
-        <a:font script="Geor" typeface="Sylfaen"/>
-      </a:majorFont>
-      <a:minorFont>
-        <a:latin typeface="Calibri"/>
-        <a:ea typeface=""/>
-        <a:cs typeface=""/>
-        <a:font script="Jpan" typeface="游ゴシック"/>
-        <a:font script="Hang" typeface="맑은 고딕"/>
-        <a:font script="Hans" typeface="等线"/>
-        <a:font script="Hant" typeface="新細明體"/>
-        <a:font script="Arab" typeface="Arial"/>
-        <a:font script="Hebr" typeface="Arial"/>
-        <a:font script="Thai" typeface="Cordia New"/>
-        <a:font script="Ethi" typeface="Nyala"/>
-        <a:font script="Beng" typeface="Vrinda"/>
-        <a:font script="Gujr" typeface="Shruti"/>
-        <a:font script="Khmr" typeface="DaunPenh"/>
-        <a:font script="Knda" typeface="Tunga"/>
-        <a:font script="Guru" typeface="Raavi"/>
-        <a:font script="Cans" typeface="Euphemia"/>
-        <a:font script="Cher" typeface="Plantagenet Cherokee"/>
-        <a:font script="Yiii" typeface="Microsoft Yi Baiti"/>
-        <a:font script="Tibt" typeface="Microsoft Himalaya"/>
-        <a:font script="Thaa" typeface="MV Boli"/>
-        <a:font script="Deva" typeface="Mangal"/>
-        <a:font script="Telu" typeface="Gautami"/>
-        <a:font script="Taml" typeface="Latha"/>
-        <a:font script="Syrc" typeface="Estrangelo Edessa"/>
-        <a:font script="Orya" typeface="Kalinga"/>
-        <a:font script="Mlym" typeface="Kartika"/>
-        <a:font script="Laoo" typeface="DokChampa"/>
-        <a:font script="Sinh" typeface="Iskoola Pota"/>
-        <a:font script="Mong" typeface="Mongolian Baiti"/>
-        <a:font script="Viet" typeface="Arial"/>
-        <a:font script="Uigh" typeface="Microsoft Uighur"/>
-        <a:font script="Geor" typeface="Sylfaen"/>
-      </a:minorFont>
-    </a:fontScheme>
-    <a:fmtScheme name="Office">
-      <a:fillStyleLst>
-        <a:solidFill>
-          <a:schemeClr val="phClr"/>
-        </a:solidFill>
-        <a:gradFill rotWithShape="1">
-          <a:gsLst>
-            <a:gs pos="0">
-              <a:schemeClr val="phClr">
-                <a:lumMod val="110000"/>
-                <a:satMod val="105000"/>
-                <a:tint val="67000"/>
-              </a:schemeClr>
-            </a:gs>
-            <a:gs pos="50000">
-              <a:schemeClr val="phClr">
-                <a:lumMod val="105000"/>
-                <a:satMod val="103000"/>
-                <a:tint val="73000"/>
-              </a:schemeClr>
-            </a:gs>
-            <a:gs pos="100000">
-              <a:schemeClr val="phClr">
-                <a:lumMod val="105000"/>
-                <a:satMod val="109000"/>
-                <a:tint val="81000"/>
-              </a:schemeClr>
-            </a:gs>
-          </a:gsLst>
-          <a:lin ang="5400000" scaled="0"/>
-        </a:gradFill>
-        <a:gradFill rotWithShape="1">
-          <a:gsLst>
-            <a:gs pos="0">
-              <a:schemeClr val="phClr">
-                <a:satMod val="103000"/>
-                <a:lumMod val="102000"/>
-                <a:tint val="94000"/>
-              </a:schemeClr>
-            </a:gs>
-            <a:gs pos="50000">
-              <a:schemeClr val="phClr">
-                <a:satMod val="110000"/>
-                <a:lumMod val="100000"/>
-                <a:shade val="100000"/>
-              </a:schemeClr>
-            </a:gs>
-            <a:gs pos="100000">
-              <a:schemeClr val="phClr">
-                <a:lumMod val="99000"/>
-                <a:satMod val="120000"/>
-                <a:shade val="78000"/>
-              </a:schemeClr>
-            </a:gs>
-          </a:gsLst>
-          <a:lin ang="5400000" scaled="0"/>
-        </a:gradFill>
-      </a:fillStyleLst>
-      <a:lnStyleLst>
-        <a:ln w="6350" cap="flat" cmpd="sng" algn="ctr">
-          <a:solidFill>
-            <a:schemeClr val="phClr"/>
-          </a:solidFill>
-          <a:prstDash val="solid"/>
-          <a:miter lim="800000"/>
-        </a:ln>
-        <a:ln w="12700" cap="flat" cmpd="sng" algn="ctr">
-          <a:solidFill>
-            <a:schemeClr val="phClr"/>
-          </a:solidFill>
-          <a:prstDash val="solid"/>
-          <a:miter lim="800000"/>
-        </a:ln>
-        <a:ln w="19050" cap="flat" cmpd="sng" algn="ctr">
-          <a:solidFill>
-            <a:schemeClr val="phClr"/>
-          </a:solidFill>
-          <a:prstDash val="solid"/>
-          <a:miter lim="800000"/>
-        </a:ln>
-      </a:lnStyleLst>
-      <a:effectStyleLst>
-        <a:effectStyle>
-          <a:effectLst/>
-        </a:effectStyle>
-        <a:effectStyle>
-          <a:effectLst/>
-        </a:effectStyle>
-        <a:effectStyle>
-          <a:effectLst>
-            <a:outerShdw blurRad="57150" dist="19050" dir="5400000" algn="ctr" rotWithShape="0">
-              <a:srgbClr val="000000">
-                <a:alpha val="63000"/>
-              </a:srgbClr>
-            </a:outerShdw>
-          </a:effectLst>
-        </a:effectStyle>
-      </a:effectStyleLst>
-      <a:bgFillStyleLst>
-        <a:solidFill>
-          <a:schemeClr val="phClr"/>
-        </a:solidFill>
-        <a:solidFill>
-          <a:schemeClr val="phClr">
-            <a:tint val="95000"/>
-            <a:satMod val="170000"/>
-          </a:schemeClr>
-        </a:solidFill>
-        <a:gradFill rotWithShape="1">
-          <a:gsLst>
-            <a:gs pos="0">
-              <a:schemeClr val="phClr">
-                <a:tint val="93000"/>
-                <a:satMod val="150000"/>
-                <a:shade val="98000"/>
-                <a:lumMod val="102000"/>
-              </a:schemeClr>
-            </a:gs>
-            <a:gs pos="50000">
-              <a:schemeClr val="phClr">
-                <a:tint val="98000"/>
-                <a:satMod val="130000"/>
-                <a:shade val="90000"/>
-                <a:lumMod val="103000"/>
-              </a:schemeClr>
-            </a:gs>
-            <a:gs pos="100000">
-              <a:schemeClr val="phClr">
-                <a:shade val="63000"/>
-                <a:satMod val="120000"/>
-              </a:schemeClr>
-            </a:gs>
-          </a:gsLst>
-          <a:lin ang="5400000" scaled="0"/>
-        </a:gradFill>
-      </a:bgFillStyleLst>
-    </a:fmtScheme>
-  </a:themeElements>
-  <a:extLst>
-    <a:ext uri="{05A4C25C-085E-4340-85A3-A5531E510DB2}">
-      <thm15:themeFamily xmlns:thm15="http://schemas.microsoft.com/office/thememl/2012/main" name="Office Theme" id="{62F939B6-93AF-4DB8-9C6B-D6C7DFDC589F}" vid="{4A3C46E8-61CC-4603-A589-7422A47A8E4A}"/>
-    </a:ext>
-  </a:extLst>
-</a:theme>
-</file>
-
-<file path=ppt/theme/theme3.xml><?xml version="1.0" encoding="utf-8"?>
-<a:theme xmlns:a="http://schemas.openxmlformats.org/drawingml/2006/main" name="Office Theme">
-  <a:themeElements>
-    <a:clrScheme name="Office">
-      <a:dk1>
-        <a:sysClr val="windowText" lastClr="000000"/>
-      </a:dk1>
-      <a:lt1>
-        <a:sysClr val="window" lastClr="FFFFFF"/>
-      </a:lt1>
-      <a:dk2>
-        <a:srgbClr val="44546A"/>
-      </a:dk2>
-      <a:lt2>
-        <a:srgbClr val="E7E6E6"/>
-      </a:lt2>
-      <a:accent1>
-        <a:srgbClr val="4472C4"/>
-      </a:accent1>
-      <a:accent2>
-        <a:srgbClr val="ED7D31"/>
-      </a:accent2>
-      <a:accent3>
-        <a:srgbClr val="A5A5A5"/>
-      </a:accent3>
-      <a:accent4>
-        <a:srgbClr val="FFC000"/>
-      </a:accent4>
-      <a:accent5>
-        <a:srgbClr val="5B9BD5"/>
-      </a:accent5>
-      <a:accent6>
-        <a:srgbClr val="70AD47"/>
-      </a:accent6>
-      <a:hlink>
-        <a:srgbClr val="0563C1"/>
-      </a:hlink>
-      <a:folHlink>
-        <a:srgbClr val="954F72"/>
-      </a:folHlink>
-    </a:clrScheme>
-    <a:fontScheme name="Office">
-      <a:majorFont>
-        <a:latin typeface="Calibri Light"/>
-        <a:ea typeface=""/>
-        <a:cs typeface=""/>
-        <a:font script="Jpan" typeface="游ゴシック Light"/>
-        <a:font script="Hang" typeface="맑은 고딕"/>
-        <a:font script="Hans" typeface="等线 Light"/>
-        <a:font script="Hant" typeface="新細明體"/>
-        <a:font script="Arab" typeface="Times New Roman"/>
-        <a:font script="Hebr" typeface="Times New Roman"/>
-        <a:font script="Thai" typeface="Angsana New"/>
-        <a:font script="Ethi" typeface="Nyala"/>
-        <a:font script="Beng" typeface="Vrinda"/>
-        <a:font script="Gujr" typeface="Shruti"/>
-        <a:font script="Khmr" typeface="MoolBoran"/>
-        <a:font script="Knda" typeface="Tunga"/>
-        <a:font script="Guru" typeface="Raavi"/>
-        <a:font script="Cans" typeface="Euphemia"/>
-        <a:font script="Cher" typeface="Plantagenet Cherokee"/>
-        <a:font script="Yiii" typeface="Microsoft Yi Baiti"/>
-        <a:font script="Tibt" typeface="Microsoft Himalaya"/>
-        <a:font script="Thaa" typeface="MV Boli"/>
-        <a:font script="Deva" typeface="Mangal"/>
-        <a:font script="Telu" typeface="Gautami"/>
-        <a:font script="Taml" typeface="Latha"/>
-        <a:font script="Syrc" typeface="Estrangelo Edessa"/>
-        <a:font script="Orya" typeface="Kalinga"/>
-        <a:font script="Mlym" typeface="Kartika"/>
-        <a:font script="Laoo" typeface="DokChampa"/>
-        <a:font script="Sinh" typeface="Iskoola Pota"/>
-        <a:font script="Mong" typeface="Mongolian Baiti"/>
-        <a:font script="Viet" typeface="Times New Roman"/>
-        <a:font script="Uigh" typeface="Microsoft Uighur"/>
-        <a:font script="Geor" typeface="Sylfaen"/>
-      </a:majorFont>
-      <a:minorFont>
-        <a:latin typeface="Calibri"/>
-        <a:ea typeface=""/>
-        <a:cs typeface=""/>
-        <a:font script="Jpan" typeface="游ゴシック"/>
-        <a:font script="Hang" typeface="맑은 고딕"/>
-        <a:font script="Hans" typeface="等线"/>
-        <a:font script="Hant" typeface="新細明體"/>
-        <a:font script="Arab" typeface="Arial"/>
-        <a:font script="Hebr" typeface="Arial"/>
-        <a:font script="Thai" typeface="Cordia New"/>
-        <a:font script="Ethi" typeface="Nyala"/>
-        <a:font script="Beng" typeface="Vrinda"/>
-        <a:font script="Gujr" typeface="Shruti"/>
-        <a:font script="Khmr" typeface="DaunPenh"/>
-        <a:font script="Knda" typeface="Tunga"/>
-        <a:font script="Guru" typeface="Raavi"/>
-        <a:font script="Cans" typeface="Euphemia"/>
-        <a:font script="Cher" typeface="Plantagenet Cherokee"/>
-        <a:font script="Yiii" typeface="Microsoft Yi Baiti"/>
-        <a:font script="Tibt" typeface="Microsoft Himalaya"/>
-        <a:font script="Thaa" typeface="MV Boli"/>
-        <a:font script="Deva" typeface="Mangal"/>
-        <a:font script="Telu" typeface="Gautami"/>
-        <a:font script="Taml" typeface="Latha"/>
-        <a:font script="Syrc" typeface="Estrangelo Edessa"/>
-        <a:font script="Orya" typeface="Kalinga"/>
-        <a:font script="Mlym" typeface="Kartika"/>
-        <a:font script="Laoo" typeface="DokChampa"/>
-        <a:font script="Sinh" typeface="Iskoola Pota"/>
-        <a:font script="Mong" typeface="Mongolian Baiti"/>
-        <a:font script="Viet" typeface="Arial"/>
-        <a:font script="Uigh" typeface="Microsoft Uighur"/>
-        <a:font script="Geor" typeface="Sylfaen"/>
-      </a:minorFont>
-    </a:fontScheme>
-    <a:fmtScheme name="Office">
-      <a:fillStyleLst>
-        <a:solidFill>
-          <a:schemeClr val="phClr"/>
-        </a:solidFill>
-        <a:gradFill rotWithShape="1">
-          <a:gsLst>
-            <a:gs pos="0">
-              <a:schemeClr val="phClr">
-                <a:lumMod val="110000"/>
-                <a:satMod val="105000"/>
-                <a:tint val="67000"/>
-              </a:schemeClr>
-            </a:gs>
-            <a:gs pos="50000">
-              <a:schemeClr val="phClr">
-                <a:lumMod val="105000"/>
-                <a:satMod val="103000"/>
-                <a:tint val="73000"/>
-              </a:schemeClr>
-            </a:gs>
-            <a:gs pos="100000">
-              <a:schemeClr val="phClr">
-                <a:lumMod val="105000"/>
-                <a:satMod val="109000"/>
-                <a:tint val="81000"/>
-              </a:schemeClr>
-            </a:gs>
-          </a:gsLst>
-          <a:lin ang="5400000" scaled="0"/>
-        </a:gradFill>
-        <a:gradFill rotWithShape="1">
-          <a:gsLst>
-            <a:gs pos="0">
-              <a:schemeClr val="phClr">
-                <a:satMod val="103000"/>
-                <a:lumMod val="102000"/>
-                <a:tint val="94000"/>
-              </a:schemeClr>
-            </a:gs>
-            <a:gs pos="50000">
-              <a:schemeClr val="phClr">
-                <a:satMod val="110000"/>
-                <a:lumMod val="100000"/>
-                <a:shade val="100000"/>
-              </a:schemeClr>
-            </a:gs>
-            <a:gs pos="100000">
-              <a:schemeClr val="phClr">
-                <a:lumMod val="99000"/>
-                <a:satMod val="120000"/>
-                <a:shade val="78000"/>
-              </a:schemeClr>
-            </a:gs>
-          </a:gsLst>
-          <a:lin ang="5400000" scaled="0"/>
-        </a:gradFill>
-      </a:fillStyleLst>
-      <a:lnStyleLst>
-        <a:ln w="6350" cap="flat" cmpd="sng" algn="ctr">
-          <a:solidFill>
-            <a:schemeClr val="phClr"/>
-          </a:solidFill>
-          <a:prstDash val="solid"/>
-          <a:miter lim="800000"/>
-        </a:ln>
-        <a:ln w="12700" cap="flat" cmpd="sng" algn="ctr">
-          <a:solidFill>
-            <a:schemeClr val="phClr"/>
-          </a:solidFill>
-          <a:prstDash val="solid"/>
-          <a:miter lim="800000"/>
-        </a:ln>
-        <a:ln w="19050" cap="flat" cmpd="sng" algn="ctr">
-          <a:solidFill>
-            <a:schemeClr val="phClr"/>
-          </a:solidFill>
-          <a:prstDash val="solid"/>
-          <a:miter lim="800000"/>
-        </a:ln>
-      </a:lnStyleLst>
-      <a:effectStyleLst>
-        <a:effectStyle>
-          <a:effectLst/>
-        </a:effectStyle>
-        <a:effectStyle>
-          <a:effectLst/>
-        </a:effectStyle>
-        <a:effectStyle>
-          <a:effectLst>
-            <a:outerShdw blurRad="57150" dist="19050" dir="5400000" algn="ctr" rotWithShape="0">
-              <a:srgbClr val="000000">
-                <a:alpha val="63000"/>
-              </a:srgbClr>
-            </a:outerShdw>
-          </a:effectLst>
-        </a:effectStyle>
-      </a:effectStyleLst>
-      <a:bgFillStyleLst>
-        <a:solidFill>
-          <a:schemeClr val="phClr"/>
-        </a:solidFill>
-        <a:solidFill>
-          <a:schemeClr val="phClr">
-            <a:tint val="95000"/>
-            <a:satMod val="170000"/>
-          </a:schemeClr>
-        </a:solidFill>
-        <a:gradFill rotWithShape="1">
-          <a:gsLst>
-            <a:gs pos="0">
-              <a:schemeClr val="phClr">
-                <a:tint val="93000"/>
-                <a:satMod val="150000"/>
-                <a:shade val="98000"/>
-                <a:lumMod val="102000"/>
-              </a:schemeClr>
-            </a:gs>
-            <a:gs pos="50000">
-              <a:schemeClr val="phClr">
-                <a:tint val="98000"/>
-                <a:satMod val="130000"/>
-                <a:shade val="90000"/>
-                <a:lumMod val="103000"/>
-              </a:schemeClr>
-            </a:gs>
-            <a:gs pos="100000">
-              <a:schemeClr val="phClr">
-                <a:shade val="63000"/>
-                <a:satMod val="120000"/>
-              </a:schemeClr>
-            </a:gs>
-          </a:gsLst>
-          <a:lin ang="5400000" scaled="0"/>
-        </a:gradFill>
-      </a:bgFillStyleLst>
-    </a:fmtScheme>
-  </a:themeElements>
+  <a:objectDefaults/>
+  <a:extraClrSchemeLst/>
   <a:extLst>
     <a:ext uri="{05A4C25C-085E-4340-85A3-A5531E510DB2}">
       <thm15:themeFamily xmlns:thm15="http://schemas.microsoft.com/office/thememl/2012/main" name="Office Theme" id="{62F939B6-93AF-4DB8-9C6B-D6C7DFDC589F}" vid="{4A3C46E8-61CC-4603-A589-7422A47A8E4A}"/>
